--- a/halloween_trip_2025.pptx
+++ b/halloween_trip_2025.pptx
@@ -2437,11 +2437,11 @@
             <a:avLst/>
           </a:prstGeom>
           <a:solidFill>
-            <a:srgbClr val="FFC107"/>
+            <a:srgbClr val="E6321E"/>
           </a:solidFill>
           <a:ln w="12700">
             <a:solidFill>
-              <a:srgbClr val="FFC107"/>
+              <a:srgbClr val="E6321E"/>
             </a:solidFill>
             <a:prstDash val="solid"/>
           </a:ln>
@@ -2505,7 +2505,7 @@
                 <a:ea typeface="Trebuchet MS" pitchFamily="34" charset="-122"/>
                 <a:cs typeface="Trebuchet MS" pitchFamily="34" charset="-120"/>
               </a:rPr>
-              <a:t>🇭🇺  BUDAPEST — DAY-BY-DAY ITINERARY</a:t>
+              <a:t>🇪🇸  MADRID — DAY-BY-DAY ITINERARY</a:t>
             </a:r>
             <a:endParaRPr lang="en-US" sz="2200" dirty="0"/>
           </a:p>
@@ -2526,11 +2526,11 @@
             <a:avLst/>
           </a:prstGeom>
           <a:solidFill>
-            <a:srgbClr val="FFC107"/>
+            <a:srgbClr val="E6321E"/>
           </a:solidFill>
           <a:ln w="12700">
             <a:solidFill>
-              <a:srgbClr val="FFC107"/>
+              <a:srgbClr val="E6321E"/>
             </a:solidFill>
             <a:prstDash val="solid"/>
           </a:ln>
@@ -2555,7 +2555,7 @@
           </a:solidFill>
           <a:ln w="12700">
             <a:solidFill>
-              <a:srgbClr val="FFC107"/>
+              <a:srgbClr val="E6321E"/>
             </a:solidFill>
             <a:prstDash val="solid"/>
           </a:ln>
@@ -2613,7 +2613,7 @@
             <a:r>
               <a:rPr lang="en-US" sz="1100" b="1" dirty="0">
                 <a:solidFill>
-                  <a:srgbClr val="FFC107"/>
+                  <a:srgbClr val="E6321E"/>
                 </a:solidFill>
                 <a:latin typeface="Trebuchet MS" pitchFamily="34" charset="0"/>
                 <a:ea typeface="Trebuchet MS" pitchFamily="34" charset="-122"/>
@@ -2697,7 +2697,7 @@
                 <a:ea typeface="Calibri" pitchFamily="34" charset="-122"/>
                 <a:cs typeface="Calibri" pitchFamily="34" charset="-120"/>
               </a:rPr>
-              <a:t>✈  W62292 lands BUD 17:55 from DTM</a:t>
+              <a:t>✈  Iberia ~22:35 lands MAD from DUS</a:t>
             </a:r>
             <a:endParaRPr lang="en-US" sz="900" dirty="0"/>
           </a:p>
@@ -2736,7 +2736,7 @@
                 <a:ea typeface="Calibri" pitchFamily="34" charset="-122"/>
                 <a:cs typeface="Calibri" pitchFamily="34" charset="-120"/>
               </a:rPr>
-              <a:t>🏠  Check in District VII apartment</a:t>
+              <a:t>🚇  Metro Line 8 to centre (~€5, 20 min)</a:t>
             </a:r>
             <a:endParaRPr lang="en-US" sz="900" dirty="0"/>
           </a:p>
@@ -2775,7 +2775,7 @@
                 <a:ea typeface="Calibri" pitchFamily="34" charset="-122"/>
                 <a:cs typeface="Calibri" pitchFamily="34" charset="-120"/>
               </a:rPr>
-              <a:t>🍜  Dinner: Goulash at Menza or Hungarikum Bisztro</a:t>
+              <a:t>🏠  Check in Malasaña apartment</a:t>
             </a:r>
             <a:endParaRPr lang="en-US" sz="900" dirty="0"/>
           </a:p>
@@ -2814,7 +2814,7 @@
                 <a:ea typeface="Calibri" pitchFamily="34" charset="-122"/>
                 <a:cs typeface="Calibri" pitchFamily="34" charset="-120"/>
               </a:rPr>
-              <a:t>🍺  First ruin bar: Szimpla Kert (Kazinczy u. 14)</a:t>
+              <a:t>🍷  Bodega de la Ardosa: vermouth on tap since 1892</a:t>
             </a:r>
             <a:endParaRPr lang="en-US" sz="900" dirty="0"/>
           </a:p>
@@ -2853,7 +2853,7 @@
                 <a:ea typeface="Calibri" pitchFamily="34" charset="-122"/>
                 <a:cs typeface="Calibri" pitchFamily="34" charset="-120"/>
               </a:rPr>
-              <a:t>   The original (2002) — iconic labyrinthine courtyard</a:t>
+              <a:t>🍺  Malasaña bar crawl: Calle de la Palma, Tupperware</a:t>
             </a:r>
             <a:endParaRPr lang="en-US" sz="900" dirty="0"/>
           </a:p>
@@ -2892,7 +2892,7 @@
                 <a:ea typeface="Calibri" pitchFamily="34" charset="-122"/>
                 <a:cs typeface="Calibri" pitchFamily="34" charset="-120"/>
               </a:rPr>
-              <a:t>   Beer: Dreher Classic ~€3 · Open till 4 AM</a:t>
+              <a:t>   Beer: Mahou 5 Estrellas ~€3 · La Vía Láctea till 3 AM</a:t>
             </a:r>
             <a:endParaRPr lang="en-US" sz="900" dirty="0"/>
           </a:p>
@@ -2917,7 +2917,7 @@
           </a:solidFill>
           <a:ln w="12700">
             <a:solidFill>
-              <a:srgbClr val="FFC107"/>
+              <a:srgbClr val="E6321E"/>
             </a:solidFill>
             <a:prstDash val="solid"/>
           </a:ln>
@@ -2975,7 +2975,7 @@
             <a:r>
               <a:rPr lang="en-US" sz="1100" b="1" dirty="0">
                 <a:solidFill>
-                  <a:srgbClr val="FFC107"/>
+                  <a:srgbClr val="E6321E"/>
                 </a:solidFill>
                 <a:latin typeface="Trebuchet MS" pitchFamily="34" charset="0"/>
                 <a:ea typeface="Trebuchet MS" pitchFamily="34" charset="-122"/>
@@ -3020,7 +3020,7 @@
                 <a:ea typeface="Calibri" pitchFamily="34" charset="-122"/>
                 <a:cs typeface="Calibri" pitchFamily="34" charset="-120"/>
               </a:rPr>
-              <a:t>Thermal Bath Day</a:t>
+              <a:t>Walking Tour + Cooking</a:t>
             </a:r>
             <a:endParaRPr lang="en-US" sz="900" dirty="0"/>
           </a:p>
@@ -3059,7 +3059,7 @@
                 <a:ea typeface="Calibri" pitchFamily="34" charset="-122"/>
                 <a:cs typeface="Calibri" pitchFamily="34" charset="-120"/>
               </a:rPr>
-              <a:t>🚶  TripToBudapest Free Walking Tour 10 AM</a:t>
+              <a:t>🚶  SANDEMANs Free Tour 11:30 AM @ Plaza Mayor</a:t>
             </a:r>
             <a:endParaRPr lang="en-US" sz="900" dirty="0"/>
           </a:p>
@@ -3098,7 +3098,7 @@
                 <a:ea typeface="Calibri" pitchFamily="34" charset="-122"/>
                 <a:cs typeface="Calibri" pitchFamily="34" charset="-120"/>
               </a:rPr>
-              <a:t>   Erzsébet tér (look for blue FREE TOUR flag) · 2.5h</a:t>
+              <a:t>   2.5h · Royal Palace, Sol, La Latina, historic Madrid</a:t>
             </a:r>
             <a:endParaRPr lang="en-US" sz="900" dirty="0"/>
           </a:p>
@@ -3137,7 +3137,7 @@
                 <a:ea typeface="Calibri" pitchFamily="34" charset="-122"/>
                 <a:cs typeface="Calibri" pitchFamily="34" charset="-120"/>
               </a:rPr>
-              <a:t>🛁  Széchenyi Thermal Bath afternoon (€30pp)</a:t>
+              <a:t>🥘  Lunch tapas on Calle de la Cava Baja (La Latina)</a:t>
             </a:r>
             <a:endParaRPr lang="en-US" sz="900" dirty="0"/>
           </a:p>
@@ -3176,7 +3176,7 @@
                 <a:ea typeface="Calibri" pitchFamily="34" charset="-122"/>
                 <a:cs typeface="Calibri" pitchFamily="34" charset="-120"/>
               </a:rPr>
-              <a:t>   18 pools, outdoor thermal · open till 10 PM</a:t>
+              <a:t>🍳  Cooking Point Tapas Class 17:30–21:30 (€85pp)</a:t>
             </a:r>
             <a:endParaRPr lang="en-US" sz="900" dirty="0"/>
           </a:p>
@@ -3215,7 +3215,7 @@
                 <a:ea typeface="Calibri" pitchFamily="34" charset="-122"/>
                 <a:cs typeface="Calibri" pitchFamily="34" charset="-120"/>
               </a:rPr>
-              <a:t>🍺  Mazel Tov bar (Akácfa u. 47) dinner + drinks</a:t>
+              <a:t>   7 tapas recipes + sangría · Calle de Moratín, 11</a:t>
             </a:r>
             <a:endParaRPr lang="en-US" sz="900" dirty="0"/>
           </a:p>
@@ -3254,7 +3254,7 @@
                 <a:ea typeface="Calibri" pitchFamily="34" charset="-122"/>
                 <a:cs typeface="Calibri" pitchFamily="34" charset="-120"/>
               </a:rPr>
-              <a:t>🌃  Instant-Fogas complex (Akácfa u. 51)</a:t>
+              <a:t>   Book: cookingpoint.es  · Group max 12</a:t>
             </a:r>
             <a:endParaRPr lang="en-US" sz="900" dirty="0"/>
           </a:p>
@@ -3293,7 +3293,7 @@
                 <a:ea typeface="Calibri" pitchFamily="34" charset="-122"/>
                 <a:cs typeface="Calibri" pitchFamily="34" charset="-120"/>
               </a:rPr>
-              <a:t>   18 bars + 7 dance floors · open till 6 AM · FREE entry</a:t>
+              <a:t>🌃  After: Chueca bar scene + El Tigre free tapas</a:t>
             </a:r>
             <a:endParaRPr lang="en-US" sz="900" dirty="0"/>
           </a:p>
@@ -3318,7 +3318,7 @@
           </a:solidFill>
           <a:ln w="12700">
             <a:solidFill>
-              <a:srgbClr val="FFC107"/>
+              <a:srgbClr val="E6321E"/>
             </a:solidFill>
             <a:prstDash val="solid"/>
           </a:ln>
@@ -3376,7 +3376,7 @@
             <a:r>
               <a:rPr lang="en-US" sz="1100" b="1" dirty="0">
                 <a:solidFill>
-                  <a:srgbClr val="FFC107"/>
+                  <a:srgbClr val="E6321E"/>
                 </a:solidFill>
                 <a:latin typeface="Trebuchet MS" pitchFamily="34" charset="0"/>
                 <a:ea typeface="Trebuchet MS" pitchFamily="34" charset="-122"/>
@@ -3460,7 +3460,7 @@
                 <a:ea typeface="Calibri" pitchFamily="34" charset="-122"/>
                 <a:cs typeface="Calibri" pitchFamily="34" charset="-120"/>
               </a:rPr>
-              <a:t>🍳  Chefparade Hungarian Cooking Class (3h, €105pp)</a:t>
+              <a:t>🌞  Sleep in — Madrid nights go till 7 AM</a:t>
             </a:r>
             <a:endParaRPr lang="en-US" sz="900" dirty="0"/>
           </a:p>
@@ -3499,7 +3499,7 @@
                 <a:ea typeface="Calibri" pitchFamily="34" charset="-122"/>
                 <a:cs typeface="Calibri" pitchFamily="34" charset="-120"/>
               </a:rPr>
-              <a:t>   Hands-on goulash + stuffed cabbage + chimney cake</a:t>
+              <a:t>🏛  Afternoon: Prado Museum or Retiro Park stroll</a:t>
             </a:r>
             <a:endParaRPr lang="en-US" sz="900" dirty="0"/>
           </a:p>
@@ -3538,7 +3538,7 @@
                 <a:ea typeface="Calibri" pitchFamily="34" charset="-122"/>
                 <a:cs typeface="Calibri" pitchFamily="34" charset="-120"/>
               </a:rPr>
-              <a:t>   Book: cookingbudapest.com  · Group max 12</a:t>
+              <a:t>🎃  Halloween Pub Crawl 22:00 · €20pp</a:t>
             </a:r>
             <a:endParaRPr lang="en-US" sz="900" dirty="0"/>
           </a:p>
@@ -3577,7 +3577,7 @@
                 <a:ea typeface="Calibri" pitchFamily="34" charset="-122"/>
                 <a:cs typeface="Calibri" pitchFamily="34" charset="-120"/>
               </a:rPr>
-              <a:t>🕙  Original Halloween Pub Crawl 9:30 PM · €19pp</a:t>
+              <a:t>   Meet: Mulberry's Bar, Calle de Núñez de Arce 9</a:t>
             </a:r>
             <a:endParaRPr lang="en-US" sz="900" dirty="0"/>
           </a:p>
@@ -3616,7 +3616,7 @@
                 <a:ea typeface="Calibri" pitchFamily="34" charset="-122"/>
                 <a:cs typeface="Calibri" pitchFamily="34" charset="-120"/>
               </a:rPr>
-              <a:t>   Meet: Király utca 56 · guide with umbrella</a:t>
+              <a:t>   4 bars · tequila shots · €100 costume contest</a:t>
             </a:r>
             <a:endParaRPr lang="en-US" sz="900" dirty="0"/>
           </a:p>
@@ -3655,7 +3655,7 @@
                 <a:ea typeface="Calibri" pitchFamily="34" charset="-122"/>
                 <a:cs typeface="Calibri" pitchFamily="34" charset="-120"/>
               </a:rPr>
-              <a:t>   Free shots + costume contest + VIP club entry</a:t>
+              <a:t>🎶  After 1 AM: Teatro Kapital — 7 floors, till 6 AM</a:t>
             </a:r>
             <a:endParaRPr lang="en-US" sz="900" dirty="0"/>
           </a:p>
@@ -3694,7 +3694,7 @@
                 <a:ea typeface="Calibri" pitchFamily="34" charset="-122"/>
                 <a:cs typeface="Calibri" pitchFamily="34" charset="-120"/>
               </a:rPr>
-              <a:t>🎉  After: International Halloween Madness @ Akvárium Klub</a:t>
+              <a:t>   Calle Atocha 125 · €21pp entry · most central club</a:t>
             </a:r>
             <a:endParaRPr lang="en-US" sz="900" dirty="0"/>
           </a:p>
@@ -3733,7 +3733,7 @@
                 <a:ea typeface="Calibri" pitchFamily="34" charset="-122"/>
                 <a:cs typeface="Calibri" pitchFamily="34" charset="-120"/>
               </a:rPr>
-              <a:t>   3 dance floors, 2,500 people · pre-sale €15–18</a:t>
+              <a:t>   OR Fabrik Halloween party (20 min Uber, bigger)</a:t>
             </a:r>
             <a:endParaRPr lang="en-US" sz="900" dirty="0"/>
           </a:p>
@@ -3758,7 +3758,7 @@
           </a:solidFill>
           <a:ln w="12700">
             <a:solidFill>
-              <a:srgbClr val="FFC107"/>
+              <a:srgbClr val="E6321E"/>
             </a:solidFill>
             <a:prstDash val="solid"/>
           </a:ln>
@@ -3816,13 +3816,13 @@
             <a:r>
               <a:rPr lang="en-US" sz="1100" b="1" dirty="0">
                 <a:solidFill>
-                  <a:srgbClr val="FFC107"/>
+                  <a:srgbClr val="E6321E"/>
                 </a:solidFill>
                 <a:latin typeface="Trebuchet MS" pitchFamily="34" charset="0"/>
                 <a:ea typeface="Trebuchet MS" pitchFamily="34" charset="-122"/>
                 <a:cs typeface="Trebuchet MS" pitchFamily="34" charset="-120"/>
               </a:rPr>
-              <a:t>DAY 4 — SAT Nov 1 → Nov 2</a:t>
+              <a:t>DAY 4 — SAT Nov 1 (hol) + Nov 2</a:t>
             </a:r>
             <a:endParaRPr lang="en-US" sz="1100" dirty="0"/>
           </a:p>
@@ -3861,7 +3861,7 @@
                 <a:ea typeface="Calibri" pitchFamily="34" charset="-122"/>
                 <a:cs typeface="Calibri" pitchFamily="34" charset="-120"/>
               </a:rPr>
-              <a:t>Explore + Depart</a:t>
+              <a:t>Public Holiday + Depart</a:t>
             </a:r>
             <a:endParaRPr lang="en-US" sz="900" dirty="0"/>
           </a:p>
@@ -3900,7 +3900,7 @@
                 <a:ea typeface="Calibri" pitchFamily="34" charset="-122"/>
                 <a:cs typeface="Calibri" pitchFamily="34" charset="-120"/>
               </a:rPr>
-              <a:t>🏛  Heroes' Square + Vajdahunyad Castle (free)</a:t>
+              <a:t>🌞  Nov 1 = ALL SAINTS DAY (public holiday in Spain)</a:t>
             </a:r>
             <a:endParaRPr lang="en-US" sz="900" dirty="0"/>
           </a:p>
@@ -3939,7 +3939,7 @@
                 <a:ea typeface="Calibri" pitchFamily="34" charset="-122"/>
                 <a:cs typeface="Calibri" pitchFamily="34" charset="-120"/>
               </a:rPr>
-              <a:t>🛍  Great Market Hall: paprika, pálinka, lángos</a:t>
+              <a:t>☕  Brunch: Churros con Chocolate at Chocolatería San Ginés</a:t>
             </a:r>
             <a:endParaRPr lang="en-US" sz="900" dirty="0"/>
           </a:p>
@@ -3978,7 +3978,7 @@
                 <a:ea typeface="Calibri" pitchFamily="34" charset="-122"/>
                 <a:cs typeface="Calibri" pitchFamily="34" charset="-120"/>
               </a:rPr>
-              <a:t>🍺  Great ruin bar bar afternoon: Ötkert outdoor</a:t>
+              <a:t>🏺  Mercado de San Miguel: pintxos + local wines</a:t>
             </a:r>
             <a:endParaRPr lang="en-US" sz="900" dirty="0"/>
           </a:p>
@@ -4017,7 +4017,7 @@
                 <a:ea typeface="Calibri" pitchFamily="34" charset="-122"/>
                 <a:cs typeface="Calibri" pitchFamily="34" charset="-120"/>
               </a:rPr>
-              <a:t>🌙  Optional: Rudas Night Bath 10 PM – 3 AM (€37)</a:t>
+              <a:t>🍺  Afternoon vermut: La Hora del Vermut (~noon–3 PM)</a:t>
             </a:r>
             <a:endParaRPr lang="en-US" sz="900" dirty="0"/>
           </a:p>
@@ -4032,34 +4032,6 @@
         <p:spPr>
           <a:xfrm>
             <a:off x="6309360" y="5276088"/>
-            <a:ext cx="5486400" cy="256032"/>
-          </a:xfrm>
-          <a:prstGeom prst="rect">
-            <a:avLst/>
-          </a:prstGeom>
-          <a:noFill/>
-          <a:ln/>
-        </p:spPr>
-        <p:txBody>
-          <a:bodyPr wrap="square" rtlCol="0" anchor="t"/>
-          <a:lstStyle/>
-          <a:p>
-            <a:pPr indent="0" marL="0">
-              <a:buNone/>
-            </a:pPr>
-            <a:endParaRPr lang="en-US" sz="900" dirty="0"/>
-          </a:p>
-        </p:txBody>
-      </p:sp>
-      <p:sp>
-        <p:nvSpPr>
-          <p:cNvPr id="48" name="Text 46"/>
-          <p:cNvSpPr/>
-          <p:nvPr/>
-        </p:nvSpPr>
-        <p:spPr>
-          <a:xfrm>
-            <a:off x="6309360" y="5541264"/>
             <a:ext cx="5486400" cy="256032"/>
           </a:xfrm>
           <a:prstGeom prst="rect">
@@ -4084,8 +4056,36 @@
                 <a:ea typeface="Calibri" pitchFamily="34" charset="-122"/>
                 <a:cs typeface="Calibri" pitchFamily="34" charset="-120"/>
               </a:rPr>
-              <a:t>☀  NOV 2: W62291 departs BUD 10:40 → DTM 12:35</a:t>
+              <a:t>🌃  Final night: Malasaña or Lavapiés late bars</a:t>
             </a:r>
+            <a:endParaRPr lang="en-US" sz="900" dirty="0"/>
+          </a:p>
+        </p:txBody>
+      </p:sp>
+      <p:sp>
+        <p:nvSpPr>
+          <p:cNvPr id="48" name="Text 46"/>
+          <p:cNvSpPr/>
+          <p:nvPr/>
+        </p:nvSpPr>
+        <p:spPr>
+          <a:xfrm>
+            <a:off x="6309360" y="5541264"/>
+            <a:ext cx="5486400" cy="256032"/>
+          </a:xfrm>
+          <a:prstGeom prst="rect">
+            <a:avLst/>
+          </a:prstGeom>
+          <a:noFill/>
+          <a:ln/>
+        </p:spPr>
+        <p:txBody>
+          <a:bodyPr wrap="square" rtlCol="0" anchor="t"/>
+          <a:lstStyle/>
+          <a:p>
+            <a:pPr indent="0" marL="0">
+              <a:buNone/>
+            </a:pPr>
             <a:endParaRPr lang="en-US" sz="900" dirty="0"/>
           </a:p>
         </p:txBody>
@@ -4123,7 +4123,7 @@
                 <a:ea typeface="Calibri" pitchFamily="34" charset="-122"/>
                 <a:cs typeface="Calibri" pitchFamily="34" charset="-120"/>
               </a:rPr>
-              <a:t>   Bolt taxi to BKK airport (30 min, ~€15)</a:t>
+              <a:t>✈  NOV 2: DUS return flight (check Iberia/Eurowings)</a:t>
             </a:r>
             <a:endParaRPr lang="en-US" sz="900" dirty="0"/>
           </a:p>
@@ -4131,7 +4131,46 @@
       </p:sp>
       <p:sp>
         <p:nvSpPr>
-          <p:cNvPr id="50" name="Shape 48"/>
+          <p:cNvPr id="50" name="Text 48"/>
+          <p:cNvSpPr/>
+          <p:nvPr/>
+        </p:nvSpPr>
+        <p:spPr>
+          <a:xfrm>
+            <a:off x="6309360" y="6071616"/>
+            <a:ext cx="5486400" cy="256032"/>
+          </a:xfrm>
+          <a:prstGeom prst="rect">
+            <a:avLst/>
+          </a:prstGeom>
+          <a:noFill/>
+          <a:ln/>
+        </p:spPr>
+        <p:txBody>
+          <a:bodyPr wrap="square" rtlCol="0" anchor="t"/>
+          <a:lstStyle/>
+          <a:p>
+            <a:pPr indent="0" marL="0">
+              <a:buNone/>
+            </a:pPr>
+            <a:r>
+              <a:rPr lang="en-US" sz="900" dirty="0">
+                <a:solidFill>
+                  <a:srgbClr val="E8E8E8"/>
+                </a:solidFill>
+                <a:latin typeface="Calibri" pitchFamily="34" charset="0"/>
+                <a:ea typeface="Calibri" pitchFamily="34" charset="-122"/>
+                <a:cs typeface="Calibri" pitchFamily="34" charset="-120"/>
+              </a:rPr>
+              <a:t>   Metro Line 8 to airport (~€5, allow 45 min)</a:t>
+            </a:r>
+            <a:endParaRPr lang="en-US" sz="900" dirty="0"/>
+          </a:p>
+        </p:txBody>
+      </p:sp>
+      <p:sp>
+        <p:nvSpPr>
+          <p:cNvPr id="51" name="Shape 49"/>
           <p:cNvSpPr/>
           <p:nvPr/>
         </p:nvSpPr>
@@ -4156,7 +4195,7 @@
       </p:sp>
       <p:sp>
         <p:nvSpPr>
-          <p:cNvPr id="51" name="Text 49"/>
+          <p:cNvPr id="52" name="Text 50"/>
           <p:cNvSpPr/>
           <p:nvPr/>
         </p:nvSpPr>
@@ -4187,7 +4226,7 @@
                 <a:ea typeface="Calibri" pitchFamily="34" charset="-122"/>
                 <a:cs typeface="Calibri" pitchFamily="34" charset="-120"/>
               </a:rPr>
-              <a:t>Halloween Pub Crawl: originalberlintours.com/budapest-halloween  ·  Cooking: cookingbudapest.com  ·  Free tour: triptobudapest.hu  ·  Thermal: szechenyibath.hu</a:t>
+              <a:t>Halloween Pub Crawl: eventbrite.es/e/1037812363717  ·  Cooking: cookingpoint.es  ·  Free tour: neweuropetours.eu/madrid  ·  Club: teatrokapital.com</a:t>
             </a:r>
             <a:endParaRPr lang="en-US" sz="800" dirty="0"/>
           </a:p>
@@ -4195,7 +4234,7 @@
       </p:sp>
       <p:sp>
         <p:nvSpPr>
-          <p:cNvPr id="52" name="Shape 50"/>
+          <p:cNvPr id="53" name="Shape 51"/>
           <p:cNvSpPr/>
           <p:nvPr/>
         </p:nvSpPr>
@@ -4265,11 +4304,11 @@
             <a:avLst/>
           </a:prstGeom>
           <a:solidFill>
-            <a:srgbClr val="FFC107"/>
+            <a:srgbClr val="E6321E"/>
           </a:solidFill>
           <a:ln w="12700">
             <a:solidFill>
-              <a:srgbClr val="FFC107"/>
+              <a:srgbClr val="E6321E"/>
             </a:solidFill>
             <a:prstDash val="solid"/>
           </a:ln>
@@ -4333,7 +4372,7 @@
                 <a:ea typeface="Trebuchet MS" pitchFamily="34" charset="-122"/>
                 <a:cs typeface="Trebuchet MS" pitchFamily="34" charset="-120"/>
               </a:rPr>
-              <a:t>🇭🇺  BUDAPEST — COST SUMMARY</a:t>
+              <a:t>🇪🇸  MADRID — COST SUMMARY</a:t>
             </a:r>
             <a:endParaRPr lang="en-US" sz="2200" dirty="0"/>
           </a:p>
@@ -4354,11 +4393,11 @@
             <a:avLst/>
           </a:prstGeom>
           <a:solidFill>
-            <a:srgbClr val="FFC107"/>
+            <a:srgbClr val="E6321E"/>
           </a:solidFill>
           <a:ln w="12700">
             <a:solidFill>
-              <a:srgbClr val="FFC107"/>
+              <a:srgbClr val="E6321E"/>
             </a:solidFill>
             <a:prstDash val="solid"/>
           </a:ln>
@@ -4404,7 +4443,7 @@
                       <a:r>
                         <a:rPr lang="en-US" sz="1200" b="1" dirty="0">
                           <a:solidFill>
-                            <a:srgbClr val="FFC107"/>
+                            <a:srgbClr val="E6321E"/>
                           </a:solidFill>
                           <a:latin typeface="Trebuchet MS" pitchFamily="34" charset="0"/>
                           <a:ea typeface="Trebuchet MS" pitchFamily="34" charset="-122"/>
@@ -4472,7 +4511,7 @@
                       <a:r>
                         <a:rPr lang="en-US" sz="1200" b="1" dirty="0">
                           <a:solidFill>
-                            <a:srgbClr val="FFC107"/>
+                            <a:srgbClr val="E6321E"/>
                           </a:solidFill>
                           <a:latin typeface="Trebuchet MS" pitchFamily="34" charset="0"/>
                           <a:ea typeface="Trebuchet MS" pitchFamily="34" charset="-122"/>
@@ -4540,7 +4579,7 @@
                       <a:r>
                         <a:rPr lang="en-US" sz="1200" b="1" dirty="0">
                           <a:solidFill>
-                            <a:srgbClr val="FFC107"/>
+                            <a:srgbClr val="E6321E"/>
                           </a:solidFill>
                           <a:latin typeface="Trebuchet MS" pitchFamily="34" charset="0"/>
                           <a:ea typeface="Trebuchet MS" pitchFamily="34" charset="-122"/>
@@ -4666,7 +4705,7 @@
                   </a:tcPr>
                 </a:tc>
               </a:tr>
-              <a:tr h="411480">
+              <a:tr h="438912">
                 <a:tc>
                   <a:txBody>
                     <a:bodyPr/>
@@ -4752,7 +4791,7 @@
                           <a:ea typeface="Calibri" pitchFamily="34" charset="-122"/>
                           <a:cs typeface="Calibri" pitchFamily="34" charset="-120"/>
                         </a:rPr>
-                        <a:t>Wizz Air W62292/W62291  DTM ↔ BUD</a:t>
+                        <a:t>Iberia / Eurowings  DUS ↔ MAD</a:t>
                       </a:r>
                       <a:endParaRPr lang="en-US" sz="1100" dirty="0">
                         <a:latin typeface="Calibri" charset="0"/>
@@ -4820,7 +4859,7 @@
                           <a:ea typeface="Calibri" pitchFamily="34" charset="-122"/>
                           <a:cs typeface="Calibri" pitchFamily="34" charset="-120"/>
                         </a:rPr>
-                        <a:t>~€135</a:t>
+                        <a:t>~€175</a:t>
                       </a:r>
                       <a:endParaRPr lang="en-US" sz="1100" dirty="0">
                         <a:latin typeface="Calibri" charset="0"/>
@@ -4888,7 +4927,7 @@
                           <a:ea typeface="Calibri" pitchFamily="34" charset="-122"/>
                           <a:cs typeface="Calibri" pitchFamily="34" charset="-120"/>
                         </a:rPr>
-                        <a:t>~€540</a:t>
+                        <a:t>~€700</a:t>
                       </a:r>
                       <a:endParaRPr lang="en-US" sz="1100" dirty="0">
                         <a:latin typeface="Calibri" charset="0"/>
@@ -4940,7 +4979,7 @@
                   </a:tcPr>
                 </a:tc>
               </a:tr>
-              <a:tr h="411480">
+              <a:tr h="438912">
                 <a:tc>
                   <a:txBody>
                     <a:bodyPr/>
@@ -5026,7 +5065,7 @@
                           <a:ea typeface="Calibri" pitchFamily="34" charset="-122"/>
                           <a:cs typeface="Calibri" pitchFamily="34" charset="-120"/>
                         </a:rPr>
-                        <a:t>Airbnb District VII — 3 nights (inc. fees)</a:t>
+                        <a:t>Airbnb Malasaña — 3 nights (inc. fees)</a:t>
                       </a:r>
                       <a:endParaRPr lang="en-US" sz="1100" dirty="0">
                         <a:latin typeface="Calibri" charset="0"/>
@@ -5094,7 +5133,7 @@
                           <a:ea typeface="Calibri" pitchFamily="34" charset="-122"/>
                           <a:cs typeface="Calibri" pitchFamily="34" charset="-120"/>
                         </a:rPr>
-                        <a:t>~€90</a:t>
+                        <a:t>~€130</a:t>
                       </a:r>
                       <a:endParaRPr lang="en-US" sz="1100" dirty="0">
                         <a:latin typeface="Calibri" charset="0"/>
@@ -5162,7 +5201,7 @@
                           <a:ea typeface="Calibri" pitchFamily="34" charset="-122"/>
                           <a:cs typeface="Calibri" pitchFamily="34" charset="-120"/>
                         </a:rPr>
-                        <a:t>~€360</a:t>
+                        <a:t>~€520</a:t>
                       </a:r>
                       <a:endParaRPr lang="en-US" sz="1100" dirty="0">
                         <a:latin typeface="Calibri" charset="0"/>
@@ -5214,7 +5253,7 @@
                   </a:tcPr>
                 </a:tc>
               </a:tr>
-              <a:tr h="411480">
+              <a:tr h="438912">
                 <a:tc>
                   <a:txBody>
                     <a:bodyPr/>
@@ -5300,7 +5339,7 @@
                           <a:ea typeface="Calibri" pitchFamily="34" charset="-122"/>
                           <a:cs typeface="Calibri" pitchFamily="34" charset="-120"/>
                         </a:rPr>
-                        <a:t>Original Halloween Pub Crawl (Oct 31)</a:t>
+                        <a:t>Bar Crawl Madrid — Puerta del Sol (Oct 31)</a:t>
                       </a:r>
                       <a:endParaRPr lang="en-US" sz="1100" dirty="0">
                         <a:latin typeface="Calibri" charset="0"/>
@@ -5368,7 +5407,7 @@
                           <a:ea typeface="Calibri" pitchFamily="34" charset="-122"/>
                           <a:cs typeface="Calibri" pitchFamily="34" charset="-120"/>
                         </a:rPr>
-                        <a:t>€19</a:t>
+                        <a:t>€20</a:t>
                       </a:r>
                       <a:endParaRPr lang="en-US" sz="1100" dirty="0">
                         <a:latin typeface="Calibri" charset="0"/>
@@ -5436,7 +5475,7 @@
                           <a:ea typeface="Calibri" pitchFamily="34" charset="-122"/>
                           <a:cs typeface="Calibri" pitchFamily="34" charset="-120"/>
                         </a:rPr>
-                        <a:t>€76</a:t>
+                        <a:t>€80</a:t>
                       </a:r>
                       <a:endParaRPr lang="en-US" sz="1100" dirty="0">
                         <a:latin typeface="Calibri" charset="0"/>
@@ -5488,7 +5527,7 @@
                   </a:tcPr>
                 </a:tc>
               </a:tr>
-              <a:tr h="411480">
+              <a:tr h="438912">
                 <a:tc>
                   <a:txBody>
                     <a:bodyPr/>
@@ -5574,7 +5613,7 @@
                           <a:ea typeface="Calibri" pitchFamily="34" charset="-122"/>
                           <a:cs typeface="Calibri" pitchFamily="34" charset="-120"/>
                         </a:rPr>
-                        <a:t>Chefparade — Hungarian goulash + chimney cake</a:t>
+                        <a:t>Cooking Point — 7 tapas + sangría (4h)</a:t>
                       </a:r>
                       <a:endParaRPr lang="en-US" sz="1100" dirty="0">
                         <a:latin typeface="Calibri" charset="0"/>
@@ -5642,7 +5681,7 @@
                           <a:ea typeface="Calibri" pitchFamily="34" charset="-122"/>
                           <a:cs typeface="Calibri" pitchFamily="34" charset="-120"/>
                         </a:rPr>
-                        <a:t>€105</a:t>
+                        <a:t>€85</a:t>
                       </a:r>
                       <a:endParaRPr lang="en-US" sz="1100" dirty="0">
                         <a:latin typeface="Calibri" charset="0"/>
@@ -5710,7 +5749,7 @@
                           <a:ea typeface="Calibri" pitchFamily="34" charset="-122"/>
                           <a:cs typeface="Calibri" pitchFamily="34" charset="-120"/>
                         </a:rPr>
-                        <a:t>€420</a:t>
+                        <a:t>€340</a:t>
                       </a:r>
                       <a:endParaRPr lang="en-US" sz="1100" dirty="0">
                         <a:latin typeface="Calibri" charset="0"/>
@@ -5762,281 +5801,7 @@
                   </a:tcPr>
                 </a:tc>
               </a:tr>
-              <a:tr h="411480">
-                <a:tc>
-                  <a:txBody>
-                    <a:bodyPr/>
-                    <a:lstStyle/>
-                    <a:p>
-                      <a:pPr algn="l" indent="0" marL="0">
-                        <a:buNone/>
-                      </a:pPr>
-                      <a:r>
-                        <a:rPr lang="en-US" sz="1100" dirty="0">
-                          <a:solidFill>
-                            <a:srgbClr val="E8E8E8"/>
-                          </a:solidFill>
-                          <a:latin typeface="Calibri" pitchFamily="34" charset="0"/>
-                          <a:ea typeface="Calibri" pitchFamily="34" charset="-122"/>
-                          <a:cs typeface="Calibri" pitchFamily="34" charset="-120"/>
-                        </a:rPr>
-                        <a:t>Thermal Bath</a:t>
-                      </a:r>
-                      <a:endParaRPr lang="en-US" sz="1100" dirty="0">
-                        <a:latin typeface="Calibri" charset="0"/>
-                        <a:ea typeface="Calibri" charset="0"/>
-                        <a:cs typeface="Calibri" charset="0"/>
-                      </a:endParaRPr>
-                    </a:p>
-                  </a:txBody>
-                  <a:tcPr marL="91440" marR="91440" marT="45720" marB="45720" anchor="ctr">
-                    <a:lnL w="12700" cap="flat" cmpd="sng" algn="ctr">
-                      <a:solidFill>
-                        <a:srgbClr val="0F3460"/>
-                      </a:solidFill>
-                      <a:prstDash val="solid"/>
-                      <a:round/>
-                      <a:headEnd type="none" w="med" len="med"/>
-                      <a:tailEnd type="none" w="med" len="med"/>
-                    </a:lnL>
-                    <a:lnR w="12700" cap="flat" cmpd="sng" algn="ctr">
-                      <a:solidFill>
-                        <a:srgbClr val="0F3460"/>
-                      </a:solidFill>
-                      <a:prstDash val="solid"/>
-                      <a:round/>
-                      <a:headEnd type="none" w="med" len="med"/>
-                      <a:tailEnd type="none" w="med" len="med"/>
-                    </a:lnR>
-                    <a:lnT w="12700" cap="flat" cmpd="sng" algn="ctr">
-                      <a:solidFill>
-                        <a:srgbClr val="0F3460"/>
-                      </a:solidFill>
-                      <a:prstDash val="solid"/>
-                      <a:round/>
-                      <a:headEnd type="none" w="med" len="med"/>
-                      <a:tailEnd type="none" w="med" len="med"/>
-                    </a:lnT>
-                    <a:lnB w="12700" cap="flat" cmpd="sng" algn="ctr">
-                      <a:solidFill>
-                        <a:srgbClr val="0F3460"/>
-                      </a:solidFill>
-                      <a:prstDash val="solid"/>
-                      <a:round/>
-                      <a:headEnd type="none" w="med" len="med"/>
-                      <a:tailEnd type="none" w="med" len="med"/>
-                    </a:lnB>
-                    <a:solidFill>
-                      <a:srgbClr val="16213E"/>
-                    </a:solidFill>
-                  </a:tcPr>
-                </a:tc>
-                <a:tc>
-                  <a:txBody>
-                    <a:bodyPr/>
-                    <a:lstStyle/>
-                    <a:p>
-                      <a:pPr algn="l" indent="0" marL="0">
-                        <a:buNone/>
-                      </a:pPr>
-                      <a:r>
-                        <a:rPr lang="en-US" sz="1100" dirty="0">
-                          <a:solidFill>
-                            <a:srgbClr val="E8E8E8"/>
-                          </a:solidFill>
-                          <a:latin typeface="Calibri" pitchFamily="34" charset="0"/>
-                          <a:ea typeface="Calibri" pitchFamily="34" charset="-122"/>
-                          <a:cs typeface="Calibri" pitchFamily="34" charset="-120"/>
-                        </a:rPr>
-                        <a:t>Széchenyi — all-day thermal (Oct 30)</a:t>
-                      </a:r>
-                      <a:endParaRPr lang="en-US" sz="1100" dirty="0">
-                        <a:latin typeface="Calibri" charset="0"/>
-                        <a:ea typeface="Calibri" charset="0"/>
-                        <a:cs typeface="Calibri" charset="0"/>
-                      </a:endParaRPr>
-                    </a:p>
-                  </a:txBody>
-                  <a:tcPr marL="91440" marR="91440" marT="45720" marB="45720" anchor="ctr">
-                    <a:lnL w="12700" cap="flat" cmpd="sng" algn="ctr">
-                      <a:solidFill>
-                        <a:srgbClr val="0F3460"/>
-                      </a:solidFill>
-                      <a:prstDash val="solid"/>
-                      <a:round/>
-                      <a:headEnd type="none" w="med" len="med"/>
-                      <a:tailEnd type="none" w="med" len="med"/>
-                    </a:lnL>
-                    <a:lnR w="12700" cap="flat" cmpd="sng" algn="ctr">
-                      <a:solidFill>
-                        <a:srgbClr val="0F3460"/>
-                      </a:solidFill>
-                      <a:prstDash val="solid"/>
-                      <a:round/>
-                      <a:headEnd type="none" w="med" len="med"/>
-                      <a:tailEnd type="none" w="med" len="med"/>
-                    </a:lnR>
-                    <a:lnT w="12700" cap="flat" cmpd="sng" algn="ctr">
-                      <a:solidFill>
-                        <a:srgbClr val="0F3460"/>
-                      </a:solidFill>
-                      <a:prstDash val="solid"/>
-                      <a:round/>
-                      <a:headEnd type="none" w="med" len="med"/>
-                      <a:tailEnd type="none" w="med" len="med"/>
-                    </a:lnT>
-                    <a:lnB w="12700" cap="flat" cmpd="sng" algn="ctr">
-                      <a:solidFill>
-                        <a:srgbClr val="0F3460"/>
-                      </a:solidFill>
-                      <a:prstDash val="solid"/>
-                      <a:round/>
-                      <a:headEnd type="none" w="med" len="med"/>
-                      <a:tailEnd type="none" w="med" len="med"/>
-                    </a:lnB>
-                    <a:solidFill>
-                      <a:srgbClr val="16213E"/>
-                    </a:solidFill>
-                  </a:tcPr>
-                </a:tc>
-                <a:tc>
-                  <a:txBody>
-                    <a:bodyPr/>
-                    <a:lstStyle/>
-                    <a:p>
-                      <a:pPr algn="r" indent="0" marL="0">
-                        <a:buNone/>
-                      </a:pPr>
-                      <a:r>
-                        <a:rPr lang="en-US" sz="1100" dirty="0">
-                          <a:solidFill>
-                            <a:srgbClr val="E8E8E8"/>
-                          </a:solidFill>
-                          <a:latin typeface="Calibri" pitchFamily="34" charset="0"/>
-                          <a:ea typeface="Calibri" pitchFamily="34" charset="-122"/>
-                          <a:cs typeface="Calibri" pitchFamily="34" charset="-120"/>
-                        </a:rPr>
-                        <a:t>€32</a:t>
-                      </a:r>
-                      <a:endParaRPr lang="en-US" sz="1100" dirty="0">
-                        <a:latin typeface="Calibri" charset="0"/>
-                        <a:ea typeface="Calibri" charset="0"/>
-                        <a:cs typeface="Calibri" charset="0"/>
-                      </a:endParaRPr>
-                    </a:p>
-                  </a:txBody>
-                  <a:tcPr marL="91440" marR="91440" marT="45720" marB="45720" anchor="ctr">
-                    <a:lnL w="12700" cap="flat" cmpd="sng" algn="ctr">
-                      <a:solidFill>
-                        <a:srgbClr val="0F3460"/>
-                      </a:solidFill>
-                      <a:prstDash val="solid"/>
-                      <a:round/>
-                      <a:headEnd type="none" w="med" len="med"/>
-                      <a:tailEnd type="none" w="med" len="med"/>
-                    </a:lnL>
-                    <a:lnR w="12700" cap="flat" cmpd="sng" algn="ctr">
-                      <a:solidFill>
-                        <a:srgbClr val="0F3460"/>
-                      </a:solidFill>
-                      <a:prstDash val="solid"/>
-                      <a:round/>
-                      <a:headEnd type="none" w="med" len="med"/>
-                      <a:tailEnd type="none" w="med" len="med"/>
-                    </a:lnR>
-                    <a:lnT w="12700" cap="flat" cmpd="sng" algn="ctr">
-                      <a:solidFill>
-                        <a:srgbClr val="0F3460"/>
-                      </a:solidFill>
-                      <a:prstDash val="solid"/>
-                      <a:round/>
-                      <a:headEnd type="none" w="med" len="med"/>
-                      <a:tailEnd type="none" w="med" len="med"/>
-                    </a:lnT>
-                    <a:lnB w="12700" cap="flat" cmpd="sng" algn="ctr">
-                      <a:solidFill>
-                        <a:srgbClr val="0F3460"/>
-                      </a:solidFill>
-                      <a:prstDash val="solid"/>
-                      <a:round/>
-                      <a:headEnd type="none" w="med" len="med"/>
-                      <a:tailEnd type="none" w="med" len="med"/>
-                    </a:lnB>
-                    <a:solidFill>
-                      <a:srgbClr val="16213E"/>
-                    </a:solidFill>
-                  </a:tcPr>
-                </a:tc>
-                <a:tc>
-                  <a:txBody>
-                    <a:bodyPr/>
-                    <a:lstStyle/>
-                    <a:p>
-                      <a:pPr algn="r" indent="0" marL="0">
-                        <a:buNone/>
-                      </a:pPr>
-                      <a:r>
-                        <a:rPr lang="en-US" sz="1100" dirty="0">
-                          <a:solidFill>
-                            <a:srgbClr val="E8E8E8"/>
-                          </a:solidFill>
-                          <a:latin typeface="Calibri" pitchFamily="34" charset="0"/>
-                          <a:ea typeface="Calibri" pitchFamily="34" charset="-122"/>
-                          <a:cs typeface="Calibri" pitchFamily="34" charset="-120"/>
-                        </a:rPr>
-                        <a:t>€128</a:t>
-                      </a:r>
-                      <a:endParaRPr lang="en-US" sz="1100" dirty="0">
-                        <a:latin typeface="Calibri" charset="0"/>
-                        <a:ea typeface="Calibri" charset="0"/>
-                        <a:cs typeface="Calibri" charset="0"/>
-                      </a:endParaRPr>
-                    </a:p>
-                  </a:txBody>
-                  <a:tcPr marL="91440" marR="91440" marT="45720" marB="45720" anchor="ctr">
-                    <a:lnL w="12700" cap="flat" cmpd="sng" algn="ctr">
-                      <a:solidFill>
-                        <a:srgbClr val="0F3460"/>
-                      </a:solidFill>
-                      <a:prstDash val="solid"/>
-                      <a:round/>
-                      <a:headEnd type="none" w="med" len="med"/>
-                      <a:tailEnd type="none" w="med" len="med"/>
-                    </a:lnL>
-                    <a:lnR w="12700" cap="flat" cmpd="sng" algn="ctr">
-                      <a:solidFill>
-                        <a:srgbClr val="0F3460"/>
-                      </a:solidFill>
-                      <a:prstDash val="solid"/>
-                      <a:round/>
-                      <a:headEnd type="none" w="med" len="med"/>
-                      <a:tailEnd type="none" w="med" len="med"/>
-                    </a:lnR>
-                    <a:lnT w="12700" cap="flat" cmpd="sng" algn="ctr">
-                      <a:solidFill>
-                        <a:srgbClr val="0F3460"/>
-                      </a:solidFill>
-                      <a:prstDash val="solid"/>
-                      <a:round/>
-                      <a:headEnd type="none" w="med" len="med"/>
-                      <a:tailEnd type="none" w="med" len="med"/>
-                    </a:lnT>
-                    <a:lnB w="12700" cap="flat" cmpd="sng" algn="ctr">
-                      <a:solidFill>
-                        <a:srgbClr val="0F3460"/>
-                      </a:solidFill>
-                      <a:prstDash val="solid"/>
-                      <a:round/>
-                      <a:headEnd type="none" w="med" len="med"/>
-                      <a:tailEnd type="none" w="med" len="med"/>
-                    </a:lnB>
-                    <a:solidFill>
-                      <a:srgbClr val="16213E"/>
-                    </a:solidFill>
-                  </a:tcPr>
-                </a:tc>
-              </a:tr>
-              <a:tr h="411480">
+              <a:tr h="438912">
                 <a:tc>
                   <a:txBody>
                     <a:bodyPr/>
@@ -6101,7 +5866,7 @@
                       <a:tailEnd type="none" w="med" len="med"/>
                     </a:lnB>
                     <a:solidFill>
-                      <a:srgbClr val="1A1A2E"/>
+                      <a:srgbClr val="16213E"/>
                     </a:solidFill>
                   </a:tcPr>
                 </a:tc>
@@ -6122,7 +5887,7 @@
                           <a:ea typeface="Calibri" pitchFamily="34" charset="-122"/>
                           <a:cs typeface="Calibri" pitchFamily="34" charset="-120"/>
                         </a:rPr>
-                        <a:t>TripToBudapest — Erzsébet tér (tip)</a:t>
+                        <a:t>SANDEMANs — Plaza Mayor (tip)</a:t>
                       </a:r>
                       <a:endParaRPr lang="en-US" sz="1100" dirty="0">
                         <a:latin typeface="Calibri" charset="0"/>
@@ -6169,7 +5934,7 @@
                       <a:tailEnd type="none" w="med" len="med"/>
                     </a:lnB>
                     <a:solidFill>
-                      <a:srgbClr val="1A1A2E"/>
+                      <a:srgbClr val="16213E"/>
                     </a:solidFill>
                   </a:tcPr>
                 </a:tc>
@@ -6237,7 +6002,7 @@
                       <a:tailEnd type="none" w="med" len="med"/>
                     </a:lnB>
                     <a:solidFill>
-                      <a:srgbClr val="1A1A2E"/>
+                      <a:srgbClr val="16213E"/>
                     </a:solidFill>
                   </a:tcPr>
                 </a:tc>
@@ -6305,12 +6070,12 @@
                       <a:tailEnd type="none" w="med" len="med"/>
                     </a:lnB>
                     <a:solidFill>
-                      <a:srgbClr val="1A1A2E"/>
+                      <a:srgbClr val="16213E"/>
                     </a:solidFill>
                   </a:tcPr>
                 </a:tc>
               </a:tr>
-              <a:tr h="411480">
+              <a:tr h="438912">
                 <a:tc>
                   <a:txBody>
                     <a:bodyPr/>
@@ -6375,7 +6140,7 @@
                       <a:tailEnd type="none" w="med" len="med"/>
                     </a:lnB>
                     <a:solidFill>
-                      <a:srgbClr val="16213E"/>
+                      <a:srgbClr val="1A1A2E"/>
                     </a:solidFill>
                   </a:tcPr>
                 </a:tc>
@@ -6396,7 +6161,7 @@
                           <a:ea typeface="Calibri" pitchFamily="34" charset="-122"/>
                           <a:cs typeface="Calibri" pitchFamily="34" charset="-120"/>
                         </a:rPr>
-                        <a:t>Goulash, lángos, chimney cakes — avg €10–20/meal</a:t>
+                        <a:t>Tapas, churros, market food — avg €15–20/meal</a:t>
                       </a:r>
                       <a:endParaRPr lang="en-US" sz="1100" dirty="0">
                         <a:latin typeface="Calibri" charset="0"/>
@@ -6443,7 +6208,7 @@
                       <a:tailEnd type="none" w="med" len="med"/>
                     </a:lnB>
                     <a:solidFill>
-                      <a:srgbClr val="16213E"/>
+                      <a:srgbClr val="1A1A2E"/>
                     </a:solidFill>
                   </a:tcPr>
                 </a:tc>
@@ -6464,7 +6229,7 @@
                           <a:ea typeface="Calibri" pitchFamily="34" charset="-122"/>
                           <a:cs typeface="Calibri" pitchFamily="34" charset="-120"/>
                         </a:rPr>
-                        <a:t>~€95</a:t>
+                        <a:t>~€115</a:t>
                       </a:r>
                       <a:endParaRPr lang="en-US" sz="1100" dirty="0">
                         <a:latin typeface="Calibri" charset="0"/>
@@ -6511,7 +6276,7 @@
                       <a:tailEnd type="none" w="med" len="med"/>
                     </a:lnB>
                     <a:solidFill>
-                      <a:srgbClr val="16213E"/>
+                      <a:srgbClr val="1A1A2E"/>
                     </a:solidFill>
                   </a:tcPr>
                 </a:tc>
@@ -6532,7 +6297,7 @@
                           <a:ea typeface="Calibri" pitchFamily="34" charset="-122"/>
                           <a:cs typeface="Calibri" pitchFamily="34" charset="-120"/>
                         </a:rPr>
-                        <a:t>~€380</a:t>
+                        <a:t>~€460</a:t>
                       </a:r>
                       <a:endParaRPr lang="en-US" sz="1100" dirty="0">
                         <a:latin typeface="Calibri" charset="0"/>
@@ -6579,12 +6344,12 @@
                       <a:tailEnd type="none" w="med" len="med"/>
                     </a:lnB>
                     <a:solidFill>
-                      <a:srgbClr val="16213E"/>
+                      <a:srgbClr val="1A1A2E"/>
                     </a:solidFill>
                   </a:tcPr>
                 </a:tc>
               </a:tr>
-              <a:tr h="411480">
+              <a:tr h="438912">
                 <a:tc>
                   <a:txBody>
                     <a:bodyPr/>
@@ -6649,7 +6414,7 @@
                       <a:tailEnd type="none" w="med" len="med"/>
                     </a:lnB>
                     <a:solidFill>
-                      <a:srgbClr val="1A1A2E"/>
+                      <a:srgbClr val="16213E"/>
                     </a:solidFill>
                   </a:tcPr>
                 </a:tc>
@@ -6670,7 +6435,7 @@
                           <a:ea typeface="Calibri" pitchFamily="34" charset="-122"/>
                           <a:cs typeface="Calibri" pitchFamily="34" charset="-120"/>
                         </a:rPr>
-                        <a:t>Ruin bars + clubs (3 nights) — very cheap</a:t>
+                        <a:t>Malasaña + Chueca + Halloween club (3 nights)</a:t>
                       </a:r>
                       <a:endParaRPr lang="en-US" sz="1100" dirty="0">
                         <a:latin typeface="Calibri" charset="0"/>
@@ -6717,7 +6482,7 @@
                       <a:tailEnd type="none" w="med" len="med"/>
                     </a:lnB>
                     <a:solidFill>
-                      <a:srgbClr val="1A1A2E"/>
+                      <a:srgbClr val="16213E"/>
                     </a:solidFill>
                   </a:tcPr>
                 </a:tc>
@@ -6738,7 +6503,7 @@
                           <a:ea typeface="Calibri" pitchFamily="34" charset="-122"/>
                           <a:cs typeface="Calibri" pitchFamily="34" charset="-120"/>
                         </a:rPr>
-                        <a:t>~€110</a:t>
+                        <a:t>~€140</a:t>
                       </a:r>
                       <a:endParaRPr lang="en-US" sz="1100" dirty="0">
                         <a:latin typeface="Calibri" charset="0"/>
@@ -6785,7 +6550,7 @@
                       <a:tailEnd type="none" w="med" len="med"/>
                     </a:lnB>
                     <a:solidFill>
-                      <a:srgbClr val="1A1A2E"/>
+                      <a:srgbClr val="16213E"/>
                     </a:solidFill>
                   </a:tcPr>
                 </a:tc>
@@ -6806,7 +6571,7 @@
                           <a:ea typeface="Calibri" pitchFamily="34" charset="-122"/>
                           <a:cs typeface="Calibri" pitchFamily="34" charset="-120"/>
                         </a:rPr>
-                        <a:t>~€440</a:t>
+                        <a:t>~€560</a:t>
                       </a:r>
                       <a:endParaRPr lang="en-US" sz="1100" dirty="0">
                         <a:latin typeface="Calibri" charset="0"/>
@@ -6853,12 +6618,12 @@
                       <a:tailEnd type="none" w="med" len="med"/>
                     </a:lnB>
                     <a:solidFill>
-                      <a:srgbClr val="1A1A2E"/>
+                      <a:srgbClr val="16213E"/>
                     </a:solidFill>
                   </a:tcPr>
                 </a:tc>
               </a:tr>
-              <a:tr h="411480">
+              <a:tr h="438912">
                 <a:tc>
                   <a:txBody>
                     <a:bodyPr/>
@@ -6923,7 +6688,7 @@
                       <a:tailEnd type="none" w="med" len="med"/>
                     </a:lnB>
                     <a:solidFill>
-                      <a:srgbClr val="16213E"/>
+                      <a:srgbClr val="1A1A2E"/>
                     </a:solidFill>
                   </a:tcPr>
                 </a:tc>
@@ -6944,7 +6709,7 @@
                           <a:ea typeface="Calibri" pitchFamily="34" charset="-122"/>
                           <a:cs typeface="Calibri" pitchFamily="34" charset="-120"/>
                         </a:rPr>
-                        <a:t>Bolt rides, Budapest GO transit card, souvenirs</a:t>
+                        <a:t>Metro, Uber, souvenirs, airport taxi</a:t>
                       </a:r>
                       <a:endParaRPr lang="en-US" sz="1100" dirty="0">
                         <a:latin typeface="Calibri" charset="0"/>
@@ -6991,7 +6756,7 @@
                       <a:tailEnd type="none" w="med" len="med"/>
                     </a:lnB>
                     <a:solidFill>
-                      <a:srgbClr val="16213E"/>
+                      <a:srgbClr val="1A1A2E"/>
                     </a:solidFill>
                   </a:tcPr>
                 </a:tc>
@@ -7012,7 +6777,7 @@
                           <a:ea typeface="Calibri" pitchFamily="34" charset="-122"/>
                           <a:cs typeface="Calibri" pitchFamily="34" charset="-120"/>
                         </a:rPr>
-                        <a:t>~€25</a:t>
+                        <a:t>~€35</a:t>
                       </a:r>
                       <a:endParaRPr lang="en-US" sz="1100" dirty="0">
                         <a:latin typeface="Calibri" charset="0"/>
@@ -7059,7 +6824,7 @@
                       <a:tailEnd type="none" w="med" len="med"/>
                     </a:lnB>
                     <a:solidFill>
-                      <a:srgbClr val="16213E"/>
+                      <a:srgbClr val="1A1A2E"/>
                     </a:solidFill>
                   </a:tcPr>
                 </a:tc>
@@ -7080,7 +6845,7 @@
                           <a:ea typeface="Calibri" pitchFamily="34" charset="-122"/>
                           <a:cs typeface="Calibri" pitchFamily="34" charset="-120"/>
                         </a:rPr>
-                        <a:t>~€100</a:t>
+                        <a:t>~€140</a:t>
                       </a:r>
                       <a:endParaRPr lang="en-US" sz="1100" dirty="0">
                         <a:latin typeface="Calibri" charset="0"/>
@@ -7127,12 +6892,12 @@
                       <a:tailEnd type="none" w="med" len="med"/>
                     </a:lnB>
                     <a:solidFill>
-                      <a:srgbClr val="16213E"/>
+                      <a:srgbClr val="1A1A2E"/>
                     </a:solidFill>
                   </a:tcPr>
                 </a:tc>
               </a:tr>
-              <a:tr h="475488">
+              <a:tr h="502920">
                 <a:tc>
                   <a:txBody>
                     <a:bodyPr/>
@@ -7218,7 +6983,7 @@
                           <a:ea typeface="Trebuchet MS" pitchFamily="34" charset="-122"/>
                           <a:cs typeface="Trebuchet MS" pitchFamily="34" charset="-120"/>
                         </a:rPr>
-                        <a:t>Budapest, Oct 29 – Nov 2, 2025</a:t>
+                        <a:t>Madrid, Oct 29/30 – Nov 2, 2025</a:t>
                       </a:r>
                       <a:endParaRPr lang="en-US" sz="1300" dirty="0">
                         <a:latin typeface="Trebuchet MS" charset="0"/>
@@ -7280,13 +7045,13 @@
                       <a:r>
                         <a:rPr lang="en-US" sz="1300" b="1" dirty="0">
                           <a:solidFill>
-                            <a:srgbClr val="FFC107"/>
+                            <a:srgbClr val="E6321E"/>
                           </a:solidFill>
                           <a:latin typeface="Trebuchet MS" pitchFamily="34" charset="0"/>
                           <a:ea typeface="Trebuchet MS" pitchFamily="34" charset="-122"/>
                           <a:cs typeface="Trebuchet MS" pitchFamily="34" charset="-120"/>
                         </a:rPr>
-                        <a:t>~€623</a:t>
+                        <a:t>~€712</a:t>
                       </a:r>
                       <a:endParaRPr lang="en-US" sz="1300" dirty="0">
                         <a:latin typeface="Trebuchet MS" charset="0"/>
@@ -7354,7 +7119,7 @@
                           <a:ea typeface="Trebuchet MS" pitchFamily="34" charset="-122"/>
                           <a:cs typeface="Trebuchet MS" pitchFamily="34" charset="-120"/>
                         </a:rPr>
-                        <a:t>~€2,492</a:t>
+                        <a:t>~€2,848</a:t>
                       </a:r>
                       <a:endParaRPr lang="en-US" sz="1300" dirty="0">
                         <a:latin typeface="Trebuchet MS" charset="0"/>
@@ -7418,8 +7183,8 @@
         </p:nvSpPr>
         <p:spPr>
           <a:xfrm>
-            <a:off x="457200" y="6080760"/>
-            <a:ext cx="11247120" cy="502920"/>
+            <a:off x="457200" y="5961888"/>
+            <a:ext cx="11247120" cy="621792"/>
           </a:xfrm>
           <a:prstGeom prst="rect">
             <a:avLst/>
@@ -7429,7 +7194,7 @@
           </a:solidFill>
           <a:ln w="12700">
             <a:solidFill>
-              <a:srgbClr val="FFC107"/>
+              <a:srgbClr val="E6321E"/>
             </a:solidFill>
             <a:prstDash val="solid"/>
           </a:ln>
@@ -7443,8 +7208,8 @@
         </p:nvSpPr>
         <p:spPr>
           <a:xfrm>
-            <a:off x="594360" y="6099048"/>
-            <a:ext cx="10972800" cy="457200"/>
+            <a:off x="594360" y="5980176"/>
+            <a:ext cx="10972800" cy="585216"/>
           </a:xfrm>
           <a:prstGeom prst="rect">
             <a:avLst/>
@@ -7468,7 +7233,7 @@
                 <a:ea typeface="Calibri" pitchFamily="34" charset="-122"/>
                 <a:cs typeface="Calibri" pitchFamily="34" charset="-120"/>
               </a:rPr>
-              <a:t>💡 Budget range: €500–750pp.  Ruin bars = NO cover charge most nights.  Beers from €1.25 (pub) to €4.50 (ruin bar).  Optional Rudas Night Bath (€37) or Akvárium Klub Halloween event (+€15–18) are add-ons.</a:t>
+              <a:t>💡 Budget range: €600–900pp depending on accommodation choice and club nights.  El Tigre bar gives MASSIVE free tapas plates with every €3 beer — take advantage.  Oct 31 is a Friday + Nov 1 is a public holiday = the best possible Halloween combo in Europe.</a:t>
             </a:r>
             <a:endParaRPr lang="en-US" sz="1050" dirty="0"/>
           </a:p>
@@ -7753,7 +7518,7 @@
           </a:solidFill>
           <a:ln w="12700">
             <a:solidFill>
-              <a:srgbClr val="FFC107"/>
+              <a:srgbClr val="E6321E"/>
             </a:solidFill>
             <a:prstDash val="solid"/>
           </a:ln>
@@ -7786,13 +7551,13 @@
             <a:r>
               <a:rPr lang="en-US" sz="2000" b="1" dirty="0">
                 <a:solidFill>
-                  <a:srgbClr val="FFC107"/>
+                  <a:srgbClr val="E6321E"/>
                 </a:solidFill>
                 <a:latin typeface="Trebuchet MS" pitchFamily="34" charset="0"/>
                 <a:ea typeface="Trebuchet MS" pitchFamily="34" charset="-122"/>
                 <a:cs typeface="Trebuchet MS" pitchFamily="34" charset="-120"/>
               </a:rPr>
-              <a:t>🇭🇺  BUDAPEST</a:t>
+              <a:t>🇪🇸  MADRID</a:t>
             </a:r>
             <a:endParaRPr lang="en-US" sz="2000" dirty="0"/>
           </a:p>
@@ -7990,7 +7755,7 @@
                 <a:ea typeface="Calibri" pitchFamily="34" charset="-122"/>
                 <a:cs typeface="Calibri" pitchFamily="34" charset="-120"/>
               </a:rPr>
-              <a:t>~€623</a:t>
+              <a:t>~€712</a:t>
             </a:r>
             <a:endParaRPr lang="en-US" sz="1000" dirty="0"/>
           </a:p>
@@ -8188,7 +7953,7 @@
                 <a:ea typeface="Calibri" pitchFamily="34" charset="-122"/>
                 <a:cs typeface="Calibri" pitchFamily="34" charset="-120"/>
               </a:rPr>
-              <a:t>1h 45m · DTM or DUS</a:t>
+              <a:t>2h 30m · DUS only</a:t>
             </a:r>
             <a:endParaRPr lang="en-US" sz="1000" dirty="0"/>
           </a:p>
@@ -8386,7 +8151,7 @@
                 <a:ea typeface="Calibri" pitchFamily="34" charset="-122"/>
                 <a:cs typeface="Calibri" pitchFamily="34" charset="-120"/>
               </a:rPr>
-              <a:t>DTM + DUS (Wizz + Eurowings)</a:t>
+              <a:t>DUS only (Iberia / Eurowings)</a:t>
             </a:r>
             <a:endParaRPr lang="en-US" sz="1000" dirty="0"/>
           </a:p>
@@ -8584,7 +8349,7 @@
                 <a:ea typeface="Calibri" pitchFamily="34" charset="-122"/>
                 <a:cs typeface="Calibri" pitchFamily="34" charset="-120"/>
               </a:rPr>
-              <a:t>€1.25 – €4.50 per pint</a:t>
+              <a:t>€2 – €4 per caña / tubo</a:t>
             </a:r>
             <a:endParaRPr lang="en-US" sz="1000" dirty="0"/>
           </a:p>
@@ -8782,7 +8547,7 @@
                 <a:ea typeface="Calibri" pitchFamily="34" charset="-122"/>
                 <a:cs typeface="Calibri" pitchFamily="34" charset="-120"/>
               </a:rPr>
-              <a:t>5–12°C 🧥 Jacket needed</a:t>
+              <a:t>18–20°C ☀ Warmer at night</a:t>
             </a:r>
             <a:endParaRPr lang="en-US" sz="1000" dirty="0"/>
           </a:p>
@@ -8914,7 +8679,7 @@
                 <a:ea typeface="Calibri" pitchFamily="34" charset="-122"/>
                 <a:cs typeface="Calibri" pitchFamily="34" charset="-120"/>
               </a:rPr>
-              <a:t>⭐⭐⭐⭐  Pub crawl + big clubs</a:t>
+              <a:t>⭐⭐⭐⭐  Fri pub crawl + clubs</a:t>
             </a:r>
             <a:endParaRPr lang="en-US" sz="1000" dirty="0"/>
           </a:p>
@@ -8980,7 +8745,7 @@
                 <a:ea typeface="Calibri" pitchFamily="34" charset="-122"/>
                 <a:cs typeface="Calibri" pitchFamily="34" charset="-120"/>
               </a:rPr>
-              <a:t>⭐⭐⭐⭐⭐ District VII insanity</a:t>
+              <a:t>⭐⭐⭐⭐⭐ Fri + PUBLIC HOLIDAY</a:t>
             </a:r>
             <a:endParaRPr lang="en-US" sz="1000" dirty="0"/>
           </a:p>
@@ -9178,7 +8943,7 @@
                 <a:ea typeface="Calibri" pitchFamily="34" charset="-122"/>
                 <a:cs typeface="Calibri" pitchFamily="34" charset="-120"/>
               </a:rPr>
-              <a:t>Ruin Bars · Thermal Baths</a:t>
+              <a:t>Malasaña · Tapas · Vermouth</a:t>
             </a:r>
             <a:endParaRPr lang="en-US" sz="1000" dirty="0"/>
           </a:p>
@@ -9376,7 +9141,7 @@
                 <a:ea typeface="Calibri" pitchFamily="34" charset="-122"/>
                 <a:cs typeface="Calibri" pitchFamily="34" charset="-120"/>
               </a:rPr>
-              <a:t>Ruin bars till 6 AM · FREE</a:t>
+              <a:t>Clubs till 6–7 AM · free tapas</a:t>
             </a:r>
             <a:endParaRPr lang="en-US" sz="1000" dirty="0"/>
           </a:p>
@@ -9574,7 +9339,7 @@
                 <a:ea typeface="Calibri" pitchFamily="34" charset="-122"/>
                 <a:cs typeface="Calibri" pitchFamily="34" charset="-120"/>
               </a:rPr>
-              <a:t>Goulash · Lángos · €10–20</a:t>
+              <a:t>Tapas · Pintxos · €15–20/meal</a:t>
             </a:r>
             <a:endParaRPr lang="en-US" sz="1000" dirty="0"/>
           </a:p>
@@ -9772,7 +9537,7 @@
                 <a:ea typeface="Calibri" pitchFamily="34" charset="-122"/>
                 <a:cs typeface="Calibri" pitchFamily="34" charset="-120"/>
               </a:rPr>
-              <a:t>Original BPT Crawl · €19pp</a:t>
+              <a:t>Bar Crawl Madrid · €20pp</a:t>
             </a:r>
             <a:endParaRPr lang="en-US" sz="1000" dirty="0"/>
           </a:p>
@@ -9970,7 +9735,7 @@
                 <a:ea typeface="Calibri" pitchFamily="34" charset="-122"/>
                 <a:cs typeface="Calibri" pitchFamily="34" charset="-120"/>
               </a:rPr>
-              <a:t>Chefparade · €105pp</a:t>
+              <a:t>Cooking Point · €85pp</a:t>
             </a:r>
             <a:endParaRPr lang="en-US" sz="1000" dirty="0"/>
           </a:p>
@@ -10098,7 +9863,7 @@
                 <a:ea typeface="Trebuchet MS" pitchFamily="34" charset="-122"/>
                 <a:cs typeface="Trebuchet MS" pitchFamily="34" charset="-120"/>
               </a:rPr>
-              <a:t>Warm, chic, world-class nightlife</a:t>
+              <a:t>Atlantic charm, Fado, warmer Airbnb</a:t>
             </a:r>
             <a:endParaRPr lang="en-US" sz="1150" dirty="0"/>
           </a:p>
@@ -10123,7 +9888,7 @@
           </a:solidFill>
           <a:ln w="12700">
             <a:solidFill>
-              <a:srgbClr val="FFC107"/>
+              <a:srgbClr val="E6321E"/>
             </a:solidFill>
             <a:prstDash val="solid"/>
           </a:ln>
@@ -10156,13 +9921,13 @@
             <a:r>
               <a:rPr lang="en-US" sz="1150" b="1" dirty="0">
                 <a:solidFill>
-                  <a:srgbClr val="FFC107"/>
+                  <a:srgbClr val="E6321E"/>
                 </a:solidFill>
                 <a:latin typeface="Trebuchet MS" pitchFamily="34" charset="0"/>
                 <a:ea typeface="Trebuchet MS" pitchFamily="34" charset="-122"/>
                 <a:cs typeface="Trebuchet MS" pitchFamily="34" charset="-120"/>
               </a:rPr>
-              <a:t>Cheapest, wildest, most unique</a:t>
+              <a:t>BEST Halloween in Europe 2025</a:t>
             </a:r>
             <a:endParaRPr lang="en-US" sz="1150" dirty="0"/>
           </a:p>
@@ -21758,11 +21523,11 @@
             <a:avLst/>
           </a:prstGeom>
           <a:solidFill>
-            <a:srgbClr val="FFC107"/>
+            <a:srgbClr val="E6321E"/>
           </a:solidFill>
           <a:ln w="12700">
             <a:solidFill>
-              <a:srgbClr val="FFC107"/>
+              <a:srgbClr val="E6321E"/>
             </a:solidFill>
             <a:prstDash val="solid"/>
           </a:ln>
@@ -21826,7 +21591,7 @@
                 <a:ea typeface="Trebuchet MS" pitchFamily="34" charset="-122"/>
                 <a:cs typeface="Trebuchet MS" pitchFamily="34" charset="-120"/>
               </a:rPr>
-              <a:t>🇭🇺  DESTINATION 2 — BUDAPEST, HUNGARY</a:t>
+              <a:t>🇪🇸  DESTINATION 2 — MADRID, SPAIN</a:t>
             </a:r>
             <a:endParaRPr lang="en-US" sz="2200" dirty="0"/>
           </a:p>
@@ -21847,11 +21612,11 @@
             <a:avLst/>
           </a:prstGeom>
           <a:solidFill>
-            <a:srgbClr val="FFC107"/>
+            <a:srgbClr val="E6321E"/>
           </a:solidFill>
           <a:ln w="12700">
             <a:solidFill>
-              <a:srgbClr val="FFC107"/>
+              <a:srgbClr val="E6321E"/>
             </a:solidFill>
             <a:prstDash val="solid"/>
           </a:ln>
@@ -21859,7 +21624,7 @@
       </p:sp>
       <p:pic>
         <p:nvPicPr>
-          <p:cNvPr id="6" name="Image 0" descr="/home/user/Excelhaus/halloween_trip/budapest_hero.png">    </p:cNvPr>
+          <p:cNvPr id="6" name="Image 0" descr="/home/user/Excelhaus/halloween_trip/madrid_hero.png">    </p:cNvPr>
           <p:cNvPicPr>
             <a:picLocks noChangeAspect="1"/>
           </p:cNvPicPr>
@@ -21933,13 +21698,13 @@
             <a:r>
               <a:rPr lang="en-US" sz="1600" b="1" dirty="0">
                 <a:solidFill>
-                  <a:srgbClr val="FFC107"/>
+                  <a:srgbClr val="E6321E"/>
                 </a:solidFill>
                 <a:latin typeface="Trebuchet MS" pitchFamily="34" charset="0"/>
                 <a:ea typeface="Trebuchet MS" pitchFamily="34" charset="-122"/>
                 <a:cs typeface="Trebuchet MS" pitchFamily="34" charset="-120"/>
               </a:rPr>
-              <a:t>Ruin Bar Capital of the World</a:t>
+              <a:t>The City That Never Sleeps — Literally</a:t>
             </a:r>
             <a:endParaRPr lang="en-US" sz="1600" dirty="0"/>
           </a:p>
@@ -21978,7 +21743,7 @@
                 <a:ea typeface="Calibri" pitchFamily="34" charset="-122"/>
                 <a:cs typeface="Calibri" pitchFamily="34" charset="-120"/>
               </a:rPr>
-              <a:t>District VII  ·  Szimpla Kert  ·  Thermal Baths  ·  Parliament at Night</a:t>
+              <a:t>Malasaña  ·  Chueca  ·  Gran Vía  ·  La Latina tapas  ·  Clubs till 7 AM</a:t>
             </a:r>
             <a:endParaRPr lang="en-US" sz="1000" dirty="0"/>
           </a:p>
@@ -22003,7 +21768,7 @@
           </a:solidFill>
           <a:ln w="12700">
             <a:solidFill>
-              <a:srgbClr val="FFC107"/>
+              <a:srgbClr val="E6321E"/>
             </a:solidFill>
             <a:prstDash val="solid"/>
           </a:ln>
@@ -22075,13 +21840,13 @@
             <a:r>
               <a:rPr lang="en-US" sz="1600" b="1" dirty="0">
                 <a:solidFill>
-                  <a:srgbClr val="FFC107"/>
+                  <a:srgbClr val="E6321E"/>
                 </a:solidFill>
                 <a:latin typeface="Trebuchet MS" pitchFamily="34" charset="0"/>
                 <a:ea typeface="Trebuchet MS" pitchFamily="34" charset="-122"/>
                 <a:cs typeface="Trebuchet MS" pitchFamily="34" charset="-120"/>
               </a:rPr>
-              <a:t>1h 45m</a:t>
+              <a:t>2h 30m</a:t>
             </a:r>
             <a:endParaRPr lang="en-US" sz="1600" dirty="0"/>
           </a:p>
@@ -22092,13 +21857,13 @@
             <a:r>
               <a:rPr lang="en-US" sz="1600" b="1" dirty="0">
                 <a:solidFill>
-                  <a:srgbClr val="FFC107"/>
+                  <a:srgbClr val="E6321E"/>
                 </a:solidFill>
                 <a:latin typeface="Trebuchet MS" pitchFamily="34" charset="0"/>
                 <a:ea typeface="Trebuchet MS" pitchFamily="34" charset="-122"/>
                 <a:cs typeface="Trebuchet MS" pitchFamily="34" charset="-120"/>
               </a:rPr>
-              <a:t>from DTM</a:t>
+              <a:t>from DUS</a:t>
             </a:r>
             <a:endParaRPr lang="en-US" sz="1600" dirty="0"/>
           </a:p>
@@ -22123,7 +21888,7 @@
           </a:solidFill>
           <a:ln w="12700">
             <a:solidFill>
-              <a:srgbClr val="FFC107"/>
+              <a:srgbClr val="E6321E"/>
             </a:solidFill>
             <a:prstDash val="solid"/>
           </a:ln>
@@ -22195,13 +21960,13 @@
             <a:r>
               <a:rPr lang="en-US" sz="1600" b="1" dirty="0">
                 <a:solidFill>
-                  <a:srgbClr val="FFC107"/>
+                  <a:srgbClr val="E6321E"/>
                 </a:solidFill>
                 <a:latin typeface="Trebuchet MS" pitchFamily="34" charset="0"/>
                 <a:ea typeface="Trebuchet MS" pitchFamily="34" charset="-122"/>
                 <a:cs typeface="Trebuchet MS" pitchFamily="34" charset="-120"/>
               </a:rPr>
-              <a:t>€1.25–4.50</a:t>
+              <a:t>€2 – €4</a:t>
             </a:r>
             <a:endParaRPr lang="en-US" sz="1600" dirty="0"/>
           </a:p>
@@ -22212,13 +21977,13 @@
             <a:r>
               <a:rPr lang="en-US" sz="1600" b="1" dirty="0">
                 <a:solidFill>
-                  <a:srgbClr val="FFC107"/>
+                  <a:srgbClr val="E6321E"/>
                 </a:solidFill>
                 <a:latin typeface="Trebuchet MS" pitchFamily="34" charset="0"/>
                 <a:ea typeface="Trebuchet MS" pitchFamily="34" charset="-122"/>
                 <a:cs typeface="Trebuchet MS" pitchFamily="34" charset="-120"/>
               </a:rPr>
-              <a:t>avg per pint</a:t>
+              <a:t>caña or tubo</a:t>
             </a:r>
             <a:endParaRPr lang="en-US" sz="1600" dirty="0"/>
           </a:p>
@@ -22243,7 +22008,7 @@
           </a:solidFill>
           <a:ln w="12700">
             <a:solidFill>
-              <a:srgbClr val="FFC107"/>
+              <a:srgbClr val="E6321E"/>
             </a:solidFill>
             <a:prstDash val="solid"/>
           </a:ln>
@@ -22315,13 +22080,13 @@
             <a:r>
               <a:rPr lang="en-US" sz="1600" b="1" dirty="0">
                 <a:solidFill>
-                  <a:srgbClr val="FFC107"/>
+                  <a:srgbClr val="E6321E"/>
                 </a:solidFill>
                 <a:latin typeface="Trebuchet MS" pitchFamily="34" charset="0"/>
                 <a:ea typeface="Trebuchet MS" pitchFamily="34" charset="-122"/>
                 <a:cs typeface="Trebuchet MS" pitchFamily="34" charset="-120"/>
               </a:rPr>
-              <a:t>5–12°C</a:t>
+              <a:t>18–20°C ☀</a:t>
             </a:r>
             <a:endParaRPr lang="en-US" sz="1600" dirty="0"/>
           </a:p>
@@ -22332,7 +22097,7 @@
             <a:r>
               <a:rPr lang="en-US" sz="1600" b="1" dirty="0">
                 <a:solidFill>
-                  <a:srgbClr val="FFC107"/>
+                  <a:srgbClr val="E6321E"/>
                 </a:solidFill>
                 <a:latin typeface="Trebuchet MS" pitchFamily="34" charset="0"/>
                 <a:ea typeface="Trebuchet MS" pitchFamily="34" charset="-122"/>
@@ -22363,7 +22128,7 @@
           </a:solidFill>
           <a:ln w="12700">
             <a:solidFill>
-              <a:srgbClr val="FFC107"/>
+              <a:srgbClr val="E6321E"/>
             </a:solidFill>
             <a:prstDash val="solid"/>
           </a:ln>
@@ -22435,13 +22200,13 @@
             <a:r>
               <a:rPr lang="en-US" sz="1600" b="1" dirty="0">
                 <a:solidFill>
-                  <a:srgbClr val="FFC107"/>
+                  <a:srgbClr val="E6321E"/>
                 </a:solidFill>
                 <a:latin typeface="Trebuchet MS" pitchFamily="34" charset="0"/>
                 <a:ea typeface="Trebuchet MS" pitchFamily="34" charset="-122"/>
                 <a:cs typeface="Trebuchet MS" pitchFamily="34" charset="-120"/>
               </a:rPr>
-              <a:t>~€550</a:t>
+              <a:t>~€712</a:t>
             </a:r>
             <a:endParaRPr lang="en-US" sz="1600" dirty="0"/>
           </a:p>
@@ -22452,7 +22217,7 @@
             <a:r>
               <a:rPr lang="en-US" sz="1600" b="1" dirty="0">
                 <a:solidFill>
-                  <a:srgbClr val="FFC107"/>
+                  <a:srgbClr val="E6321E"/>
                 </a:solidFill>
                 <a:latin typeface="Trebuchet MS" pitchFamily="34" charset="0"/>
                 <a:ea typeface="Trebuchet MS" pitchFamily="34" charset="-122"/>
@@ -22483,7 +22248,7 @@
           </a:solidFill>
           <a:ln w="12700">
             <a:solidFill>
-              <a:srgbClr val="FFC107"/>
+              <a:srgbClr val="E6321E"/>
             </a:solidFill>
             <a:prstDash val="solid"/>
           </a:ln>
@@ -22555,7 +22320,7 @@
             <a:r>
               <a:rPr lang="en-US" sz="1600" b="1" dirty="0">
                 <a:solidFill>
-                  <a:srgbClr val="FFC107"/>
+                  <a:srgbClr val="E6321E"/>
                 </a:solidFill>
                 <a:latin typeface="Trebuchet MS" pitchFamily="34" charset="0"/>
                 <a:ea typeface="Trebuchet MS" pitchFamily="34" charset="-122"/>
@@ -22572,13 +22337,13 @@
             <a:r>
               <a:rPr lang="en-US" sz="1600" b="1" dirty="0">
                 <a:solidFill>
-                  <a:srgbClr val="FFC107"/>
+                  <a:srgbClr val="E6321E"/>
                 </a:solidFill>
                 <a:latin typeface="Trebuchet MS" pitchFamily="34" charset="0"/>
                 <a:ea typeface="Trebuchet MS" pitchFamily="34" charset="-122"/>
                 <a:cs typeface="Trebuchet MS" pitchFamily="34" charset="-120"/>
               </a:rPr>
-              <a:t>Ruin Bar Gold</a:t>
+              <a:t>Clubs till 7 AM</a:t>
             </a:r>
             <a:endParaRPr lang="en-US" sz="1600" dirty="0"/>
           </a:p>
@@ -22603,7 +22368,7 @@
           </a:solidFill>
           <a:ln w="12700">
             <a:solidFill>
-              <a:srgbClr val="FFC107"/>
+              <a:srgbClr val="E6321E"/>
             </a:solidFill>
             <a:prstDash val="solid"/>
           </a:ln>
@@ -22675,13 +22440,13 @@
             <a:r>
               <a:rPr lang="en-US" sz="1600" b="1" dirty="0">
                 <a:solidFill>
-                  <a:srgbClr val="FFC107"/>
+                  <a:srgbClr val="E6321E"/>
                 </a:solidFill>
                 <a:latin typeface="Trebuchet MS" pitchFamily="34" charset="0"/>
                 <a:ea typeface="Trebuchet MS" pitchFamily="34" charset="-122"/>
                 <a:cs typeface="Trebuchet MS" pitchFamily="34" charset="-120"/>
               </a:rPr>
-              <a:t>DTM or DUS</a:t>
+              <a:t>DUS only</a:t>
             </a:r>
             <a:endParaRPr lang="en-US" sz="1600" dirty="0"/>
           </a:p>
@@ -22692,13 +22457,13 @@
             <a:r>
               <a:rPr lang="en-US" sz="1600" b="1" dirty="0">
                 <a:solidFill>
-                  <a:srgbClr val="FFC107"/>
+                  <a:srgbClr val="E6321E"/>
                 </a:solidFill>
                 <a:latin typeface="Trebuchet MS" pitchFamily="34" charset="0"/>
                 <a:ea typeface="Trebuchet MS" pitchFamily="34" charset="-122"/>
                 <a:cs typeface="Trebuchet MS" pitchFamily="34" charset="-120"/>
               </a:rPr>
-              <a:t>(Wizz/Eurowings)</a:t>
+              <a:t>(Iberia/Eurowings)</a:t>
             </a:r>
             <a:endParaRPr lang="en-US" sz="1600" dirty="0"/>
           </a:p>
@@ -22762,7 +22527,7 @@
                 <a:ea typeface="Calibri" pitchFamily="34" charset="-122"/>
                 <a:cs typeface="Calibri" pitchFamily="34" charset="-120"/>
               </a:rPr>
-              <a:t>Budapest is Europe's undisputed ruin bar capital — abandoned courtyards turned into labyrinthine multi-room bars open till 6 AM. At Halloween, District VII goes completely wild with costumes, themed events at every venue, and zero cover charges. The city is 30–40% cheaper than Lisbon. Thermal baths the morning after? Genuinely spectacular.</a:t>
+              <a:t>Madrid is the warmest Halloween in Europe. Oct 31 is a Friday AND Nov 1 is a Spanish public holiday — meaning absolutely everyone is out and clubs stay open until 7 AM. Malasaña's bohemian bar scene, free tapas at El Tigre, vermouth on tap at 150-year-old bodegas, and Teatro Kapital's 7-floor nightclub. T-shirt weather guaranteed.</a:t>
             </a:r>
             <a:endParaRPr lang="en-US" sz="1050" dirty="0"/>
           </a:p>
@@ -22840,11 +22605,11 @@
             <a:avLst/>
           </a:prstGeom>
           <a:solidFill>
-            <a:srgbClr val="FFC107"/>
+            <a:srgbClr val="E6321E"/>
           </a:solidFill>
           <a:ln w="12700">
             <a:solidFill>
-              <a:srgbClr val="FFC107"/>
+              <a:srgbClr val="E6321E"/>
             </a:solidFill>
             <a:prstDash val="solid"/>
           </a:ln>
@@ -22908,7 +22673,7 @@
                 <a:ea typeface="Trebuchet MS" pitchFamily="34" charset="-122"/>
                 <a:cs typeface="Trebuchet MS" pitchFamily="34" charset="-120"/>
               </a:rPr>
-              <a:t>🇭🇺  BUDAPEST — FLIGHTS</a:t>
+              <a:t>🇪🇸  MADRID — FLIGHTS</a:t>
             </a:r>
             <a:endParaRPr lang="en-US" sz="2200" dirty="0"/>
           </a:p>
@@ -22929,11 +22694,11 @@
             <a:avLst/>
           </a:prstGeom>
           <a:solidFill>
-            <a:srgbClr val="FFC107"/>
+            <a:srgbClr val="E6321E"/>
           </a:solidFill>
           <a:ln w="12700">
             <a:solidFill>
-              <a:srgbClr val="FFC107"/>
+              <a:srgbClr val="E6321E"/>
             </a:solidFill>
             <a:prstDash val="solid"/>
           </a:ln>
@@ -22966,13 +22731,13 @@
             <a:r>
               <a:rPr lang="en-US" sz="1300" b="1" dirty="0">
                 <a:solidFill>
-                  <a:srgbClr val="FFC107"/>
+                  <a:srgbClr val="E6321E"/>
                 </a:solidFill>
                 <a:latin typeface="Trebuchet MS" pitchFamily="34" charset="0"/>
                 <a:ea typeface="Trebuchet MS" pitchFamily="34" charset="-122"/>
                 <a:cs typeface="Trebuchet MS" pitchFamily="34" charset="-120"/>
               </a:rPr>
-              <a:t>OUTBOUND: Germany → Budapest (BUD)</a:t>
+              <a:t>OUTBOUND: Germany → Madrid (MAD / Barajas)</a:t>
             </a:r>
             <a:endParaRPr lang="en-US" sz="1300" dirty="0"/>
           </a:p>
@@ -23022,7 +22787,7 @@
                       <a:r>
                         <a:rPr lang="en-US" sz="1100" b="1" dirty="0">
                           <a:solidFill>
-                            <a:srgbClr val="FFC107"/>
+                            <a:srgbClr val="E6321E"/>
                           </a:solidFill>
                           <a:latin typeface="Trebuchet MS" pitchFamily="34" charset="0"/>
                           <a:ea typeface="Trebuchet MS" pitchFamily="34" charset="-122"/>
@@ -23090,13 +22855,13 @@
                       <a:r>
                         <a:rPr lang="en-US" sz="1100" b="1" dirty="0">
                           <a:solidFill>
-                            <a:srgbClr val="FFC107"/>
+                            <a:srgbClr val="E6321E"/>
                           </a:solidFill>
                           <a:latin typeface="Trebuchet MS" pitchFamily="34" charset="0"/>
                           <a:ea typeface="Trebuchet MS" pitchFamily="34" charset="-122"/>
                           <a:cs typeface="Trebuchet MS" pitchFamily="34" charset="-120"/>
                         </a:rPr>
-                        <a:t>Flight</a:t>
+                        <a:t>Airline</a:t>
                       </a:r>
                       <a:endParaRPr lang="en-US" sz="1100" dirty="0">
                         <a:latin typeface="Trebuchet MS" charset="0"/>
@@ -23158,7 +22923,7 @@
                       <a:r>
                         <a:rPr lang="en-US" sz="1100" b="1" dirty="0">
                           <a:solidFill>
-                            <a:srgbClr val="FFC107"/>
+                            <a:srgbClr val="E6321E"/>
                           </a:solidFill>
                           <a:latin typeface="Trebuchet MS" pitchFamily="34" charset="0"/>
                           <a:ea typeface="Trebuchet MS" pitchFamily="34" charset="-122"/>
@@ -23226,7 +22991,7 @@
                       <a:r>
                         <a:rPr lang="en-US" sz="1100" b="1" dirty="0">
                           <a:solidFill>
-                            <a:srgbClr val="FFC107"/>
+                            <a:srgbClr val="E6321E"/>
                           </a:solidFill>
                           <a:latin typeface="Trebuchet MS" pitchFamily="34" charset="0"/>
                           <a:ea typeface="Trebuchet MS" pitchFamily="34" charset="-122"/>
@@ -23294,7 +23059,7 @@
                       <a:r>
                         <a:rPr lang="en-US" sz="1100" b="1" dirty="0">
                           <a:solidFill>
-                            <a:srgbClr val="FFC107"/>
+                            <a:srgbClr val="E6321E"/>
                           </a:solidFill>
                           <a:latin typeface="Trebuchet MS" pitchFamily="34" charset="0"/>
                           <a:ea typeface="Trebuchet MS" pitchFamily="34" charset="-122"/>
@@ -23362,7 +23127,7 @@
                       <a:r>
                         <a:rPr lang="en-US" sz="1100" b="1" dirty="0">
                           <a:solidFill>
-                            <a:srgbClr val="FFC107"/>
+                            <a:srgbClr val="E6321E"/>
                           </a:solidFill>
                           <a:latin typeface="Trebuchet MS" pitchFamily="34" charset="0"/>
                           <a:ea typeface="Trebuchet MS" pitchFamily="34" charset="-122"/>
@@ -23430,7 +23195,7 @@
                       <a:r>
                         <a:rPr lang="en-US" sz="1100" b="1" dirty="0">
                           <a:solidFill>
-                            <a:srgbClr val="FFC107"/>
+                            <a:srgbClr val="E6321E"/>
                           </a:solidFill>
                           <a:latin typeface="Trebuchet MS" pitchFamily="34" charset="0"/>
                           <a:ea typeface="Trebuchet MS" pitchFamily="34" charset="-122"/>
@@ -23663,7 +23428,7 @@
                           <a:ea typeface="Calibri" pitchFamily="34" charset="-122"/>
                           <a:cs typeface="Calibri" pitchFamily="34" charset="-120"/>
                         </a:rPr>
-                        <a:t>W62292</a:t>
+                        <a:t>Iberia</a:t>
                       </a:r>
                       <a:endParaRPr lang="en-US" sz="1000" dirty="0">
                         <a:latin typeface="Calibri" charset="0"/>
@@ -23684,7 +23449,7 @@
                           <a:ea typeface="Calibri" pitchFamily="34" charset="-122"/>
                           <a:cs typeface="Calibri" pitchFamily="34" charset="-120"/>
                         </a:rPr>
-                        <a:t>Wizz Air</a:t>
+                        <a:t>(IB3166)</a:t>
                       </a:r>
                       <a:endParaRPr lang="en-US" sz="1000" dirty="0">
                         <a:latin typeface="Calibri" charset="0"/>
@@ -23752,7 +23517,7 @@
                           <a:ea typeface="Calibri" pitchFamily="34" charset="-122"/>
                           <a:cs typeface="Calibri" pitchFamily="34" charset="-120"/>
                         </a:rPr>
-                        <a:t>DTM → BUD</a:t>
+                        <a:t>DUS → MAD</a:t>
                       </a:r>
                       <a:endParaRPr lang="en-US" sz="1000" dirty="0">
                         <a:latin typeface="Calibri" charset="0"/>
@@ -23841,7 +23606,7 @@
                           <a:ea typeface="Calibri" pitchFamily="34" charset="-122"/>
                           <a:cs typeface="Calibri" pitchFamily="34" charset="-120"/>
                         </a:rPr>
-                        <a:t>16:10</a:t>
+                        <a:t>~19:55</a:t>
                       </a:r>
                       <a:endParaRPr lang="en-US" sz="1000" dirty="0">
                         <a:latin typeface="Calibri" charset="0"/>
@@ -23909,7 +23674,7 @@
                           <a:ea typeface="Calibri" pitchFamily="34" charset="-122"/>
                           <a:cs typeface="Calibri" pitchFamily="34" charset="-120"/>
                         </a:rPr>
-                        <a:t>17:55</a:t>
+                        <a:t>~22:35</a:t>
                       </a:r>
                       <a:endParaRPr lang="en-US" sz="1000" dirty="0">
                         <a:latin typeface="Calibri" charset="0"/>
@@ -23977,7 +23742,7 @@
                           <a:ea typeface="Calibri" pitchFamily="34" charset="-122"/>
                           <a:cs typeface="Calibri" pitchFamily="34" charset="-120"/>
                         </a:rPr>
-                        <a:t>1h 45m</a:t>
+                        <a:t>2h 30m</a:t>
                       </a:r>
                       <a:endParaRPr lang="en-US" sz="1000" dirty="0">
                         <a:latin typeface="Calibri" charset="0"/>
@@ -24025,6 +23790,594 @@
                     </a:lnB>
                     <a:solidFill>
                       <a:srgbClr val="16213E"/>
+                    </a:solidFill>
+                  </a:tcPr>
+                </a:tc>
+                <a:tc>
+                  <a:txBody>
+                    <a:bodyPr/>
+                    <a:lstStyle/>
+                    <a:p>
+                      <a:pPr algn="ctr" indent="0" marL="0">
+                        <a:buNone/>
+                      </a:pPr>
+                      <a:r>
+                        <a:rPr lang="en-US" sz="1000" dirty="0">
+                          <a:solidFill>
+                            <a:srgbClr val="E8E8E8"/>
+                          </a:solidFill>
+                          <a:latin typeface="Calibri" pitchFamily="34" charset="0"/>
+                          <a:ea typeface="Calibri" pitchFamily="34" charset="-122"/>
+                          <a:cs typeface="Calibri" pitchFamily="34" charset="-120"/>
+                        </a:rPr>
+                        <a:t>~€95</a:t>
+                      </a:r>
+                      <a:endParaRPr lang="en-US" sz="1000" dirty="0">
+                        <a:latin typeface="Calibri" charset="0"/>
+                        <a:ea typeface="Calibri" charset="0"/>
+                        <a:cs typeface="Calibri" charset="0"/>
+                      </a:endParaRPr>
+                    </a:p>
+                  </a:txBody>
+                  <a:tcPr marL="91440" marR="91440" marT="45720" marB="45720">
+                    <a:lnL w="12700" cap="flat" cmpd="sng" algn="ctr">
+                      <a:solidFill>
+                        <a:srgbClr val="0F3460"/>
+                      </a:solidFill>
+                      <a:prstDash val="solid"/>
+                      <a:round/>
+                      <a:headEnd type="none" w="med" len="med"/>
+                      <a:tailEnd type="none" w="med" len="med"/>
+                    </a:lnL>
+                    <a:lnR w="12700" cap="flat" cmpd="sng" algn="ctr">
+                      <a:solidFill>
+                        <a:srgbClr val="0F3460"/>
+                      </a:solidFill>
+                      <a:prstDash val="solid"/>
+                      <a:round/>
+                      <a:headEnd type="none" w="med" len="med"/>
+                      <a:tailEnd type="none" w="med" len="med"/>
+                    </a:lnR>
+                    <a:lnT w="12700" cap="flat" cmpd="sng" algn="ctr">
+                      <a:solidFill>
+                        <a:srgbClr val="0F3460"/>
+                      </a:solidFill>
+                      <a:prstDash val="solid"/>
+                      <a:round/>
+                      <a:headEnd type="none" w="med" len="med"/>
+                      <a:tailEnd type="none" w="med" len="med"/>
+                    </a:lnT>
+                    <a:lnB w="12700" cap="flat" cmpd="sng" algn="ctr">
+                      <a:solidFill>
+                        <a:srgbClr val="0F3460"/>
+                      </a:solidFill>
+                      <a:prstDash val="solid"/>
+                      <a:round/>
+                      <a:headEnd type="none" w="med" len="med"/>
+                      <a:tailEnd type="none" w="med" len="med"/>
+                    </a:lnB>
+                    <a:solidFill>
+                      <a:srgbClr val="16213E"/>
+                    </a:solidFill>
+                  </a:tcPr>
+                </a:tc>
+                <a:tc>
+                  <a:txBody>
+                    <a:bodyPr/>
+                    <a:lstStyle/>
+                    <a:p>
+                      <a:pPr algn="ctr" indent="0" marL="0">
+                        <a:buNone/>
+                      </a:pPr>
+                      <a:r>
+                        <a:rPr lang="en-US" sz="1000" b="1" dirty="0">
+                          <a:solidFill>
+                            <a:srgbClr val="FF8C00"/>
+                          </a:solidFill>
+                          <a:latin typeface="Calibri" pitchFamily="34" charset="0"/>
+                          <a:ea typeface="Calibri" pitchFamily="34" charset="-122"/>
+                          <a:cs typeface="Calibri" pitchFamily="34" charset="-120"/>
+                        </a:rPr>
+                        <a:t>~€380</a:t>
+                      </a:r>
+                      <a:endParaRPr lang="en-US" sz="1000" dirty="0">
+                        <a:latin typeface="Calibri" charset="0"/>
+                        <a:ea typeface="Calibri" charset="0"/>
+                        <a:cs typeface="Calibri" charset="0"/>
+                      </a:endParaRPr>
+                    </a:p>
+                  </a:txBody>
+                  <a:tcPr marL="91440" marR="91440" marT="45720" marB="45720">
+                    <a:lnL w="12700" cap="flat" cmpd="sng" algn="ctr">
+                      <a:solidFill>
+                        <a:srgbClr val="0F3460"/>
+                      </a:solidFill>
+                      <a:prstDash val="solid"/>
+                      <a:round/>
+                      <a:headEnd type="none" w="med" len="med"/>
+                      <a:tailEnd type="none" w="med" len="med"/>
+                    </a:lnL>
+                    <a:lnR w="12700" cap="flat" cmpd="sng" algn="ctr">
+                      <a:solidFill>
+                        <a:srgbClr val="0F3460"/>
+                      </a:solidFill>
+                      <a:prstDash val="solid"/>
+                      <a:round/>
+                      <a:headEnd type="none" w="med" len="med"/>
+                      <a:tailEnd type="none" w="med" len="med"/>
+                    </a:lnR>
+                    <a:lnT w="12700" cap="flat" cmpd="sng" algn="ctr">
+                      <a:solidFill>
+                        <a:srgbClr val="0F3460"/>
+                      </a:solidFill>
+                      <a:prstDash val="solid"/>
+                      <a:round/>
+                      <a:headEnd type="none" w="med" len="med"/>
+                      <a:tailEnd type="none" w="med" len="med"/>
+                    </a:lnT>
+                    <a:lnB w="12700" cap="flat" cmpd="sng" algn="ctr">
+                      <a:solidFill>
+                        <a:srgbClr val="0F3460"/>
+                      </a:solidFill>
+                      <a:prstDash val="solid"/>
+                      <a:round/>
+                      <a:headEnd type="none" w="med" len="med"/>
+                      <a:tailEnd type="none" w="med" len="med"/>
+                    </a:lnB>
+                    <a:solidFill>
+                      <a:srgbClr val="16213E"/>
+                    </a:solidFill>
+                  </a:tcPr>
+                </a:tc>
+              </a:tr>
+              <a:tr h="475488">
+                <a:tc>
+                  <a:txBody>
+                    <a:bodyPr/>
+                    <a:lstStyle/>
+                    <a:p>
+                      <a:pPr algn="ctr" indent="0" marL="0">
+                        <a:buNone/>
+                      </a:pPr>
+                      <a:r>
+                        <a:rPr lang="en-US" sz="1000" dirty="0">
+                          <a:solidFill>
+                            <a:srgbClr val="E8E8E8"/>
+                          </a:solidFill>
+                          <a:latin typeface="Calibri" pitchFamily="34" charset="0"/>
+                          <a:ea typeface="Calibri" pitchFamily="34" charset="-122"/>
+                          <a:cs typeface="Calibri" pitchFamily="34" charset="-120"/>
+                        </a:rPr>
+                        <a:t>Early Oct 30</a:t>
+                      </a:r>
+                      <a:endParaRPr lang="en-US" sz="1000" dirty="0">
+                        <a:latin typeface="Calibri" charset="0"/>
+                        <a:ea typeface="Calibri" charset="0"/>
+                        <a:cs typeface="Calibri" charset="0"/>
+                      </a:endParaRPr>
+                    </a:p>
+                  </a:txBody>
+                  <a:tcPr marL="91440" marR="91440" marT="45720" marB="45720">
+                    <a:lnL w="12700" cap="flat" cmpd="sng" algn="ctr">
+                      <a:solidFill>
+                        <a:srgbClr val="0F3460"/>
+                      </a:solidFill>
+                      <a:prstDash val="solid"/>
+                      <a:round/>
+                      <a:headEnd type="none" w="med" len="med"/>
+                      <a:tailEnd type="none" w="med" len="med"/>
+                    </a:lnL>
+                    <a:lnR w="12700" cap="flat" cmpd="sng" algn="ctr">
+                      <a:solidFill>
+                        <a:srgbClr val="0F3460"/>
+                      </a:solidFill>
+                      <a:prstDash val="solid"/>
+                      <a:round/>
+                      <a:headEnd type="none" w="med" len="med"/>
+                      <a:tailEnd type="none" w="med" len="med"/>
+                    </a:lnR>
+                    <a:lnT w="12700" cap="flat" cmpd="sng" algn="ctr">
+                      <a:solidFill>
+                        <a:srgbClr val="0F3460"/>
+                      </a:solidFill>
+                      <a:prstDash val="solid"/>
+                      <a:round/>
+                      <a:headEnd type="none" w="med" len="med"/>
+                      <a:tailEnd type="none" w="med" len="med"/>
+                    </a:lnT>
+                    <a:lnB w="12700" cap="flat" cmpd="sng" algn="ctr">
+                      <a:solidFill>
+                        <a:srgbClr val="0F3460"/>
+                      </a:solidFill>
+                      <a:prstDash val="solid"/>
+                      <a:round/>
+                      <a:headEnd type="none" w="med" len="med"/>
+                      <a:tailEnd type="none" w="med" len="med"/>
+                    </a:lnB>
+                    <a:solidFill>
+                      <a:srgbClr val="1A1A2E"/>
+                    </a:solidFill>
+                  </a:tcPr>
+                </a:tc>
+                <a:tc>
+                  <a:txBody>
+                    <a:bodyPr/>
+                    <a:lstStyle/>
+                    <a:p>
+                      <a:pPr algn="ctr" indent="0" marL="0">
+                        <a:buNone/>
+                      </a:pPr>
+                      <a:r>
+                        <a:rPr lang="en-US" sz="1000" dirty="0">
+                          <a:solidFill>
+                            <a:srgbClr val="E8E8E8"/>
+                          </a:solidFill>
+                          <a:latin typeface="Calibri" pitchFamily="34" charset="0"/>
+                          <a:ea typeface="Calibri" pitchFamily="34" charset="-122"/>
+                          <a:cs typeface="Calibri" pitchFamily="34" charset="-120"/>
+                        </a:rPr>
+                        <a:t>Iberia</a:t>
+                      </a:r>
+                      <a:endParaRPr lang="en-US" sz="1000" dirty="0">
+                        <a:latin typeface="Calibri" charset="0"/>
+                        <a:ea typeface="Calibri" charset="0"/>
+                        <a:cs typeface="Calibri" charset="0"/>
+                      </a:endParaRPr>
+                    </a:p>
+                    <a:p>
+                      <a:pPr algn="ctr" indent="0" marL="0">
+                        <a:buNone/>
+                      </a:pPr>
+                      <a:r>
+                        <a:rPr lang="en-US" sz="1000" dirty="0">
+                          <a:solidFill>
+                            <a:srgbClr val="E8E8E8"/>
+                          </a:solidFill>
+                          <a:latin typeface="Calibri" pitchFamily="34" charset="0"/>
+                          <a:ea typeface="Calibri" pitchFamily="34" charset="-122"/>
+                          <a:cs typeface="Calibri" pitchFamily="34" charset="-120"/>
+                        </a:rPr>
+                        <a:t>(IB3162)</a:t>
+                      </a:r>
+                      <a:endParaRPr lang="en-US" sz="1000" dirty="0">
+                        <a:latin typeface="Calibri" charset="0"/>
+                        <a:ea typeface="Calibri" charset="0"/>
+                        <a:cs typeface="Calibri" charset="0"/>
+                      </a:endParaRPr>
+                    </a:p>
+                  </a:txBody>
+                  <a:tcPr marL="91440" marR="91440" marT="45720" marB="45720">
+                    <a:lnL w="12700" cap="flat" cmpd="sng" algn="ctr">
+                      <a:solidFill>
+                        <a:srgbClr val="0F3460"/>
+                      </a:solidFill>
+                      <a:prstDash val="solid"/>
+                      <a:round/>
+                      <a:headEnd type="none" w="med" len="med"/>
+                      <a:tailEnd type="none" w="med" len="med"/>
+                    </a:lnL>
+                    <a:lnR w="12700" cap="flat" cmpd="sng" algn="ctr">
+                      <a:solidFill>
+                        <a:srgbClr val="0F3460"/>
+                      </a:solidFill>
+                      <a:prstDash val="solid"/>
+                      <a:round/>
+                      <a:headEnd type="none" w="med" len="med"/>
+                      <a:tailEnd type="none" w="med" len="med"/>
+                    </a:lnR>
+                    <a:lnT w="12700" cap="flat" cmpd="sng" algn="ctr">
+                      <a:solidFill>
+                        <a:srgbClr val="0F3460"/>
+                      </a:solidFill>
+                      <a:prstDash val="solid"/>
+                      <a:round/>
+                      <a:headEnd type="none" w="med" len="med"/>
+                      <a:tailEnd type="none" w="med" len="med"/>
+                    </a:lnT>
+                    <a:lnB w="12700" cap="flat" cmpd="sng" algn="ctr">
+                      <a:solidFill>
+                        <a:srgbClr val="0F3460"/>
+                      </a:solidFill>
+                      <a:prstDash val="solid"/>
+                      <a:round/>
+                      <a:headEnd type="none" w="med" len="med"/>
+                      <a:tailEnd type="none" w="med" len="med"/>
+                    </a:lnB>
+                    <a:solidFill>
+                      <a:srgbClr val="1A1A2E"/>
+                    </a:solidFill>
+                  </a:tcPr>
+                </a:tc>
+                <a:tc>
+                  <a:txBody>
+                    <a:bodyPr/>
+                    <a:lstStyle/>
+                    <a:p>
+                      <a:pPr algn="ctr" indent="0" marL="0">
+                        <a:buNone/>
+                      </a:pPr>
+                      <a:r>
+                        <a:rPr lang="en-US" sz="1000" dirty="0">
+                          <a:solidFill>
+                            <a:srgbClr val="E8E8E8"/>
+                          </a:solidFill>
+                          <a:latin typeface="Calibri" pitchFamily="34" charset="0"/>
+                          <a:ea typeface="Calibri" pitchFamily="34" charset="-122"/>
+                          <a:cs typeface="Calibri" pitchFamily="34" charset="-120"/>
+                        </a:rPr>
+                        <a:t>DUS → MAD</a:t>
+                      </a:r>
+                      <a:endParaRPr lang="en-US" sz="1000" dirty="0">
+                        <a:latin typeface="Calibri" charset="0"/>
+                        <a:ea typeface="Calibri" charset="0"/>
+                        <a:cs typeface="Calibri" charset="0"/>
+                      </a:endParaRPr>
+                    </a:p>
+                    <a:p>
+                      <a:pPr algn="ctr" indent="0" marL="0">
+                        <a:buNone/>
+                      </a:pPr>
+                      <a:r>
+                        <a:rPr lang="en-US" sz="1000" dirty="0">
+                          <a:solidFill>
+                            <a:srgbClr val="E8E8E8"/>
+                          </a:solidFill>
+                          <a:latin typeface="Calibri" pitchFamily="34" charset="0"/>
+                          <a:ea typeface="Calibri" pitchFamily="34" charset="-122"/>
+                          <a:cs typeface="Calibri" pitchFamily="34" charset="-120"/>
+                        </a:rPr>
+                        <a:t>Oct 30 morning</a:t>
+                      </a:r>
+                      <a:endParaRPr lang="en-US" sz="1000" dirty="0">
+                        <a:latin typeface="Calibri" charset="0"/>
+                        <a:ea typeface="Calibri" charset="0"/>
+                        <a:cs typeface="Calibri" charset="0"/>
+                      </a:endParaRPr>
+                    </a:p>
+                  </a:txBody>
+                  <a:tcPr marL="91440" marR="91440" marT="45720" marB="45720">
+                    <a:lnL w="12700" cap="flat" cmpd="sng" algn="ctr">
+                      <a:solidFill>
+                        <a:srgbClr val="0F3460"/>
+                      </a:solidFill>
+                      <a:prstDash val="solid"/>
+                      <a:round/>
+                      <a:headEnd type="none" w="med" len="med"/>
+                      <a:tailEnd type="none" w="med" len="med"/>
+                    </a:lnL>
+                    <a:lnR w="12700" cap="flat" cmpd="sng" algn="ctr">
+                      <a:solidFill>
+                        <a:srgbClr val="0F3460"/>
+                      </a:solidFill>
+                      <a:prstDash val="solid"/>
+                      <a:round/>
+                      <a:headEnd type="none" w="med" len="med"/>
+                      <a:tailEnd type="none" w="med" len="med"/>
+                    </a:lnR>
+                    <a:lnT w="12700" cap="flat" cmpd="sng" algn="ctr">
+                      <a:solidFill>
+                        <a:srgbClr val="0F3460"/>
+                      </a:solidFill>
+                      <a:prstDash val="solid"/>
+                      <a:round/>
+                      <a:headEnd type="none" w="med" len="med"/>
+                      <a:tailEnd type="none" w="med" len="med"/>
+                    </a:lnT>
+                    <a:lnB w="12700" cap="flat" cmpd="sng" algn="ctr">
+                      <a:solidFill>
+                        <a:srgbClr val="0F3460"/>
+                      </a:solidFill>
+                      <a:prstDash val="solid"/>
+                      <a:round/>
+                      <a:headEnd type="none" w="med" len="med"/>
+                      <a:tailEnd type="none" w="med" len="med"/>
+                    </a:lnB>
+                    <a:solidFill>
+                      <a:srgbClr val="1A1A2E"/>
+                    </a:solidFill>
+                  </a:tcPr>
+                </a:tc>
+                <a:tc>
+                  <a:txBody>
+                    <a:bodyPr/>
+                    <a:lstStyle/>
+                    <a:p>
+                      <a:pPr algn="ctr" indent="0" marL="0">
+                        <a:buNone/>
+                      </a:pPr>
+                      <a:r>
+                        <a:rPr lang="en-US" sz="1000" dirty="0">
+                          <a:solidFill>
+                            <a:srgbClr val="E8E8E8"/>
+                          </a:solidFill>
+                          <a:latin typeface="Calibri" pitchFamily="34" charset="0"/>
+                          <a:ea typeface="Calibri" pitchFamily="34" charset="-122"/>
+                          <a:cs typeface="Calibri" pitchFamily="34" charset="-120"/>
+                        </a:rPr>
+                        <a:t>~06:20</a:t>
+                      </a:r>
+                      <a:endParaRPr lang="en-US" sz="1000" dirty="0">
+                        <a:latin typeface="Calibri" charset="0"/>
+                        <a:ea typeface="Calibri" charset="0"/>
+                        <a:cs typeface="Calibri" charset="0"/>
+                      </a:endParaRPr>
+                    </a:p>
+                  </a:txBody>
+                  <a:tcPr marL="91440" marR="91440" marT="45720" marB="45720">
+                    <a:lnL w="12700" cap="flat" cmpd="sng" algn="ctr">
+                      <a:solidFill>
+                        <a:srgbClr val="0F3460"/>
+                      </a:solidFill>
+                      <a:prstDash val="solid"/>
+                      <a:round/>
+                      <a:headEnd type="none" w="med" len="med"/>
+                      <a:tailEnd type="none" w="med" len="med"/>
+                    </a:lnL>
+                    <a:lnR w="12700" cap="flat" cmpd="sng" algn="ctr">
+                      <a:solidFill>
+                        <a:srgbClr val="0F3460"/>
+                      </a:solidFill>
+                      <a:prstDash val="solid"/>
+                      <a:round/>
+                      <a:headEnd type="none" w="med" len="med"/>
+                      <a:tailEnd type="none" w="med" len="med"/>
+                    </a:lnR>
+                    <a:lnT w="12700" cap="flat" cmpd="sng" algn="ctr">
+                      <a:solidFill>
+                        <a:srgbClr val="0F3460"/>
+                      </a:solidFill>
+                      <a:prstDash val="solid"/>
+                      <a:round/>
+                      <a:headEnd type="none" w="med" len="med"/>
+                      <a:tailEnd type="none" w="med" len="med"/>
+                    </a:lnT>
+                    <a:lnB w="12700" cap="flat" cmpd="sng" algn="ctr">
+                      <a:solidFill>
+                        <a:srgbClr val="0F3460"/>
+                      </a:solidFill>
+                      <a:prstDash val="solid"/>
+                      <a:round/>
+                      <a:headEnd type="none" w="med" len="med"/>
+                      <a:tailEnd type="none" w="med" len="med"/>
+                    </a:lnB>
+                    <a:solidFill>
+                      <a:srgbClr val="1A1A2E"/>
+                    </a:solidFill>
+                  </a:tcPr>
+                </a:tc>
+                <a:tc>
+                  <a:txBody>
+                    <a:bodyPr/>
+                    <a:lstStyle/>
+                    <a:p>
+                      <a:pPr algn="ctr" indent="0" marL="0">
+                        <a:buNone/>
+                      </a:pPr>
+                      <a:r>
+                        <a:rPr lang="en-US" sz="1000" dirty="0">
+                          <a:solidFill>
+                            <a:srgbClr val="E8E8E8"/>
+                          </a:solidFill>
+                          <a:latin typeface="Calibri" pitchFamily="34" charset="0"/>
+                          <a:ea typeface="Calibri" pitchFamily="34" charset="-122"/>
+                          <a:cs typeface="Calibri" pitchFamily="34" charset="-120"/>
+                        </a:rPr>
+                        <a:t>~08:50</a:t>
+                      </a:r>
+                      <a:endParaRPr lang="en-US" sz="1000" dirty="0">
+                        <a:latin typeface="Calibri" charset="0"/>
+                        <a:ea typeface="Calibri" charset="0"/>
+                        <a:cs typeface="Calibri" charset="0"/>
+                      </a:endParaRPr>
+                    </a:p>
+                  </a:txBody>
+                  <a:tcPr marL="91440" marR="91440" marT="45720" marB="45720">
+                    <a:lnL w="12700" cap="flat" cmpd="sng" algn="ctr">
+                      <a:solidFill>
+                        <a:srgbClr val="0F3460"/>
+                      </a:solidFill>
+                      <a:prstDash val="solid"/>
+                      <a:round/>
+                      <a:headEnd type="none" w="med" len="med"/>
+                      <a:tailEnd type="none" w="med" len="med"/>
+                    </a:lnL>
+                    <a:lnR w="12700" cap="flat" cmpd="sng" algn="ctr">
+                      <a:solidFill>
+                        <a:srgbClr val="0F3460"/>
+                      </a:solidFill>
+                      <a:prstDash val="solid"/>
+                      <a:round/>
+                      <a:headEnd type="none" w="med" len="med"/>
+                      <a:tailEnd type="none" w="med" len="med"/>
+                    </a:lnR>
+                    <a:lnT w="12700" cap="flat" cmpd="sng" algn="ctr">
+                      <a:solidFill>
+                        <a:srgbClr val="0F3460"/>
+                      </a:solidFill>
+                      <a:prstDash val="solid"/>
+                      <a:round/>
+                      <a:headEnd type="none" w="med" len="med"/>
+                      <a:tailEnd type="none" w="med" len="med"/>
+                    </a:lnT>
+                    <a:lnB w="12700" cap="flat" cmpd="sng" algn="ctr">
+                      <a:solidFill>
+                        <a:srgbClr val="0F3460"/>
+                      </a:solidFill>
+                      <a:prstDash val="solid"/>
+                      <a:round/>
+                      <a:headEnd type="none" w="med" len="med"/>
+                      <a:tailEnd type="none" w="med" len="med"/>
+                    </a:lnB>
+                    <a:solidFill>
+                      <a:srgbClr val="1A1A2E"/>
+                    </a:solidFill>
+                  </a:tcPr>
+                </a:tc>
+                <a:tc>
+                  <a:txBody>
+                    <a:bodyPr/>
+                    <a:lstStyle/>
+                    <a:p>
+                      <a:pPr algn="ctr" indent="0" marL="0">
+                        <a:buNone/>
+                      </a:pPr>
+                      <a:r>
+                        <a:rPr lang="en-US" sz="1000" dirty="0">
+                          <a:solidFill>
+                            <a:srgbClr val="E8E8E8"/>
+                          </a:solidFill>
+                          <a:latin typeface="Calibri" pitchFamily="34" charset="0"/>
+                          <a:ea typeface="Calibri" pitchFamily="34" charset="-122"/>
+                          <a:cs typeface="Calibri" pitchFamily="34" charset="-120"/>
+                        </a:rPr>
+                        <a:t>2h 30m</a:t>
+                      </a:r>
+                      <a:endParaRPr lang="en-US" sz="1000" dirty="0">
+                        <a:latin typeface="Calibri" charset="0"/>
+                        <a:ea typeface="Calibri" charset="0"/>
+                        <a:cs typeface="Calibri" charset="0"/>
+                      </a:endParaRPr>
+                    </a:p>
+                  </a:txBody>
+                  <a:tcPr marL="91440" marR="91440" marT="45720" marB="45720">
+                    <a:lnL w="12700" cap="flat" cmpd="sng" algn="ctr">
+                      <a:solidFill>
+                        <a:srgbClr val="0F3460"/>
+                      </a:solidFill>
+                      <a:prstDash val="solid"/>
+                      <a:round/>
+                      <a:headEnd type="none" w="med" len="med"/>
+                      <a:tailEnd type="none" w="med" len="med"/>
+                    </a:lnL>
+                    <a:lnR w="12700" cap="flat" cmpd="sng" algn="ctr">
+                      <a:solidFill>
+                        <a:srgbClr val="0F3460"/>
+                      </a:solidFill>
+                      <a:prstDash val="solid"/>
+                      <a:round/>
+                      <a:headEnd type="none" w="med" len="med"/>
+                      <a:tailEnd type="none" w="med" len="med"/>
+                    </a:lnR>
+                    <a:lnT w="12700" cap="flat" cmpd="sng" algn="ctr">
+                      <a:solidFill>
+                        <a:srgbClr val="0F3460"/>
+                      </a:solidFill>
+                      <a:prstDash val="solid"/>
+                      <a:round/>
+                      <a:headEnd type="none" w="med" len="med"/>
+                      <a:tailEnd type="none" w="med" len="med"/>
+                    </a:lnT>
+                    <a:lnB w="12700" cap="flat" cmpd="sng" algn="ctr">
+                      <a:solidFill>
+                        <a:srgbClr val="0F3460"/>
+                      </a:solidFill>
+                      <a:prstDash val="solid"/>
+                      <a:round/>
+                      <a:headEnd type="none" w="med" len="med"/>
+                      <a:tailEnd type="none" w="med" len="med"/>
+                    </a:lnB>
+                    <a:solidFill>
+                      <a:srgbClr val="1A1A2E"/>
                     </a:solidFill>
                   </a:tcPr>
                 </a:tc>
@@ -24092,6 +24445,594 @@
                       <a:tailEnd type="none" w="med" len="med"/>
                     </a:lnB>
                     <a:solidFill>
+                      <a:srgbClr val="1A1A2E"/>
+                    </a:solidFill>
+                  </a:tcPr>
+                </a:tc>
+                <a:tc>
+                  <a:txBody>
+                    <a:bodyPr/>
+                    <a:lstStyle/>
+                    <a:p>
+                      <a:pPr algn="ctr" indent="0" marL="0">
+                        <a:buNone/>
+                      </a:pPr>
+                      <a:r>
+                        <a:rPr lang="en-US" sz="1000" b="1" dirty="0">
+                          <a:solidFill>
+                            <a:srgbClr val="22C55E"/>
+                          </a:solidFill>
+                          <a:latin typeface="Calibri" pitchFamily="34" charset="0"/>
+                          <a:ea typeface="Calibri" pitchFamily="34" charset="-122"/>
+                          <a:cs typeface="Calibri" pitchFamily="34" charset="-120"/>
+                        </a:rPr>
+                        <a:t>~€300</a:t>
+                      </a:r>
+                      <a:endParaRPr lang="en-US" sz="1000" dirty="0">
+                        <a:latin typeface="Calibri" charset="0"/>
+                        <a:ea typeface="Calibri" charset="0"/>
+                        <a:cs typeface="Calibri" charset="0"/>
+                      </a:endParaRPr>
+                    </a:p>
+                  </a:txBody>
+                  <a:tcPr marL="91440" marR="91440" marT="45720" marB="45720">
+                    <a:lnL w="12700" cap="flat" cmpd="sng" algn="ctr">
+                      <a:solidFill>
+                        <a:srgbClr val="0F3460"/>
+                      </a:solidFill>
+                      <a:prstDash val="solid"/>
+                      <a:round/>
+                      <a:headEnd type="none" w="med" len="med"/>
+                      <a:tailEnd type="none" w="med" len="med"/>
+                    </a:lnL>
+                    <a:lnR w="12700" cap="flat" cmpd="sng" algn="ctr">
+                      <a:solidFill>
+                        <a:srgbClr val="0F3460"/>
+                      </a:solidFill>
+                      <a:prstDash val="solid"/>
+                      <a:round/>
+                      <a:headEnd type="none" w="med" len="med"/>
+                      <a:tailEnd type="none" w="med" len="med"/>
+                    </a:lnR>
+                    <a:lnT w="12700" cap="flat" cmpd="sng" algn="ctr">
+                      <a:solidFill>
+                        <a:srgbClr val="0F3460"/>
+                      </a:solidFill>
+                      <a:prstDash val="solid"/>
+                      <a:round/>
+                      <a:headEnd type="none" w="med" len="med"/>
+                      <a:tailEnd type="none" w="med" len="med"/>
+                    </a:lnT>
+                    <a:lnB w="12700" cap="flat" cmpd="sng" algn="ctr">
+                      <a:solidFill>
+                        <a:srgbClr val="0F3460"/>
+                      </a:solidFill>
+                      <a:prstDash val="solid"/>
+                      <a:round/>
+                      <a:headEnd type="none" w="med" len="med"/>
+                      <a:tailEnd type="none" w="med" len="med"/>
+                    </a:lnB>
+                    <a:solidFill>
+                      <a:srgbClr val="1A1A2E"/>
+                    </a:solidFill>
+                  </a:tcPr>
+                </a:tc>
+              </a:tr>
+              <a:tr h="475488">
+                <a:tc>
+                  <a:txBody>
+                    <a:bodyPr/>
+                    <a:lstStyle/>
+                    <a:p>
+                      <a:pPr algn="ctr" indent="0" marL="0">
+                        <a:buNone/>
+                      </a:pPr>
+                      <a:r>
+                        <a:rPr lang="en-US" sz="1000" dirty="0">
+                          <a:solidFill>
+                            <a:srgbClr val="E8E8E8"/>
+                          </a:solidFill>
+                          <a:latin typeface="Calibri" pitchFamily="34" charset="0"/>
+                          <a:ea typeface="Calibri" pitchFamily="34" charset="-122"/>
+                          <a:cs typeface="Calibri" pitchFamily="34" charset="-120"/>
+                        </a:rPr>
+                        <a:t>Midday Oct 30</a:t>
+                      </a:r>
+                      <a:endParaRPr lang="en-US" sz="1000" dirty="0">
+                        <a:latin typeface="Calibri" charset="0"/>
+                        <a:ea typeface="Calibri" charset="0"/>
+                        <a:cs typeface="Calibri" charset="0"/>
+                      </a:endParaRPr>
+                    </a:p>
+                  </a:txBody>
+                  <a:tcPr marL="91440" marR="91440" marT="45720" marB="45720">
+                    <a:lnL w="12700" cap="flat" cmpd="sng" algn="ctr">
+                      <a:solidFill>
+                        <a:srgbClr val="0F3460"/>
+                      </a:solidFill>
+                      <a:prstDash val="solid"/>
+                      <a:round/>
+                      <a:headEnd type="none" w="med" len="med"/>
+                      <a:tailEnd type="none" w="med" len="med"/>
+                    </a:lnL>
+                    <a:lnR w="12700" cap="flat" cmpd="sng" algn="ctr">
+                      <a:solidFill>
+                        <a:srgbClr val="0F3460"/>
+                      </a:solidFill>
+                      <a:prstDash val="solid"/>
+                      <a:round/>
+                      <a:headEnd type="none" w="med" len="med"/>
+                      <a:tailEnd type="none" w="med" len="med"/>
+                    </a:lnR>
+                    <a:lnT w="12700" cap="flat" cmpd="sng" algn="ctr">
+                      <a:solidFill>
+                        <a:srgbClr val="0F3460"/>
+                      </a:solidFill>
+                      <a:prstDash val="solid"/>
+                      <a:round/>
+                      <a:headEnd type="none" w="med" len="med"/>
+                      <a:tailEnd type="none" w="med" len="med"/>
+                    </a:lnT>
+                    <a:lnB w="12700" cap="flat" cmpd="sng" algn="ctr">
+                      <a:solidFill>
+                        <a:srgbClr val="0F3460"/>
+                      </a:solidFill>
+                      <a:prstDash val="solid"/>
+                      <a:round/>
+                      <a:headEnd type="none" w="med" len="med"/>
+                      <a:tailEnd type="none" w="med" len="med"/>
+                    </a:lnB>
+                    <a:solidFill>
+                      <a:srgbClr val="16213E"/>
+                    </a:solidFill>
+                  </a:tcPr>
+                </a:tc>
+                <a:tc>
+                  <a:txBody>
+                    <a:bodyPr/>
+                    <a:lstStyle/>
+                    <a:p>
+                      <a:pPr algn="ctr" indent="0" marL="0">
+                        <a:buNone/>
+                      </a:pPr>
+                      <a:r>
+                        <a:rPr lang="en-US" sz="1000" dirty="0">
+                          <a:solidFill>
+                            <a:srgbClr val="E8E8E8"/>
+                          </a:solidFill>
+                          <a:latin typeface="Calibri" pitchFamily="34" charset="0"/>
+                          <a:ea typeface="Calibri" pitchFamily="34" charset="-122"/>
+                          <a:cs typeface="Calibri" pitchFamily="34" charset="-120"/>
+                        </a:rPr>
+                        <a:t>Eurowings</a:t>
+                      </a:r>
+                      <a:endParaRPr lang="en-US" sz="1000" dirty="0">
+                        <a:latin typeface="Calibri" charset="0"/>
+                        <a:ea typeface="Calibri" charset="0"/>
+                        <a:cs typeface="Calibri" charset="0"/>
+                      </a:endParaRPr>
+                    </a:p>
+                    <a:p>
+                      <a:pPr algn="ctr" indent="0" marL="0">
+                        <a:buNone/>
+                      </a:pPr>
+                      <a:r>
+                        <a:rPr lang="en-US" sz="1000" dirty="0">
+                          <a:solidFill>
+                            <a:srgbClr val="E8E8E8"/>
+                          </a:solidFill>
+                          <a:latin typeface="Calibri" pitchFamily="34" charset="0"/>
+                          <a:ea typeface="Calibri" pitchFamily="34" charset="-122"/>
+                          <a:cs typeface="Calibri" pitchFamily="34" charset="-120"/>
+                        </a:rPr>
+                        <a:t>(EW)</a:t>
+                      </a:r>
+                      <a:endParaRPr lang="en-US" sz="1000" dirty="0">
+                        <a:latin typeface="Calibri" charset="0"/>
+                        <a:ea typeface="Calibri" charset="0"/>
+                        <a:cs typeface="Calibri" charset="0"/>
+                      </a:endParaRPr>
+                    </a:p>
+                  </a:txBody>
+                  <a:tcPr marL="91440" marR="91440" marT="45720" marB="45720">
+                    <a:lnL w="12700" cap="flat" cmpd="sng" algn="ctr">
+                      <a:solidFill>
+                        <a:srgbClr val="0F3460"/>
+                      </a:solidFill>
+                      <a:prstDash val="solid"/>
+                      <a:round/>
+                      <a:headEnd type="none" w="med" len="med"/>
+                      <a:tailEnd type="none" w="med" len="med"/>
+                    </a:lnL>
+                    <a:lnR w="12700" cap="flat" cmpd="sng" algn="ctr">
+                      <a:solidFill>
+                        <a:srgbClr val="0F3460"/>
+                      </a:solidFill>
+                      <a:prstDash val="solid"/>
+                      <a:round/>
+                      <a:headEnd type="none" w="med" len="med"/>
+                      <a:tailEnd type="none" w="med" len="med"/>
+                    </a:lnR>
+                    <a:lnT w="12700" cap="flat" cmpd="sng" algn="ctr">
+                      <a:solidFill>
+                        <a:srgbClr val="0F3460"/>
+                      </a:solidFill>
+                      <a:prstDash val="solid"/>
+                      <a:round/>
+                      <a:headEnd type="none" w="med" len="med"/>
+                      <a:tailEnd type="none" w="med" len="med"/>
+                    </a:lnT>
+                    <a:lnB w="12700" cap="flat" cmpd="sng" algn="ctr">
+                      <a:solidFill>
+                        <a:srgbClr val="0F3460"/>
+                      </a:solidFill>
+                      <a:prstDash val="solid"/>
+                      <a:round/>
+                      <a:headEnd type="none" w="med" len="med"/>
+                      <a:tailEnd type="none" w="med" len="med"/>
+                    </a:lnB>
+                    <a:solidFill>
+                      <a:srgbClr val="16213E"/>
+                    </a:solidFill>
+                  </a:tcPr>
+                </a:tc>
+                <a:tc>
+                  <a:txBody>
+                    <a:bodyPr/>
+                    <a:lstStyle/>
+                    <a:p>
+                      <a:pPr algn="ctr" indent="0" marL="0">
+                        <a:buNone/>
+                      </a:pPr>
+                      <a:r>
+                        <a:rPr lang="en-US" sz="1000" dirty="0">
+                          <a:solidFill>
+                            <a:srgbClr val="E8E8E8"/>
+                          </a:solidFill>
+                          <a:latin typeface="Calibri" pitchFamily="34" charset="0"/>
+                          <a:ea typeface="Calibri" pitchFamily="34" charset="-122"/>
+                          <a:cs typeface="Calibri" pitchFamily="34" charset="-120"/>
+                        </a:rPr>
+                        <a:t>DUS → MAD</a:t>
+                      </a:r>
+                      <a:endParaRPr lang="en-US" sz="1000" dirty="0">
+                        <a:latin typeface="Calibri" charset="0"/>
+                        <a:ea typeface="Calibri" charset="0"/>
+                        <a:cs typeface="Calibri" charset="0"/>
+                      </a:endParaRPr>
+                    </a:p>
+                    <a:p>
+                      <a:pPr algn="ctr" indent="0" marL="0">
+                        <a:buNone/>
+                      </a:pPr>
+                      <a:r>
+                        <a:rPr lang="en-US" sz="1000" dirty="0">
+                          <a:solidFill>
+                            <a:srgbClr val="E8E8E8"/>
+                          </a:solidFill>
+                          <a:latin typeface="Calibri" pitchFamily="34" charset="0"/>
+                          <a:ea typeface="Calibri" pitchFamily="34" charset="-122"/>
+                          <a:cs typeface="Calibri" pitchFamily="34" charset="-120"/>
+                        </a:rPr>
+                        <a:t>Oct 30 midday</a:t>
+                      </a:r>
+                      <a:endParaRPr lang="en-US" sz="1000" dirty="0">
+                        <a:latin typeface="Calibri" charset="0"/>
+                        <a:ea typeface="Calibri" charset="0"/>
+                        <a:cs typeface="Calibri" charset="0"/>
+                      </a:endParaRPr>
+                    </a:p>
+                  </a:txBody>
+                  <a:tcPr marL="91440" marR="91440" marT="45720" marB="45720">
+                    <a:lnL w="12700" cap="flat" cmpd="sng" algn="ctr">
+                      <a:solidFill>
+                        <a:srgbClr val="0F3460"/>
+                      </a:solidFill>
+                      <a:prstDash val="solid"/>
+                      <a:round/>
+                      <a:headEnd type="none" w="med" len="med"/>
+                      <a:tailEnd type="none" w="med" len="med"/>
+                    </a:lnL>
+                    <a:lnR w="12700" cap="flat" cmpd="sng" algn="ctr">
+                      <a:solidFill>
+                        <a:srgbClr val="0F3460"/>
+                      </a:solidFill>
+                      <a:prstDash val="solid"/>
+                      <a:round/>
+                      <a:headEnd type="none" w="med" len="med"/>
+                      <a:tailEnd type="none" w="med" len="med"/>
+                    </a:lnR>
+                    <a:lnT w="12700" cap="flat" cmpd="sng" algn="ctr">
+                      <a:solidFill>
+                        <a:srgbClr val="0F3460"/>
+                      </a:solidFill>
+                      <a:prstDash val="solid"/>
+                      <a:round/>
+                      <a:headEnd type="none" w="med" len="med"/>
+                      <a:tailEnd type="none" w="med" len="med"/>
+                    </a:lnT>
+                    <a:lnB w="12700" cap="flat" cmpd="sng" algn="ctr">
+                      <a:solidFill>
+                        <a:srgbClr val="0F3460"/>
+                      </a:solidFill>
+                      <a:prstDash val="solid"/>
+                      <a:round/>
+                      <a:headEnd type="none" w="med" len="med"/>
+                      <a:tailEnd type="none" w="med" len="med"/>
+                    </a:lnB>
+                    <a:solidFill>
+                      <a:srgbClr val="16213E"/>
+                    </a:solidFill>
+                  </a:tcPr>
+                </a:tc>
+                <a:tc>
+                  <a:txBody>
+                    <a:bodyPr/>
+                    <a:lstStyle/>
+                    <a:p>
+                      <a:pPr algn="ctr" indent="0" marL="0">
+                        <a:buNone/>
+                      </a:pPr>
+                      <a:r>
+                        <a:rPr lang="en-US" sz="1000" dirty="0">
+                          <a:solidFill>
+                            <a:srgbClr val="E8E8E8"/>
+                          </a:solidFill>
+                          <a:latin typeface="Calibri" pitchFamily="34" charset="0"/>
+                          <a:ea typeface="Calibri" pitchFamily="34" charset="-122"/>
+                          <a:cs typeface="Calibri" pitchFamily="34" charset="-120"/>
+                        </a:rPr>
+                        <a:t>~13:xx</a:t>
+                      </a:r>
+                      <a:endParaRPr lang="en-US" sz="1000" dirty="0">
+                        <a:latin typeface="Calibri" charset="0"/>
+                        <a:ea typeface="Calibri" charset="0"/>
+                        <a:cs typeface="Calibri" charset="0"/>
+                      </a:endParaRPr>
+                    </a:p>
+                  </a:txBody>
+                  <a:tcPr marL="91440" marR="91440" marT="45720" marB="45720">
+                    <a:lnL w="12700" cap="flat" cmpd="sng" algn="ctr">
+                      <a:solidFill>
+                        <a:srgbClr val="0F3460"/>
+                      </a:solidFill>
+                      <a:prstDash val="solid"/>
+                      <a:round/>
+                      <a:headEnd type="none" w="med" len="med"/>
+                      <a:tailEnd type="none" w="med" len="med"/>
+                    </a:lnL>
+                    <a:lnR w="12700" cap="flat" cmpd="sng" algn="ctr">
+                      <a:solidFill>
+                        <a:srgbClr val="0F3460"/>
+                      </a:solidFill>
+                      <a:prstDash val="solid"/>
+                      <a:round/>
+                      <a:headEnd type="none" w="med" len="med"/>
+                      <a:tailEnd type="none" w="med" len="med"/>
+                    </a:lnR>
+                    <a:lnT w="12700" cap="flat" cmpd="sng" algn="ctr">
+                      <a:solidFill>
+                        <a:srgbClr val="0F3460"/>
+                      </a:solidFill>
+                      <a:prstDash val="solid"/>
+                      <a:round/>
+                      <a:headEnd type="none" w="med" len="med"/>
+                      <a:tailEnd type="none" w="med" len="med"/>
+                    </a:lnT>
+                    <a:lnB w="12700" cap="flat" cmpd="sng" algn="ctr">
+                      <a:solidFill>
+                        <a:srgbClr val="0F3460"/>
+                      </a:solidFill>
+                      <a:prstDash val="solid"/>
+                      <a:round/>
+                      <a:headEnd type="none" w="med" len="med"/>
+                      <a:tailEnd type="none" w="med" len="med"/>
+                    </a:lnB>
+                    <a:solidFill>
+                      <a:srgbClr val="16213E"/>
+                    </a:solidFill>
+                  </a:tcPr>
+                </a:tc>
+                <a:tc>
+                  <a:txBody>
+                    <a:bodyPr/>
+                    <a:lstStyle/>
+                    <a:p>
+                      <a:pPr algn="ctr" indent="0" marL="0">
+                        <a:buNone/>
+                      </a:pPr>
+                      <a:r>
+                        <a:rPr lang="en-US" sz="1000" dirty="0">
+                          <a:solidFill>
+                            <a:srgbClr val="E8E8E8"/>
+                          </a:solidFill>
+                          <a:latin typeface="Calibri" pitchFamily="34" charset="0"/>
+                          <a:ea typeface="Calibri" pitchFamily="34" charset="-122"/>
+                          <a:cs typeface="Calibri" pitchFamily="34" charset="-120"/>
+                        </a:rPr>
+                        <a:t>~15:30</a:t>
+                      </a:r>
+                      <a:endParaRPr lang="en-US" sz="1000" dirty="0">
+                        <a:latin typeface="Calibri" charset="0"/>
+                        <a:ea typeface="Calibri" charset="0"/>
+                        <a:cs typeface="Calibri" charset="0"/>
+                      </a:endParaRPr>
+                    </a:p>
+                  </a:txBody>
+                  <a:tcPr marL="91440" marR="91440" marT="45720" marB="45720">
+                    <a:lnL w="12700" cap="flat" cmpd="sng" algn="ctr">
+                      <a:solidFill>
+                        <a:srgbClr val="0F3460"/>
+                      </a:solidFill>
+                      <a:prstDash val="solid"/>
+                      <a:round/>
+                      <a:headEnd type="none" w="med" len="med"/>
+                      <a:tailEnd type="none" w="med" len="med"/>
+                    </a:lnL>
+                    <a:lnR w="12700" cap="flat" cmpd="sng" algn="ctr">
+                      <a:solidFill>
+                        <a:srgbClr val="0F3460"/>
+                      </a:solidFill>
+                      <a:prstDash val="solid"/>
+                      <a:round/>
+                      <a:headEnd type="none" w="med" len="med"/>
+                      <a:tailEnd type="none" w="med" len="med"/>
+                    </a:lnR>
+                    <a:lnT w="12700" cap="flat" cmpd="sng" algn="ctr">
+                      <a:solidFill>
+                        <a:srgbClr val="0F3460"/>
+                      </a:solidFill>
+                      <a:prstDash val="solid"/>
+                      <a:round/>
+                      <a:headEnd type="none" w="med" len="med"/>
+                      <a:tailEnd type="none" w="med" len="med"/>
+                    </a:lnT>
+                    <a:lnB w="12700" cap="flat" cmpd="sng" algn="ctr">
+                      <a:solidFill>
+                        <a:srgbClr val="0F3460"/>
+                      </a:solidFill>
+                      <a:prstDash val="solid"/>
+                      <a:round/>
+                      <a:headEnd type="none" w="med" len="med"/>
+                      <a:tailEnd type="none" w="med" len="med"/>
+                    </a:lnB>
+                    <a:solidFill>
+                      <a:srgbClr val="16213E"/>
+                    </a:solidFill>
+                  </a:tcPr>
+                </a:tc>
+                <a:tc>
+                  <a:txBody>
+                    <a:bodyPr/>
+                    <a:lstStyle/>
+                    <a:p>
+                      <a:pPr algn="ctr" indent="0" marL="0">
+                        <a:buNone/>
+                      </a:pPr>
+                      <a:r>
+                        <a:rPr lang="en-US" sz="1000" dirty="0">
+                          <a:solidFill>
+                            <a:srgbClr val="E8E8E8"/>
+                          </a:solidFill>
+                          <a:latin typeface="Calibri" pitchFamily="34" charset="0"/>
+                          <a:ea typeface="Calibri" pitchFamily="34" charset="-122"/>
+                          <a:cs typeface="Calibri" pitchFamily="34" charset="-120"/>
+                        </a:rPr>
+                        <a:t>2h 30m</a:t>
+                      </a:r>
+                      <a:endParaRPr lang="en-US" sz="1000" dirty="0">
+                        <a:latin typeface="Calibri" charset="0"/>
+                        <a:ea typeface="Calibri" charset="0"/>
+                        <a:cs typeface="Calibri" charset="0"/>
+                      </a:endParaRPr>
+                    </a:p>
+                  </a:txBody>
+                  <a:tcPr marL="91440" marR="91440" marT="45720" marB="45720">
+                    <a:lnL w="12700" cap="flat" cmpd="sng" algn="ctr">
+                      <a:solidFill>
+                        <a:srgbClr val="0F3460"/>
+                      </a:solidFill>
+                      <a:prstDash val="solid"/>
+                      <a:round/>
+                      <a:headEnd type="none" w="med" len="med"/>
+                      <a:tailEnd type="none" w="med" len="med"/>
+                    </a:lnL>
+                    <a:lnR w="12700" cap="flat" cmpd="sng" algn="ctr">
+                      <a:solidFill>
+                        <a:srgbClr val="0F3460"/>
+                      </a:solidFill>
+                      <a:prstDash val="solid"/>
+                      <a:round/>
+                      <a:headEnd type="none" w="med" len="med"/>
+                      <a:tailEnd type="none" w="med" len="med"/>
+                    </a:lnR>
+                    <a:lnT w="12700" cap="flat" cmpd="sng" algn="ctr">
+                      <a:solidFill>
+                        <a:srgbClr val="0F3460"/>
+                      </a:solidFill>
+                      <a:prstDash val="solid"/>
+                      <a:round/>
+                      <a:headEnd type="none" w="med" len="med"/>
+                      <a:tailEnd type="none" w="med" len="med"/>
+                    </a:lnT>
+                    <a:lnB w="12700" cap="flat" cmpd="sng" algn="ctr">
+                      <a:solidFill>
+                        <a:srgbClr val="0F3460"/>
+                      </a:solidFill>
+                      <a:prstDash val="solid"/>
+                      <a:round/>
+                      <a:headEnd type="none" w="med" len="med"/>
+                      <a:tailEnd type="none" w="med" len="med"/>
+                    </a:lnB>
+                    <a:solidFill>
+                      <a:srgbClr val="16213E"/>
+                    </a:solidFill>
+                  </a:tcPr>
+                </a:tc>
+                <a:tc>
+                  <a:txBody>
+                    <a:bodyPr/>
+                    <a:lstStyle/>
+                    <a:p>
+                      <a:pPr algn="ctr" indent="0" marL="0">
+                        <a:buNone/>
+                      </a:pPr>
+                      <a:r>
+                        <a:rPr lang="en-US" sz="1000" dirty="0">
+                          <a:solidFill>
+                            <a:srgbClr val="E8E8E8"/>
+                          </a:solidFill>
+                          <a:latin typeface="Calibri" pitchFamily="34" charset="0"/>
+                          <a:ea typeface="Calibri" pitchFamily="34" charset="-122"/>
+                          <a:cs typeface="Calibri" pitchFamily="34" charset="-120"/>
+                        </a:rPr>
+                        <a:t>~€90</a:t>
+                      </a:r>
+                      <a:endParaRPr lang="en-US" sz="1000" dirty="0">
+                        <a:latin typeface="Calibri" charset="0"/>
+                        <a:ea typeface="Calibri" charset="0"/>
+                        <a:cs typeface="Calibri" charset="0"/>
+                      </a:endParaRPr>
+                    </a:p>
+                  </a:txBody>
+                  <a:tcPr marL="91440" marR="91440" marT="45720" marB="45720">
+                    <a:lnL w="12700" cap="flat" cmpd="sng" algn="ctr">
+                      <a:solidFill>
+                        <a:srgbClr val="0F3460"/>
+                      </a:solidFill>
+                      <a:prstDash val="solid"/>
+                      <a:round/>
+                      <a:headEnd type="none" w="med" len="med"/>
+                      <a:tailEnd type="none" w="med" len="med"/>
+                    </a:lnL>
+                    <a:lnR w="12700" cap="flat" cmpd="sng" algn="ctr">
+                      <a:solidFill>
+                        <a:srgbClr val="0F3460"/>
+                      </a:solidFill>
+                      <a:prstDash val="solid"/>
+                      <a:round/>
+                      <a:headEnd type="none" w="med" len="med"/>
+                      <a:tailEnd type="none" w="med" len="med"/>
+                    </a:lnR>
+                    <a:lnT w="12700" cap="flat" cmpd="sng" algn="ctr">
+                      <a:solidFill>
+                        <a:srgbClr val="0F3460"/>
+                      </a:solidFill>
+                      <a:prstDash val="solid"/>
+                      <a:round/>
+                      <a:headEnd type="none" w="med" len="med"/>
+                      <a:tailEnd type="none" w="med" len="med"/>
+                    </a:lnT>
+                    <a:lnB w="12700" cap="flat" cmpd="sng" algn="ctr">
+                      <a:solidFill>
+                        <a:srgbClr val="0F3460"/>
+                      </a:solidFill>
+                      <a:prstDash val="solid"/>
+                      <a:round/>
+                      <a:headEnd type="none" w="med" len="med"/>
+                      <a:tailEnd type="none" w="med" len="med"/>
+                    </a:lnB>
+                    <a:solidFill>
                       <a:srgbClr val="16213E"/>
                     </a:solidFill>
                   </a:tcPr>
@@ -24107,13 +25048,13 @@
                       <a:r>
                         <a:rPr lang="en-US" sz="1000" b="1" dirty="0">
                           <a:solidFill>
-                            <a:srgbClr val="FF8C00"/>
+                            <a:srgbClr val="FFC107"/>
                           </a:solidFill>
                           <a:latin typeface="Calibri" pitchFamily="34" charset="0"/>
                           <a:ea typeface="Calibri" pitchFamily="34" charset="-122"/>
                           <a:cs typeface="Calibri" pitchFamily="34" charset="-120"/>
                         </a:rPr>
-                        <a:t>~€300</a:t>
+                        <a:t>~€360</a:t>
                       </a:r>
                       <a:endParaRPr lang="en-US" sz="1000" dirty="0">
                         <a:latin typeface="Calibri" charset="0"/>
@@ -24183,28 +25124,7 @@
                           <a:ea typeface="Calibri" pitchFamily="34" charset="-122"/>
                           <a:cs typeface="Calibri" pitchFamily="34" charset="-120"/>
                         </a:rPr>
-                        <a:t>Oct 30</a:t>
-                      </a:r>
-                      <a:endParaRPr lang="en-US" sz="1000" dirty="0">
-                        <a:latin typeface="Calibri" charset="0"/>
-                        <a:ea typeface="Calibri" charset="0"/>
-                        <a:cs typeface="Calibri" charset="0"/>
-                      </a:endParaRPr>
-                    </a:p>
-                    <a:p>
-                      <a:pPr algn="ctr" indent="0" marL="0">
-                        <a:buNone/>
-                      </a:pPr>
-                      <a:r>
-                        <a:rPr lang="en-US" sz="1000" dirty="0">
-                          <a:solidFill>
-                            <a:srgbClr val="E8E8E8"/>
-                          </a:solidFill>
-                          <a:latin typeface="Calibri" pitchFamily="34" charset="0"/>
-                          <a:ea typeface="Calibri" pitchFamily="34" charset="-122"/>
-                          <a:cs typeface="Calibri" pitchFamily="34" charset="-120"/>
-                        </a:rPr>
-                        <a:t>Morning</a:t>
+                        <a:t>Premium</a:t>
                       </a:r>
                       <a:endParaRPr lang="en-US" sz="1000" dirty="0">
                         <a:latin typeface="Calibri" charset="0"/>
@@ -24272,7 +25192,7 @@
                           <a:ea typeface="Calibri" pitchFamily="34" charset="-122"/>
                           <a:cs typeface="Calibri" pitchFamily="34" charset="-120"/>
                         </a:rPr>
-                        <a:t>W62292</a:t>
+                        <a:t>Vueling</a:t>
                       </a:r>
                       <a:endParaRPr lang="en-US" sz="1000" dirty="0">
                         <a:latin typeface="Calibri" charset="0"/>
@@ -24293,7 +25213,7 @@
                           <a:ea typeface="Calibri" pitchFamily="34" charset="-122"/>
                           <a:cs typeface="Calibri" pitchFamily="34" charset="-120"/>
                         </a:rPr>
-                        <a:t>Wizz Air</a:t>
+                        <a:t>(VY)</a:t>
                       </a:r>
                       <a:endParaRPr lang="en-US" sz="1000" dirty="0">
                         <a:latin typeface="Calibri" charset="0"/>
@@ -24361,7 +25281,7 @@
                           <a:ea typeface="Calibri" pitchFamily="34" charset="-122"/>
                           <a:cs typeface="Calibri" pitchFamily="34" charset="-120"/>
                         </a:rPr>
-                        <a:t>DTM → BUD</a:t>
+                        <a:t>DUS → MAD</a:t>
                       </a:r>
                       <a:endParaRPr lang="en-US" sz="1000" dirty="0">
                         <a:latin typeface="Calibri" charset="0"/>
@@ -24450,7 +25370,7 @@
                           <a:ea typeface="Calibri" pitchFamily="34" charset="-122"/>
                           <a:cs typeface="Calibri" pitchFamily="34" charset="-120"/>
                         </a:rPr>
-                        <a:t>AM slot</a:t>
+                        <a:t>Various</a:t>
                       </a:r>
                       <a:endParaRPr lang="en-US" sz="1000" dirty="0">
                         <a:latin typeface="Calibri" charset="0"/>
@@ -24518,7 +25438,7 @@
                           <a:ea typeface="Calibri" pitchFamily="34" charset="-122"/>
                           <a:cs typeface="Calibri" pitchFamily="34" charset="-120"/>
                         </a:rPr>
-                        <a:t>AM +1h45</a:t>
+                        <a:t>Various</a:t>
                       </a:r>
                       <a:endParaRPr lang="en-US" sz="1000" dirty="0">
                         <a:latin typeface="Calibri" charset="0"/>
@@ -24586,7 +25506,7 @@
                           <a:ea typeface="Calibri" pitchFamily="34" charset="-122"/>
                           <a:cs typeface="Calibri" pitchFamily="34" charset="-120"/>
                         </a:rPr>
-                        <a:t>1h 45m</a:t>
+                        <a:t>2h 30m</a:t>
                       </a:r>
                       <a:endParaRPr lang="en-US" sz="1000" dirty="0">
                         <a:latin typeface="Calibri" charset="0"/>
@@ -24654,733 +25574,7 @@
                           <a:ea typeface="Calibri" pitchFamily="34" charset="-122"/>
                           <a:cs typeface="Calibri" pitchFamily="34" charset="-120"/>
                         </a:rPr>
-                        <a:t>~€65</a:t>
-                      </a:r>
-                      <a:endParaRPr lang="en-US" sz="1000" dirty="0">
-                        <a:latin typeface="Calibri" charset="0"/>
-                        <a:ea typeface="Calibri" charset="0"/>
-                        <a:cs typeface="Calibri" charset="0"/>
-                      </a:endParaRPr>
-                    </a:p>
-                  </a:txBody>
-                  <a:tcPr marL="91440" marR="91440" marT="45720" marB="45720">
-                    <a:lnL w="12700" cap="flat" cmpd="sng" algn="ctr">
-                      <a:solidFill>
-                        <a:srgbClr val="0F3460"/>
-                      </a:solidFill>
-                      <a:prstDash val="solid"/>
-                      <a:round/>
-                      <a:headEnd type="none" w="med" len="med"/>
-                      <a:tailEnd type="none" w="med" len="med"/>
-                    </a:lnL>
-                    <a:lnR w="12700" cap="flat" cmpd="sng" algn="ctr">
-                      <a:solidFill>
-                        <a:srgbClr val="0F3460"/>
-                      </a:solidFill>
-                      <a:prstDash val="solid"/>
-                      <a:round/>
-                      <a:headEnd type="none" w="med" len="med"/>
-                      <a:tailEnd type="none" w="med" len="med"/>
-                    </a:lnR>
-                    <a:lnT w="12700" cap="flat" cmpd="sng" algn="ctr">
-                      <a:solidFill>
-                        <a:srgbClr val="0F3460"/>
-                      </a:solidFill>
-                      <a:prstDash val="solid"/>
-                      <a:round/>
-                      <a:headEnd type="none" w="med" len="med"/>
-                      <a:tailEnd type="none" w="med" len="med"/>
-                    </a:lnT>
-                    <a:lnB w="12700" cap="flat" cmpd="sng" algn="ctr">
-                      <a:solidFill>
-                        <a:srgbClr val="0F3460"/>
-                      </a:solidFill>
-                      <a:prstDash val="solid"/>
-                      <a:round/>
-                      <a:headEnd type="none" w="med" len="med"/>
-                      <a:tailEnd type="none" w="med" len="med"/>
-                    </a:lnB>
-                    <a:solidFill>
-                      <a:srgbClr val="1A1A2E"/>
-                    </a:solidFill>
-                  </a:tcPr>
-                </a:tc>
-                <a:tc>
-                  <a:txBody>
-                    <a:bodyPr/>
-                    <a:lstStyle/>
-                    <a:p>
-                      <a:pPr algn="ctr" indent="0" marL="0">
-                        <a:buNone/>
-                      </a:pPr>
-                      <a:r>
-                        <a:rPr lang="en-US" sz="1000" b="1" dirty="0">
-                          <a:solidFill>
-                            <a:srgbClr val="22C55E"/>
-                          </a:solidFill>
-                          <a:latin typeface="Calibri" pitchFamily="34" charset="0"/>
-                          <a:ea typeface="Calibri" pitchFamily="34" charset="-122"/>
-                          <a:cs typeface="Calibri" pitchFamily="34" charset="-120"/>
-                        </a:rPr>
-                        <a:t>~€260</a:t>
-                      </a:r>
-                      <a:endParaRPr lang="en-US" sz="1000" dirty="0">
-                        <a:latin typeface="Calibri" charset="0"/>
-                        <a:ea typeface="Calibri" charset="0"/>
-                        <a:cs typeface="Calibri" charset="0"/>
-                      </a:endParaRPr>
-                    </a:p>
-                  </a:txBody>
-                  <a:tcPr marL="91440" marR="91440" marT="45720" marB="45720">
-                    <a:lnL w="12700" cap="flat" cmpd="sng" algn="ctr">
-                      <a:solidFill>
-                        <a:srgbClr val="0F3460"/>
-                      </a:solidFill>
-                      <a:prstDash val="solid"/>
-                      <a:round/>
-                      <a:headEnd type="none" w="med" len="med"/>
-                      <a:tailEnd type="none" w="med" len="med"/>
-                    </a:lnL>
-                    <a:lnR w="12700" cap="flat" cmpd="sng" algn="ctr">
-                      <a:solidFill>
-                        <a:srgbClr val="0F3460"/>
-                      </a:solidFill>
-                      <a:prstDash val="solid"/>
-                      <a:round/>
-                      <a:headEnd type="none" w="med" len="med"/>
-                      <a:tailEnd type="none" w="med" len="med"/>
-                    </a:lnR>
-                    <a:lnT w="12700" cap="flat" cmpd="sng" algn="ctr">
-                      <a:solidFill>
-                        <a:srgbClr val="0F3460"/>
-                      </a:solidFill>
-                      <a:prstDash val="solid"/>
-                      <a:round/>
-                      <a:headEnd type="none" w="med" len="med"/>
-                      <a:tailEnd type="none" w="med" len="med"/>
-                    </a:lnT>
-                    <a:lnB w="12700" cap="flat" cmpd="sng" algn="ctr">
-                      <a:solidFill>
-                        <a:srgbClr val="0F3460"/>
-                      </a:solidFill>
-                      <a:prstDash val="solid"/>
-                      <a:round/>
-                      <a:headEnd type="none" w="med" len="med"/>
-                      <a:tailEnd type="none" w="med" len="med"/>
-                    </a:lnB>
-                    <a:solidFill>
-                      <a:srgbClr val="1A1A2E"/>
-                    </a:solidFill>
-                  </a:tcPr>
-                </a:tc>
-              </a:tr>
-              <a:tr h="475488">
-                <a:tc>
-                  <a:txBody>
-                    <a:bodyPr/>
-                    <a:lstStyle/>
-                    <a:p>
-                      <a:pPr algn="ctr" indent="0" marL="0">
-                        <a:buNone/>
-                      </a:pPr>
-                      <a:r>
-                        <a:rPr lang="en-US" sz="1000" dirty="0">
-                          <a:solidFill>
-                            <a:srgbClr val="E8E8E8"/>
-                          </a:solidFill>
-                          <a:latin typeface="Calibri" pitchFamily="34" charset="0"/>
-                          <a:ea typeface="Calibri" pitchFamily="34" charset="-122"/>
-                          <a:cs typeface="Calibri" pitchFamily="34" charset="-120"/>
-                        </a:rPr>
-                        <a:t>Alt: DUS</a:t>
-                      </a:r>
-                      <a:endParaRPr lang="en-US" sz="1000" dirty="0">
-                        <a:latin typeface="Calibri" charset="0"/>
-                        <a:ea typeface="Calibri" charset="0"/>
-                        <a:cs typeface="Calibri" charset="0"/>
-                      </a:endParaRPr>
-                    </a:p>
-                  </a:txBody>
-                  <a:tcPr marL="91440" marR="91440" marT="45720" marB="45720">
-                    <a:lnL w="12700" cap="flat" cmpd="sng" algn="ctr">
-                      <a:solidFill>
-                        <a:srgbClr val="0F3460"/>
-                      </a:solidFill>
-                      <a:prstDash val="solid"/>
-                      <a:round/>
-                      <a:headEnd type="none" w="med" len="med"/>
-                      <a:tailEnd type="none" w="med" len="med"/>
-                    </a:lnL>
-                    <a:lnR w="12700" cap="flat" cmpd="sng" algn="ctr">
-                      <a:solidFill>
-                        <a:srgbClr val="0F3460"/>
-                      </a:solidFill>
-                      <a:prstDash val="solid"/>
-                      <a:round/>
-                      <a:headEnd type="none" w="med" len="med"/>
-                      <a:tailEnd type="none" w="med" len="med"/>
-                    </a:lnR>
-                    <a:lnT w="12700" cap="flat" cmpd="sng" algn="ctr">
-                      <a:solidFill>
-                        <a:srgbClr val="0F3460"/>
-                      </a:solidFill>
-                      <a:prstDash val="solid"/>
-                      <a:round/>
-                      <a:headEnd type="none" w="med" len="med"/>
-                      <a:tailEnd type="none" w="med" len="med"/>
-                    </a:lnT>
-                    <a:lnB w="12700" cap="flat" cmpd="sng" algn="ctr">
-                      <a:solidFill>
-                        <a:srgbClr val="0F3460"/>
-                      </a:solidFill>
-                      <a:prstDash val="solid"/>
-                      <a:round/>
-                      <a:headEnd type="none" w="med" len="med"/>
-                      <a:tailEnd type="none" w="med" len="med"/>
-                    </a:lnB>
-                    <a:solidFill>
-                      <a:srgbClr val="16213E"/>
-                    </a:solidFill>
-                  </a:tcPr>
-                </a:tc>
-                <a:tc>
-                  <a:txBody>
-                    <a:bodyPr/>
-                    <a:lstStyle/>
-                    <a:p>
-                      <a:pPr algn="ctr" indent="0" marL="0">
-                        <a:buNone/>
-                      </a:pPr>
-                      <a:r>
-                        <a:rPr lang="en-US" sz="1000" dirty="0">
-                          <a:solidFill>
-                            <a:srgbClr val="E8E8E8"/>
-                          </a:solidFill>
-                          <a:latin typeface="Calibri" pitchFamily="34" charset="0"/>
-                          <a:ea typeface="Calibri" pitchFamily="34" charset="-122"/>
-                          <a:cs typeface="Calibri" pitchFamily="34" charset="-120"/>
-                        </a:rPr>
-                        <a:t>EW9784</a:t>
-                      </a:r>
-                      <a:endParaRPr lang="en-US" sz="1000" dirty="0">
-                        <a:latin typeface="Calibri" charset="0"/>
-                        <a:ea typeface="Calibri" charset="0"/>
-                        <a:cs typeface="Calibri" charset="0"/>
-                      </a:endParaRPr>
-                    </a:p>
-                    <a:p>
-                      <a:pPr algn="ctr" indent="0" marL="0">
-                        <a:buNone/>
-                      </a:pPr>
-                      <a:r>
-                        <a:rPr lang="en-US" sz="1000" dirty="0">
-                          <a:solidFill>
-                            <a:srgbClr val="E8E8E8"/>
-                          </a:solidFill>
-                          <a:latin typeface="Calibri" pitchFamily="34" charset="0"/>
-                          <a:ea typeface="Calibri" pitchFamily="34" charset="-122"/>
-                          <a:cs typeface="Calibri" pitchFamily="34" charset="-120"/>
-                        </a:rPr>
-                        <a:t>Eurowings</a:t>
-                      </a:r>
-                      <a:endParaRPr lang="en-US" sz="1000" dirty="0">
-                        <a:latin typeface="Calibri" charset="0"/>
-                        <a:ea typeface="Calibri" charset="0"/>
-                        <a:cs typeface="Calibri" charset="0"/>
-                      </a:endParaRPr>
-                    </a:p>
-                  </a:txBody>
-                  <a:tcPr marL="91440" marR="91440" marT="45720" marB="45720">
-                    <a:lnL w="12700" cap="flat" cmpd="sng" algn="ctr">
-                      <a:solidFill>
-                        <a:srgbClr val="0F3460"/>
-                      </a:solidFill>
-                      <a:prstDash val="solid"/>
-                      <a:round/>
-                      <a:headEnd type="none" w="med" len="med"/>
-                      <a:tailEnd type="none" w="med" len="med"/>
-                    </a:lnL>
-                    <a:lnR w="12700" cap="flat" cmpd="sng" algn="ctr">
-                      <a:solidFill>
-                        <a:srgbClr val="0F3460"/>
-                      </a:solidFill>
-                      <a:prstDash val="solid"/>
-                      <a:round/>
-                      <a:headEnd type="none" w="med" len="med"/>
-                      <a:tailEnd type="none" w="med" len="med"/>
-                    </a:lnR>
-                    <a:lnT w="12700" cap="flat" cmpd="sng" algn="ctr">
-                      <a:solidFill>
-                        <a:srgbClr val="0F3460"/>
-                      </a:solidFill>
-                      <a:prstDash val="solid"/>
-                      <a:round/>
-                      <a:headEnd type="none" w="med" len="med"/>
-                      <a:tailEnd type="none" w="med" len="med"/>
-                    </a:lnT>
-                    <a:lnB w="12700" cap="flat" cmpd="sng" algn="ctr">
-                      <a:solidFill>
-                        <a:srgbClr val="0F3460"/>
-                      </a:solidFill>
-                      <a:prstDash val="solid"/>
-                      <a:round/>
-                      <a:headEnd type="none" w="med" len="med"/>
-                      <a:tailEnd type="none" w="med" len="med"/>
-                    </a:lnB>
-                    <a:solidFill>
-                      <a:srgbClr val="16213E"/>
-                    </a:solidFill>
-                  </a:tcPr>
-                </a:tc>
-                <a:tc>
-                  <a:txBody>
-                    <a:bodyPr/>
-                    <a:lstStyle/>
-                    <a:p>
-                      <a:pPr algn="ctr" indent="0" marL="0">
-                        <a:buNone/>
-                      </a:pPr>
-                      <a:r>
-                        <a:rPr lang="en-US" sz="1000" dirty="0">
-                          <a:solidFill>
-                            <a:srgbClr val="E8E8E8"/>
-                          </a:solidFill>
-                          <a:latin typeface="Calibri" pitchFamily="34" charset="0"/>
-                          <a:ea typeface="Calibri" pitchFamily="34" charset="-122"/>
-                          <a:cs typeface="Calibri" pitchFamily="34" charset="-120"/>
-                        </a:rPr>
-                        <a:t>DUS → BUD</a:t>
-                      </a:r>
-                      <a:endParaRPr lang="en-US" sz="1000" dirty="0">
-                        <a:latin typeface="Calibri" charset="0"/>
-                        <a:ea typeface="Calibri" charset="0"/>
-                        <a:cs typeface="Calibri" charset="0"/>
-                      </a:endParaRPr>
-                    </a:p>
-                    <a:p>
-                      <a:pPr algn="ctr" indent="0" marL="0">
-                        <a:buNone/>
-                      </a:pPr>
-                      <a:r>
-                        <a:rPr lang="en-US" sz="1000" dirty="0">
-                          <a:solidFill>
-                            <a:srgbClr val="E8E8E8"/>
-                          </a:solidFill>
-                          <a:latin typeface="Calibri" pitchFamily="34" charset="0"/>
-                          <a:ea typeface="Calibri" pitchFamily="34" charset="-122"/>
-                          <a:cs typeface="Calibri" pitchFamily="34" charset="-120"/>
-                        </a:rPr>
-                        <a:t>Oct 29 evening</a:t>
-                      </a:r>
-                      <a:endParaRPr lang="en-US" sz="1000" dirty="0">
-                        <a:latin typeface="Calibri" charset="0"/>
-                        <a:ea typeface="Calibri" charset="0"/>
-                        <a:cs typeface="Calibri" charset="0"/>
-                      </a:endParaRPr>
-                    </a:p>
-                  </a:txBody>
-                  <a:tcPr marL="91440" marR="91440" marT="45720" marB="45720">
-                    <a:lnL w="12700" cap="flat" cmpd="sng" algn="ctr">
-                      <a:solidFill>
-                        <a:srgbClr val="0F3460"/>
-                      </a:solidFill>
-                      <a:prstDash val="solid"/>
-                      <a:round/>
-                      <a:headEnd type="none" w="med" len="med"/>
-                      <a:tailEnd type="none" w="med" len="med"/>
-                    </a:lnL>
-                    <a:lnR w="12700" cap="flat" cmpd="sng" algn="ctr">
-                      <a:solidFill>
-                        <a:srgbClr val="0F3460"/>
-                      </a:solidFill>
-                      <a:prstDash val="solid"/>
-                      <a:round/>
-                      <a:headEnd type="none" w="med" len="med"/>
-                      <a:tailEnd type="none" w="med" len="med"/>
-                    </a:lnR>
-                    <a:lnT w="12700" cap="flat" cmpd="sng" algn="ctr">
-                      <a:solidFill>
-                        <a:srgbClr val="0F3460"/>
-                      </a:solidFill>
-                      <a:prstDash val="solid"/>
-                      <a:round/>
-                      <a:headEnd type="none" w="med" len="med"/>
-                      <a:tailEnd type="none" w="med" len="med"/>
-                    </a:lnT>
-                    <a:lnB w="12700" cap="flat" cmpd="sng" algn="ctr">
-                      <a:solidFill>
-                        <a:srgbClr val="0F3460"/>
-                      </a:solidFill>
-                      <a:prstDash val="solid"/>
-                      <a:round/>
-                      <a:headEnd type="none" w="med" len="med"/>
-                      <a:tailEnd type="none" w="med" len="med"/>
-                    </a:lnB>
-                    <a:solidFill>
-                      <a:srgbClr val="16213E"/>
-                    </a:solidFill>
-                  </a:tcPr>
-                </a:tc>
-                <a:tc>
-                  <a:txBody>
-                    <a:bodyPr/>
-                    <a:lstStyle/>
-                    <a:p>
-                      <a:pPr algn="ctr" indent="0" marL="0">
-                        <a:buNone/>
-                      </a:pPr>
-                      <a:r>
-                        <a:rPr lang="en-US" sz="1000" dirty="0">
-                          <a:solidFill>
-                            <a:srgbClr val="E8E8E8"/>
-                          </a:solidFill>
-                          <a:latin typeface="Calibri" pitchFamily="34" charset="0"/>
-                          <a:ea typeface="Calibri" pitchFamily="34" charset="-122"/>
-                          <a:cs typeface="Calibri" pitchFamily="34" charset="-120"/>
-                        </a:rPr>
-                        <a:t>17:45</a:t>
-                      </a:r>
-                      <a:endParaRPr lang="en-US" sz="1000" dirty="0">
-                        <a:latin typeface="Calibri" charset="0"/>
-                        <a:ea typeface="Calibri" charset="0"/>
-                        <a:cs typeface="Calibri" charset="0"/>
-                      </a:endParaRPr>
-                    </a:p>
-                  </a:txBody>
-                  <a:tcPr marL="91440" marR="91440" marT="45720" marB="45720">
-                    <a:lnL w="12700" cap="flat" cmpd="sng" algn="ctr">
-                      <a:solidFill>
-                        <a:srgbClr val="0F3460"/>
-                      </a:solidFill>
-                      <a:prstDash val="solid"/>
-                      <a:round/>
-                      <a:headEnd type="none" w="med" len="med"/>
-                      <a:tailEnd type="none" w="med" len="med"/>
-                    </a:lnL>
-                    <a:lnR w="12700" cap="flat" cmpd="sng" algn="ctr">
-                      <a:solidFill>
-                        <a:srgbClr val="0F3460"/>
-                      </a:solidFill>
-                      <a:prstDash val="solid"/>
-                      <a:round/>
-                      <a:headEnd type="none" w="med" len="med"/>
-                      <a:tailEnd type="none" w="med" len="med"/>
-                    </a:lnR>
-                    <a:lnT w="12700" cap="flat" cmpd="sng" algn="ctr">
-                      <a:solidFill>
-                        <a:srgbClr val="0F3460"/>
-                      </a:solidFill>
-                      <a:prstDash val="solid"/>
-                      <a:round/>
-                      <a:headEnd type="none" w="med" len="med"/>
-                      <a:tailEnd type="none" w="med" len="med"/>
-                    </a:lnT>
-                    <a:lnB w="12700" cap="flat" cmpd="sng" algn="ctr">
-                      <a:solidFill>
-                        <a:srgbClr val="0F3460"/>
-                      </a:solidFill>
-                      <a:prstDash val="solid"/>
-                      <a:round/>
-                      <a:headEnd type="none" w="med" len="med"/>
-                      <a:tailEnd type="none" w="med" len="med"/>
-                    </a:lnB>
-                    <a:solidFill>
-                      <a:srgbClr val="16213E"/>
-                    </a:solidFill>
-                  </a:tcPr>
-                </a:tc>
-                <a:tc>
-                  <a:txBody>
-                    <a:bodyPr/>
-                    <a:lstStyle/>
-                    <a:p>
-                      <a:pPr algn="ctr" indent="0" marL="0">
-                        <a:buNone/>
-                      </a:pPr>
-                      <a:r>
-                        <a:rPr lang="en-US" sz="1000" dirty="0">
-                          <a:solidFill>
-                            <a:srgbClr val="E8E8E8"/>
-                          </a:solidFill>
-                          <a:latin typeface="Calibri" pitchFamily="34" charset="0"/>
-                          <a:ea typeface="Calibri" pitchFamily="34" charset="-122"/>
-                          <a:cs typeface="Calibri" pitchFamily="34" charset="-120"/>
-                        </a:rPr>
-                        <a:t>19:30</a:t>
-                      </a:r>
-                      <a:endParaRPr lang="en-US" sz="1000" dirty="0">
-                        <a:latin typeface="Calibri" charset="0"/>
-                        <a:ea typeface="Calibri" charset="0"/>
-                        <a:cs typeface="Calibri" charset="0"/>
-                      </a:endParaRPr>
-                    </a:p>
-                  </a:txBody>
-                  <a:tcPr marL="91440" marR="91440" marT="45720" marB="45720">
-                    <a:lnL w="12700" cap="flat" cmpd="sng" algn="ctr">
-                      <a:solidFill>
-                        <a:srgbClr val="0F3460"/>
-                      </a:solidFill>
-                      <a:prstDash val="solid"/>
-                      <a:round/>
-                      <a:headEnd type="none" w="med" len="med"/>
-                      <a:tailEnd type="none" w="med" len="med"/>
-                    </a:lnL>
-                    <a:lnR w="12700" cap="flat" cmpd="sng" algn="ctr">
-                      <a:solidFill>
-                        <a:srgbClr val="0F3460"/>
-                      </a:solidFill>
-                      <a:prstDash val="solid"/>
-                      <a:round/>
-                      <a:headEnd type="none" w="med" len="med"/>
-                      <a:tailEnd type="none" w="med" len="med"/>
-                    </a:lnR>
-                    <a:lnT w="12700" cap="flat" cmpd="sng" algn="ctr">
-                      <a:solidFill>
-                        <a:srgbClr val="0F3460"/>
-                      </a:solidFill>
-                      <a:prstDash val="solid"/>
-                      <a:round/>
-                      <a:headEnd type="none" w="med" len="med"/>
-                      <a:tailEnd type="none" w="med" len="med"/>
-                    </a:lnT>
-                    <a:lnB w="12700" cap="flat" cmpd="sng" algn="ctr">
-                      <a:solidFill>
-                        <a:srgbClr val="0F3460"/>
-                      </a:solidFill>
-                      <a:prstDash val="solid"/>
-                      <a:round/>
-                      <a:headEnd type="none" w="med" len="med"/>
-                      <a:tailEnd type="none" w="med" len="med"/>
-                    </a:lnB>
-                    <a:solidFill>
-                      <a:srgbClr val="16213E"/>
-                    </a:solidFill>
-                  </a:tcPr>
-                </a:tc>
-                <a:tc>
-                  <a:txBody>
-                    <a:bodyPr/>
-                    <a:lstStyle/>
-                    <a:p>
-                      <a:pPr algn="ctr" indent="0" marL="0">
-                        <a:buNone/>
-                      </a:pPr>
-                      <a:r>
-                        <a:rPr lang="en-US" sz="1000" dirty="0">
-                          <a:solidFill>
-                            <a:srgbClr val="E8E8E8"/>
-                          </a:solidFill>
-                          <a:latin typeface="Calibri" pitchFamily="34" charset="0"/>
-                          <a:ea typeface="Calibri" pitchFamily="34" charset="-122"/>
-                          <a:cs typeface="Calibri" pitchFamily="34" charset="-120"/>
-                        </a:rPr>
-                        <a:t>1h 50m</a:t>
-                      </a:r>
-                      <a:endParaRPr lang="en-US" sz="1000" dirty="0">
-                        <a:latin typeface="Calibri" charset="0"/>
-                        <a:ea typeface="Calibri" charset="0"/>
-                        <a:cs typeface="Calibri" charset="0"/>
-                      </a:endParaRPr>
-                    </a:p>
-                  </a:txBody>
-                  <a:tcPr marL="91440" marR="91440" marT="45720" marB="45720">
-                    <a:lnL w="12700" cap="flat" cmpd="sng" algn="ctr">
-                      <a:solidFill>
-                        <a:srgbClr val="0F3460"/>
-                      </a:solidFill>
-                      <a:prstDash val="solid"/>
-                      <a:round/>
-                      <a:headEnd type="none" w="med" len="med"/>
-                      <a:tailEnd type="none" w="med" len="med"/>
-                    </a:lnL>
-                    <a:lnR w="12700" cap="flat" cmpd="sng" algn="ctr">
-                      <a:solidFill>
-                        <a:srgbClr val="0F3460"/>
-                      </a:solidFill>
-                      <a:prstDash val="solid"/>
-                      <a:round/>
-                      <a:headEnd type="none" w="med" len="med"/>
-                      <a:tailEnd type="none" w="med" len="med"/>
-                    </a:lnR>
-                    <a:lnT w="12700" cap="flat" cmpd="sng" algn="ctr">
-                      <a:solidFill>
-                        <a:srgbClr val="0F3460"/>
-                      </a:solidFill>
-                      <a:prstDash val="solid"/>
-                      <a:round/>
-                      <a:headEnd type="none" w="med" len="med"/>
-                      <a:tailEnd type="none" w="med" len="med"/>
-                    </a:lnT>
-                    <a:lnB w="12700" cap="flat" cmpd="sng" algn="ctr">
-                      <a:solidFill>
-                        <a:srgbClr val="0F3460"/>
-                      </a:solidFill>
-                      <a:prstDash val="solid"/>
-                      <a:round/>
-                      <a:headEnd type="none" w="med" len="med"/>
-                      <a:tailEnd type="none" w="med" len="med"/>
-                    </a:lnB>
-                    <a:solidFill>
-                      <a:srgbClr val="16213E"/>
-                    </a:solidFill>
-                  </a:tcPr>
-                </a:tc>
-                <a:tc>
-                  <a:txBody>
-                    <a:bodyPr/>
-                    <a:lstStyle/>
-                    <a:p>
-                      <a:pPr algn="ctr" indent="0" marL="0">
-                        <a:buNone/>
-                      </a:pPr>
-                      <a:r>
-                        <a:rPr lang="en-US" sz="1000" dirty="0">
-                          <a:solidFill>
-                            <a:srgbClr val="E8E8E8"/>
-                          </a:solidFill>
-                          <a:latin typeface="Calibri" pitchFamily="34" charset="0"/>
-                          <a:ea typeface="Calibri" pitchFamily="34" charset="-122"/>
-                          <a:cs typeface="Calibri" pitchFamily="34" charset="-120"/>
-                        </a:rPr>
-                        <a:t>~€80</a:t>
-                      </a:r>
-                      <a:endParaRPr lang="en-US" sz="1000" dirty="0">
-                        <a:latin typeface="Calibri" charset="0"/>
-                        <a:ea typeface="Calibri" charset="0"/>
-                        <a:cs typeface="Calibri" charset="0"/>
-                      </a:endParaRPr>
-                    </a:p>
-                  </a:txBody>
-                  <a:tcPr marL="91440" marR="91440" marT="45720" marB="45720">
-                    <a:lnL w="12700" cap="flat" cmpd="sng" algn="ctr">
-                      <a:solidFill>
-                        <a:srgbClr val="0F3460"/>
-                      </a:solidFill>
-                      <a:prstDash val="solid"/>
-                      <a:round/>
-                      <a:headEnd type="none" w="med" len="med"/>
-                      <a:tailEnd type="none" w="med" len="med"/>
-                    </a:lnL>
-                    <a:lnR w="12700" cap="flat" cmpd="sng" algn="ctr">
-                      <a:solidFill>
-                        <a:srgbClr val="0F3460"/>
-                      </a:solidFill>
-                      <a:prstDash val="solid"/>
-                      <a:round/>
-                      <a:headEnd type="none" w="med" len="med"/>
-                      <a:tailEnd type="none" w="med" len="med"/>
-                    </a:lnR>
-                    <a:lnT w="12700" cap="flat" cmpd="sng" algn="ctr">
-                      <a:solidFill>
-                        <a:srgbClr val="0F3460"/>
-                      </a:solidFill>
-                      <a:prstDash val="solid"/>
-                      <a:round/>
-                      <a:headEnd type="none" w="med" len="med"/>
-                      <a:tailEnd type="none" w="med" len="med"/>
-                    </a:lnT>
-                    <a:lnB w="12700" cap="flat" cmpd="sng" algn="ctr">
-                      <a:solidFill>
-                        <a:srgbClr val="0F3460"/>
-                      </a:solidFill>
-                      <a:prstDash val="solid"/>
-                      <a:round/>
-                      <a:headEnd type="none" w="med" len="med"/>
-                      <a:tailEnd type="none" w="med" len="med"/>
-                    </a:lnB>
-                    <a:solidFill>
-                      <a:srgbClr val="16213E"/>
-                    </a:solidFill>
-                  </a:tcPr>
-                </a:tc>
-                <a:tc>
-                  <a:txBody>
-                    <a:bodyPr/>
-                    <a:lstStyle/>
-                    <a:p>
-                      <a:pPr algn="ctr" indent="0" marL="0">
-                        <a:buNone/>
-                      </a:pPr>
-                      <a:r>
-                        <a:rPr lang="en-US" sz="1000" b="1" dirty="0">
-                          <a:solidFill>
-                            <a:srgbClr val="FFC107"/>
-                          </a:solidFill>
-                          <a:latin typeface="Calibri" pitchFamily="34" charset="0"/>
-                          <a:ea typeface="Calibri" pitchFamily="34" charset="-122"/>
-                          <a:cs typeface="Calibri" pitchFamily="34" charset="-120"/>
-                        </a:rPr>
-                        <a:t>~€320</a:t>
-                      </a:r>
-                      <a:endParaRPr lang="en-US" sz="1000" dirty="0">
-                        <a:latin typeface="Calibri" charset="0"/>
-                        <a:ea typeface="Calibri" charset="0"/>
-                        <a:cs typeface="Calibri" charset="0"/>
-                      </a:endParaRPr>
-                    </a:p>
-                  </a:txBody>
-                  <a:tcPr marL="91440" marR="91440" marT="45720" marB="45720">
-                    <a:lnL w="12700" cap="flat" cmpd="sng" algn="ctr">
-                      <a:solidFill>
-                        <a:srgbClr val="0F3460"/>
-                      </a:solidFill>
-                      <a:prstDash val="solid"/>
-                      <a:round/>
-                      <a:headEnd type="none" w="med" len="med"/>
-                      <a:tailEnd type="none" w="med" len="med"/>
-                    </a:lnL>
-                    <a:lnR w="12700" cap="flat" cmpd="sng" algn="ctr">
-                      <a:solidFill>
-                        <a:srgbClr val="0F3460"/>
-                      </a:solidFill>
-                      <a:prstDash val="solid"/>
-                      <a:round/>
-                      <a:headEnd type="none" w="med" len="med"/>
-                      <a:tailEnd type="none" w="med" len="med"/>
-                    </a:lnR>
-                    <a:lnT w="12700" cap="flat" cmpd="sng" algn="ctr">
-                      <a:solidFill>
-                        <a:srgbClr val="0F3460"/>
-                      </a:solidFill>
-                      <a:prstDash val="solid"/>
-                      <a:round/>
-                      <a:headEnd type="none" w="med" len="med"/>
-                      <a:tailEnd type="none" w="med" len="med"/>
-                    </a:lnT>
-                    <a:lnB w="12700" cap="flat" cmpd="sng" algn="ctr">
-                      <a:solidFill>
-                        <a:srgbClr val="0F3460"/>
-                      </a:solidFill>
-                      <a:prstDash val="solid"/>
-                      <a:round/>
-                      <a:headEnd type="none" w="med" len="med"/>
-                      <a:tailEnd type="none" w="med" len="med"/>
-                    </a:lnB>
-                    <a:solidFill>
-                      <a:srgbClr val="16213E"/>
-                    </a:solidFill>
-                  </a:tcPr>
-                </a:tc>
-              </a:tr>
-              <a:tr h="475488">
-                <a:tc>
-                  <a:txBody>
-                    <a:bodyPr/>
-                    <a:lstStyle/>
-                    <a:p>
-                      <a:pPr algn="ctr" indent="0" marL="0">
-                        <a:buNone/>
-                      </a:pPr>
-                      <a:r>
-                        <a:rPr lang="en-US" sz="1000" dirty="0">
-                          <a:solidFill>
-                            <a:srgbClr val="E8E8E8"/>
-                          </a:solidFill>
-                          <a:latin typeface="Calibri" pitchFamily="34" charset="0"/>
-                          <a:ea typeface="Calibri" pitchFamily="34" charset="-122"/>
-                          <a:cs typeface="Calibri" pitchFamily="34" charset="-120"/>
-                        </a:rPr>
-                        <a:t>Early DUS</a:t>
+                        <a:t>€100–130</a:t>
                       </a:r>
                       <a:endParaRPr lang="en-US" sz="1000" dirty="0">
                         <a:latin typeface="Calibri" charset="0"/>
@@ -25448,457 +25642,7 @@
                           <a:ea typeface="Calibri" pitchFamily="34" charset="-122"/>
                           <a:cs typeface="Calibri" pitchFamily="34" charset="-120"/>
                         </a:rPr>
-                        <a:t>EW9782</a:t>
-                      </a:r>
-                      <a:endParaRPr lang="en-US" sz="1000" dirty="0">
-                        <a:latin typeface="Calibri" charset="0"/>
-                        <a:ea typeface="Calibri" charset="0"/>
-                        <a:cs typeface="Calibri" charset="0"/>
-                      </a:endParaRPr>
-                    </a:p>
-                    <a:p>
-                      <a:pPr algn="ctr" indent="0" marL="0">
-                        <a:buNone/>
-                      </a:pPr>
-                      <a:r>
-                        <a:rPr lang="en-US" sz="1000" dirty="0">
-                          <a:solidFill>
-                            <a:srgbClr val="E8E8E8"/>
-                          </a:solidFill>
-                          <a:latin typeface="Calibri" pitchFamily="34" charset="0"/>
-                          <a:ea typeface="Calibri" pitchFamily="34" charset="-122"/>
-                          <a:cs typeface="Calibri" pitchFamily="34" charset="-120"/>
-                        </a:rPr>
-                        <a:t>Eurowings</a:t>
-                      </a:r>
-                      <a:endParaRPr lang="en-US" sz="1000" dirty="0">
-                        <a:latin typeface="Calibri" charset="0"/>
-                        <a:ea typeface="Calibri" charset="0"/>
-                        <a:cs typeface="Calibri" charset="0"/>
-                      </a:endParaRPr>
-                    </a:p>
-                  </a:txBody>
-                  <a:tcPr marL="91440" marR="91440" marT="45720" marB="45720">
-                    <a:lnL w="12700" cap="flat" cmpd="sng" algn="ctr">
-                      <a:solidFill>
-                        <a:srgbClr val="0F3460"/>
-                      </a:solidFill>
-                      <a:prstDash val="solid"/>
-                      <a:round/>
-                      <a:headEnd type="none" w="med" len="med"/>
-                      <a:tailEnd type="none" w="med" len="med"/>
-                    </a:lnL>
-                    <a:lnR w="12700" cap="flat" cmpd="sng" algn="ctr">
-                      <a:solidFill>
-                        <a:srgbClr val="0F3460"/>
-                      </a:solidFill>
-                      <a:prstDash val="solid"/>
-                      <a:round/>
-                      <a:headEnd type="none" w="med" len="med"/>
-                      <a:tailEnd type="none" w="med" len="med"/>
-                    </a:lnR>
-                    <a:lnT w="12700" cap="flat" cmpd="sng" algn="ctr">
-                      <a:solidFill>
-                        <a:srgbClr val="0F3460"/>
-                      </a:solidFill>
-                      <a:prstDash val="solid"/>
-                      <a:round/>
-                      <a:headEnd type="none" w="med" len="med"/>
-                      <a:tailEnd type="none" w="med" len="med"/>
-                    </a:lnT>
-                    <a:lnB w="12700" cap="flat" cmpd="sng" algn="ctr">
-                      <a:solidFill>
-                        <a:srgbClr val="0F3460"/>
-                      </a:solidFill>
-                      <a:prstDash val="solid"/>
-                      <a:round/>
-                      <a:headEnd type="none" w="med" len="med"/>
-                      <a:tailEnd type="none" w="med" len="med"/>
-                    </a:lnB>
-                    <a:solidFill>
-                      <a:srgbClr val="1A1A2E"/>
-                    </a:solidFill>
-                  </a:tcPr>
-                </a:tc>
-                <a:tc>
-                  <a:txBody>
-                    <a:bodyPr/>
-                    <a:lstStyle/>
-                    <a:p>
-                      <a:pPr algn="ctr" indent="0" marL="0">
-                        <a:buNone/>
-                      </a:pPr>
-                      <a:r>
-                        <a:rPr lang="en-US" sz="1000" dirty="0">
-                          <a:solidFill>
-                            <a:srgbClr val="E8E8E8"/>
-                          </a:solidFill>
-                          <a:latin typeface="Calibri" pitchFamily="34" charset="0"/>
-                          <a:ea typeface="Calibri" pitchFamily="34" charset="-122"/>
-                          <a:cs typeface="Calibri" pitchFamily="34" charset="-120"/>
-                        </a:rPr>
-                        <a:t>DUS → BUD</a:t>
-                      </a:r>
-                      <a:endParaRPr lang="en-US" sz="1000" dirty="0">
-                        <a:latin typeface="Calibri" charset="0"/>
-                        <a:ea typeface="Calibri" charset="0"/>
-                        <a:cs typeface="Calibri" charset="0"/>
-                      </a:endParaRPr>
-                    </a:p>
-                    <a:p>
-                      <a:pPr algn="ctr" indent="0" marL="0">
-                        <a:buNone/>
-                      </a:pPr>
-                      <a:r>
-                        <a:rPr lang="en-US" sz="1000" dirty="0">
-                          <a:solidFill>
-                            <a:srgbClr val="E8E8E8"/>
-                          </a:solidFill>
-                          <a:latin typeface="Calibri" pitchFamily="34" charset="0"/>
-                          <a:ea typeface="Calibri" pitchFamily="34" charset="-122"/>
-                          <a:cs typeface="Calibri" pitchFamily="34" charset="-120"/>
-                        </a:rPr>
-                        <a:t>Oct 30 early</a:t>
-                      </a:r>
-                      <a:endParaRPr lang="en-US" sz="1000" dirty="0">
-                        <a:latin typeface="Calibri" charset="0"/>
-                        <a:ea typeface="Calibri" charset="0"/>
-                        <a:cs typeface="Calibri" charset="0"/>
-                      </a:endParaRPr>
-                    </a:p>
-                  </a:txBody>
-                  <a:tcPr marL="91440" marR="91440" marT="45720" marB="45720">
-                    <a:lnL w="12700" cap="flat" cmpd="sng" algn="ctr">
-                      <a:solidFill>
-                        <a:srgbClr val="0F3460"/>
-                      </a:solidFill>
-                      <a:prstDash val="solid"/>
-                      <a:round/>
-                      <a:headEnd type="none" w="med" len="med"/>
-                      <a:tailEnd type="none" w="med" len="med"/>
-                    </a:lnL>
-                    <a:lnR w="12700" cap="flat" cmpd="sng" algn="ctr">
-                      <a:solidFill>
-                        <a:srgbClr val="0F3460"/>
-                      </a:solidFill>
-                      <a:prstDash val="solid"/>
-                      <a:round/>
-                      <a:headEnd type="none" w="med" len="med"/>
-                      <a:tailEnd type="none" w="med" len="med"/>
-                    </a:lnR>
-                    <a:lnT w="12700" cap="flat" cmpd="sng" algn="ctr">
-                      <a:solidFill>
-                        <a:srgbClr val="0F3460"/>
-                      </a:solidFill>
-                      <a:prstDash val="solid"/>
-                      <a:round/>
-                      <a:headEnd type="none" w="med" len="med"/>
-                      <a:tailEnd type="none" w="med" len="med"/>
-                    </a:lnT>
-                    <a:lnB w="12700" cap="flat" cmpd="sng" algn="ctr">
-                      <a:solidFill>
-                        <a:srgbClr val="0F3460"/>
-                      </a:solidFill>
-                      <a:prstDash val="solid"/>
-                      <a:round/>
-                      <a:headEnd type="none" w="med" len="med"/>
-                      <a:tailEnd type="none" w="med" len="med"/>
-                    </a:lnB>
-                    <a:solidFill>
-                      <a:srgbClr val="1A1A2E"/>
-                    </a:solidFill>
-                  </a:tcPr>
-                </a:tc>
-                <a:tc>
-                  <a:txBody>
-                    <a:bodyPr/>
-                    <a:lstStyle/>
-                    <a:p>
-                      <a:pPr algn="ctr" indent="0" marL="0">
-                        <a:buNone/>
-                      </a:pPr>
-                      <a:r>
-                        <a:rPr lang="en-US" sz="1000" dirty="0">
-                          <a:solidFill>
-                            <a:srgbClr val="E8E8E8"/>
-                          </a:solidFill>
-                          <a:latin typeface="Calibri" pitchFamily="34" charset="0"/>
-                          <a:ea typeface="Calibri" pitchFamily="34" charset="-122"/>
-                          <a:cs typeface="Calibri" pitchFamily="34" charset="-120"/>
-                        </a:rPr>
-                        <a:t>06:35</a:t>
-                      </a:r>
-                      <a:endParaRPr lang="en-US" sz="1000" dirty="0">
-                        <a:latin typeface="Calibri" charset="0"/>
-                        <a:ea typeface="Calibri" charset="0"/>
-                        <a:cs typeface="Calibri" charset="0"/>
-                      </a:endParaRPr>
-                    </a:p>
-                  </a:txBody>
-                  <a:tcPr marL="91440" marR="91440" marT="45720" marB="45720">
-                    <a:lnL w="12700" cap="flat" cmpd="sng" algn="ctr">
-                      <a:solidFill>
-                        <a:srgbClr val="0F3460"/>
-                      </a:solidFill>
-                      <a:prstDash val="solid"/>
-                      <a:round/>
-                      <a:headEnd type="none" w="med" len="med"/>
-                      <a:tailEnd type="none" w="med" len="med"/>
-                    </a:lnL>
-                    <a:lnR w="12700" cap="flat" cmpd="sng" algn="ctr">
-                      <a:solidFill>
-                        <a:srgbClr val="0F3460"/>
-                      </a:solidFill>
-                      <a:prstDash val="solid"/>
-                      <a:round/>
-                      <a:headEnd type="none" w="med" len="med"/>
-                      <a:tailEnd type="none" w="med" len="med"/>
-                    </a:lnR>
-                    <a:lnT w="12700" cap="flat" cmpd="sng" algn="ctr">
-                      <a:solidFill>
-                        <a:srgbClr val="0F3460"/>
-                      </a:solidFill>
-                      <a:prstDash val="solid"/>
-                      <a:round/>
-                      <a:headEnd type="none" w="med" len="med"/>
-                      <a:tailEnd type="none" w="med" len="med"/>
-                    </a:lnT>
-                    <a:lnB w="12700" cap="flat" cmpd="sng" algn="ctr">
-                      <a:solidFill>
-                        <a:srgbClr val="0F3460"/>
-                      </a:solidFill>
-                      <a:prstDash val="solid"/>
-                      <a:round/>
-                      <a:headEnd type="none" w="med" len="med"/>
-                      <a:tailEnd type="none" w="med" len="med"/>
-                    </a:lnB>
-                    <a:solidFill>
-                      <a:srgbClr val="1A1A2E"/>
-                    </a:solidFill>
-                  </a:tcPr>
-                </a:tc>
-                <a:tc>
-                  <a:txBody>
-                    <a:bodyPr/>
-                    <a:lstStyle/>
-                    <a:p>
-                      <a:pPr algn="ctr" indent="0" marL="0">
-                        <a:buNone/>
-                      </a:pPr>
-                      <a:r>
-                        <a:rPr lang="en-US" sz="1000" dirty="0">
-                          <a:solidFill>
-                            <a:srgbClr val="E8E8E8"/>
-                          </a:solidFill>
-                          <a:latin typeface="Calibri" pitchFamily="34" charset="0"/>
-                          <a:ea typeface="Calibri" pitchFamily="34" charset="-122"/>
-                          <a:cs typeface="Calibri" pitchFamily="34" charset="-120"/>
-                        </a:rPr>
-                        <a:t>08:20</a:t>
-                      </a:r>
-                      <a:endParaRPr lang="en-US" sz="1000" dirty="0">
-                        <a:latin typeface="Calibri" charset="0"/>
-                        <a:ea typeface="Calibri" charset="0"/>
-                        <a:cs typeface="Calibri" charset="0"/>
-                      </a:endParaRPr>
-                    </a:p>
-                  </a:txBody>
-                  <a:tcPr marL="91440" marR="91440" marT="45720" marB="45720">
-                    <a:lnL w="12700" cap="flat" cmpd="sng" algn="ctr">
-                      <a:solidFill>
-                        <a:srgbClr val="0F3460"/>
-                      </a:solidFill>
-                      <a:prstDash val="solid"/>
-                      <a:round/>
-                      <a:headEnd type="none" w="med" len="med"/>
-                      <a:tailEnd type="none" w="med" len="med"/>
-                    </a:lnL>
-                    <a:lnR w="12700" cap="flat" cmpd="sng" algn="ctr">
-                      <a:solidFill>
-                        <a:srgbClr val="0F3460"/>
-                      </a:solidFill>
-                      <a:prstDash val="solid"/>
-                      <a:round/>
-                      <a:headEnd type="none" w="med" len="med"/>
-                      <a:tailEnd type="none" w="med" len="med"/>
-                    </a:lnR>
-                    <a:lnT w="12700" cap="flat" cmpd="sng" algn="ctr">
-                      <a:solidFill>
-                        <a:srgbClr val="0F3460"/>
-                      </a:solidFill>
-                      <a:prstDash val="solid"/>
-                      <a:round/>
-                      <a:headEnd type="none" w="med" len="med"/>
-                      <a:tailEnd type="none" w="med" len="med"/>
-                    </a:lnT>
-                    <a:lnB w="12700" cap="flat" cmpd="sng" algn="ctr">
-                      <a:solidFill>
-                        <a:srgbClr val="0F3460"/>
-                      </a:solidFill>
-                      <a:prstDash val="solid"/>
-                      <a:round/>
-                      <a:headEnd type="none" w="med" len="med"/>
-                      <a:tailEnd type="none" w="med" len="med"/>
-                    </a:lnB>
-                    <a:solidFill>
-                      <a:srgbClr val="1A1A2E"/>
-                    </a:solidFill>
-                  </a:tcPr>
-                </a:tc>
-                <a:tc>
-                  <a:txBody>
-                    <a:bodyPr/>
-                    <a:lstStyle/>
-                    <a:p>
-                      <a:pPr algn="ctr" indent="0" marL="0">
-                        <a:buNone/>
-                      </a:pPr>
-                      <a:r>
-                        <a:rPr lang="en-US" sz="1000" dirty="0">
-                          <a:solidFill>
-                            <a:srgbClr val="E8E8E8"/>
-                          </a:solidFill>
-                          <a:latin typeface="Calibri" pitchFamily="34" charset="0"/>
-                          <a:ea typeface="Calibri" pitchFamily="34" charset="-122"/>
-                          <a:cs typeface="Calibri" pitchFamily="34" charset="-120"/>
-                        </a:rPr>
-                        <a:t>1h 45m</a:t>
-                      </a:r>
-                      <a:endParaRPr lang="en-US" sz="1000" dirty="0">
-                        <a:latin typeface="Calibri" charset="0"/>
-                        <a:ea typeface="Calibri" charset="0"/>
-                        <a:cs typeface="Calibri" charset="0"/>
-                      </a:endParaRPr>
-                    </a:p>
-                  </a:txBody>
-                  <a:tcPr marL="91440" marR="91440" marT="45720" marB="45720">
-                    <a:lnL w="12700" cap="flat" cmpd="sng" algn="ctr">
-                      <a:solidFill>
-                        <a:srgbClr val="0F3460"/>
-                      </a:solidFill>
-                      <a:prstDash val="solid"/>
-                      <a:round/>
-                      <a:headEnd type="none" w="med" len="med"/>
-                      <a:tailEnd type="none" w="med" len="med"/>
-                    </a:lnL>
-                    <a:lnR w="12700" cap="flat" cmpd="sng" algn="ctr">
-                      <a:solidFill>
-                        <a:srgbClr val="0F3460"/>
-                      </a:solidFill>
-                      <a:prstDash val="solid"/>
-                      <a:round/>
-                      <a:headEnd type="none" w="med" len="med"/>
-                      <a:tailEnd type="none" w="med" len="med"/>
-                    </a:lnR>
-                    <a:lnT w="12700" cap="flat" cmpd="sng" algn="ctr">
-                      <a:solidFill>
-                        <a:srgbClr val="0F3460"/>
-                      </a:solidFill>
-                      <a:prstDash val="solid"/>
-                      <a:round/>
-                      <a:headEnd type="none" w="med" len="med"/>
-                      <a:tailEnd type="none" w="med" len="med"/>
-                    </a:lnT>
-                    <a:lnB w="12700" cap="flat" cmpd="sng" algn="ctr">
-                      <a:solidFill>
-                        <a:srgbClr val="0F3460"/>
-                      </a:solidFill>
-                      <a:prstDash val="solid"/>
-                      <a:round/>
-                      <a:headEnd type="none" w="med" len="med"/>
-                      <a:tailEnd type="none" w="med" len="med"/>
-                    </a:lnB>
-                    <a:solidFill>
-                      <a:srgbClr val="1A1A2E"/>
-                    </a:solidFill>
-                  </a:tcPr>
-                </a:tc>
-                <a:tc>
-                  <a:txBody>
-                    <a:bodyPr/>
-                    <a:lstStyle/>
-                    <a:p>
-                      <a:pPr algn="ctr" indent="0" marL="0">
-                        <a:buNone/>
-                      </a:pPr>
-                      <a:r>
-                        <a:rPr lang="en-US" sz="1000" dirty="0">
-                          <a:solidFill>
-                            <a:srgbClr val="E8E8E8"/>
-                          </a:solidFill>
-                          <a:latin typeface="Calibri" pitchFamily="34" charset="0"/>
-                          <a:ea typeface="Calibri" pitchFamily="34" charset="-122"/>
-                          <a:cs typeface="Calibri" pitchFamily="34" charset="-120"/>
-                        </a:rPr>
-                        <a:t>~€60</a:t>
-                      </a:r>
-                      <a:endParaRPr lang="en-US" sz="1000" dirty="0">
-                        <a:latin typeface="Calibri" charset="0"/>
-                        <a:ea typeface="Calibri" charset="0"/>
-                        <a:cs typeface="Calibri" charset="0"/>
-                      </a:endParaRPr>
-                    </a:p>
-                  </a:txBody>
-                  <a:tcPr marL="91440" marR="91440" marT="45720" marB="45720">
-                    <a:lnL w="12700" cap="flat" cmpd="sng" algn="ctr">
-                      <a:solidFill>
-                        <a:srgbClr val="0F3460"/>
-                      </a:solidFill>
-                      <a:prstDash val="solid"/>
-                      <a:round/>
-                      <a:headEnd type="none" w="med" len="med"/>
-                      <a:tailEnd type="none" w="med" len="med"/>
-                    </a:lnL>
-                    <a:lnR w="12700" cap="flat" cmpd="sng" algn="ctr">
-                      <a:solidFill>
-                        <a:srgbClr val="0F3460"/>
-                      </a:solidFill>
-                      <a:prstDash val="solid"/>
-                      <a:round/>
-                      <a:headEnd type="none" w="med" len="med"/>
-                      <a:tailEnd type="none" w="med" len="med"/>
-                    </a:lnR>
-                    <a:lnT w="12700" cap="flat" cmpd="sng" algn="ctr">
-                      <a:solidFill>
-                        <a:srgbClr val="0F3460"/>
-                      </a:solidFill>
-                      <a:prstDash val="solid"/>
-                      <a:round/>
-                      <a:headEnd type="none" w="med" len="med"/>
-                      <a:tailEnd type="none" w="med" len="med"/>
-                    </a:lnT>
-                    <a:lnB w="12700" cap="flat" cmpd="sng" algn="ctr">
-                      <a:solidFill>
-                        <a:srgbClr val="0F3460"/>
-                      </a:solidFill>
-                      <a:prstDash val="solid"/>
-                      <a:round/>
-                      <a:headEnd type="none" w="med" len="med"/>
-                      <a:tailEnd type="none" w="med" len="med"/>
-                    </a:lnB>
-                    <a:solidFill>
-                      <a:srgbClr val="1A1A2E"/>
-                    </a:solidFill>
-                  </a:tcPr>
-                </a:tc>
-                <a:tc>
-                  <a:txBody>
-                    <a:bodyPr/>
-                    <a:lstStyle/>
-                    <a:p>
-                      <a:pPr algn="ctr" indent="0" marL="0">
-                        <a:buNone/>
-                      </a:pPr>
-                      <a:r>
-                        <a:rPr lang="en-US" sz="1000" b="1" dirty="0">
-                          <a:solidFill>
-                            <a:srgbClr val="22C55E"/>
-                          </a:solidFill>
-                          <a:latin typeface="Calibri" pitchFamily="34" charset="0"/>
-                          <a:ea typeface="Calibri" pitchFamily="34" charset="-122"/>
-                          <a:cs typeface="Calibri" pitchFamily="34" charset="-120"/>
-                        </a:rPr>
-                        <a:t>~€240</a:t>
+                        <a:t>€400–520</a:t>
                       </a:r>
                       <a:endParaRPr lang="en-US" sz="1000" dirty="0">
                         <a:latin typeface="Calibri" charset="0"/>
@@ -25981,13 +25725,13 @@
             <a:r>
               <a:rPr lang="en-US" sz="1300" b="1" dirty="0">
                 <a:solidFill>
-                  <a:srgbClr val="FFC107"/>
+                  <a:srgbClr val="E6321E"/>
                 </a:solidFill>
                 <a:latin typeface="Trebuchet MS" pitchFamily="34" charset="0"/>
                 <a:ea typeface="Trebuchet MS" pitchFamily="34" charset="-122"/>
                 <a:cs typeface="Trebuchet MS" pitchFamily="34" charset="-120"/>
               </a:rPr>
-              <a:t>RETURN: Budapest → Germany (Nov 2)</a:t>
+              <a:t>RETURN: Madrid → Germany (Nov 2)</a:t>
             </a:r>
             <a:endParaRPr lang="en-US" sz="1300" dirty="0"/>
           </a:p>
@@ -26036,7 +25780,7 @@
                       <a:r>
                         <a:rPr lang="en-US" sz="1100" b="1" dirty="0">
                           <a:solidFill>
-                            <a:srgbClr val="FFC107"/>
+                            <a:srgbClr val="E6321E"/>
                           </a:solidFill>
                           <a:latin typeface="Trebuchet MS" pitchFamily="34" charset="0"/>
                           <a:ea typeface="Trebuchet MS" pitchFamily="34" charset="-122"/>
@@ -26104,7 +25848,7 @@
                       <a:r>
                         <a:rPr lang="en-US" sz="1100" b="1" dirty="0">
                           <a:solidFill>
-                            <a:srgbClr val="FFC107"/>
+                            <a:srgbClr val="E6321E"/>
                           </a:solidFill>
                           <a:latin typeface="Trebuchet MS" pitchFamily="34" charset="0"/>
                           <a:ea typeface="Trebuchet MS" pitchFamily="34" charset="-122"/>
@@ -26172,7 +25916,7 @@
                       <a:r>
                         <a:rPr lang="en-US" sz="1100" b="1" dirty="0">
                           <a:solidFill>
-                            <a:srgbClr val="FFC107"/>
+                            <a:srgbClr val="E6321E"/>
                           </a:solidFill>
                           <a:latin typeface="Trebuchet MS" pitchFamily="34" charset="0"/>
                           <a:ea typeface="Trebuchet MS" pitchFamily="34" charset="-122"/>
@@ -26240,7 +25984,7 @@
                       <a:r>
                         <a:rPr lang="en-US" sz="1100" b="1" dirty="0">
                           <a:solidFill>
-                            <a:srgbClr val="FFC107"/>
+                            <a:srgbClr val="E6321E"/>
                           </a:solidFill>
                           <a:latin typeface="Trebuchet MS" pitchFamily="34" charset="0"/>
                           <a:ea typeface="Trebuchet MS" pitchFamily="34" charset="-122"/>
@@ -26308,7 +26052,7 @@
                       <a:r>
                         <a:rPr lang="en-US" sz="1100" b="1" dirty="0">
                           <a:solidFill>
-                            <a:srgbClr val="FFC107"/>
+                            <a:srgbClr val="E6321E"/>
                           </a:solidFill>
                           <a:latin typeface="Trebuchet MS" pitchFamily="34" charset="0"/>
                           <a:ea typeface="Trebuchet MS" pitchFamily="34" charset="-122"/>
@@ -26376,7 +26120,7 @@
                       <a:r>
                         <a:rPr lang="en-US" sz="1100" b="1" dirty="0">
                           <a:solidFill>
-                            <a:srgbClr val="FFC107"/>
+                            <a:srgbClr val="E6321E"/>
                           </a:solidFill>
                           <a:latin typeface="Trebuchet MS" pitchFamily="34" charset="0"/>
                           <a:ea typeface="Trebuchet MS" pitchFamily="34" charset="-122"/>
@@ -26520,7 +26264,7 @@
                           <a:ea typeface="Calibri" pitchFamily="34" charset="-122"/>
                           <a:cs typeface="Calibri" pitchFamily="34" charset="-120"/>
                         </a:rPr>
-                        <a:t>W62291  Wizz Air  (BUD→DTM)</a:t>
+                        <a:t>Iberia / Eurowings  (MAD→DUS)</a:t>
                       </a:r>
                       <a:endParaRPr lang="en-US" sz="1000" dirty="0">
                         <a:latin typeface="Calibri" charset="0"/>
@@ -26588,7 +26332,7 @@
                           <a:ea typeface="Calibri" pitchFamily="34" charset="-122"/>
                           <a:cs typeface="Calibri" pitchFamily="34" charset="-120"/>
                         </a:rPr>
-                        <a:t>BUD → DTM  /  Nov 2</a:t>
+                        <a:t>MAD → DUS  /  Nov 2</a:t>
                       </a:r>
                       <a:endParaRPr lang="en-US" sz="1000" dirty="0">
                         <a:latin typeface="Calibri" charset="0"/>
@@ -26656,7 +26400,7 @@
                           <a:ea typeface="Calibri" pitchFamily="34" charset="-122"/>
                           <a:cs typeface="Calibri" pitchFamily="34" charset="-120"/>
                         </a:rPr>
-                        <a:t>10:40</a:t>
+                        <a:t>Various</a:t>
                       </a:r>
                       <a:endParaRPr lang="en-US" sz="1000" dirty="0">
                         <a:latin typeface="Calibri" charset="0"/>
@@ -26724,7 +26468,7 @@
                           <a:ea typeface="Calibri" pitchFamily="34" charset="-122"/>
                           <a:cs typeface="Calibri" pitchFamily="34" charset="-120"/>
                         </a:rPr>
-                        <a:t>12:35</a:t>
+                        <a:t>Various</a:t>
                       </a:r>
                       <a:endParaRPr lang="en-US" sz="1000" dirty="0">
                         <a:latin typeface="Calibri" charset="0"/>
@@ -26792,7 +26536,7 @@
                           <a:ea typeface="Calibri" pitchFamily="34" charset="-122"/>
                           <a:cs typeface="Calibri" pitchFamily="34" charset="-120"/>
                         </a:rPr>
-                        <a:t>1h 55m</a:t>
+                        <a:t>2h 40m</a:t>
                       </a:r>
                       <a:endParaRPr lang="en-US" sz="1000" dirty="0">
                         <a:latin typeface="Calibri" charset="0"/>
@@ -26860,7 +26604,7 @@
                           <a:ea typeface="Calibri" pitchFamily="34" charset="-122"/>
                           <a:cs typeface="Calibri" pitchFamily="34" charset="-120"/>
                         </a:rPr>
-                        <a:t>~€60</a:t>
+                        <a:t>~€70–90</a:t>
                       </a:r>
                       <a:endParaRPr lang="en-US" sz="1000" dirty="0">
                         <a:latin typeface="Calibri" charset="0"/>
@@ -26928,7 +26672,7 @@
                           <a:ea typeface="Calibri" pitchFamily="34" charset="-122"/>
                           <a:cs typeface="Calibri" pitchFamily="34" charset="-120"/>
                         </a:rPr>
-                        <a:t>~€240</a:t>
+                        <a:t>~€280–360</a:t>
                       </a:r>
                       <a:endParaRPr lang="en-US" sz="1000" dirty="0">
                         <a:latin typeface="Calibri" charset="0"/>
@@ -27042,7 +26786,7 @@
                 <a:ea typeface="Calibri" pitchFamily="34" charset="-122"/>
                 <a:cs typeface="Calibri" pitchFamily="34" charset="-120"/>
               </a:rPr>
-              <a:t>✅  ADVANTAGE: Both DTM (Dortmund) AND DUS (Düsseldorf) have direct Budapest service — far more flexibility than Lisbon.  Wizz Air from DTM is cheapest.  Eurowings from DUS offers more schedule options.  Book at wizzair.com or eurowings.com  ·  Compare on skyscanner.net</a:t>
+              <a:t>ℹ  DUS (Düsseldorf) is the recommended airport — direct flights with Iberia (3×/day), Eurowings &amp; Vueling.  DTM (Dortmund) has no direct Madrid service.  FMO requires connections.  Book at iberia.com · eurowings.com · kayak.com  ·  Airport to city centre: Metro Line 8 (€5) or taxi (~€35 fixed)</a:t>
             </a:r>
             <a:endParaRPr lang="en-US" sz="1000" dirty="0"/>
           </a:p>
@@ -27067,7 +26811,7 @@
           </a:solidFill>
           <a:ln w="12700">
             <a:solidFill>
-              <a:srgbClr val="FFC107"/>
+              <a:srgbClr val="E6321E"/>
             </a:solidFill>
             <a:prstDash val="solid"/>
           </a:ln>
@@ -27139,13 +26883,13 @@
             <a:r>
               <a:rPr lang="en-US" sz="2000" b="1" dirty="0">
                 <a:solidFill>
-                  <a:srgbClr val="FFC107"/>
+                  <a:srgbClr val="E6321E"/>
                 </a:solidFill>
                 <a:latin typeface="Trebuchet MS" pitchFamily="34" charset="0"/>
                 <a:ea typeface="Trebuchet MS" pitchFamily="34" charset="-122"/>
                 <a:cs typeface="Trebuchet MS" pitchFamily="34" charset="-120"/>
               </a:rPr>
-              <a:t>€500 – €560 total</a:t>
+              <a:t>€580 – €740 total</a:t>
             </a:r>
             <a:endParaRPr lang="en-US" sz="2000" dirty="0"/>
           </a:p>
@@ -27223,11 +26967,11 @@
             <a:avLst/>
           </a:prstGeom>
           <a:solidFill>
-            <a:srgbClr val="FFC107"/>
+            <a:srgbClr val="E6321E"/>
           </a:solidFill>
           <a:ln w="12700">
             <a:solidFill>
-              <a:srgbClr val="FFC107"/>
+              <a:srgbClr val="E6321E"/>
             </a:solidFill>
             <a:prstDash val="solid"/>
           </a:ln>
@@ -27291,7 +27035,7 @@
                 <a:ea typeface="Trebuchet MS" pitchFamily="34" charset="-122"/>
                 <a:cs typeface="Trebuchet MS" pitchFamily="34" charset="-120"/>
               </a:rPr>
-              <a:t>🇭🇺  BUDAPEST — ACCOMMODATION</a:t>
+              <a:t>🇪🇸  MADRID — ACCOMMODATION</a:t>
             </a:r>
             <a:endParaRPr lang="en-US" sz="2200" dirty="0"/>
           </a:p>
@@ -27312,11 +27056,11 @@
             <a:avLst/>
           </a:prstGeom>
           <a:solidFill>
-            <a:srgbClr val="FFC107"/>
+            <a:srgbClr val="E6321E"/>
           </a:solidFill>
           <a:ln w="12700">
             <a:solidFill>
-              <a:srgbClr val="FFC107"/>
+              <a:srgbClr val="E6321E"/>
             </a:solidFill>
             <a:prstDash val="solid"/>
           </a:ln>
@@ -27324,7 +27068,7 @@
       </p:sp>
       <p:pic>
         <p:nvPicPr>
-          <p:cNvPr id="6" name="Image 0" descr="/home/user/Excelhaus/halloween_trip/budapest_airbnb.png">    </p:cNvPr>
+          <p:cNvPr id="6" name="Image 0" descr="/home/user/Excelhaus/halloween_trip/madrid_airbnb.png">    </p:cNvPr>
           <p:cNvPicPr>
             <a:picLocks noChangeAspect="1"/>
           </p:cNvPicPr>
@@ -27348,7 +27092,7 @@
       </p:pic>
       <p:pic>
         <p:nvPicPr>
-          <p:cNvPr id="7" name="Image 1" descr="/home/user/Excelhaus/halloween_trip/budapest_map.png">    </p:cNvPr>
+          <p:cNvPr id="7" name="Image 1" descr="/home/user/Excelhaus/halloween_trip/madrid_map.png">    </p:cNvPr>
           <p:cNvPicPr>
             <a:picLocks noChangeAspect="1"/>
           </p:cNvPicPr>
@@ -27389,7 +27133,7 @@
           </a:solidFill>
           <a:ln w="12700">
             <a:solidFill>
-              <a:srgbClr val="FFC107"/>
+              <a:srgbClr val="E6321E"/>
             </a:solidFill>
             <a:prstDash val="solid"/>
           </a:ln>
@@ -27428,7 +27172,7 @@
                 <a:ea typeface="Trebuchet MS" pitchFamily="34" charset="-122"/>
                 <a:cs typeface="Trebuchet MS" pitchFamily="34" charset="-120"/>
               </a:rPr>
-              <a:t>District VII — 2 Bedroom · Balcony · Opera 10 min walk</a:t>
+              <a:t>Sonder Malasaña — 2 Bedroom · Balcony · Nightlife on the Doorstep</a:t>
             </a:r>
             <a:endParaRPr lang="en-US" sz="1400" dirty="0"/>
           </a:p>
@@ -27453,7 +27197,7 @@
           </a:solidFill>
           <a:ln w="12700">
             <a:solidFill>
-              <a:srgbClr val="FFC107"/>
+              <a:srgbClr val="E6321E"/>
             </a:solidFill>
             <a:prstDash val="solid"/>
           </a:ln>
@@ -27486,7 +27230,7 @@
             <a:r>
               <a:rPr lang="en-US" sz="1100" b="1" dirty="0">
                 <a:solidFill>
-                  <a:srgbClr val="FFC107"/>
+                  <a:srgbClr val="E6321E"/>
                 </a:solidFill>
                 <a:latin typeface="Calibri" pitchFamily="34" charset="0"/>
                 <a:ea typeface="Calibri" pitchFamily="34" charset="-122"/>
@@ -27517,7 +27261,7 @@
           </a:solidFill>
           <a:ln w="12700">
             <a:solidFill>
-              <a:srgbClr val="FFC107"/>
+              <a:srgbClr val="E6321E"/>
             </a:solidFill>
             <a:prstDash val="solid"/>
           </a:ln>
@@ -27550,13 +27294,13 @@
             <a:r>
               <a:rPr lang="en-US" sz="1100" b="1" dirty="0">
                 <a:solidFill>
-                  <a:srgbClr val="FFC107"/>
+                  <a:srgbClr val="E6321E"/>
                 </a:solidFill>
                 <a:latin typeface="Calibri" pitchFamily="34" charset="0"/>
                 <a:ea typeface="Calibri" pitchFamily="34" charset="-122"/>
                 <a:cs typeface="Calibri" pitchFamily="34" charset="-120"/>
               </a:rPr>
-              <a:t>🚿  1 Bathroom</a:t>
+              <a:t>🚿  2 Bathrooms</a:t>
             </a:r>
             <a:endParaRPr lang="en-US" sz="1100" dirty="0"/>
           </a:p>
@@ -27645,7 +27389,7 @@
           </a:solidFill>
           <a:ln w="12700">
             <a:solidFill>
-              <a:srgbClr val="FFC107"/>
+              <a:srgbClr val="E6321E"/>
             </a:solidFill>
             <a:prstDash val="solid"/>
           </a:ln>
@@ -27678,7 +27422,7 @@
             <a:r>
               <a:rPr lang="en-US" sz="1100" b="1" dirty="0">
                 <a:solidFill>
-                  <a:srgbClr val="FFC107"/>
+                  <a:srgbClr val="E6321E"/>
                 </a:solidFill>
                 <a:latin typeface="Calibri" pitchFamily="34" charset="0"/>
                 <a:ea typeface="Calibri" pitchFamily="34" charset="-122"/>
@@ -27709,7 +27453,7 @@
           </a:solidFill>
           <a:ln w="12700">
             <a:solidFill>
-              <a:srgbClr val="FFC107"/>
+              <a:srgbClr val="E6321E"/>
             </a:solidFill>
             <a:prstDash val="solid"/>
           </a:ln>
@@ -27742,7 +27486,7 @@
             <a:r>
               <a:rPr lang="en-US" sz="1100" b="1" dirty="0">
                 <a:solidFill>
-                  <a:srgbClr val="FFC107"/>
+                  <a:srgbClr val="E6321E"/>
                 </a:solidFill>
                 <a:latin typeface="Calibri" pitchFamily="34" charset="0"/>
                 <a:ea typeface="Calibri" pitchFamily="34" charset="-122"/>
@@ -27812,7 +27556,7 @@
                 <a:ea typeface="Calibri" pitchFamily="34" charset="-122"/>
                 <a:cs typeface="Calibri" pitchFamily="34" charset="-120"/>
               </a:rPr>
-              <a:t>🎭  Ruin Bars 5min</a:t>
+              <a:t>🎸  Malasaña bars</a:t>
             </a:r>
             <a:endParaRPr lang="en-US" sz="1100" dirty="0"/>
           </a:p>
@@ -27876,7 +27620,7 @@
                 <a:ea typeface="Calibri" pitchFamily="34" charset="-122"/>
                 <a:cs typeface="Calibri" pitchFamily="34" charset="-120"/>
               </a:rPr>
-              <a:t>📌  District VII (Erzsébetváros) — steps from Szimpla Kert, Instant-Fogas, Mazel Tov</a:t>
+              <a:t>📌  Malasaña — 1 min to Calle de la Palma bars, 5 min to Gran Vía, 10 min to Puerta del Sol</a:t>
             </a:r>
             <a:endParaRPr lang="en-US" sz="1050" dirty="0"/>
           </a:p>
@@ -27901,7 +27645,7 @@
           </a:solidFill>
           <a:ln w="12700">
             <a:solidFill>
-              <a:srgbClr val="FFC107"/>
+              <a:srgbClr val="E6321E"/>
             </a:solidFill>
             <a:prstDash val="solid"/>
           </a:ln>
@@ -27934,7 +27678,7 @@
             <a:r>
               <a:rPr lang="en-US" sz="1100" b="1" dirty="0">
                 <a:solidFill>
-                  <a:srgbClr val="FFC107"/>
+                  <a:srgbClr val="E6321E"/>
                 </a:solidFill>
                 <a:latin typeface="Trebuchet MS" pitchFamily="34" charset="0"/>
                 <a:ea typeface="Trebuchet MS" pitchFamily="34" charset="-122"/>
@@ -27979,7 +27723,7 @@
                 <a:ea typeface="Calibri" pitchFamily="34" charset="-122"/>
                 <a:cs typeface="Calibri" pitchFamily="34" charset="-120"/>
               </a:rPr>
-              <a:t>Per night</a:t>
+              <a:t>Per night (Sonder managed)</a:t>
             </a:r>
             <a:endParaRPr lang="en-US" sz="1000" dirty="0"/>
           </a:p>
@@ -28018,7 +27762,7 @@
                 <a:ea typeface="Trebuchet MS" pitchFamily="34" charset="-122"/>
                 <a:cs typeface="Trebuchet MS" pitchFamily="34" charset="-120"/>
               </a:rPr>
-              <a:t>~€100</a:t>
+              <a:t>~€150</a:t>
             </a:r>
             <a:endParaRPr lang="en-US" sz="1000" dirty="0"/>
           </a:p>
@@ -28096,7 +27840,7 @@
                 <a:ea typeface="Trebuchet MS" pitchFamily="34" charset="-122"/>
                 <a:cs typeface="Trebuchet MS" pitchFamily="34" charset="-120"/>
               </a:rPr>
-              <a:t>~€300</a:t>
+              <a:t>~€450</a:t>
             </a:r>
             <a:endParaRPr lang="en-US" sz="1000" dirty="0"/>
           </a:p>
@@ -28174,7 +27918,7 @@
                 <a:ea typeface="Trebuchet MS" pitchFamily="34" charset="-122"/>
                 <a:cs typeface="Trebuchet MS" pitchFamily="34" charset="-120"/>
               </a:rPr>
-              <a:t>~€50–70</a:t>
+              <a:t>~€60–80</a:t>
             </a:r>
             <a:endParaRPr lang="en-US" sz="1000" dirty="0"/>
           </a:p>
@@ -28246,13 +27990,13 @@
             <a:r>
               <a:rPr lang="en-US" sz="1000" b="1" dirty="0">
                 <a:solidFill>
-                  <a:srgbClr val="FFC107"/>
+                  <a:srgbClr val="E6321E"/>
                 </a:solidFill>
                 <a:latin typeface="Trebuchet MS" pitchFamily="34" charset="0"/>
                 <a:ea typeface="Trebuchet MS" pitchFamily="34" charset="-122"/>
                 <a:cs typeface="Trebuchet MS" pitchFamily="34" charset="-120"/>
               </a:rPr>
-              <a:t>~€350–370</a:t>
+              <a:t>~€510–530</a:t>
             </a:r>
             <a:endParaRPr lang="en-US" sz="1000" dirty="0"/>
           </a:p>
@@ -28330,7 +28074,7 @@
                 <a:ea typeface="Trebuchet MS" pitchFamily="34" charset="-122"/>
                 <a:cs typeface="Trebuchet MS" pitchFamily="34" charset="-120"/>
               </a:rPr>
-              <a:t>~€88–93</a:t>
+              <a:t>~€128–133</a:t>
             </a:r>
             <a:endParaRPr lang="en-US" sz="1000" dirty="0"/>
           </a:p>
@@ -28388,13 +28132,13 @@
             <a:r>
               <a:rPr lang="en-US" sz="950" i="1" dirty="0">
                 <a:solidFill>
-                  <a:srgbClr val="FFC107"/>
+                  <a:srgbClr val="E6321E"/>
                 </a:solidFill>
                 <a:latin typeface="Calibri" pitchFamily="34" charset="0"/>
                 <a:ea typeface="Calibri" pitchFamily="34" charset="-122"/>
                 <a:cs typeface="Calibri" pitchFamily="34" charset="-120"/>
               </a:rPr>
-              <a:t>airbnb.com/rooms/34669674  (District VII — Andrássy Avenue area, balcony)</a:t>
+              <a:t>airbnb.com/rooms/47308216  (Sonder Malasaña — professional managed, 24/7 support)</a:t>
             </a:r>
             <a:endParaRPr lang="en-US" sz="950" dirty="0"/>
           </a:p>
@@ -28433,7 +28177,7 @@
                 <a:ea typeface="Calibri" pitchFamily="34" charset="-122"/>
                 <a:cs typeface="Calibri" pitchFamily="34" charset="-120"/>
               </a:rPr>
-              <a:t>Alternative: "Cozy 2-BR Budapest Broadway AC/Balcony" → airbnb.com/rooms/40916878</a:t>
+              <a:t>Budget alt: 2BR central Madrid ~€80–110/night → ~€310 total → ~€78pp total</a:t>
             </a:r>
             <a:endParaRPr lang="en-US" sz="950" dirty="0"/>
           </a:p>
@@ -28472,7 +28216,7 @@
                 <a:ea typeface="Calibri" pitchFamily="34" charset="-122"/>
                 <a:cs typeface="Calibri" pitchFamily="34" charset="-120"/>
               </a:rPr>
-              <a:t>🔑  Book immediately — Halloween weekend in Budapest sells out months ahead!</a:t>
+              <a:t>🔑  Book immediately — Halloween weekend Madrid fills up completely!</a:t>
             </a:r>
             <a:endParaRPr lang="en-US" sz="950" dirty="0"/>
           </a:p>

--- a/halloween_trip_2025.pptx
+++ b/halloween_trip_2025.pptx
@@ -18122,17 +18122,17 @@
         <p:spPr>
           <a:xfrm>
             <a:off x="5303520" y="4599432"/>
-            <a:ext cx="6675120" cy="475488"/>
+            <a:ext cx="6675120" cy="603504"/>
           </a:xfrm>
           <a:prstGeom prst="rect">
             <a:avLst/>
           </a:prstGeom>
           <a:solidFill>
-            <a:srgbClr val="0F3460"/>
+            <a:srgbClr val="FF8C00"/>
           </a:solidFill>
           <a:ln w="12700">
             <a:solidFill>
-              <a:srgbClr val="0F3460"/>
+              <a:srgbClr val="FF8C00"/>
             </a:solidFill>
             <a:prstDash val="solid"/>
           </a:ln>
@@ -18140,14 +18140,64 @@
       </p:sp>
       <p:sp>
         <p:nvSpPr>
-          <p:cNvPr id="37" name="Text 33"/>
-          <p:cNvSpPr/>
-          <p:nvPr/>
-        </p:nvSpPr>
-        <p:spPr>
-          <a:xfrm>
-            <a:off x="5440680" y="4599432"/>
-            <a:ext cx="6400800" cy="475488"/>
+          <p:cNvPr id="37" name="Text 33">
+            <a:hlinkClick r:id="rId3" tooltip="Airbnb öffnen — 30. Okt.–2. Nov., 4 Gäste, 2 SZ"/>
+          </p:cNvPr>
+          <p:cNvSpPr/>
+          <p:nvPr/>
+        </p:nvSpPr>
+        <p:spPr>
+          <a:xfrm>
+            <a:off x="5303520" y="4599432"/>
+            <a:ext cx="6675120" cy="603504"/>
+          </a:xfrm>
+          <a:prstGeom prst="rect">
+            <a:avLst/>
+          </a:prstGeom>
+          <a:noFill/>
+          <a:ln/>
+        </p:spPr>
+        <p:txBody>
+          <a:bodyPr wrap="square" rtlCol="0" anchor="ctr"/>
+          <a:lstStyle/>
+          <a:p>
+            <a:pPr algn="ctr" indent="0" marL="0">
+              <a:buNone/>
+            </a:pPr>
+            <a:r>
+              <a:rPr lang="en-US" sz="1500" b="1" u="sng" dirty="0">
+                <a:solidFill>
+                  <a:srgbClr val="FFFFFF"/>
+                </a:solidFill>
+                <a:latin typeface="Trebuchet MS" pitchFamily="34" charset="0"/>
+                <a:ea typeface="Trebuchet MS" pitchFamily="34" charset="-122"/>
+                <a:cs typeface="Trebuchet MS" pitchFamily="34" charset="-120"/>
+                <a:hlinkClick r:id="rId3" invalidUrl="" action="" tgtFrame="" tooltip="Airbnb öffnen — 30. Okt.–2. Nov., 4 Gäste, 2 SZ" history="1" highlightClick="0" endSnd="0">
+                  <a:extLst>
+                    <a:ext uri="{A12FA001-AC4F-418D-AE19-62706E023703}">
+                      <ahyp:hlinkClr xmlns:ahyp="http://schemas.microsoft.com/office/drawing/2018/hyperlinkcolor" val="tx"/>
+                    </a:ext>
+                  </a:extLst>
+                </a:hlinkClick>
+              </a:rPr>
+              <a:t>🔍  Airbnb: Lissabon durchsuchen  →</a:t>
+            </a:r>
+            <a:endParaRPr lang="en-US" sz="1500" dirty="0"/>
+          </a:p>
+        </p:txBody>
+      </p:sp>
+      <p:sp>
+        <p:nvSpPr>
+          <p:cNvPr id="38" name="Text 34">
+            <a:hlinkClick r:id="rId4" tooltip="Alternative Suche öffnen"/>
+          </p:cNvPr>
+          <p:cNvSpPr/>
+          <p:nvPr/>
+        </p:nvSpPr>
+        <p:spPr>
+          <a:xfrm>
+            <a:off x="5394960" y="5276088"/>
+            <a:ext cx="6492240" cy="256032"/>
           </a:xfrm>
           <a:prstGeom prst="rect">
             <a:avLst/>
@@ -18163,56 +18213,24 @@
               <a:buNone/>
             </a:pPr>
             <a:r>
-              <a:rPr lang="en-US" sz="950" i="1" dirty="0">
-                <a:solidFill>
-                  <a:srgbClr val="FF8C00"/>
-                </a:solidFill>
-                <a:latin typeface="Calibri" pitchFamily="34" charset="0"/>
-                <a:ea typeface="Calibri" pitchFamily="34" charset="-122"/>
-                <a:cs typeface="Calibri" pitchFamily="34" charset="-120"/>
-              </a:rPr>
-              <a:t>airbnb.com/rooms/26081783  (Bairro Alto / São Roque — Verfügbarkeit prüfen)</a:t>
-            </a:r>
-            <a:endParaRPr lang="en-US" sz="950" dirty="0"/>
-          </a:p>
-        </p:txBody>
-      </p:sp>
-      <p:sp>
-        <p:nvSpPr>
-          <p:cNvPr id="38" name="Text 34"/>
-          <p:cNvSpPr/>
-          <p:nvPr/>
-        </p:nvSpPr>
-        <p:spPr>
-          <a:xfrm>
-            <a:off x="5394960" y="5166360"/>
-            <a:ext cx="6492240" cy="292608"/>
-          </a:xfrm>
-          <a:prstGeom prst="rect">
-            <a:avLst/>
-          </a:prstGeom>
-          <a:noFill/>
-          <a:ln/>
-        </p:spPr>
-        <p:txBody>
-          <a:bodyPr wrap="square" rtlCol="0" anchor="ctr"/>
-          <a:lstStyle/>
-          <a:p>
-            <a:pPr indent="0" marL="0">
-              <a:buNone/>
-            </a:pPr>
-            <a:r>
-              <a:rPr lang="en-US" sz="950" i="1" dirty="0">
+              <a:rPr lang="en-US" sz="900" i="1" u="sng" dirty="0">
                 <a:solidFill>
                   <a:srgbClr val="6B7280"/>
                 </a:solidFill>
                 <a:latin typeface="Calibri" pitchFamily="34" charset="0"/>
                 <a:ea typeface="Calibri" pitchFamily="34" charset="-122"/>
                 <a:cs typeface="Calibri" pitchFamily="34" charset="-120"/>
+                <a:hlinkClick r:id="rId4" invalidUrl="" action="" tgtFrame="" tooltip="Alternative Suche öffnen" history="1" highlightClick="0" endSnd="0">
+                  <a:extLst>
+                    <a:ext uri="{A12FA001-AC4F-418D-AE19-62706E023703}">
+                      <ahyp:hlinkClr xmlns:ahyp="http://schemas.microsoft.com/office/drawing/2018/hyperlinkcolor" val="tx"/>
+                    </a:ext>
+                  </a:extLst>
+                </a:hlinkClick>
               </a:rPr>
-              <a:t>Alternative: "Garrett 48" in Chiado — Terrasse, 2 SZ, ~€100–130/Nacht → airbnb.com/rooms/1016061</a:t>
+              <a:t>📍 Alternativ in Chiado suchen: airbnb.com/s/Chiado--Lisbon (2 SZ, 4 Gäste, gleiche Daten)</a:t>
             </a:r>
-            <a:endParaRPr lang="en-US" sz="950" dirty="0"/>
+            <a:endParaRPr lang="en-US" sz="900" dirty="0"/>
           </a:p>
         </p:txBody>
       </p:sp>
@@ -18224,8 +18242,8 @@
         </p:nvSpPr>
         <p:spPr>
           <a:xfrm>
-            <a:off x="5394960" y="5532120"/>
-            <a:ext cx="6492240" cy="292608"/>
+            <a:off x="5394960" y="5577840"/>
+            <a:ext cx="6492240" cy="274320"/>
           </a:xfrm>
           <a:prstGeom prst="rect">
             <a:avLst/>
@@ -18249,7 +18267,7 @@
                 <a:ea typeface="Calibri" pitchFamily="34" charset="-122"/>
                 <a:cs typeface="Calibri" pitchFamily="34" charset="-120"/>
               </a:rPr>
-              <a:t>🔑  Jetzt buchen — Halloween-Wochenende ist schnell ausgebucht!</a:t>
+              <a:t>⚠️  Halloween-Wochenende ist schnell ausgebucht — jetzt klicken &amp; buchen!</a:t>
             </a:r>
             <a:endParaRPr lang="en-US" sz="950" dirty="0"/>
           </a:p>
@@ -29013,17 +29031,17 @@
         <p:spPr>
           <a:xfrm>
             <a:off x="5303520" y="4599432"/>
-            <a:ext cx="6675120" cy="475488"/>
+            <a:ext cx="6675120" cy="603504"/>
           </a:xfrm>
           <a:prstGeom prst="rect">
             <a:avLst/>
           </a:prstGeom>
           <a:solidFill>
-            <a:srgbClr val="0F3460"/>
+            <a:srgbClr val="1EB4C8"/>
           </a:solidFill>
           <a:ln w="12700">
             <a:solidFill>
-              <a:srgbClr val="0F3460"/>
+              <a:srgbClr val="1EB4C8"/>
             </a:solidFill>
             <a:prstDash val="solid"/>
           </a:ln>
@@ -29031,14 +29049,64 @@
       </p:sp>
       <p:sp>
         <p:nvSpPr>
-          <p:cNvPr id="37" name="Text 33"/>
-          <p:cNvSpPr/>
-          <p:nvPr/>
-        </p:nvSpPr>
-        <p:spPr>
-          <a:xfrm>
-            <a:off x="5440680" y="4599432"/>
-            <a:ext cx="6400800" cy="475488"/>
+          <p:cNvPr id="37" name="Text 33">
+            <a:hlinkClick r:id="rId3" tooltip="Airbnb öffnen — 30. Okt.–2. Nov., 4 Gäste, 2 SZ"/>
+          </p:cNvPr>
+          <p:cNvSpPr/>
+          <p:nvPr/>
+        </p:nvSpPr>
+        <p:spPr>
+          <a:xfrm>
+            <a:off x="5303520" y="4599432"/>
+            <a:ext cx="6675120" cy="603504"/>
+          </a:xfrm>
+          <a:prstGeom prst="rect">
+            <a:avLst/>
+          </a:prstGeom>
+          <a:noFill/>
+          <a:ln/>
+        </p:spPr>
+        <p:txBody>
+          <a:bodyPr wrap="square" rtlCol="0" anchor="ctr"/>
+          <a:lstStyle/>
+          <a:p>
+            <a:pPr algn="ctr" indent="0" marL="0">
+              <a:buNone/>
+            </a:pPr>
+            <a:r>
+              <a:rPr lang="en-US" sz="1500" b="1" u="sng" dirty="0">
+                <a:solidFill>
+                  <a:srgbClr val="FFFFFF"/>
+                </a:solidFill>
+                <a:latin typeface="Trebuchet MS" pitchFamily="34" charset="0"/>
+                <a:ea typeface="Trebuchet MS" pitchFamily="34" charset="-122"/>
+                <a:cs typeface="Trebuchet MS" pitchFamily="34" charset="-120"/>
+                <a:hlinkClick r:id="rId3" invalidUrl="" action="" tgtFrame="" tooltip="Airbnb öffnen — 30. Okt.–2. Nov., 4 Gäste, 2 SZ" history="1" highlightClick="0" endSnd="0">
+                  <a:extLst>
+                    <a:ext uri="{A12FA001-AC4F-418D-AE19-62706E023703}">
+                      <ahyp:hlinkClr xmlns:ahyp="http://schemas.microsoft.com/office/drawing/2018/hyperlinkcolor" val="tx"/>
+                    </a:ext>
+                  </a:extLst>
+                </a:hlinkClick>
+              </a:rPr>
+              <a:t>🔍  Airbnb: Malta durchsuchen  →</a:t>
+            </a:r>
+            <a:endParaRPr lang="en-US" sz="1500" dirty="0"/>
+          </a:p>
+        </p:txBody>
+      </p:sp>
+      <p:sp>
+        <p:nvSpPr>
+          <p:cNvPr id="38" name="Text 34">
+            <a:hlinkClick r:id="rId4" tooltip="Alternative Suche öffnen"/>
+          </p:cNvPr>
+          <p:cNvSpPr/>
+          <p:nvPr/>
+        </p:nvSpPr>
+        <p:spPr>
+          <a:xfrm>
+            <a:off x="5394960" y="5276088"/>
+            <a:ext cx="6492240" cy="256032"/>
           </a:xfrm>
           <a:prstGeom prst="rect">
             <a:avLst/>
@@ -29054,56 +29122,24 @@
               <a:buNone/>
             </a:pPr>
             <a:r>
-              <a:rPr lang="en-US" sz="950" i="1" dirty="0">
-                <a:solidFill>
-                  <a:srgbClr val="1EB4C8"/>
-                </a:solidFill>
-                <a:latin typeface="Calibri" pitchFamily="34" charset="0"/>
-                <a:ea typeface="Calibri" pitchFamily="34" charset="-122"/>
-                <a:cs typeface="Calibri" pitchFamily="34" charset="-120"/>
-              </a:rPr>
-              <a:t>airbnb.com → Suche: St. Julian's Malta, 4 Gäste, 2 SZ, Terrasse, 30. Okt.–2. Nov.</a:t>
-            </a:r>
-            <a:endParaRPr lang="en-US" sz="950" dirty="0"/>
-          </a:p>
-        </p:txBody>
-      </p:sp>
-      <p:sp>
-        <p:nvSpPr>
-          <p:cNvPr id="38" name="Text 34"/>
-          <p:cNvSpPr/>
-          <p:nvPr/>
-        </p:nvSpPr>
-        <p:spPr>
-          <a:xfrm>
-            <a:off x="5394960" y="5166360"/>
-            <a:ext cx="6492240" cy="292608"/>
-          </a:xfrm>
-          <a:prstGeom prst="rect">
-            <a:avLst/>
-          </a:prstGeom>
-          <a:noFill/>
-          <a:ln/>
-        </p:spPr>
-        <p:txBody>
-          <a:bodyPr wrap="square" rtlCol="0" anchor="ctr"/>
-          <a:lstStyle/>
-          <a:p>
-            <a:pPr indent="0" marL="0">
-              <a:buNone/>
-            </a:pPr>
-            <a:r>
-              <a:rPr lang="en-US" sz="950" i="1" dirty="0">
+              <a:rPr lang="en-US" sz="900" i="1" u="sng" dirty="0">
                 <a:solidFill>
                   <a:srgbClr val="6B7280"/>
                 </a:solidFill>
                 <a:latin typeface="Calibri" pitchFamily="34" charset="0"/>
                 <a:ea typeface="Calibri" pitchFamily="34" charset="-122"/>
                 <a:cs typeface="Calibri" pitchFamily="34" charset="-120"/>
+                <a:hlinkClick r:id="rId4" invalidUrl="" action="" tgtFrame="" tooltip="Alternative Suche öffnen" history="1" highlightClick="0" endSnd="0">
+                  <a:extLst>
+                    <a:ext uri="{A12FA001-AC4F-418D-AE19-62706E023703}">
+                      <ahyp:hlinkClr xmlns:ahyp="http://schemas.microsoft.com/office/drawing/2018/hyperlinkcolor" val="tx"/>
+                    </a:ext>
+                  </a:extLst>
+                </a:hlinkClick>
               </a:rPr>
-              <a:t>Alternative: Sliema (ruhiger, Wasserfront) oder Valletta (historisch, UNESCO) ebenfalls empfohlen</a:t>
+              <a:t>📍 Alternativ in Sliema suchen: airbnb.com/s/Sliema--Malta (ruhiger, Wasserfront, gleiche Daten)</a:t>
             </a:r>
-            <a:endParaRPr lang="en-US" sz="950" dirty="0"/>
+            <a:endParaRPr lang="en-US" sz="900" dirty="0"/>
           </a:p>
         </p:txBody>
       </p:sp>
@@ -29115,8 +29151,8 @@
         </p:nvSpPr>
         <p:spPr>
           <a:xfrm>
-            <a:off x="5394960" y="5532120"/>
-            <a:ext cx="6492240" cy="292608"/>
+            <a:off x="5394960" y="5577840"/>
+            <a:ext cx="6492240" cy="274320"/>
           </a:xfrm>
           <a:prstGeom prst="rect">
             <a:avLst/>
@@ -29140,7 +29176,7 @@
                 <a:ea typeface="Calibri" pitchFamily="34" charset="-122"/>
                 <a:cs typeface="Calibri" pitchFamily="34" charset="-120"/>
               </a:rPr>
-              <a:t>🔑  Jetzt buchen — Halloween-Wochenende ist schnell ausgebucht!</a:t>
+              <a:t>⚠️  Halloween-Wochenende ist schnell ausgebucht — jetzt klicken &amp; buchen!</a:t>
             </a:r>
             <a:endParaRPr lang="en-US" sz="950" dirty="0"/>
           </a:p>

--- a/halloween_trip_2025.pptx
+++ b/halloween_trip_2025.pptx
@@ -4611,7 +4611,7 @@
                           <a:ea typeface="Calibri" pitchFamily="34" charset="-122"/>
                           <a:cs typeface="Calibri" pitchFamily="34" charset="-120"/>
                         </a:rPr>
-                        <a:t>Eurowings/Ryanair  DUS ↔ MLA</a:t>
+                        <a:t>Ryanair  FMO/DTM ↔ MLA  (+ Anfahrt ~€15)</a:t>
                       </a:r>
                       <a:endParaRPr lang="en-US" sz="1100" dirty="0">
                         <a:latin typeface="Calibri" charset="0"/>
@@ -4679,7 +4679,7 @@
                           <a:ea typeface="Calibri" pitchFamily="34" charset="-122"/>
                           <a:cs typeface="Calibri" pitchFamily="34" charset="-120"/>
                         </a:rPr>
-                        <a:t>~€185</a:t>
+                        <a:t>~€140</a:t>
                       </a:r>
                       <a:endParaRPr lang="en-US" sz="1100" dirty="0">
                         <a:latin typeface="Calibri" charset="0"/>
@@ -4747,7 +4747,7 @@
                           <a:ea typeface="Calibri" pitchFamily="34" charset="-122"/>
                           <a:cs typeface="Calibri" pitchFamily="34" charset="-120"/>
                         </a:rPr>
-                        <a:t>~€740</a:t>
+                        <a:t>~€560</a:t>
                       </a:r>
                       <a:endParaRPr lang="en-US" sz="1100" dirty="0">
                         <a:latin typeface="Calibri" charset="0"/>
@@ -7145,7 +7145,7 @@
                           <a:ea typeface="Trebuchet MS" pitchFamily="34" charset="-122"/>
                           <a:cs typeface="Trebuchet MS" pitchFamily="34" charset="-120"/>
                         </a:rPr>
-                        <a:t>~€631</a:t>
+                        <a:t>~€586</a:t>
                       </a:r>
                       <a:endParaRPr lang="en-US" sz="1300" dirty="0">
                         <a:latin typeface="Trebuchet MS" charset="0"/>
@@ -7213,7 +7213,7 @@
                           <a:ea typeface="Trebuchet MS" pitchFamily="34" charset="-122"/>
                           <a:cs typeface="Trebuchet MS" pitchFamily="34" charset="-120"/>
                         </a:rPr>
-                        <a:t>~€2.523</a:t>
+                        <a:t>~€2.344</a:t>
                       </a:r>
                       <a:endParaRPr lang="en-US" sz="1300" dirty="0">
                         <a:latin typeface="Trebuchet MS" charset="0"/>
@@ -7818,7 +7818,7 @@
                 <a:ea typeface="Calibri" pitchFamily="34" charset="-122"/>
                 <a:cs typeface="Calibri" pitchFamily="34" charset="-120"/>
               </a:rPr>
-              <a:t>~€631</a:t>
+              <a:t>~€586</a:t>
             </a:r>
             <a:endParaRPr lang="en-US" sz="1000" dirty="0"/>
           </a:p>
@@ -8010,7 +8010,7 @@
                 <a:ea typeface="Calibri" pitchFamily="34" charset="-122"/>
                 <a:cs typeface="Calibri" pitchFamily="34" charset="-120"/>
               </a:rPr>
-              <a:t>~3h 00m  ab DUS</a:t>
+              <a:t>~3h 00m  ab FMO/DTM</a:t>
             </a:r>
             <a:endParaRPr lang="en-US" sz="1000" dirty="0"/>
           </a:p>
@@ -8202,7 +8202,7 @@
                 <a:ea typeface="Calibri" pitchFamily="34" charset="-122"/>
                 <a:cs typeface="Calibri" pitchFamily="34" charset="-120"/>
               </a:rPr>
-              <a:t>DUS — Eurowings / Ryanair</a:t>
+              <a:t>FMO oder DTM — Ryanair direkt</a:t>
             </a:r>
             <a:endParaRPr lang="en-US" sz="1000" dirty="0"/>
           </a:p>
@@ -23757,7 +23757,7 @@
                 <a:ea typeface="Trebuchet MS" pitchFamily="34" charset="-122"/>
                 <a:cs typeface="Trebuchet MS" pitchFamily="34" charset="-120"/>
               </a:rPr>
-              <a:t>~€580</a:t>
+              <a:t>~€631</a:t>
             </a:r>
             <a:endParaRPr lang="en-US" sz="1600" dirty="0"/>
           </a:p>
@@ -23997,7 +23997,7 @@
                 <a:ea typeface="Trebuchet MS" pitchFamily="34" charset="-122"/>
                 <a:cs typeface="Trebuchet MS" pitchFamily="34" charset="-120"/>
               </a:rPr>
-              <a:t>DUS</a:t>
+              <a:t>FMO / DTM</a:t>
             </a:r>
             <a:endParaRPr lang="en-US" sz="1600" dirty="0"/>
           </a:p>
@@ -24014,7 +24014,7 @@
                 <a:ea typeface="Trebuchet MS" pitchFamily="34" charset="-122"/>
                 <a:cs typeface="Trebuchet MS" pitchFamily="34" charset="-120"/>
               </a:rPr>
-              <a:t>(Eurowings/Ryanair)</a:t>
+              <a:t>(Ryanair direkt)</a:t>
             </a:r>
             <a:endParaRPr lang="en-US" sz="1600" dirty="0"/>
           </a:p>
@@ -24958,7 +24958,7 @@
                           <a:ea typeface="Calibri" pitchFamily="34" charset="-122"/>
                           <a:cs typeface="Calibri" pitchFamily="34" charset="-120"/>
                         </a:rPr>
-                        <a:t>EW</a:t>
+                        <a:t>FR</a:t>
                       </a:r>
                       <a:endParaRPr lang="en-US" sz="1000" dirty="0">
                         <a:latin typeface="Calibri" charset="0"/>
@@ -24979,7 +24979,7 @@
                           <a:ea typeface="Calibri" pitchFamily="34" charset="-122"/>
                           <a:cs typeface="Calibri" pitchFamily="34" charset="-120"/>
                         </a:rPr>
-                        <a:t>Eurowings</a:t>
+                        <a:t>Ryanair</a:t>
                       </a:r>
                       <a:endParaRPr lang="en-US" sz="1000" dirty="0">
                         <a:latin typeface="Calibri" charset="0"/>
@@ -25047,7 +25047,7 @@
                           <a:ea typeface="Calibri" pitchFamily="34" charset="-122"/>
                           <a:cs typeface="Calibri" pitchFamily="34" charset="-120"/>
                         </a:rPr>
-                        <a:t>DUS → MLA</a:t>
+                        <a:t>FMO → MLA</a:t>
                       </a:r>
                       <a:endParaRPr lang="en-US" sz="1000" dirty="0">
                         <a:latin typeface="Calibri" charset="0"/>
@@ -25068,7 +25068,7 @@
                           <a:ea typeface="Calibri" pitchFamily="34" charset="-122"/>
                           <a:cs typeface="Calibri" pitchFamily="34" charset="-120"/>
                         </a:rPr>
-                        <a:t>30. Okt. früh</a:t>
+                        <a:t>30. Okt.</a:t>
                       </a:r>
                       <a:endParaRPr lang="en-US" sz="1000" dirty="0">
                         <a:latin typeface="Calibri" charset="0"/>
@@ -25136,7 +25136,7 @@
                           <a:ea typeface="Calibri" pitchFamily="34" charset="-122"/>
                           <a:cs typeface="Calibri" pitchFamily="34" charset="-120"/>
                         </a:rPr>
-                        <a:t>~07:xx</a:t>
+                        <a:t>Morgens</a:t>
                       </a:r>
                       <a:endParaRPr lang="en-US" sz="1000" dirty="0">
                         <a:latin typeface="Calibri" charset="0"/>
@@ -25204,7 +25204,7 @@
                           <a:ea typeface="Calibri" pitchFamily="34" charset="-122"/>
                           <a:cs typeface="Calibri" pitchFamily="34" charset="-120"/>
                         </a:rPr>
-                        <a:t>~10:00</a:t>
+                        <a:t>~10:30</a:t>
                       </a:r>
                       <a:endParaRPr lang="en-US" sz="1000" dirty="0">
                         <a:latin typeface="Calibri" charset="0"/>
@@ -25272,7 +25272,7 @@
                           <a:ea typeface="Calibri" pitchFamily="34" charset="-122"/>
                           <a:cs typeface="Calibri" pitchFamily="34" charset="-120"/>
                         </a:rPr>
-                        <a:t>2h 55m</a:t>
+                        <a:t>~3h 00m</a:t>
                       </a:r>
                       <a:endParaRPr lang="en-US" sz="1000" dirty="0">
                         <a:latin typeface="Calibri" charset="0"/>
@@ -25340,7 +25340,7 @@
                           <a:ea typeface="Calibri" pitchFamily="34" charset="-122"/>
                           <a:cs typeface="Calibri" pitchFamily="34" charset="-120"/>
                         </a:rPr>
-                        <a:t>~€90</a:t>
+                        <a:t>~€60–90</a:t>
                       </a:r>
                       <a:endParaRPr lang="en-US" sz="1000" dirty="0">
                         <a:latin typeface="Calibri" charset="0"/>
@@ -25408,7 +25408,7 @@
                           <a:ea typeface="Calibri" pitchFamily="34" charset="-122"/>
                           <a:cs typeface="Calibri" pitchFamily="34" charset="-120"/>
                         </a:rPr>
-                        <a:t>~€360</a:t>
+                        <a:t>~€240–360</a:t>
                       </a:r>
                       <a:endParaRPr lang="en-US" sz="1000" dirty="0">
                         <a:latin typeface="Calibri" charset="0"/>
@@ -25478,7 +25478,7 @@
                           <a:ea typeface="Calibri" pitchFamily="34" charset="-122"/>
                           <a:cs typeface="Calibri" pitchFamily="34" charset="-120"/>
                         </a:rPr>
-                        <a:t>Vorabend 29.10.</a:t>
+                        <a:t>Option 2</a:t>
                       </a:r>
                       <a:endParaRPr lang="en-US" sz="1000" dirty="0">
                         <a:latin typeface="Calibri" charset="0"/>
@@ -25546,7 +25546,7 @@
                           <a:ea typeface="Calibri" pitchFamily="34" charset="-122"/>
                           <a:cs typeface="Calibri" pitchFamily="34" charset="-120"/>
                         </a:rPr>
-                        <a:t>Eurowings</a:t>
+                        <a:t>FR</a:t>
                       </a:r>
                       <a:endParaRPr lang="en-US" sz="1000" dirty="0">
                         <a:latin typeface="Calibri" charset="0"/>
@@ -25567,7 +25567,7 @@
                           <a:ea typeface="Calibri" pitchFamily="34" charset="-122"/>
                           <a:cs typeface="Calibri" pitchFamily="34" charset="-120"/>
                         </a:rPr>
-                        <a:t>/ Ryanair</a:t>
+                        <a:t>Ryanair</a:t>
                       </a:r>
                       <a:endParaRPr lang="en-US" sz="1000" dirty="0">
                         <a:latin typeface="Calibri" charset="0"/>
@@ -25635,7 +25635,7 @@
                           <a:ea typeface="Calibri" pitchFamily="34" charset="-122"/>
                           <a:cs typeface="Calibri" pitchFamily="34" charset="-120"/>
                         </a:rPr>
-                        <a:t>DUS → MLA</a:t>
+                        <a:t>DTM → MLA</a:t>
                       </a:r>
                       <a:endParaRPr lang="en-US" sz="1000" dirty="0">
                         <a:latin typeface="Calibri" charset="0"/>
@@ -25656,7 +25656,7 @@
                           <a:ea typeface="Calibri" pitchFamily="34" charset="-122"/>
                           <a:cs typeface="Calibri" pitchFamily="34" charset="-120"/>
                         </a:rPr>
-                        <a:t>29. Okt. abends</a:t>
+                        <a:t>30. Okt.</a:t>
                       </a:r>
                       <a:endParaRPr lang="en-US" sz="1000" dirty="0">
                         <a:latin typeface="Calibri" charset="0"/>
@@ -25724,7 +25724,7 @@
                           <a:ea typeface="Calibri" pitchFamily="34" charset="-122"/>
                           <a:cs typeface="Calibri" pitchFamily="34" charset="-120"/>
                         </a:rPr>
-                        <a:t>Abends</a:t>
+                        <a:t>Morgens</a:t>
                       </a:r>
                       <a:endParaRPr lang="en-US" sz="1000" dirty="0">
                         <a:latin typeface="Calibri" charset="0"/>
@@ -25792,7 +25792,7 @@
                           <a:ea typeface="Calibri" pitchFamily="34" charset="-122"/>
                           <a:cs typeface="Calibri" pitchFamily="34" charset="-120"/>
                         </a:rPr>
-                        <a:t>Abends</a:t>
+                        <a:t>~10:45</a:t>
                       </a:r>
                       <a:endParaRPr lang="en-US" sz="1000" dirty="0">
                         <a:latin typeface="Calibri" charset="0"/>
@@ -25860,7 +25860,7 @@
                           <a:ea typeface="Calibri" pitchFamily="34" charset="-122"/>
                           <a:cs typeface="Calibri" pitchFamily="34" charset="-120"/>
                         </a:rPr>
-                        <a:t>~3h</a:t>
+                        <a:t>~3h 00m</a:t>
                       </a:r>
                       <a:endParaRPr lang="en-US" sz="1000" dirty="0">
                         <a:latin typeface="Calibri" charset="0"/>
@@ -25928,7 +25928,7 @@
                           <a:ea typeface="Calibri" pitchFamily="34" charset="-122"/>
                           <a:cs typeface="Calibri" pitchFamily="34" charset="-120"/>
                         </a:rPr>
-                        <a:t>~€100</a:t>
+                        <a:t>~€65–95</a:t>
                       </a:r>
                       <a:endParaRPr lang="en-US" sz="1000" dirty="0">
                         <a:latin typeface="Calibri" charset="0"/>
@@ -25996,7 +25996,7 @@
                           <a:ea typeface="Calibri" pitchFamily="34" charset="-122"/>
                           <a:cs typeface="Calibri" pitchFamily="34" charset="-120"/>
                         </a:rPr>
-                        <a:t>~€400</a:t>
+                        <a:t>~€260–380</a:t>
                       </a:r>
                       <a:endParaRPr lang="en-US" sz="1000" dirty="0">
                         <a:latin typeface="Calibri" charset="0"/>
@@ -26066,7 +26066,28 @@
                           <a:ea typeface="Calibri" pitchFamily="34" charset="-122"/>
                           <a:cs typeface="Calibri" pitchFamily="34" charset="-120"/>
                         </a:rPr>
-                        <a:t>Budget</a:t>
+                        <a:t>Vorabend</a:t>
+                      </a:r>
+                      <a:endParaRPr lang="en-US" sz="1000" dirty="0">
+                        <a:latin typeface="Calibri" charset="0"/>
+                        <a:ea typeface="Calibri" charset="0"/>
+                        <a:cs typeface="Calibri" charset="0"/>
+                      </a:endParaRPr>
+                    </a:p>
+                    <a:p>
+                      <a:pPr algn="ctr" indent="0" marL="0">
+                        <a:buNone/>
+                      </a:pPr>
+                      <a:r>
+                        <a:rPr lang="en-US" sz="1000" dirty="0">
+                          <a:solidFill>
+                            <a:srgbClr val="E8E8E8"/>
+                          </a:solidFill>
+                          <a:latin typeface="Calibri" pitchFamily="34" charset="0"/>
+                          <a:ea typeface="Calibri" pitchFamily="34" charset="-122"/>
+                          <a:cs typeface="Calibri" pitchFamily="34" charset="-120"/>
+                        </a:rPr>
+                        <a:t>29. Okt.</a:t>
                       </a:r>
                       <a:endParaRPr lang="en-US" sz="1000" dirty="0">
                         <a:latin typeface="Calibri" charset="0"/>
@@ -26223,7 +26244,7 @@
                           <a:ea typeface="Calibri" pitchFamily="34" charset="-122"/>
                           <a:cs typeface="Calibri" pitchFamily="34" charset="-120"/>
                         </a:rPr>
-                        <a:t>DUS → MLA</a:t>
+                        <a:t>FMO → MLA</a:t>
                       </a:r>
                       <a:endParaRPr lang="en-US" sz="1000" dirty="0">
                         <a:latin typeface="Calibri" charset="0"/>
@@ -26244,7 +26265,7 @@
                           <a:ea typeface="Calibri" pitchFamily="34" charset="-122"/>
                           <a:cs typeface="Calibri" pitchFamily="34" charset="-120"/>
                         </a:rPr>
-                        <a:t>30. Okt.</a:t>
+                        <a:t>29. Okt.</a:t>
                       </a:r>
                       <a:endParaRPr lang="en-US" sz="1000" dirty="0">
                         <a:latin typeface="Calibri" charset="0"/>
@@ -26312,7 +26333,7 @@
                           <a:ea typeface="Calibri" pitchFamily="34" charset="-122"/>
                           <a:cs typeface="Calibri" pitchFamily="34" charset="-120"/>
                         </a:rPr>
-                        <a:t>Verschieden</a:t>
+                        <a:t>Abends</a:t>
                       </a:r>
                       <a:endParaRPr lang="en-US" sz="1000" dirty="0">
                         <a:latin typeface="Calibri" charset="0"/>
@@ -26380,7 +26401,7 @@
                           <a:ea typeface="Calibri" pitchFamily="34" charset="-122"/>
                           <a:cs typeface="Calibri" pitchFamily="34" charset="-120"/>
                         </a:rPr>
-                        <a:t>Verschieden</a:t>
+                        <a:t>Abends</a:t>
                       </a:r>
                       <a:endParaRPr lang="en-US" sz="1000" dirty="0">
                         <a:latin typeface="Calibri" charset="0"/>
@@ -26448,7 +26469,7 @@
                           <a:ea typeface="Calibri" pitchFamily="34" charset="-122"/>
                           <a:cs typeface="Calibri" pitchFamily="34" charset="-120"/>
                         </a:rPr>
-                        <a:t>3h 00m</a:t>
+                        <a:t>~3h 00m</a:t>
                       </a:r>
                       <a:endParaRPr lang="en-US" sz="1000" dirty="0">
                         <a:latin typeface="Calibri" charset="0"/>
@@ -26516,7 +26537,7 @@
                           <a:ea typeface="Calibri" pitchFamily="34" charset="-122"/>
                           <a:cs typeface="Calibri" pitchFamily="34" charset="-120"/>
                         </a:rPr>
-                        <a:t>~€70–90</a:t>
+                        <a:t>~€70–100</a:t>
                       </a:r>
                       <a:endParaRPr lang="en-US" sz="1000" dirty="0">
                         <a:latin typeface="Calibri" charset="0"/>
@@ -26584,7 +26605,7 @@
                           <a:ea typeface="Calibri" pitchFamily="34" charset="-122"/>
                           <a:cs typeface="Calibri" pitchFamily="34" charset="-120"/>
                         </a:rPr>
-                        <a:t>~€280–360</a:t>
+                        <a:t>~€280–400</a:t>
                       </a:r>
                       <a:endParaRPr lang="en-US" sz="1000" dirty="0">
                         <a:latin typeface="Calibri" charset="0"/>
@@ -26636,6 +26657,594 @@
                   </a:tcPr>
                 </a:tc>
               </a:tr>
+              <a:tr h="475488">
+                <a:tc>
+                  <a:txBody>
+                    <a:bodyPr/>
+                    <a:lstStyle/>
+                    <a:p>
+                      <a:pPr algn="ctr" indent="0" marL="0">
+                        <a:buNone/>
+                      </a:pPr>
+                      <a:r>
+                        <a:rPr lang="en-US" sz="1000" dirty="0">
+                          <a:solidFill>
+                            <a:srgbClr val="E8E8E8"/>
+                          </a:solidFill>
+                          <a:latin typeface="Calibri" pitchFamily="34" charset="0"/>
+                          <a:ea typeface="Calibri" pitchFamily="34" charset="-122"/>
+                          <a:cs typeface="Calibri" pitchFamily="34" charset="-120"/>
+                        </a:rPr>
+                        <a:t>DUS-Passagiere</a:t>
+                      </a:r>
+                      <a:endParaRPr lang="en-US" sz="1000" dirty="0">
+                        <a:latin typeface="Calibri" charset="0"/>
+                        <a:ea typeface="Calibri" charset="0"/>
+                        <a:cs typeface="Calibri" charset="0"/>
+                      </a:endParaRPr>
+                    </a:p>
+                  </a:txBody>
+                  <a:tcPr marL="91440" marR="91440" marT="45720" marB="45720">
+                    <a:lnL w="12700" cap="flat" cmpd="sng" algn="ctr">
+                      <a:solidFill>
+                        <a:srgbClr val="0F3460"/>
+                      </a:solidFill>
+                      <a:prstDash val="solid"/>
+                      <a:round/>
+                      <a:headEnd type="none" w="med" len="med"/>
+                      <a:tailEnd type="none" w="med" len="med"/>
+                    </a:lnL>
+                    <a:lnR w="12700" cap="flat" cmpd="sng" algn="ctr">
+                      <a:solidFill>
+                        <a:srgbClr val="0F3460"/>
+                      </a:solidFill>
+                      <a:prstDash val="solid"/>
+                      <a:round/>
+                      <a:headEnd type="none" w="med" len="med"/>
+                      <a:tailEnd type="none" w="med" len="med"/>
+                    </a:lnR>
+                    <a:lnT w="12700" cap="flat" cmpd="sng" algn="ctr">
+                      <a:solidFill>
+                        <a:srgbClr val="0F3460"/>
+                      </a:solidFill>
+                      <a:prstDash val="solid"/>
+                      <a:round/>
+                      <a:headEnd type="none" w="med" len="med"/>
+                      <a:tailEnd type="none" w="med" len="med"/>
+                    </a:lnT>
+                    <a:lnB w="12700" cap="flat" cmpd="sng" algn="ctr">
+                      <a:solidFill>
+                        <a:srgbClr val="0F3460"/>
+                      </a:solidFill>
+                      <a:prstDash val="solid"/>
+                      <a:round/>
+                      <a:headEnd type="none" w="med" len="med"/>
+                      <a:tailEnd type="none" w="med" len="med"/>
+                    </a:lnB>
+                    <a:solidFill>
+                      <a:srgbClr val="1A1A2E"/>
+                    </a:solidFill>
+                  </a:tcPr>
+                </a:tc>
+                <a:tc>
+                  <a:txBody>
+                    <a:bodyPr/>
+                    <a:lstStyle/>
+                    <a:p>
+                      <a:pPr algn="ctr" indent="0" marL="0">
+                        <a:buNone/>
+                      </a:pPr>
+                      <a:r>
+                        <a:rPr lang="en-US" sz="1000" dirty="0">
+                          <a:solidFill>
+                            <a:srgbClr val="E8E8E8"/>
+                          </a:solidFill>
+                          <a:latin typeface="Calibri" pitchFamily="34" charset="0"/>
+                          <a:ea typeface="Calibri" pitchFamily="34" charset="-122"/>
+                          <a:cs typeface="Calibri" pitchFamily="34" charset="-120"/>
+                        </a:rPr>
+                        <a:t>Umstieg</a:t>
+                      </a:r>
+                      <a:endParaRPr lang="en-US" sz="1000" dirty="0">
+                        <a:latin typeface="Calibri" charset="0"/>
+                        <a:ea typeface="Calibri" charset="0"/>
+                        <a:cs typeface="Calibri" charset="0"/>
+                      </a:endParaRPr>
+                    </a:p>
+                    <a:p>
+                      <a:pPr algn="ctr" indent="0" marL="0">
+                        <a:buNone/>
+                      </a:pPr>
+                      <a:r>
+                        <a:rPr lang="en-US" sz="1000" dirty="0">
+                          <a:solidFill>
+                            <a:srgbClr val="E8E8E8"/>
+                          </a:solidFill>
+                          <a:latin typeface="Calibri" pitchFamily="34" charset="0"/>
+                          <a:ea typeface="Calibri" pitchFamily="34" charset="-122"/>
+                          <a:cs typeface="Calibri" pitchFamily="34" charset="-120"/>
+                        </a:rPr>
+                        <a:t>(z.B. LH/EW)</a:t>
+                      </a:r>
+                      <a:endParaRPr lang="en-US" sz="1000" dirty="0">
+                        <a:latin typeface="Calibri" charset="0"/>
+                        <a:ea typeface="Calibri" charset="0"/>
+                        <a:cs typeface="Calibri" charset="0"/>
+                      </a:endParaRPr>
+                    </a:p>
+                  </a:txBody>
+                  <a:tcPr marL="91440" marR="91440" marT="45720" marB="45720">
+                    <a:lnL w="12700" cap="flat" cmpd="sng" algn="ctr">
+                      <a:solidFill>
+                        <a:srgbClr val="0F3460"/>
+                      </a:solidFill>
+                      <a:prstDash val="solid"/>
+                      <a:round/>
+                      <a:headEnd type="none" w="med" len="med"/>
+                      <a:tailEnd type="none" w="med" len="med"/>
+                    </a:lnL>
+                    <a:lnR w="12700" cap="flat" cmpd="sng" algn="ctr">
+                      <a:solidFill>
+                        <a:srgbClr val="0F3460"/>
+                      </a:solidFill>
+                      <a:prstDash val="solid"/>
+                      <a:round/>
+                      <a:headEnd type="none" w="med" len="med"/>
+                      <a:tailEnd type="none" w="med" len="med"/>
+                    </a:lnR>
+                    <a:lnT w="12700" cap="flat" cmpd="sng" algn="ctr">
+                      <a:solidFill>
+                        <a:srgbClr val="0F3460"/>
+                      </a:solidFill>
+                      <a:prstDash val="solid"/>
+                      <a:round/>
+                      <a:headEnd type="none" w="med" len="med"/>
+                      <a:tailEnd type="none" w="med" len="med"/>
+                    </a:lnT>
+                    <a:lnB w="12700" cap="flat" cmpd="sng" algn="ctr">
+                      <a:solidFill>
+                        <a:srgbClr val="0F3460"/>
+                      </a:solidFill>
+                      <a:prstDash val="solid"/>
+                      <a:round/>
+                      <a:headEnd type="none" w="med" len="med"/>
+                      <a:tailEnd type="none" w="med" len="med"/>
+                    </a:lnB>
+                    <a:solidFill>
+                      <a:srgbClr val="1A1A2E"/>
+                    </a:solidFill>
+                  </a:tcPr>
+                </a:tc>
+                <a:tc>
+                  <a:txBody>
+                    <a:bodyPr/>
+                    <a:lstStyle/>
+                    <a:p>
+                      <a:pPr algn="ctr" indent="0" marL="0">
+                        <a:buNone/>
+                      </a:pPr>
+                      <a:r>
+                        <a:rPr lang="en-US" sz="1000" dirty="0">
+                          <a:solidFill>
+                            <a:srgbClr val="E8E8E8"/>
+                          </a:solidFill>
+                          <a:latin typeface="Calibri" pitchFamily="34" charset="0"/>
+                          <a:ea typeface="Calibri" pitchFamily="34" charset="-122"/>
+                          <a:cs typeface="Calibri" pitchFamily="34" charset="-120"/>
+                        </a:rPr>
+                        <a:t>DUS → FRA/MUC</a:t>
+                      </a:r>
+                      <a:endParaRPr lang="en-US" sz="1000" dirty="0">
+                        <a:latin typeface="Calibri" charset="0"/>
+                        <a:ea typeface="Calibri" charset="0"/>
+                        <a:cs typeface="Calibri" charset="0"/>
+                      </a:endParaRPr>
+                    </a:p>
+                    <a:p>
+                      <a:pPr algn="ctr" indent="0" marL="0">
+                        <a:buNone/>
+                      </a:pPr>
+                      <a:r>
+                        <a:rPr lang="en-US" sz="1000" dirty="0">
+                          <a:solidFill>
+                            <a:srgbClr val="E8E8E8"/>
+                          </a:solidFill>
+                          <a:latin typeface="Calibri" pitchFamily="34" charset="0"/>
+                          <a:ea typeface="Calibri" pitchFamily="34" charset="-122"/>
+                          <a:cs typeface="Calibri" pitchFamily="34" charset="-120"/>
+                        </a:rPr>
+                        <a:t>→ MLA</a:t>
+                      </a:r>
+                      <a:endParaRPr lang="en-US" sz="1000" dirty="0">
+                        <a:latin typeface="Calibri" charset="0"/>
+                        <a:ea typeface="Calibri" charset="0"/>
+                        <a:cs typeface="Calibri" charset="0"/>
+                      </a:endParaRPr>
+                    </a:p>
+                  </a:txBody>
+                  <a:tcPr marL="91440" marR="91440" marT="45720" marB="45720">
+                    <a:lnL w="12700" cap="flat" cmpd="sng" algn="ctr">
+                      <a:solidFill>
+                        <a:srgbClr val="0F3460"/>
+                      </a:solidFill>
+                      <a:prstDash val="solid"/>
+                      <a:round/>
+                      <a:headEnd type="none" w="med" len="med"/>
+                      <a:tailEnd type="none" w="med" len="med"/>
+                    </a:lnL>
+                    <a:lnR w="12700" cap="flat" cmpd="sng" algn="ctr">
+                      <a:solidFill>
+                        <a:srgbClr val="0F3460"/>
+                      </a:solidFill>
+                      <a:prstDash val="solid"/>
+                      <a:round/>
+                      <a:headEnd type="none" w="med" len="med"/>
+                      <a:tailEnd type="none" w="med" len="med"/>
+                    </a:lnR>
+                    <a:lnT w="12700" cap="flat" cmpd="sng" algn="ctr">
+                      <a:solidFill>
+                        <a:srgbClr val="0F3460"/>
+                      </a:solidFill>
+                      <a:prstDash val="solid"/>
+                      <a:round/>
+                      <a:headEnd type="none" w="med" len="med"/>
+                      <a:tailEnd type="none" w="med" len="med"/>
+                    </a:lnT>
+                    <a:lnB w="12700" cap="flat" cmpd="sng" algn="ctr">
+                      <a:solidFill>
+                        <a:srgbClr val="0F3460"/>
+                      </a:solidFill>
+                      <a:prstDash val="solid"/>
+                      <a:round/>
+                      <a:headEnd type="none" w="med" len="med"/>
+                      <a:tailEnd type="none" w="med" len="med"/>
+                    </a:lnB>
+                    <a:solidFill>
+                      <a:srgbClr val="1A1A2E"/>
+                    </a:solidFill>
+                  </a:tcPr>
+                </a:tc>
+                <a:tc>
+                  <a:txBody>
+                    <a:bodyPr/>
+                    <a:lstStyle/>
+                    <a:p>
+                      <a:pPr algn="ctr" indent="0" marL="0">
+                        <a:buNone/>
+                      </a:pPr>
+                      <a:r>
+                        <a:rPr lang="en-US" sz="1000" dirty="0">
+                          <a:solidFill>
+                            <a:srgbClr val="E8E8E8"/>
+                          </a:solidFill>
+                          <a:latin typeface="Calibri" pitchFamily="34" charset="0"/>
+                          <a:ea typeface="Calibri" pitchFamily="34" charset="-122"/>
+                          <a:cs typeface="Calibri" pitchFamily="34" charset="-120"/>
+                        </a:rPr>
+                        <a:t>—</a:t>
+                      </a:r>
+                      <a:endParaRPr lang="en-US" sz="1000" dirty="0">
+                        <a:latin typeface="Calibri" charset="0"/>
+                        <a:ea typeface="Calibri" charset="0"/>
+                        <a:cs typeface="Calibri" charset="0"/>
+                      </a:endParaRPr>
+                    </a:p>
+                  </a:txBody>
+                  <a:tcPr marL="91440" marR="91440" marT="45720" marB="45720">
+                    <a:lnL w="12700" cap="flat" cmpd="sng" algn="ctr">
+                      <a:solidFill>
+                        <a:srgbClr val="0F3460"/>
+                      </a:solidFill>
+                      <a:prstDash val="solid"/>
+                      <a:round/>
+                      <a:headEnd type="none" w="med" len="med"/>
+                      <a:tailEnd type="none" w="med" len="med"/>
+                    </a:lnL>
+                    <a:lnR w="12700" cap="flat" cmpd="sng" algn="ctr">
+                      <a:solidFill>
+                        <a:srgbClr val="0F3460"/>
+                      </a:solidFill>
+                      <a:prstDash val="solid"/>
+                      <a:round/>
+                      <a:headEnd type="none" w="med" len="med"/>
+                      <a:tailEnd type="none" w="med" len="med"/>
+                    </a:lnR>
+                    <a:lnT w="12700" cap="flat" cmpd="sng" algn="ctr">
+                      <a:solidFill>
+                        <a:srgbClr val="0F3460"/>
+                      </a:solidFill>
+                      <a:prstDash val="solid"/>
+                      <a:round/>
+                      <a:headEnd type="none" w="med" len="med"/>
+                      <a:tailEnd type="none" w="med" len="med"/>
+                    </a:lnT>
+                    <a:lnB w="12700" cap="flat" cmpd="sng" algn="ctr">
+                      <a:solidFill>
+                        <a:srgbClr val="0F3460"/>
+                      </a:solidFill>
+                      <a:prstDash val="solid"/>
+                      <a:round/>
+                      <a:headEnd type="none" w="med" len="med"/>
+                      <a:tailEnd type="none" w="med" len="med"/>
+                    </a:lnB>
+                    <a:solidFill>
+                      <a:srgbClr val="1A1A2E"/>
+                    </a:solidFill>
+                  </a:tcPr>
+                </a:tc>
+                <a:tc>
+                  <a:txBody>
+                    <a:bodyPr/>
+                    <a:lstStyle/>
+                    <a:p>
+                      <a:pPr algn="ctr" indent="0" marL="0">
+                        <a:buNone/>
+                      </a:pPr>
+                      <a:r>
+                        <a:rPr lang="en-US" sz="1000" dirty="0">
+                          <a:solidFill>
+                            <a:srgbClr val="E8E8E8"/>
+                          </a:solidFill>
+                          <a:latin typeface="Calibri" pitchFamily="34" charset="0"/>
+                          <a:ea typeface="Calibri" pitchFamily="34" charset="-122"/>
+                          <a:cs typeface="Calibri" pitchFamily="34" charset="-120"/>
+                        </a:rPr>
+                        <a:t>—</a:t>
+                      </a:r>
+                      <a:endParaRPr lang="en-US" sz="1000" dirty="0">
+                        <a:latin typeface="Calibri" charset="0"/>
+                        <a:ea typeface="Calibri" charset="0"/>
+                        <a:cs typeface="Calibri" charset="0"/>
+                      </a:endParaRPr>
+                    </a:p>
+                  </a:txBody>
+                  <a:tcPr marL="91440" marR="91440" marT="45720" marB="45720">
+                    <a:lnL w="12700" cap="flat" cmpd="sng" algn="ctr">
+                      <a:solidFill>
+                        <a:srgbClr val="0F3460"/>
+                      </a:solidFill>
+                      <a:prstDash val="solid"/>
+                      <a:round/>
+                      <a:headEnd type="none" w="med" len="med"/>
+                      <a:tailEnd type="none" w="med" len="med"/>
+                    </a:lnL>
+                    <a:lnR w="12700" cap="flat" cmpd="sng" algn="ctr">
+                      <a:solidFill>
+                        <a:srgbClr val="0F3460"/>
+                      </a:solidFill>
+                      <a:prstDash val="solid"/>
+                      <a:round/>
+                      <a:headEnd type="none" w="med" len="med"/>
+                      <a:tailEnd type="none" w="med" len="med"/>
+                    </a:lnR>
+                    <a:lnT w="12700" cap="flat" cmpd="sng" algn="ctr">
+                      <a:solidFill>
+                        <a:srgbClr val="0F3460"/>
+                      </a:solidFill>
+                      <a:prstDash val="solid"/>
+                      <a:round/>
+                      <a:headEnd type="none" w="med" len="med"/>
+                      <a:tailEnd type="none" w="med" len="med"/>
+                    </a:lnT>
+                    <a:lnB w="12700" cap="flat" cmpd="sng" algn="ctr">
+                      <a:solidFill>
+                        <a:srgbClr val="0F3460"/>
+                      </a:solidFill>
+                      <a:prstDash val="solid"/>
+                      <a:round/>
+                      <a:headEnd type="none" w="med" len="med"/>
+                      <a:tailEnd type="none" w="med" len="med"/>
+                    </a:lnB>
+                    <a:solidFill>
+                      <a:srgbClr val="1A1A2E"/>
+                    </a:solidFill>
+                  </a:tcPr>
+                </a:tc>
+                <a:tc>
+                  <a:txBody>
+                    <a:bodyPr/>
+                    <a:lstStyle/>
+                    <a:p>
+                      <a:pPr algn="ctr" indent="0" marL="0">
+                        <a:buNone/>
+                      </a:pPr>
+                      <a:r>
+                        <a:rPr lang="en-US" sz="1000" dirty="0">
+                          <a:solidFill>
+                            <a:srgbClr val="E8E8E8"/>
+                          </a:solidFill>
+                          <a:latin typeface="Calibri" pitchFamily="34" charset="0"/>
+                          <a:ea typeface="Calibri" pitchFamily="34" charset="-122"/>
+                          <a:cs typeface="Calibri" pitchFamily="34" charset="-120"/>
+                        </a:rPr>
+                        <a:t>5–7h</a:t>
+                      </a:r>
+                      <a:endParaRPr lang="en-US" sz="1000" dirty="0">
+                        <a:latin typeface="Calibri" charset="0"/>
+                        <a:ea typeface="Calibri" charset="0"/>
+                        <a:cs typeface="Calibri" charset="0"/>
+                      </a:endParaRPr>
+                    </a:p>
+                  </a:txBody>
+                  <a:tcPr marL="91440" marR="91440" marT="45720" marB="45720">
+                    <a:lnL w="12700" cap="flat" cmpd="sng" algn="ctr">
+                      <a:solidFill>
+                        <a:srgbClr val="0F3460"/>
+                      </a:solidFill>
+                      <a:prstDash val="solid"/>
+                      <a:round/>
+                      <a:headEnd type="none" w="med" len="med"/>
+                      <a:tailEnd type="none" w="med" len="med"/>
+                    </a:lnL>
+                    <a:lnR w="12700" cap="flat" cmpd="sng" algn="ctr">
+                      <a:solidFill>
+                        <a:srgbClr val="0F3460"/>
+                      </a:solidFill>
+                      <a:prstDash val="solid"/>
+                      <a:round/>
+                      <a:headEnd type="none" w="med" len="med"/>
+                      <a:tailEnd type="none" w="med" len="med"/>
+                    </a:lnR>
+                    <a:lnT w="12700" cap="flat" cmpd="sng" algn="ctr">
+                      <a:solidFill>
+                        <a:srgbClr val="0F3460"/>
+                      </a:solidFill>
+                      <a:prstDash val="solid"/>
+                      <a:round/>
+                      <a:headEnd type="none" w="med" len="med"/>
+                      <a:tailEnd type="none" w="med" len="med"/>
+                    </a:lnT>
+                    <a:lnB w="12700" cap="flat" cmpd="sng" algn="ctr">
+                      <a:solidFill>
+                        <a:srgbClr val="0F3460"/>
+                      </a:solidFill>
+                      <a:prstDash val="solid"/>
+                      <a:round/>
+                      <a:headEnd type="none" w="med" len="med"/>
+                      <a:tailEnd type="none" w="med" len="med"/>
+                    </a:lnB>
+                    <a:solidFill>
+                      <a:srgbClr val="1A1A2E"/>
+                    </a:solidFill>
+                  </a:tcPr>
+                </a:tc>
+                <a:tc>
+                  <a:txBody>
+                    <a:bodyPr/>
+                    <a:lstStyle/>
+                    <a:p>
+                      <a:pPr algn="ctr" indent="0" marL="0">
+                        <a:buNone/>
+                      </a:pPr>
+                      <a:r>
+                        <a:rPr lang="en-US" sz="1000" dirty="0">
+                          <a:solidFill>
+                            <a:srgbClr val="E8E8E8"/>
+                          </a:solidFill>
+                          <a:latin typeface="Calibri" pitchFamily="34" charset="0"/>
+                          <a:ea typeface="Calibri" pitchFamily="34" charset="-122"/>
+                          <a:cs typeface="Calibri" pitchFamily="34" charset="-120"/>
+                        </a:rPr>
+                        <a:t>~€120–180</a:t>
+                      </a:r>
+                      <a:endParaRPr lang="en-US" sz="1000" dirty="0">
+                        <a:latin typeface="Calibri" charset="0"/>
+                        <a:ea typeface="Calibri" charset="0"/>
+                        <a:cs typeface="Calibri" charset="0"/>
+                      </a:endParaRPr>
+                    </a:p>
+                  </a:txBody>
+                  <a:tcPr marL="91440" marR="91440" marT="45720" marB="45720">
+                    <a:lnL w="12700" cap="flat" cmpd="sng" algn="ctr">
+                      <a:solidFill>
+                        <a:srgbClr val="0F3460"/>
+                      </a:solidFill>
+                      <a:prstDash val="solid"/>
+                      <a:round/>
+                      <a:headEnd type="none" w="med" len="med"/>
+                      <a:tailEnd type="none" w="med" len="med"/>
+                    </a:lnL>
+                    <a:lnR w="12700" cap="flat" cmpd="sng" algn="ctr">
+                      <a:solidFill>
+                        <a:srgbClr val="0F3460"/>
+                      </a:solidFill>
+                      <a:prstDash val="solid"/>
+                      <a:round/>
+                      <a:headEnd type="none" w="med" len="med"/>
+                      <a:tailEnd type="none" w="med" len="med"/>
+                    </a:lnR>
+                    <a:lnT w="12700" cap="flat" cmpd="sng" algn="ctr">
+                      <a:solidFill>
+                        <a:srgbClr val="0F3460"/>
+                      </a:solidFill>
+                      <a:prstDash val="solid"/>
+                      <a:round/>
+                      <a:headEnd type="none" w="med" len="med"/>
+                      <a:tailEnd type="none" w="med" len="med"/>
+                    </a:lnT>
+                    <a:lnB w="12700" cap="flat" cmpd="sng" algn="ctr">
+                      <a:solidFill>
+                        <a:srgbClr val="0F3460"/>
+                      </a:solidFill>
+                      <a:prstDash val="solid"/>
+                      <a:round/>
+                      <a:headEnd type="none" w="med" len="med"/>
+                      <a:tailEnd type="none" w="med" len="med"/>
+                    </a:lnB>
+                    <a:solidFill>
+                      <a:srgbClr val="1A1A2E"/>
+                    </a:solidFill>
+                  </a:tcPr>
+                </a:tc>
+                <a:tc>
+                  <a:txBody>
+                    <a:bodyPr/>
+                    <a:lstStyle/>
+                    <a:p>
+                      <a:pPr algn="ctr" indent="0" marL="0">
+                        <a:buNone/>
+                      </a:pPr>
+                      <a:r>
+                        <a:rPr lang="en-US" sz="1000" dirty="0">
+                          <a:solidFill>
+                            <a:srgbClr val="FFC107"/>
+                          </a:solidFill>
+                          <a:latin typeface="Calibri" pitchFamily="34" charset="0"/>
+                          <a:ea typeface="Calibri" pitchFamily="34" charset="-122"/>
+                          <a:cs typeface="Calibri" pitchFamily="34" charset="-120"/>
+                        </a:rPr>
+                        <a:t>~€480–720</a:t>
+                      </a:r>
+                      <a:endParaRPr lang="en-US" sz="1000" dirty="0">
+                        <a:latin typeface="Calibri" charset="0"/>
+                        <a:ea typeface="Calibri" charset="0"/>
+                        <a:cs typeface="Calibri" charset="0"/>
+                      </a:endParaRPr>
+                    </a:p>
+                  </a:txBody>
+                  <a:tcPr marL="91440" marR="91440" marT="45720" marB="45720">
+                    <a:lnL w="12700" cap="flat" cmpd="sng" algn="ctr">
+                      <a:solidFill>
+                        <a:srgbClr val="0F3460"/>
+                      </a:solidFill>
+                      <a:prstDash val="solid"/>
+                      <a:round/>
+                      <a:headEnd type="none" w="med" len="med"/>
+                      <a:tailEnd type="none" w="med" len="med"/>
+                    </a:lnL>
+                    <a:lnR w="12700" cap="flat" cmpd="sng" algn="ctr">
+                      <a:solidFill>
+                        <a:srgbClr val="0F3460"/>
+                      </a:solidFill>
+                      <a:prstDash val="solid"/>
+                      <a:round/>
+                      <a:headEnd type="none" w="med" len="med"/>
+                      <a:tailEnd type="none" w="med" len="med"/>
+                    </a:lnR>
+                    <a:lnT w="12700" cap="flat" cmpd="sng" algn="ctr">
+                      <a:solidFill>
+                        <a:srgbClr val="0F3460"/>
+                      </a:solidFill>
+                      <a:prstDash val="solid"/>
+                      <a:round/>
+                      <a:headEnd type="none" w="med" len="med"/>
+                      <a:tailEnd type="none" w="med" len="med"/>
+                    </a:lnT>
+                    <a:lnB w="12700" cap="flat" cmpd="sng" algn="ctr">
+                      <a:solidFill>
+                        <a:srgbClr val="0F3460"/>
+                      </a:solidFill>
+                      <a:prstDash val="solid"/>
+                      <a:round/>
+                      <a:headEnd type="none" w="med" len="med"/>
+                      <a:tailEnd type="none" w="med" len="med"/>
+                    </a:lnB>
+                    <a:solidFill>
+                      <a:srgbClr val="1A1A2E"/>
+                    </a:solidFill>
+                  </a:tcPr>
+                </a:tc>
+              </a:tr>
             </a:tbl>
           </a:graphicData>
         </a:graphic>
@@ -26648,7 +27257,7 @@
         </p:nvSpPr>
         <p:spPr>
           <a:xfrm>
-            <a:off x="365760" y="3236976"/>
+            <a:off x="365760" y="3712464"/>
             <a:ext cx="11430000" cy="320040"/>
           </a:xfrm>
           <a:prstGeom prst="rect">
@@ -26694,7 +27303,7 @@
           </p:nvPr>
         </p:nvGraphicFramePr>
         <p:xfrm>
-          <a:off x="365760" y="3575304"/>
+          <a:off x="365760" y="4050792"/>
           <a:ext cx="11430000" cy="914400"/>
         </p:xfrm>
         <a:graphic>
@@ -27206,7 +27815,7 @@
                           <a:ea typeface="Calibri" pitchFamily="34" charset="-122"/>
                           <a:cs typeface="Calibri" pitchFamily="34" charset="-120"/>
                         </a:rPr>
-                        <a:t>Eurowings/Ryanair  (MLA→DUS)</a:t>
+                        <a:t>FR Ryanair  (MLA→FMO/DTM)</a:t>
                       </a:r>
                       <a:endParaRPr lang="en-US" sz="1000" dirty="0">
                         <a:latin typeface="Calibri" charset="0"/>
@@ -27274,7 +27883,7 @@
                           <a:ea typeface="Calibri" pitchFamily="34" charset="-122"/>
                           <a:cs typeface="Calibri" pitchFamily="34" charset="-120"/>
                         </a:rPr>
-                        <a:t>MLA → DUS  /  2. Nov.</a:t>
+                        <a:t>MLA → FMO oder DTM  /  2. Nov.</a:t>
                       </a:r>
                       <a:endParaRPr lang="en-US" sz="1000" dirty="0">
                         <a:latin typeface="Calibri" charset="0"/>
@@ -27478,7 +28087,7 @@
                           <a:ea typeface="Calibri" pitchFamily="34" charset="-122"/>
                           <a:cs typeface="Calibri" pitchFamily="34" charset="-120"/>
                         </a:rPr>
-                        <a:t>~3h</a:t>
+                        <a:t>~3h 00m</a:t>
                       </a:r>
                       <a:endParaRPr lang="en-US" sz="1000" dirty="0">
                         <a:latin typeface="Calibri" charset="0"/>
@@ -27546,7 +28155,7 @@
                           <a:ea typeface="Calibri" pitchFamily="34" charset="-122"/>
                           <a:cs typeface="Calibri" pitchFamily="34" charset="-120"/>
                         </a:rPr>
-                        <a:t>~€80–100</a:t>
+                        <a:t>~€50–90</a:t>
                       </a:r>
                       <a:endParaRPr lang="en-US" sz="1000" dirty="0">
                         <a:latin typeface="Calibri" charset="0"/>
@@ -27614,7 +28223,7 @@
                           <a:ea typeface="Calibri" pitchFamily="34" charset="-122"/>
                           <a:cs typeface="Calibri" pitchFamily="34" charset="-120"/>
                         </a:rPr>
-                        <a:t>~€320–400</a:t>
+                        <a:t>~€200–360</a:t>
                       </a:r>
                       <a:endParaRPr lang="en-US" sz="1000" dirty="0">
                         <a:latin typeface="Calibri" charset="0"/>
@@ -27678,7 +28287,7 @@
         </p:nvSpPr>
         <p:spPr>
           <a:xfrm>
-            <a:off x="365760" y="4535424"/>
+            <a:off x="365760" y="5010912"/>
             <a:ext cx="11430000" cy="658368"/>
           </a:xfrm>
           <a:prstGeom prst="rect">
@@ -27703,7 +28312,7 @@
         </p:nvSpPr>
         <p:spPr>
           <a:xfrm>
-            <a:off x="502920" y="4581144"/>
+            <a:off x="502920" y="5056632"/>
             <a:ext cx="11155680" cy="566928"/>
           </a:xfrm>
           <a:prstGeom prst="rect">
@@ -27728,7 +28337,7 @@
                 <a:ea typeface="Calibri" pitchFamily="34" charset="-122"/>
                 <a:cs typeface="Calibri" pitchFamily="34" charset="-120"/>
               </a:rPr>
-              <a:t>🌞  Malta ist mit 22–24°C Anfang November das WÄRMSTE Reiseziel dieser Auswahl!  Flughafen Malta (MLA) liegt 8 km südlich von Valletta — Taxi/Bus ins Zentrum ~20 Min.  Direktflüge ab DUS mit Eurowings &amp; Ryanair.  Buchen: eurowings.com · ryanair.com · skyscanner.de</a:t>
+              <a:t>⚠️  KEIN Direktflug ab DUS (Düsseldorf) nach Malta!  Direktflüge ab FMO (Münster/Osnabrück) und DTM (Dortmund) mit Ryanair.  FMO liegt ~100 km von DUS entfernt (1,5h Fahrt), DTM ~70 km (1h Fahrt).  Empfehlung: Fahrgemeinschaft nach FMO oder DTM zum Abflug.  Buchen: ryanair.com · skyscanner.de</a:t>
             </a:r>
             <a:endParaRPr lang="en-US" sz="1000" dirty="0"/>
           </a:p>
@@ -27742,7 +28351,7 @@
         </p:nvSpPr>
         <p:spPr>
           <a:xfrm>
-            <a:off x="8046720" y="5312664"/>
+            <a:off x="8046720" y="5788152"/>
             <a:ext cx="3749040" cy="777240"/>
           </a:xfrm>
           <a:prstGeom prst="rect">
@@ -27767,7 +28376,7 @@
         </p:nvSpPr>
         <p:spPr>
           <a:xfrm>
-            <a:off x="8046720" y="5330952"/>
+            <a:off x="8046720" y="5806440"/>
             <a:ext cx="3749040" cy="274320"/>
           </a:xfrm>
           <a:prstGeom prst="rect">
@@ -27806,7 +28415,7 @@
         </p:nvSpPr>
         <p:spPr>
           <a:xfrm>
-            <a:off x="8046720" y="5605272"/>
+            <a:off x="8046720" y="6080760"/>
             <a:ext cx="3749040" cy="438912"/>
           </a:xfrm>
           <a:prstGeom prst="rect">
@@ -27831,7 +28440,7 @@
                 <a:ea typeface="Trebuchet MS" pitchFamily="34" charset="-122"/>
                 <a:cs typeface="Trebuchet MS" pitchFamily="34" charset="-120"/>
               </a:rPr>
-              <a:t>€600 – €800 gesamt</a:t>
+              <a:t>€400 – €560 gesamt</a:t>
             </a:r>
             <a:endParaRPr lang="en-US" sz="2000" dirty="0"/>
           </a:p>

--- a/halloween_trip_2025.pptx
+++ b/halloween_trip_2025.pptx
@@ -2324,7 +2324,7 @@
           </a:solidFill>
           <a:ln w="12700">
             <a:solidFill>
-              <a:srgbClr val="1EB4C8"/>
+              <a:srgbClr val="C8003C"/>
             </a:solidFill>
             <a:prstDash val="solid"/>
           </a:ln>
@@ -2363,7 +2363,7 @@
                 <a:ea typeface="Trebuchet MS" pitchFamily="34" charset="-122"/>
                 <a:cs typeface="Trebuchet MS" pitchFamily="34" charset="-120"/>
               </a:rPr>
-              <a:t>🇲🇹 MALTA</a:t>
+              <a:t>🇮🇹 MAILAND</a:t>
             </a:r>
             <a:endParaRPr lang="en-US" sz="2400" dirty="0"/>
           </a:p>
@@ -2402,7 +2402,7 @@
                 <a:ea typeface="Calibri" pitchFamily="34" charset="-122"/>
                 <a:cs typeface="Calibri" pitchFamily="34" charset="-120"/>
               </a:rPr>
-              <a:t>Flüge ab DUS · FMO · DTM  ·  Lissabon 17–22°C · Malta 22–24°C</a:t>
+              <a:t>Beide Ziele: Direktflug ab DUS  ·  Lissabon 17–22°C · Mailand 12–16°C</a:t>
             </a:r>
             <a:endParaRPr lang="en-US" sz="1300" dirty="0"/>
           </a:p>
@@ -2480,11 +2480,11 @@
             <a:avLst/>
           </a:prstGeom>
           <a:solidFill>
-            <a:srgbClr val="1EB4C8"/>
+            <a:srgbClr val="C8003C"/>
           </a:solidFill>
           <a:ln w="12700">
             <a:solidFill>
-              <a:srgbClr val="1EB4C8"/>
+              <a:srgbClr val="C8003C"/>
             </a:solidFill>
             <a:prstDash val="solid"/>
           </a:ln>
@@ -2548,7 +2548,7 @@
                 <a:ea typeface="Trebuchet MS" pitchFamily="34" charset="-122"/>
                 <a:cs typeface="Trebuchet MS" pitchFamily="34" charset="-120"/>
               </a:rPr>
-              <a:t>🇲🇹  MALTA — TAGESPROGRAMM</a:t>
+              <a:t>🇮🇹  MAILAND — TAGESPROGRAMM</a:t>
             </a:r>
             <a:endParaRPr lang="en-US" sz="2200" dirty="0"/>
           </a:p>
@@ -2569,11 +2569,11 @@
             <a:avLst/>
           </a:prstGeom>
           <a:solidFill>
-            <a:srgbClr val="1EB4C8"/>
+            <a:srgbClr val="C8003C"/>
           </a:solidFill>
           <a:ln w="12700">
             <a:solidFill>
-              <a:srgbClr val="1EB4C8"/>
+              <a:srgbClr val="C8003C"/>
             </a:solidFill>
             <a:prstDash val="solid"/>
           </a:ln>
@@ -2598,7 +2598,7 @@
           </a:solidFill>
           <a:ln w="12700">
             <a:solidFill>
-              <a:srgbClr val="1EB4C8"/>
+              <a:srgbClr val="C8003C"/>
             </a:solidFill>
             <a:prstDash val="solid"/>
           </a:ln>
@@ -2656,7 +2656,7 @@
             <a:r>
               <a:rPr lang="en-US" sz="1100" b="1" dirty="0">
                 <a:solidFill>
-                  <a:srgbClr val="1EB4C8"/>
+                  <a:srgbClr val="C8003C"/>
                 </a:solidFill>
                 <a:latin typeface="Trebuchet MS" pitchFamily="34" charset="0"/>
                 <a:ea typeface="Trebuchet MS" pitchFamily="34" charset="-122"/>
@@ -2740,7 +2740,7 @@
                 <a:ea typeface="Calibri" pitchFamily="34" charset="-122"/>
                 <a:cs typeface="Calibri" pitchFamily="34" charset="-120"/>
               </a:rPr>
-              <a:t>✈  Eurowings landet MLA ~10:00 · Taxi nach St. Julian's</a:t>
+              <a:t>✈  Eurowings landet MXP ~08:40 · Malpensa Express ins Zentrum</a:t>
             </a:r>
             <a:endParaRPr lang="en-US" sz="900" dirty="0"/>
           </a:p>
@@ -2779,7 +2779,7 @@
                 <a:ea typeface="Calibri" pitchFamily="34" charset="-122"/>
                 <a:cs typeface="Calibri" pitchFamily="34" charset="-120"/>
               </a:rPr>
-              <a:t>🏠  Einchecken · erstes kühles Cisk-Bier auf der Terrasse</a:t>
+              <a:t>🏠  Einchecken in Navigli (Check-in ab 15 Uhr)</a:t>
             </a:r>
             <a:endParaRPr lang="en-US" sz="900" dirty="0"/>
           </a:p>
@@ -2818,7 +2818,7 @@
                 <a:ea typeface="Calibri" pitchFamily="34" charset="-122"/>
                 <a:cs typeface="Calibri" pitchFamily="34" charset="-120"/>
               </a:rPr>
-              <a:t>🏛  Valletta Altstadt-Spaziergang (UNESCO-Welterbe)</a:t>
+              <a:t>🚶  SANDEMANs Stadtführung 14:30 @ Duomo (2,5h, Trinkgeld)</a:t>
             </a:r>
             <a:endParaRPr lang="en-US" sz="900" dirty="0"/>
           </a:p>
@@ -2857,7 +2857,7 @@
                 <a:ea typeface="Calibri" pitchFamily="34" charset="-122"/>
                 <a:cs typeface="Calibri" pitchFamily="34" charset="-120"/>
               </a:rPr>
-              <a:t>🌊  Sliema Waterfront zum Sonnenuntergang</a:t>
+              <a:t>   Duomo, Galleria Vittorio Emanuele, Castello Sforzesco</a:t>
             </a:r>
             <a:endParaRPr lang="en-US" sz="900" dirty="0"/>
           </a:p>
@@ -2896,7 +2896,7 @@
                 <a:ea typeface="Calibri" pitchFamily="34" charset="-122"/>
                 <a:cs typeface="Calibri" pitchFamily="34" charset="-120"/>
               </a:rPr>
-              <a:t>🍺  Erste Bar-Nacht in Paceville: Hugo's Lounge</a:t>
+              <a:t>🍹  Aperitivo ab 18 Uhr am Naviglio Grande</a:t>
             </a:r>
             <a:endParaRPr lang="en-US" sz="900" dirty="0"/>
           </a:p>
@@ -2935,7 +2935,7 @@
                 <a:ea typeface="Calibri" pitchFamily="34" charset="-122"/>
                 <a:cs typeface="Calibri" pitchFamily="34" charset="-120"/>
               </a:rPr>
-              <a:t>   Cisk 0,5l: ~€2,50 · T-Shirt-Wetter um Mitternacht!</a:t>
+              <a:t>   €8–10 Drink + gratis Buffet — Mailänder Tradition!</a:t>
             </a:r>
             <a:endParaRPr lang="en-US" sz="900" dirty="0"/>
           </a:p>
@@ -2943,7 +2943,46 @@
       </p:sp>
       <p:sp>
         <p:nvSpPr>
-          <p:cNvPr id="16" name="Shape 14"/>
+          <p:cNvPr id="16" name="Text 14"/>
+          <p:cNvSpPr/>
+          <p:nvPr/>
+        </p:nvSpPr>
+        <p:spPr>
+          <a:xfrm>
+            <a:off x="365760" y="2926080"/>
+            <a:ext cx="5486400" cy="256032"/>
+          </a:xfrm>
+          <a:prstGeom prst="rect">
+            <a:avLst/>
+          </a:prstGeom>
+          <a:noFill/>
+          <a:ln/>
+        </p:spPr>
+        <p:txBody>
+          <a:bodyPr wrap="square" rtlCol="0" anchor="t"/>
+          <a:lstStyle/>
+          <a:p>
+            <a:pPr indent="0" marL="0">
+              <a:buNone/>
+            </a:pPr>
+            <a:r>
+              <a:rPr lang="en-US" sz="900" dirty="0">
+                <a:solidFill>
+                  <a:srgbClr val="E8E8E8"/>
+                </a:solidFill>
+                <a:latin typeface="Calibri" pitchFamily="34" charset="0"/>
+                <a:ea typeface="Calibri" pitchFamily="34" charset="-122"/>
+                <a:cs typeface="Calibri" pitchFamily="34" charset="-120"/>
+              </a:rPr>
+              <a:t>🌃  Erste Nacht: Navigli-Bars &amp; Darsena-Platz</a:t>
+            </a:r>
+            <a:endParaRPr lang="en-US" sz="900" dirty="0"/>
+          </a:p>
+        </p:txBody>
+      </p:sp>
+      <p:sp>
+        <p:nvSpPr>
+          <p:cNvPr id="17" name="Shape 15"/>
           <p:cNvSpPr/>
           <p:nvPr/>
         </p:nvSpPr>
@@ -2960,7 +2999,7 @@
           </a:solidFill>
           <a:ln w="12700">
             <a:solidFill>
-              <a:srgbClr val="1EB4C8"/>
+              <a:srgbClr val="C8003C"/>
             </a:solidFill>
             <a:prstDash val="solid"/>
           </a:ln>
@@ -2968,7 +3007,7 @@
       </p:sp>
       <p:sp>
         <p:nvSpPr>
-          <p:cNvPr id="17" name="Shape 15"/>
+          <p:cNvPr id="18" name="Shape 16"/>
           <p:cNvSpPr/>
           <p:nvPr/>
         </p:nvSpPr>
@@ -2993,7 +3032,7 @@
       </p:sp>
       <p:sp>
         <p:nvSpPr>
-          <p:cNvPr id="18" name="Text 16"/>
+          <p:cNvPr id="19" name="Text 17"/>
           <p:cNvSpPr/>
           <p:nvPr/>
         </p:nvSpPr>
@@ -3018,7 +3057,7 @@
             <a:r>
               <a:rPr lang="en-US" sz="1100" b="1" dirty="0">
                 <a:solidFill>
-                  <a:srgbClr val="1EB4C8"/>
+                  <a:srgbClr val="C8003C"/>
                 </a:solidFill>
                 <a:latin typeface="Trebuchet MS" pitchFamily="34" charset="0"/>
                 <a:ea typeface="Trebuchet MS" pitchFamily="34" charset="-122"/>
@@ -3032,7 +3071,7 @@
       </p:sp>
       <p:sp>
         <p:nvSpPr>
-          <p:cNvPr id="19" name="Text 17"/>
+          <p:cNvPr id="20" name="Text 18"/>
           <p:cNvSpPr/>
           <p:nvPr/>
         </p:nvSpPr>
@@ -3071,7 +3110,7 @@
       </p:sp>
       <p:sp>
         <p:nvSpPr>
-          <p:cNvPr id="20" name="Text 18"/>
+          <p:cNvPr id="21" name="Text 19"/>
           <p:cNvSpPr/>
           <p:nvPr/>
         </p:nvSpPr>
@@ -3102,7 +3141,7 @@
                 <a:ea typeface="Calibri" pitchFamily="34" charset="-122"/>
                 <a:cs typeface="Calibri" pitchFamily="34" charset="-120"/>
               </a:rPr>
-              <a:t>⛵  Tagesausflug Blaue Lagune (Bootsfahrt, ~€35 p.P.)</a:t>
+              <a:t>🍳  Pasta-Kochkurs 10:00 Uhr (3h, €70 p.P., Navigli)</a:t>
             </a:r>
             <a:endParaRPr lang="en-US" sz="900" dirty="0"/>
           </a:p>
@@ -3110,7 +3149,7 @@
       </p:sp>
       <p:sp>
         <p:nvSpPr>
-          <p:cNvPr id="21" name="Text 19"/>
+          <p:cNvPr id="22" name="Text 20"/>
           <p:cNvSpPr/>
           <p:nvPr/>
         </p:nvSpPr>
@@ -3141,7 +3180,7 @@
                 <a:ea typeface="Calibri" pitchFamily="34" charset="-122"/>
                 <a:cs typeface="Calibri" pitchFamily="34" charset="-120"/>
               </a:rPr>
-              <a:t>   Kristallklares Mittelmeer · letztes Bad im Oktober!</a:t>
+              <a:t>   Risotto alla Milanese + Ossobuco + Tiramisu</a:t>
             </a:r>
             <a:endParaRPr lang="en-US" sz="900" dirty="0"/>
           </a:p>
@@ -3149,7 +3188,7 @@
       </p:sp>
       <p:sp>
         <p:nvSpPr>
-          <p:cNvPr id="22" name="Text 20"/>
+          <p:cNvPr id="23" name="Text 21"/>
           <p:cNvSpPr/>
           <p:nvPr/>
         </p:nvSpPr>
@@ -3180,7 +3219,7 @@
                 <a:ea typeface="Calibri" pitchFamily="34" charset="-122"/>
                 <a:cs typeface="Calibri" pitchFamily="34" charset="-120"/>
               </a:rPr>
-              <a:t>🍳  Maltesischer Kochkurs nachmittags (€65 p.P.)</a:t>
+              <a:t>🛍  Nachmittags: Brera Designviertel oder Modeboulevard</a:t>
             </a:r>
             <a:endParaRPr lang="en-US" sz="900" dirty="0"/>
           </a:p>
@@ -3188,7 +3227,7 @@
       </p:sp>
       <p:sp>
         <p:nvSpPr>
-          <p:cNvPr id="23" name="Text 21"/>
+          <p:cNvPr id="24" name="Text 22"/>
           <p:cNvSpPr/>
           <p:nvPr/>
         </p:nvSpPr>
@@ -3219,7 +3258,7 @@
                 <a:ea typeface="Calibri" pitchFamily="34" charset="-122"/>
                 <a:cs typeface="Calibri" pitchFamily="34" charset="-120"/>
               </a:rPr>
-              <a:t>   Kaninchen-Eintopf (Fenek) + Pastizzi + lokaler Wein</a:t>
+              <a:t>🎃  Halloween Kneipentour Navigli ab 21 Uhr · ~€20 p.P.</a:t>
             </a:r>
             <a:endParaRPr lang="en-US" sz="900" dirty="0"/>
           </a:p>
@@ -3227,7 +3266,7 @@
       </p:sp>
       <p:sp>
         <p:nvSpPr>
-          <p:cNvPr id="24" name="Text 22"/>
+          <p:cNvPr id="25" name="Text 23"/>
           <p:cNvSpPr/>
           <p:nvPr/>
         </p:nvSpPr>
@@ -3258,7 +3297,7 @@
                 <a:ea typeface="Calibri" pitchFamily="34" charset="-122"/>
                 <a:cs typeface="Calibri" pitchFamily="34" charset="-120"/>
               </a:rPr>
-              <a:t>🎃  Halloween in Paceville ab 22 Uhr</a:t>
+              <a:t>   Treffpunkt Darsena · 4 Bars · Shots · Kostüm-Contest</a:t>
             </a:r>
             <a:endParaRPr lang="en-US" sz="900" dirty="0"/>
           </a:p>
@@ -3266,7 +3305,7 @@
       </p:sp>
       <p:sp>
         <p:nvSpPr>
-          <p:cNvPr id="25" name="Text 23"/>
+          <p:cNvPr id="26" name="Text 24"/>
           <p:cNvSpPr/>
           <p:nvPr/>
         </p:nvSpPr>
@@ -3297,7 +3336,7 @@
                 <a:ea typeface="Calibri" pitchFamily="34" charset="-122"/>
                 <a:cs typeface="Calibri" pitchFamily="34" charset="-120"/>
               </a:rPr>
-              <a:t>   Clubmeile: Sky Club · Footloose · Level 22</a:t>
+              <a:t>🎶  Ab 1 Uhr: Alcatraz oder Volt Club — Halloween Special</a:t>
             </a:r>
             <a:endParaRPr lang="en-US" sz="900" dirty="0"/>
           </a:p>
@@ -3305,7 +3344,7 @@
       </p:sp>
       <p:sp>
         <p:nvSpPr>
-          <p:cNvPr id="26" name="Text 24"/>
+          <p:cNvPr id="27" name="Text 25"/>
           <p:cNvSpPr/>
           <p:nvPr/>
         </p:nvSpPr>
@@ -3336,7 +3375,7 @@
                 <a:ea typeface="Calibri" pitchFamily="34" charset="-122"/>
                 <a:cs typeface="Calibri" pitchFamily="34" charset="-120"/>
               </a:rPr>
-              <a:t>   Bis 4 Uhr morgens · alle mit Halloween-Deko</a:t>
+              <a:t>   Corso Como Party bis 5 Uhr morgens</a:t>
             </a:r>
             <a:endParaRPr lang="en-US" sz="900" dirty="0"/>
           </a:p>
@@ -3344,7 +3383,7 @@
       </p:sp>
       <p:sp>
         <p:nvSpPr>
-          <p:cNvPr id="27" name="Shape 25"/>
+          <p:cNvPr id="28" name="Shape 26"/>
           <p:cNvSpPr/>
           <p:nvPr/>
         </p:nvSpPr>
@@ -3361,7 +3400,7 @@
           </a:solidFill>
           <a:ln w="12700">
             <a:solidFill>
-              <a:srgbClr val="1EB4C8"/>
+              <a:srgbClr val="C8003C"/>
             </a:solidFill>
             <a:prstDash val="solid"/>
           </a:ln>
@@ -3369,7 +3408,7 @@
       </p:sp>
       <p:sp>
         <p:nvSpPr>
-          <p:cNvPr id="28" name="Shape 26"/>
+          <p:cNvPr id="29" name="Shape 27"/>
           <p:cNvSpPr/>
           <p:nvPr/>
         </p:nvSpPr>
@@ -3394,7 +3433,7 @@
       </p:sp>
       <p:sp>
         <p:nvSpPr>
-          <p:cNvPr id="29" name="Text 27"/>
+          <p:cNvPr id="30" name="Text 28"/>
           <p:cNvSpPr/>
           <p:nvPr/>
         </p:nvSpPr>
@@ -3419,7 +3458,7 @@
             <a:r>
               <a:rPr lang="en-US" sz="1100" b="1" dirty="0">
                 <a:solidFill>
-                  <a:srgbClr val="1EB4C8"/>
+                  <a:srgbClr val="C8003C"/>
                 </a:solidFill>
                 <a:latin typeface="Trebuchet MS" pitchFamily="34" charset="0"/>
                 <a:ea typeface="Trebuchet MS" pitchFamily="34" charset="-122"/>
@@ -3433,7 +3472,7 @@
       </p:sp>
       <p:sp>
         <p:nvSpPr>
-          <p:cNvPr id="30" name="Text 28"/>
+          <p:cNvPr id="31" name="Text 29"/>
           <p:cNvSpPr/>
           <p:nvPr/>
         </p:nvSpPr>
@@ -3464,7 +3503,7 @@
                 <a:ea typeface="Calibri" pitchFamily="34" charset="-122"/>
                 <a:cs typeface="Calibri" pitchFamily="34" charset="-120"/>
               </a:rPr>
-              <a:t>Malta Erkunden</a:t>
+              <a:t>Erkunden &amp; Ausgehen</a:t>
             </a:r>
             <a:endParaRPr lang="en-US" sz="900" dirty="0"/>
           </a:p>
@@ -3472,7 +3511,7 @@
       </p:sp>
       <p:sp>
         <p:nvSpPr>
-          <p:cNvPr id="31" name="Text 29"/>
+          <p:cNvPr id="32" name="Text 30"/>
           <p:cNvSpPr/>
           <p:nvPr/>
         </p:nvSpPr>
@@ -3503,7 +3542,7 @@
                 <a:ea typeface="Calibri" pitchFamily="34" charset="-122"/>
                 <a:cs typeface="Calibri" pitchFamily="34" charset="-120"/>
               </a:rPr>
-              <a:t>🏰  Mdina: "Die Stille Stadt" — mittelalterl. Festungsstadt</a:t>
+              <a:t>🌅  Ausschlafen — Mailands Nächte enden spät</a:t>
             </a:r>
             <a:endParaRPr lang="en-US" sz="900" dirty="0"/>
           </a:p>
@@ -3511,7 +3550,7 @@
       </p:sp>
       <p:sp>
         <p:nvSpPr>
-          <p:cNvPr id="32" name="Text 30"/>
+          <p:cNvPr id="33" name="Text 31"/>
           <p:cNvSpPr/>
           <p:nvPr/>
         </p:nvSpPr>
@@ -3542,7 +3581,7 @@
                 <a:ea typeface="Calibri" pitchFamily="34" charset="-122"/>
                 <a:cs typeface="Calibri" pitchFamily="34" charset="-120"/>
               </a:rPr>
-              <a:t>🐟  Marsaxlokk Fischmarkt: frischer Fang, bunte Boote</a:t>
+              <a:t>☕  Frühstück: Cappuccino + Cornetto an der Bar (€2)</a:t>
             </a:r>
             <a:endParaRPr lang="en-US" sz="900" dirty="0"/>
           </a:p>
@@ -3550,7 +3589,7 @@
       </p:sp>
       <p:sp>
         <p:nvSpPr>
-          <p:cNvPr id="33" name="Text 31"/>
+          <p:cNvPr id="34" name="Text 32"/>
           <p:cNvSpPr/>
           <p:nvPr/>
         </p:nvSpPr>
@@ -3581,7 +3620,7 @@
                 <a:ea typeface="Calibri" pitchFamily="34" charset="-122"/>
                 <a:cs typeface="Calibri" pitchFamily="34" charset="-120"/>
               </a:rPr>
-              <a:t>🍺  Mittagspause: Pasta + Cisk am Hafen (~€12)</a:t>
+              <a:t>🏛  Duomo Dachterrasse (Blick über ganz Mailand, ~€14)</a:t>
             </a:r>
             <a:endParaRPr lang="en-US" sz="900" dirty="0"/>
           </a:p>
@@ -3589,7 +3628,7 @@
       </p:sp>
       <p:sp>
         <p:nvSpPr>
-          <p:cNvPr id="34" name="Text 32"/>
+          <p:cNvPr id="35" name="Text 33"/>
           <p:cNvSpPr/>
           <p:nvPr/>
         </p:nvSpPr>
@@ -3620,7 +3659,7 @@
                 <a:ea typeface="Calibri" pitchFamily="34" charset="-122"/>
                 <a:cs typeface="Calibri" pitchFamily="34" charset="-120"/>
               </a:rPr>
-              <a:t>🌊  Nachmittag: Baden an den Felsenbädern (noch warm!)</a:t>
+              <a:t>🛒  Mercato Metropolitano oder Fiera di Sinigaglia</a:t>
             </a:r>
             <a:endParaRPr lang="en-US" sz="900" dirty="0"/>
           </a:p>
@@ -3628,7 +3667,7 @@
       </p:sp>
       <p:sp>
         <p:nvSpPr>
-          <p:cNvPr id="35" name="Text 33"/>
+          <p:cNvPr id="36" name="Text 34"/>
           <p:cNvSpPr/>
           <p:nvPr/>
         </p:nvSpPr>
@@ -3659,7 +3698,7 @@
                 <a:ea typeface="Calibri" pitchFamily="34" charset="-122"/>
                 <a:cs typeface="Calibri" pitchFamily="34" charset="-120"/>
               </a:rPr>
-              <a:t>🌃  Letzte Nacht: Paceville + Strand-Bars</a:t>
+              <a:t>🍝  Abendessen: Risotto Milanese in der Navigli-Trattoria</a:t>
             </a:r>
             <a:endParaRPr lang="en-US" sz="900" dirty="0"/>
           </a:p>
@@ -3667,7 +3706,46 @@
       </p:sp>
       <p:sp>
         <p:nvSpPr>
-          <p:cNvPr id="36" name="Shape 34"/>
+          <p:cNvPr id="37" name="Text 35"/>
+          <p:cNvSpPr/>
+          <p:nvPr/>
+        </p:nvSpPr>
+        <p:spPr>
+          <a:xfrm>
+            <a:off x="365760" y="5541264"/>
+            <a:ext cx="5486400" cy="256032"/>
+          </a:xfrm>
+          <a:prstGeom prst="rect">
+            <a:avLst/>
+          </a:prstGeom>
+          <a:noFill/>
+          <a:ln/>
+        </p:spPr>
+        <p:txBody>
+          <a:bodyPr wrap="square" rtlCol="0" anchor="t"/>
+          <a:lstStyle/>
+          <a:p>
+            <a:pPr indent="0" marL="0">
+              <a:buNone/>
+            </a:pPr>
+            <a:r>
+              <a:rPr lang="en-US" sz="900" dirty="0">
+                <a:solidFill>
+                  <a:srgbClr val="E8E8E8"/>
+                </a:solidFill>
+                <a:latin typeface="Calibri" pitchFamily="34" charset="0"/>
+                <a:ea typeface="Calibri" pitchFamily="34" charset="-122"/>
+                <a:cs typeface="Calibri" pitchFamily="34" charset="-120"/>
+              </a:rPr>
+              <a:t>🌃  Letzte Nacht: Isola-Viertel Bars + Corso Como</a:t>
+            </a:r>
+            <a:endParaRPr lang="en-US" sz="900" dirty="0"/>
+          </a:p>
+        </p:txBody>
+      </p:sp>
+      <p:sp>
+        <p:nvSpPr>
+          <p:cNvPr id="38" name="Shape 36"/>
           <p:cNvSpPr/>
           <p:nvPr/>
         </p:nvSpPr>
@@ -3684,7 +3762,7 @@
           </a:solidFill>
           <a:ln w="12700">
             <a:solidFill>
-              <a:srgbClr val="1EB4C8"/>
+              <a:srgbClr val="C8003C"/>
             </a:solidFill>
             <a:prstDash val="solid"/>
           </a:ln>
@@ -3692,7 +3770,7 @@
       </p:sp>
       <p:sp>
         <p:nvSpPr>
-          <p:cNvPr id="37" name="Shape 35"/>
+          <p:cNvPr id="39" name="Shape 37"/>
           <p:cNvSpPr/>
           <p:nvPr/>
         </p:nvSpPr>
@@ -3717,7 +3795,7 @@
       </p:sp>
       <p:sp>
         <p:nvSpPr>
-          <p:cNvPr id="38" name="Text 36"/>
+          <p:cNvPr id="40" name="Text 38"/>
           <p:cNvSpPr/>
           <p:nvPr/>
         </p:nvSpPr>
@@ -3742,7 +3820,7 @@
             <a:r>
               <a:rPr lang="en-US" sz="1100" b="1" dirty="0">
                 <a:solidFill>
-                  <a:srgbClr val="1EB4C8"/>
+                  <a:srgbClr val="C8003C"/>
                 </a:solidFill>
                 <a:latin typeface="Trebuchet MS" pitchFamily="34" charset="0"/>
                 <a:ea typeface="Trebuchet MS" pitchFamily="34" charset="-122"/>
@@ -3756,7 +3834,7 @@
       </p:sp>
       <p:sp>
         <p:nvSpPr>
-          <p:cNvPr id="39" name="Text 37"/>
+          <p:cNvPr id="41" name="Text 39"/>
           <p:cNvSpPr/>
           <p:nvPr/>
         </p:nvSpPr>
@@ -3795,7 +3873,7 @@
       </p:sp>
       <p:sp>
         <p:nvSpPr>
-          <p:cNvPr id="40" name="Text 38"/>
+          <p:cNvPr id="42" name="Text 40"/>
           <p:cNvSpPr/>
           <p:nvPr/>
         </p:nvSpPr>
@@ -3826,7 +3904,7 @@
                 <a:ea typeface="Calibri" pitchFamily="34" charset="-122"/>
                 <a:cs typeface="Calibri" pitchFamily="34" charset="-120"/>
               </a:rPr>
-              <a:t>☀  Frühstück auf der Terrasse bei 20°C</a:t>
+              <a:t>☕  Letzter Cappuccino an der Bar — nie im Sitzen!</a:t>
             </a:r>
             <a:endParaRPr lang="en-US" sz="900" dirty="0"/>
           </a:p>
@@ -3834,7 +3912,7 @@
       </p:sp>
       <p:sp>
         <p:nvSpPr>
-          <p:cNvPr id="41" name="Text 39"/>
+          <p:cNvPr id="43" name="Text 41"/>
           <p:cNvSpPr/>
           <p:nvPr/>
         </p:nvSpPr>
@@ -3865,7 +3943,7 @@
                 <a:ea typeface="Calibri" pitchFamily="34" charset="-122"/>
                 <a:cs typeface="Calibri" pitchFamily="34" charset="-120"/>
               </a:rPr>
-              <a:t>🥐  Pastizzi zum Frühstück (Ricotta-Blätterteig, €0,50!)</a:t>
+              <a:t>🛍  Souvenirs: Panettone, Amaro, Design-Mitbringsel</a:t>
             </a:r>
             <a:endParaRPr lang="en-US" sz="900" dirty="0"/>
           </a:p>
@@ -3873,7 +3951,7 @@
       </p:sp>
       <p:sp>
         <p:nvSpPr>
-          <p:cNvPr id="42" name="Text 40"/>
+          <p:cNvPr id="44" name="Text 42"/>
           <p:cNvSpPr/>
           <p:nvPr/>
         </p:nvSpPr>
@@ -3904,7 +3982,7 @@
                 <a:ea typeface="Calibri" pitchFamily="34" charset="-122"/>
                 <a:cs typeface="Calibri" pitchFamily="34" charset="-120"/>
               </a:rPr>
-              <a:t>🏖  Letzte Stunde am Meer (badefertig!)</a:t>
+              <a:t>🚂  Malpensa Express zum Flughafen (52 Min.)</a:t>
             </a:r>
             <a:endParaRPr lang="en-US" sz="900" dirty="0"/>
           </a:p>
@@ -3912,7 +3990,7 @@
       </p:sp>
       <p:sp>
         <p:nvSpPr>
-          <p:cNvPr id="43" name="Text 41"/>
+          <p:cNvPr id="45" name="Text 43"/>
           <p:cNvSpPr/>
           <p:nvPr/>
         </p:nvSpPr>
@@ -3943,7 +4021,7 @@
                 <a:ea typeface="Calibri" pitchFamily="34" charset="-122"/>
                 <a:cs typeface="Calibri" pitchFamily="34" charset="-120"/>
               </a:rPr>
-              <a:t>🛍  Souvenirs: Maltesisches Kreuz, Ftira-Brot, Cisk-Sixpack</a:t>
+              <a:t>✈  Eurowings MXP → DUS (Nachmittag)</a:t>
             </a:r>
             <a:endParaRPr lang="en-US" sz="900" dirty="0"/>
           </a:p>
@@ -3951,46 +4029,7 @@
       </p:sp>
       <p:sp>
         <p:nvSpPr>
-          <p:cNvPr id="44" name="Text 42"/>
-          <p:cNvSpPr/>
-          <p:nvPr/>
-        </p:nvSpPr>
-        <p:spPr>
-          <a:xfrm>
-            <a:off x="6309360" y="5276088"/>
-            <a:ext cx="5486400" cy="256032"/>
-          </a:xfrm>
-          <a:prstGeom prst="rect">
-            <a:avLst/>
-          </a:prstGeom>
-          <a:noFill/>
-          <a:ln/>
-        </p:spPr>
-        <p:txBody>
-          <a:bodyPr wrap="square" rtlCol="0" anchor="t"/>
-          <a:lstStyle/>
-          <a:p>
-            <a:pPr indent="0" marL="0">
-              <a:buNone/>
-            </a:pPr>
-            <a:r>
-              <a:rPr lang="en-US" sz="900" dirty="0">
-                <a:solidFill>
-                  <a:srgbClr val="E8E8E8"/>
-                </a:solidFill>
-                <a:latin typeface="Calibri" pitchFamily="34" charset="0"/>
-                <a:ea typeface="Calibri" pitchFamily="34" charset="-122"/>
-                <a:cs typeface="Calibri" pitchFamily="34" charset="-120"/>
-              </a:rPr>
-              <a:t>✈  Eurowings/Ryanair Rückflug nach DUS</a:t>
-            </a:r>
-            <a:endParaRPr lang="en-US" sz="900" dirty="0"/>
-          </a:p>
-        </p:txBody>
-      </p:sp>
-      <p:sp>
-        <p:nvSpPr>
-          <p:cNvPr id="45" name="Shape 43"/>
+          <p:cNvPr id="46" name="Shape 44"/>
           <p:cNvSpPr/>
           <p:nvPr/>
         </p:nvSpPr>
@@ -4015,7 +4054,7 @@
       </p:sp>
       <p:sp>
         <p:nvSpPr>
-          <p:cNvPr id="46" name="Text 44"/>
+          <p:cNvPr id="47" name="Text 45"/>
           <p:cNvSpPr/>
           <p:nvPr/>
         </p:nvSpPr>
@@ -4046,7 +4085,7 @@
                 <a:ea typeface="Calibri" pitchFamily="34" charset="-122"/>
                 <a:cs typeface="Calibri" pitchFamily="34" charset="-120"/>
               </a:rPr>
-              <a:t>Bootsausflug Blaue Lagune: katarinaLine.com oder lokal buchen  ·  Kochkurs: experiencemalta.com  ·  Stadtführung: visitvalletta.mt  ·  Paceville Clubs: hugo.com.mt</a:t>
+              <a:t>Halloween Kneipentour: eventbrite.it → "Milan Halloween Bar Crawl"  ·  Kochkurs: cookly.app → "Milan Pasta Class"  ·  Stadtführung: neweuropetours.eu/milan  ·  Alcatraz Club: alcatrazmilano.com</a:t>
             </a:r>
             <a:endParaRPr lang="en-US" sz="800" dirty="0"/>
           </a:p>
@@ -4054,7 +4093,7 @@
       </p:sp>
       <p:sp>
         <p:nvSpPr>
-          <p:cNvPr id="47" name="Shape 45"/>
+          <p:cNvPr id="48" name="Shape 46"/>
           <p:cNvSpPr/>
           <p:nvPr/>
         </p:nvSpPr>
@@ -4124,11 +4163,11 @@
             <a:avLst/>
           </a:prstGeom>
           <a:solidFill>
-            <a:srgbClr val="1EB4C8"/>
+            <a:srgbClr val="C8003C"/>
           </a:solidFill>
           <a:ln w="12700">
             <a:solidFill>
-              <a:srgbClr val="1EB4C8"/>
+              <a:srgbClr val="C8003C"/>
             </a:solidFill>
             <a:prstDash val="solid"/>
           </a:ln>
@@ -4192,7 +4231,7 @@
                 <a:ea typeface="Trebuchet MS" pitchFamily="34" charset="-122"/>
                 <a:cs typeface="Trebuchet MS" pitchFamily="34" charset="-120"/>
               </a:rPr>
-              <a:t>🇲🇹  MALTA — KOSTENÜBERSICHT</a:t>
+              <a:t>🇮🇹  MAILAND — KOSTENÜBERSICHT</a:t>
             </a:r>
             <a:endParaRPr lang="en-US" sz="2200" dirty="0"/>
           </a:p>
@@ -4213,11 +4252,11 @@
             <a:avLst/>
           </a:prstGeom>
           <a:solidFill>
-            <a:srgbClr val="1EB4C8"/>
+            <a:srgbClr val="C8003C"/>
           </a:solidFill>
           <a:ln w="12700">
             <a:solidFill>
-              <a:srgbClr val="1EB4C8"/>
+              <a:srgbClr val="C8003C"/>
             </a:solidFill>
             <a:prstDash val="solid"/>
           </a:ln>
@@ -4263,7 +4302,7 @@
                       <a:r>
                         <a:rPr lang="en-US" sz="1200" b="1" dirty="0">
                           <a:solidFill>
-                            <a:srgbClr val="1EB4C8"/>
+                            <a:srgbClr val="C8003C"/>
                           </a:solidFill>
                           <a:latin typeface="Trebuchet MS" pitchFamily="34" charset="0"/>
                           <a:ea typeface="Trebuchet MS" pitchFamily="34" charset="-122"/>
@@ -4331,7 +4370,7 @@
                       <a:r>
                         <a:rPr lang="en-US" sz="1200" b="1" dirty="0">
                           <a:solidFill>
-                            <a:srgbClr val="1EB4C8"/>
+                            <a:srgbClr val="C8003C"/>
                           </a:solidFill>
                           <a:latin typeface="Trebuchet MS" pitchFamily="34" charset="0"/>
                           <a:ea typeface="Trebuchet MS" pitchFamily="34" charset="-122"/>
@@ -4399,7 +4438,7 @@
                       <a:r>
                         <a:rPr lang="en-US" sz="1200" b="1" dirty="0">
                           <a:solidFill>
-                            <a:srgbClr val="1EB4C8"/>
+                            <a:srgbClr val="C8003C"/>
                           </a:solidFill>
                           <a:latin typeface="Trebuchet MS" pitchFamily="34" charset="0"/>
                           <a:ea typeface="Trebuchet MS" pitchFamily="34" charset="-122"/>
@@ -4611,7 +4650,7 @@
                           <a:ea typeface="Calibri" pitchFamily="34" charset="-122"/>
                           <a:cs typeface="Calibri" pitchFamily="34" charset="-120"/>
                         </a:rPr>
-                        <a:t>Ryanair  FMO/DTM ↔ MLA  (+ Anfahrt ~€15)</a:t>
+                        <a:t>Eurowings EW  DUS ↔ MXP (Direktflug)</a:t>
                       </a:r>
                       <a:endParaRPr lang="en-US" sz="1100" dirty="0">
                         <a:latin typeface="Calibri" charset="0"/>
@@ -4679,7 +4718,7 @@
                           <a:ea typeface="Calibri" pitchFamily="34" charset="-122"/>
                           <a:cs typeface="Calibri" pitchFamily="34" charset="-120"/>
                         </a:rPr>
-                        <a:t>~€140</a:t>
+                        <a:t>~€170</a:t>
                       </a:r>
                       <a:endParaRPr lang="en-US" sz="1100" dirty="0">
                         <a:latin typeface="Calibri" charset="0"/>
@@ -4747,7 +4786,7 @@
                           <a:ea typeface="Calibri" pitchFamily="34" charset="-122"/>
                           <a:cs typeface="Calibri" pitchFamily="34" charset="-120"/>
                         </a:rPr>
-                        <a:t>~€560</a:t>
+                        <a:t>~€680</a:t>
                       </a:r>
                       <a:endParaRPr lang="en-US" sz="1100" dirty="0">
                         <a:latin typeface="Calibri" charset="0"/>
@@ -4885,7 +4924,7 @@
                           <a:ea typeface="Calibri" pitchFamily="34" charset="-122"/>
                           <a:cs typeface="Calibri" pitchFamily="34" charset="-120"/>
                         </a:rPr>
-                        <a:t>Airbnb St. Julian's — 3 Nächte (inkl. Gebühren)</a:t>
+                        <a:t>Airbnb Navigli — 3 Nächte (inkl. Gebühren)</a:t>
                       </a:r>
                       <a:endParaRPr lang="en-US" sz="1100" dirty="0">
                         <a:latin typeface="Calibri" charset="0"/>
@@ -4953,7 +4992,7 @@
                           <a:ea typeface="Calibri" pitchFamily="34" charset="-122"/>
                           <a:cs typeface="Calibri" pitchFamily="34" charset="-120"/>
                         </a:rPr>
-                        <a:t>~€89</a:t>
+                        <a:t>~€115</a:t>
                       </a:r>
                       <a:endParaRPr lang="en-US" sz="1100" dirty="0">
                         <a:latin typeface="Calibri" charset="0"/>
@@ -5021,7 +5060,7 @@
                           <a:ea typeface="Calibri" pitchFamily="34" charset="-122"/>
                           <a:cs typeface="Calibri" pitchFamily="34" charset="-120"/>
                         </a:rPr>
-                        <a:t>~€355</a:t>
+                        <a:t>~€460</a:t>
                       </a:r>
                       <a:endParaRPr lang="en-US" sz="1100" dirty="0">
                         <a:latin typeface="Calibri" charset="0"/>
@@ -5091,7 +5130,7 @@
                           <a:ea typeface="Calibri" pitchFamily="34" charset="-122"/>
                           <a:cs typeface="Calibri" pitchFamily="34" charset="-120"/>
                         </a:rPr>
-                        <a:t>Halloween-Party</a:t>
+                        <a:t>Halloween Kneipentour</a:t>
                       </a:r>
                       <a:endParaRPr lang="en-US" sz="1100" dirty="0">
                         <a:latin typeface="Calibri" charset="0"/>
@@ -5159,7 +5198,7 @@
                           <a:ea typeface="Calibri" pitchFamily="34" charset="-122"/>
                           <a:cs typeface="Calibri" pitchFamily="34" charset="-120"/>
                         </a:rPr>
-                        <a:t>Paceville Clubeintritt (31. Okt.) — meist günstiger</a:t>
+                        <a:t>Bar Crawl Navigli / Darsena (31. Okt.)</a:t>
                       </a:r>
                       <a:endParaRPr lang="en-US" sz="1100" dirty="0">
                         <a:latin typeface="Calibri" charset="0"/>
@@ -5227,7 +5266,7 @@
                           <a:ea typeface="Calibri" pitchFamily="34" charset="-122"/>
                           <a:cs typeface="Calibri" pitchFamily="34" charset="-120"/>
                         </a:rPr>
-                        <a:t>~€15</a:t>
+                        <a:t>€20</a:t>
                       </a:r>
                       <a:endParaRPr lang="en-US" sz="1100" dirty="0">
                         <a:latin typeface="Calibri" charset="0"/>
@@ -5295,7 +5334,7 @@
                           <a:ea typeface="Calibri" pitchFamily="34" charset="-122"/>
                           <a:cs typeface="Calibri" pitchFamily="34" charset="-120"/>
                         </a:rPr>
-                        <a:t>~€60</a:t>
+                        <a:t>€80</a:t>
                       </a:r>
                       <a:endParaRPr lang="en-US" sz="1100" dirty="0">
                         <a:latin typeface="Calibri" charset="0"/>
@@ -5433,7 +5472,7 @@
                           <a:ea typeface="Calibri" pitchFamily="34" charset="-122"/>
                           <a:cs typeface="Calibri" pitchFamily="34" charset="-120"/>
                         </a:rPr>
-                        <a:t>Maltesische Küche — Fenek + Pastizzi + Wein</a:t>
+                        <a:t>Pasta-Kochkurs Navigli — Risotto + Ossobuco</a:t>
                       </a:r>
                       <a:endParaRPr lang="en-US" sz="1100" dirty="0">
                         <a:latin typeface="Calibri" charset="0"/>
@@ -5501,7 +5540,7 @@
                           <a:ea typeface="Calibri" pitchFamily="34" charset="-122"/>
                           <a:cs typeface="Calibri" pitchFamily="34" charset="-120"/>
                         </a:rPr>
-                        <a:t>€65</a:t>
+                        <a:t>€70</a:t>
                       </a:r>
                       <a:endParaRPr lang="en-US" sz="1100" dirty="0">
                         <a:latin typeface="Calibri" charset="0"/>
@@ -5569,7 +5608,7 @@
                           <a:ea typeface="Calibri" pitchFamily="34" charset="-122"/>
                           <a:cs typeface="Calibri" pitchFamily="34" charset="-120"/>
                         </a:rPr>
-                        <a:t>€260</a:t>
+                        <a:t>€280</a:t>
                       </a:r>
                       <a:endParaRPr lang="en-US" sz="1100" dirty="0">
                         <a:latin typeface="Calibri" charset="0"/>
@@ -5617,280 +5656,6 @@
                     </a:lnB>
                     <a:solidFill>
                       <a:srgbClr val="1A1A2E"/>
-                    </a:solidFill>
-                  </a:tcPr>
-                </a:tc>
-              </a:tr>
-              <a:tr h="429768">
-                <a:tc>
-                  <a:txBody>
-                    <a:bodyPr/>
-                    <a:lstStyle/>
-                    <a:p>
-                      <a:pPr algn="l" indent="0" marL="0">
-                        <a:buNone/>
-                      </a:pPr>
-                      <a:r>
-                        <a:rPr lang="en-US" sz="1100" dirty="0">
-                          <a:solidFill>
-                            <a:srgbClr val="E8E8E8"/>
-                          </a:solidFill>
-                          <a:latin typeface="Calibri" pitchFamily="34" charset="0"/>
-                          <a:ea typeface="Calibri" pitchFamily="34" charset="-122"/>
-                          <a:cs typeface="Calibri" pitchFamily="34" charset="-120"/>
-                        </a:rPr>
-                        <a:t>Bootsausflug</a:t>
-                      </a:r>
-                      <a:endParaRPr lang="en-US" sz="1100" dirty="0">
-                        <a:latin typeface="Calibri" charset="0"/>
-                        <a:ea typeface="Calibri" charset="0"/>
-                        <a:cs typeface="Calibri" charset="0"/>
-                      </a:endParaRPr>
-                    </a:p>
-                  </a:txBody>
-                  <a:tcPr marL="91440" marR="91440" marT="45720" marB="45720" anchor="ctr">
-                    <a:lnL w="12700" cap="flat" cmpd="sng" algn="ctr">
-                      <a:solidFill>
-                        <a:srgbClr val="0F3460"/>
-                      </a:solidFill>
-                      <a:prstDash val="solid"/>
-                      <a:round/>
-                      <a:headEnd type="none" w="med" len="med"/>
-                      <a:tailEnd type="none" w="med" len="med"/>
-                    </a:lnL>
-                    <a:lnR w="12700" cap="flat" cmpd="sng" algn="ctr">
-                      <a:solidFill>
-                        <a:srgbClr val="0F3460"/>
-                      </a:solidFill>
-                      <a:prstDash val="solid"/>
-                      <a:round/>
-                      <a:headEnd type="none" w="med" len="med"/>
-                      <a:tailEnd type="none" w="med" len="med"/>
-                    </a:lnR>
-                    <a:lnT w="12700" cap="flat" cmpd="sng" algn="ctr">
-                      <a:solidFill>
-                        <a:srgbClr val="0F3460"/>
-                      </a:solidFill>
-                      <a:prstDash val="solid"/>
-                      <a:round/>
-                      <a:headEnd type="none" w="med" len="med"/>
-                      <a:tailEnd type="none" w="med" len="med"/>
-                    </a:lnT>
-                    <a:lnB w="12700" cap="flat" cmpd="sng" algn="ctr">
-                      <a:solidFill>
-                        <a:srgbClr val="0F3460"/>
-                      </a:solidFill>
-                      <a:prstDash val="solid"/>
-                      <a:round/>
-                      <a:headEnd type="none" w="med" len="med"/>
-                      <a:tailEnd type="none" w="med" len="med"/>
-                    </a:lnB>
-                    <a:solidFill>
-                      <a:srgbClr val="16213E"/>
-                    </a:solidFill>
-                  </a:tcPr>
-                </a:tc>
-                <a:tc>
-                  <a:txBody>
-                    <a:bodyPr/>
-                    <a:lstStyle/>
-                    <a:p>
-                      <a:pPr algn="l" indent="0" marL="0">
-                        <a:buNone/>
-                      </a:pPr>
-                      <a:r>
-                        <a:rPr lang="en-US" sz="1100" dirty="0">
-                          <a:solidFill>
-                            <a:srgbClr val="E8E8E8"/>
-                          </a:solidFill>
-                          <a:latin typeface="Calibri" pitchFamily="34" charset="0"/>
-                          <a:ea typeface="Calibri" pitchFamily="34" charset="-122"/>
-                          <a:cs typeface="Calibri" pitchFamily="34" charset="-120"/>
-                        </a:rPr>
-                        <a:t>Blaue Lagune (31. Okt. tagsüber)</a:t>
-                      </a:r>
-                      <a:endParaRPr lang="en-US" sz="1100" dirty="0">
-                        <a:latin typeface="Calibri" charset="0"/>
-                        <a:ea typeface="Calibri" charset="0"/>
-                        <a:cs typeface="Calibri" charset="0"/>
-                      </a:endParaRPr>
-                    </a:p>
-                  </a:txBody>
-                  <a:tcPr marL="91440" marR="91440" marT="45720" marB="45720" anchor="ctr">
-                    <a:lnL w="12700" cap="flat" cmpd="sng" algn="ctr">
-                      <a:solidFill>
-                        <a:srgbClr val="0F3460"/>
-                      </a:solidFill>
-                      <a:prstDash val="solid"/>
-                      <a:round/>
-                      <a:headEnd type="none" w="med" len="med"/>
-                      <a:tailEnd type="none" w="med" len="med"/>
-                    </a:lnL>
-                    <a:lnR w="12700" cap="flat" cmpd="sng" algn="ctr">
-                      <a:solidFill>
-                        <a:srgbClr val="0F3460"/>
-                      </a:solidFill>
-                      <a:prstDash val="solid"/>
-                      <a:round/>
-                      <a:headEnd type="none" w="med" len="med"/>
-                      <a:tailEnd type="none" w="med" len="med"/>
-                    </a:lnR>
-                    <a:lnT w="12700" cap="flat" cmpd="sng" algn="ctr">
-                      <a:solidFill>
-                        <a:srgbClr val="0F3460"/>
-                      </a:solidFill>
-                      <a:prstDash val="solid"/>
-                      <a:round/>
-                      <a:headEnd type="none" w="med" len="med"/>
-                      <a:tailEnd type="none" w="med" len="med"/>
-                    </a:lnT>
-                    <a:lnB w="12700" cap="flat" cmpd="sng" algn="ctr">
-                      <a:solidFill>
-                        <a:srgbClr val="0F3460"/>
-                      </a:solidFill>
-                      <a:prstDash val="solid"/>
-                      <a:round/>
-                      <a:headEnd type="none" w="med" len="med"/>
-                      <a:tailEnd type="none" w="med" len="med"/>
-                    </a:lnB>
-                    <a:solidFill>
-                      <a:srgbClr val="16213E"/>
-                    </a:solidFill>
-                  </a:tcPr>
-                </a:tc>
-                <a:tc>
-                  <a:txBody>
-                    <a:bodyPr/>
-                    <a:lstStyle/>
-                    <a:p>
-                      <a:pPr algn="r" indent="0" marL="0">
-                        <a:buNone/>
-                      </a:pPr>
-                      <a:r>
-                        <a:rPr lang="en-US" sz="1100" dirty="0">
-                          <a:solidFill>
-                            <a:srgbClr val="E8E8E8"/>
-                          </a:solidFill>
-                          <a:latin typeface="Calibri" pitchFamily="34" charset="0"/>
-                          <a:ea typeface="Calibri" pitchFamily="34" charset="-122"/>
-                          <a:cs typeface="Calibri" pitchFamily="34" charset="-120"/>
-                        </a:rPr>
-                        <a:t>€35</a:t>
-                      </a:r>
-                      <a:endParaRPr lang="en-US" sz="1100" dirty="0">
-                        <a:latin typeface="Calibri" charset="0"/>
-                        <a:ea typeface="Calibri" charset="0"/>
-                        <a:cs typeface="Calibri" charset="0"/>
-                      </a:endParaRPr>
-                    </a:p>
-                  </a:txBody>
-                  <a:tcPr marL="91440" marR="91440" marT="45720" marB="45720" anchor="ctr">
-                    <a:lnL w="12700" cap="flat" cmpd="sng" algn="ctr">
-                      <a:solidFill>
-                        <a:srgbClr val="0F3460"/>
-                      </a:solidFill>
-                      <a:prstDash val="solid"/>
-                      <a:round/>
-                      <a:headEnd type="none" w="med" len="med"/>
-                      <a:tailEnd type="none" w="med" len="med"/>
-                    </a:lnL>
-                    <a:lnR w="12700" cap="flat" cmpd="sng" algn="ctr">
-                      <a:solidFill>
-                        <a:srgbClr val="0F3460"/>
-                      </a:solidFill>
-                      <a:prstDash val="solid"/>
-                      <a:round/>
-                      <a:headEnd type="none" w="med" len="med"/>
-                      <a:tailEnd type="none" w="med" len="med"/>
-                    </a:lnR>
-                    <a:lnT w="12700" cap="flat" cmpd="sng" algn="ctr">
-                      <a:solidFill>
-                        <a:srgbClr val="0F3460"/>
-                      </a:solidFill>
-                      <a:prstDash val="solid"/>
-                      <a:round/>
-                      <a:headEnd type="none" w="med" len="med"/>
-                      <a:tailEnd type="none" w="med" len="med"/>
-                    </a:lnT>
-                    <a:lnB w="12700" cap="flat" cmpd="sng" algn="ctr">
-                      <a:solidFill>
-                        <a:srgbClr val="0F3460"/>
-                      </a:solidFill>
-                      <a:prstDash val="solid"/>
-                      <a:round/>
-                      <a:headEnd type="none" w="med" len="med"/>
-                      <a:tailEnd type="none" w="med" len="med"/>
-                    </a:lnB>
-                    <a:solidFill>
-                      <a:srgbClr val="16213E"/>
-                    </a:solidFill>
-                  </a:tcPr>
-                </a:tc>
-                <a:tc>
-                  <a:txBody>
-                    <a:bodyPr/>
-                    <a:lstStyle/>
-                    <a:p>
-                      <a:pPr algn="r" indent="0" marL="0">
-                        <a:buNone/>
-                      </a:pPr>
-                      <a:r>
-                        <a:rPr lang="en-US" sz="1100" dirty="0">
-                          <a:solidFill>
-                            <a:srgbClr val="E8E8E8"/>
-                          </a:solidFill>
-                          <a:latin typeface="Calibri" pitchFamily="34" charset="0"/>
-                          <a:ea typeface="Calibri" pitchFamily="34" charset="-122"/>
-                          <a:cs typeface="Calibri" pitchFamily="34" charset="-120"/>
-                        </a:rPr>
-                        <a:t>€140</a:t>
-                      </a:r>
-                      <a:endParaRPr lang="en-US" sz="1100" dirty="0">
-                        <a:latin typeface="Calibri" charset="0"/>
-                        <a:ea typeface="Calibri" charset="0"/>
-                        <a:cs typeface="Calibri" charset="0"/>
-                      </a:endParaRPr>
-                    </a:p>
-                  </a:txBody>
-                  <a:tcPr marL="91440" marR="91440" marT="45720" marB="45720" anchor="ctr">
-                    <a:lnL w="12700" cap="flat" cmpd="sng" algn="ctr">
-                      <a:solidFill>
-                        <a:srgbClr val="0F3460"/>
-                      </a:solidFill>
-                      <a:prstDash val="solid"/>
-                      <a:round/>
-                      <a:headEnd type="none" w="med" len="med"/>
-                      <a:tailEnd type="none" w="med" len="med"/>
-                    </a:lnL>
-                    <a:lnR w="12700" cap="flat" cmpd="sng" algn="ctr">
-                      <a:solidFill>
-                        <a:srgbClr val="0F3460"/>
-                      </a:solidFill>
-                      <a:prstDash val="solid"/>
-                      <a:round/>
-                      <a:headEnd type="none" w="med" len="med"/>
-                      <a:tailEnd type="none" w="med" len="med"/>
-                    </a:lnR>
-                    <a:lnT w="12700" cap="flat" cmpd="sng" algn="ctr">
-                      <a:solidFill>
-                        <a:srgbClr val="0F3460"/>
-                      </a:solidFill>
-                      <a:prstDash val="solid"/>
-                      <a:round/>
-                      <a:headEnd type="none" w="med" len="med"/>
-                      <a:tailEnd type="none" w="med" len="med"/>
-                    </a:lnT>
-                    <a:lnB w="12700" cap="flat" cmpd="sng" algn="ctr">
-                      <a:solidFill>
-                        <a:srgbClr val="0F3460"/>
-                      </a:solidFill>
-                      <a:prstDash val="solid"/>
-                      <a:round/>
-                      <a:headEnd type="none" w="med" len="med"/>
-                      <a:tailEnd type="none" w="med" len="med"/>
-                    </a:lnB>
-                    <a:solidFill>
-                      <a:srgbClr val="16213E"/>
                     </a:solidFill>
                   </a:tcPr>
                 </a:tc>
@@ -5960,7 +5725,7 @@
                       <a:tailEnd type="none" w="med" len="med"/>
                     </a:lnB>
                     <a:solidFill>
-                      <a:srgbClr val="1A1A2E"/>
+                      <a:srgbClr val="16213E"/>
                     </a:solidFill>
                   </a:tcPr>
                 </a:tc>
@@ -5981,7 +5746,7 @@
                           <a:ea typeface="Calibri" pitchFamily="34" charset="-122"/>
                           <a:cs typeface="Calibri" pitchFamily="34" charset="-120"/>
                         </a:rPr>
-                        <a:t>Valletta Free Tour (Trinkgeld)</a:t>
+                        <a:t>SANDEMANs — Duomo (Trinkgeld)</a:t>
                       </a:r>
                       <a:endParaRPr lang="en-US" sz="1100" dirty="0">
                         <a:latin typeface="Calibri" charset="0"/>
@@ -6028,7 +5793,7 @@
                       <a:tailEnd type="none" w="med" len="med"/>
                     </a:lnB>
                     <a:solidFill>
-                      <a:srgbClr val="1A1A2E"/>
+                      <a:srgbClr val="16213E"/>
                     </a:solidFill>
                   </a:tcPr>
                 </a:tc>
@@ -6096,7 +5861,7 @@
                       <a:tailEnd type="none" w="med" len="med"/>
                     </a:lnB>
                     <a:solidFill>
-                      <a:srgbClr val="1A1A2E"/>
+                      <a:srgbClr val="16213E"/>
                     </a:solidFill>
                   </a:tcPr>
                 </a:tc>
@@ -6164,7 +5929,7 @@
                       <a:tailEnd type="none" w="med" len="med"/>
                     </a:lnB>
                     <a:solidFill>
-                      <a:srgbClr val="1A1A2E"/>
+                      <a:srgbClr val="16213E"/>
                     </a:solidFill>
                   </a:tcPr>
                 </a:tc>
@@ -6234,7 +5999,7 @@
                       <a:tailEnd type="none" w="med" len="med"/>
                     </a:lnB>
                     <a:solidFill>
-                      <a:srgbClr val="16213E"/>
+                      <a:srgbClr val="1A1A2E"/>
                     </a:solidFill>
                   </a:tcPr>
                 </a:tc>
@@ -6255,7 +6020,7 @@
                           <a:ea typeface="Calibri" pitchFamily="34" charset="-122"/>
                           <a:cs typeface="Calibri" pitchFamily="34" charset="-120"/>
                         </a:rPr>
-                        <a:t>Fisch, Pasta, Pastizzi, Hafenrestaurants</a:t>
+                        <a:t>Trattoria, Aperitivo-Buffet, Bar-Frühstück</a:t>
                       </a:r>
                       <a:endParaRPr lang="en-US" sz="1100" dirty="0">
                         <a:latin typeface="Calibri" charset="0"/>
@@ -6302,7 +6067,7 @@
                       <a:tailEnd type="none" w="med" len="med"/>
                     </a:lnB>
                     <a:solidFill>
-                      <a:srgbClr val="16213E"/>
+                      <a:srgbClr val="1A1A2E"/>
                     </a:solidFill>
                   </a:tcPr>
                 </a:tc>
@@ -6323,7 +6088,7 @@
                           <a:ea typeface="Calibri" pitchFamily="34" charset="-122"/>
                           <a:cs typeface="Calibri" pitchFamily="34" charset="-120"/>
                         </a:rPr>
-                        <a:t>~€95</a:t>
+                        <a:t>~€130</a:t>
                       </a:r>
                       <a:endParaRPr lang="en-US" sz="1100" dirty="0">
                         <a:latin typeface="Calibri" charset="0"/>
@@ -6370,7 +6135,7 @@
                       <a:tailEnd type="none" w="med" len="med"/>
                     </a:lnB>
                     <a:solidFill>
-                      <a:srgbClr val="16213E"/>
+                      <a:srgbClr val="1A1A2E"/>
                     </a:solidFill>
                   </a:tcPr>
                 </a:tc>
@@ -6391,7 +6156,7 @@
                           <a:ea typeface="Calibri" pitchFamily="34" charset="-122"/>
                           <a:cs typeface="Calibri" pitchFamily="34" charset="-120"/>
                         </a:rPr>
-                        <a:t>~€380</a:t>
+                        <a:t>~€520</a:t>
                       </a:r>
                       <a:endParaRPr lang="en-US" sz="1100" dirty="0">
                         <a:latin typeface="Calibri" charset="0"/>
@@ -6438,7 +6203,7 @@
                       <a:tailEnd type="none" w="med" len="med"/>
                     </a:lnB>
                     <a:solidFill>
-                      <a:srgbClr val="16213E"/>
+                      <a:srgbClr val="1A1A2E"/>
                     </a:solidFill>
                   </a:tcPr>
                 </a:tc>
@@ -6508,7 +6273,7 @@
                       <a:tailEnd type="none" w="med" len="med"/>
                     </a:lnB>
                     <a:solidFill>
-                      <a:srgbClr val="1A1A2E"/>
+                      <a:srgbClr val="16213E"/>
                     </a:solidFill>
                   </a:tcPr>
                 </a:tc>
@@ -6529,7 +6294,7 @@
                           <a:ea typeface="Calibri" pitchFamily="34" charset="-122"/>
                           <a:cs typeface="Calibri" pitchFamily="34" charset="-120"/>
                         </a:rPr>
-                        <a:t>Paceville Clubs + Strandbar (3 Nächte)</a:t>
+                        <a:t>Navigli + Corso Como + Clubs (3 Nächte)</a:t>
                       </a:r>
                       <a:endParaRPr lang="en-US" sz="1100" dirty="0">
                         <a:latin typeface="Calibri" charset="0"/>
@@ -6576,7 +6341,7 @@
                       <a:tailEnd type="none" w="med" len="med"/>
                     </a:lnB>
                     <a:solidFill>
-                      <a:srgbClr val="1A1A2E"/>
+                      <a:srgbClr val="16213E"/>
                     </a:solidFill>
                   </a:tcPr>
                 </a:tc>
@@ -6597,7 +6362,7 @@
                           <a:ea typeface="Calibri" pitchFamily="34" charset="-122"/>
                           <a:cs typeface="Calibri" pitchFamily="34" charset="-120"/>
                         </a:rPr>
-                        <a:t>~€110</a:t>
+                        <a:t>~€160</a:t>
                       </a:r>
                       <a:endParaRPr lang="en-US" sz="1100" dirty="0">
                         <a:latin typeface="Calibri" charset="0"/>
@@ -6644,7 +6409,7 @@
                       <a:tailEnd type="none" w="med" len="med"/>
                     </a:lnB>
                     <a:solidFill>
-                      <a:srgbClr val="1A1A2E"/>
+                      <a:srgbClr val="16213E"/>
                     </a:solidFill>
                   </a:tcPr>
                 </a:tc>
@@ -6665,7 +6430,7 @@
                           <a:ea typeface="Calibri" pitchFamily="34" charset="-122"/>
                           <a:cs typeface="Calibri" pitchFamily="34" charset="-120"/>
                         </a:rPr>
-                        <a:t>~€440</a:t>
+                        <a:t>~€640</a:t>
                       </a:r>
                       <a:endParaRPr lang="en-US" sz="1100" dirty="0">
                         <a:latin typeface="Calibri" charset="0"/>
@@ -6712,7 +6477,7 @@
                       <a:tailEnd type="none" w="med" len="med"/>
                     </a:lnB>
                     <a:solidFill>
-                      <a:srgbClr val="1A1A2E"/>
+                      <a:srgbClr val="16213E"/>
                     </a:solidFill>
                   </a:tcPr>
                 </a:tc>
@@ -6782,7 +6547,7 @@
                       <a:tailEnd type="none" w="med" len="med"/>
                     </a:lnB>
                     <a:solidFill>
-                      <a:srgbClr val="16213E"/>
+                      <a:srgbClr val="1A1A2E"/>
                     </a:solidFill>
                   </a:tcPr>
                 </a:tc>
@@ -6803,7 +6568,7 @@
                           <a:ea typeface="Calibri" pitchFamily="34" charset="-122"/>
                           <a:cs typeface="Calibri" pitchFamily="34" charset="-120"/>
                         </a:rPr>
-                        <a:t>Taxi Flughafen, Bus, Souvenirs</a:t>
+                        <a:t>Malpensa Express, Tram, Souvenirs</a:t>
                       </a:r>
                       <a:endParaRPr lang="en-US" sz="1100" dirty="0">
                         <a:latin typeface="Calibri" charset="0"/>
@@ -6850,7 +6615,7 @@
                       <a:tailEnd type="none" w="med" len="med"/>
                     </a:lnB>
                     <a:solidFill>
-                      <a:srgbClr val="16213E"/>
+                      <a:srgbClr val="1A1A2E"/>
                     </a:solidFill>
                   </a:tcPr>
                 </a:tc>
@@ -6871,7 +6636,7 @@
                           <a:ea typeface="Calibri" pitchFamily="34" charset="-122"/>
                           <a:cs typeface="Calibri" pitchFamily="34" charset="-120"/>
                         </a:rPr>
-                        <a:t>~€25</a:t>
+                        <a:t>~€30</a:t>
                       </a:r>
                       <a:endParaRPr lang="en-US" sz="1100" dirty="0">
                         <a:latin typeface="Calibri" charset="0"/>
@@ -6918,7 +6683,7 @@
                       <a:tailEnd type="none" w="med" len="med"/>
                     </a:lnB>
                     <a:solidFill>
-                      <a:srgbClr val="16213E"/>
+                      <a:srgbClr val="1A1A2E"/>
                     </a:solidFill>
                   </a:tcPr>
                 </a:tc>
@@ -6939,7 +6704,7 @@
                           <a:ea typeface="Calibri" pitchFamily="34" charset="-122"/>
                           <a:cs typeface="Calibri" pitchFamily="34" charset="-120"/>
                         </a:rPr>
-                        <a:t>~€100</a:t>
+                        <a:t>~€120</a:t>
                       </a:r>
                       <a:endParaRPr lang="en-US" sz="1100" dirty="0">
                         <a:latin typeface="Calibri" charset="0"/>
@@ -6986,7 +6751,7 @@
                       <a:tailEnd type="none" w="med" len="med"/>
                     </a:lnB>
                     <a:solidFill>
-                      <a:srgbClr val="16213E"/>
+                      <a:srgbClr val="1A1A2E"/>
                     </a:solidFill>
                   </a:tcPr>
                 </a:tc>
@@ -7077,7 +6842,7 @@
                           <a:ea typeface="Trebuchet MS" pitchFamily="34" charset="-122"/>
                           <a:cs typeface="Trebuchet MS" pitchFamily="34" charset="-120"/>
                         </a:rPr>
-                        <a:t>Malta, 30. Okt. – 2. Nov. 2025</a:t>
+                        <a:t>Mailand, 30. Okt. – 2. Nov. 2025</a:t>
                       </a:r>
                       <a:endParaRPr lang="en-US" sz="1300" dirty="0">
                         <a:latin typeface="Trebuchet MS" charset="0"/>
@@ -7139,13 +6904,13 @@
                       <a:r>
                         <a:rPr lang="en-US" sz="1300" b="1" dirty="0">
                           <a:solidFill>
-                            <a:srgbClr val="1EB4C8"/>
+                            <a:srgbClr val="C8003C"/>
                           </a:solidFill>
                           <a:latin typeface="Trebuchet MS" pitchFamily="34" charset="0"/>
                           <a:ea typeface="Trebuchet MS" pitchFamily="34" charset="-122"/>
                           <a:cs typeface="Trebuchet MS" pitchFamily="34" charset="-120"/>
                         </a:rPr>
-                        <a:t>~€586</a:t>
+                        <a:t>~€707</a:t>
                       </a:r>
                       <a:endParaRPr lang="en-US" sz="1300" dirty="0">
                         <a:latin typeface="Trebuchet MS" charset="0"/>
@@ -7213,7 +6978,7 @@
                           <a:ea typeface="Trebuchet MS" pitchFamily="34" charset="-122"/>
                           <a:cs typeface="Trebuchet MS" pitchFamily="34" charset="-120"/>
                         </a:rPr>
-                        <a:t>~€2.344</a:t>
+                        <a:t>~€2.828</a:t>
                       </a:r>
                       <a:endParaRPr lang="en-US" sz="1300" dirty="0">
                         <a:latin typeface="Trebuchet MS" charset="0"/>
@@ -7277,7 +7042,7 @@
         </p:nvSpPr>
         <p:spPr>
           <a:xfrm>
-            <a:off x="457200" y="5687568"/>
+            <a:off x="457200" y="5257800"/>
             <a:ext cx="11247120" cy="594360"/>
           </a:xfrm>
           <a:prstGeom prst="rect">
@@ -7288,7 +7053,7 @@
           </a:solidFill>
           <a:ln w="12700">
             <a:solidFill>
-              <a:srgbClr val="1EB4C8"/>
+              <a:srgbClr val="C8003C"/>
             </a:solidFill>
             <a:prstDash val="solid"/>
           </a:ln>
@@ -7302,7 +7067,7 @@
         </p:nvSpPr>
         <p:spPr>
           <a:xfrm>
-            <a:off x="594360" y="5733288"/>
+            <a:off x="594360" y="5303520"/>
             <a:ext cx="10972800" cy="502920"/>
           </a:xfrm>
           <a:prstGeom prst="rect">
@@ -7327,7 +7092,7 @@
                 <a:ea typeface="Calibri" pitchFamily="34" charset="-122"/>
                 <a:cs typeface="Calibri" pitchFamily="34" charset="-120"/>
               </a:rPr>
-              <a:t>💡 Günstigste Unterkunft dieser Auswahl!  Cisk-Bier ab €2,50.  Pastizzi (maltesisches Gebäck) für €0,50.  Baden im Mittelmeer noch möglich!  Blaue Lagune ist eines der schönsten Gewässer Europas.</a:t>
+              <a:t>💡 Kürzester Flug dieser Auswahl (1h 40m ab DUS)!  Aperitivo-Zeit (18–21 Uhr): Drink + gratis Buffet ~€10 — spart Abendessenkosten.  Cappuccino an der Bar stehend: €1,50.  Budgetrahmen: €600–850 p.P.</a:t>
             </a:r>
             <a:endParaRPr lang="en-US" sz="1050" dirty="0"/>
           </a:p>
@@ -7473,7 +7238,7 @@
                 <a:ea typeface="Trebuchet MS" pitchFamily="34" charset="-122"/>
                 <a:cs typeface="Trebuchet MS" pitchFamily="34" charset="-120"/>
               </a:rPr>
-              <a:t>⚔️  DIREKTVERGLEICH — LISSABON vs. MALTA</a:t>
+              <a:t>⚔️  DIREKTVERGLEICH — LISSABON vs. MAILAND</a:t>
             </a:r>
             <a:endParaRPr lang="en-US" sz="2200" dirty="0"/>
           </a:p>
@@ -7587,7 +7352,7 @@
           </a:solidFill>
           <a:ln w="12700">
             <a:solidFill>
-              <a:srgbClr val="1EB4C8"/>
+              <a:srgbClr val="C8003C"/>
             </a:solidFill>
             <a:prstDash val="solid"/>
           </a:ln>
@@ -7620,13 +7385,13 @@
             <a:r>
               <a:rPr lang="en-US" sz="1800" b="1" dirty="0">
                 <a:solidFill>
-                  <a:srgbClr val="1EB4C8"/>
+                  <a:srgbClr val="C8003C"/>
                 </a:solidFill>
                 <a:latin typeface="Trebuchet MS" pitchFamily="34" charset="0"/>
                 <a:ea typeface="Trebuchet MS" pitchFamily="34" charset="-122"/>
                 <a:cs typeface="Trebuchet MS" pitchFamily="34" charset="-120"/>
               </a:rPr>
-              <a:t>🇲🇹 MALTA</a:t>
+              <a:t>🇮🇹 MAILAND</a:t>
             </a:r>
             <a:endParaRPr lang="en-US" sz="1800" dirty="0"/>
           </a:p>
@@ -7818,7 +7583,7 @@
                 <a:ea typeface="Calibri" pitchFamily="34" charset="-122"/>
                 <a:cs typeface="Calibri" pitchFamily="34" charset="-120"/>
               </a:rPr>
-              <a:t>~€586</a:t>
+              <a:t>~€707</a:t>
             </a:r>
             <a:endParaRPr lang="en-US" sz="1000" dirty="0"/>
           </a:p>
@@ -8010,7 +7775,7 @@
                 <a:ea typeface="Calibri" pitchFamily="34" charset="-122"/>
                 <a:cs typeface="Calibri" pitchFamily="34" charset="-120"/>
               </a:rPr>
-              <a:t>~3h 00m  ab FMO/DTM</a:t>
+              <a:t>1h 40m  ab DUS  ✈ schnellste!</a:t>
             </a:r>
             <a:endParaRPr lang="en-US" sz="1000" dirty="0"/>
           </a:p>
@@ -8202,7 +7967,7 @@
                 <a:ea typeface="Calibri" pitchFamily="34" charset="-122"/>
                 <a:cs typeface="Calibri" pitchFamily="34" charset="-120"/>
               </a:rPr>
-              <a:t>FMO oder DTM — Ryanair direkt</a:t>
+              <a:t>DUS — Eurowings / ITA / Ryanair</a:t>
             </a:r>
             <a:endParaRPr lang="en-US" sz="1000" dirty="0"/>
           </a:p>
@@ -8394,7 +8159,7 @@
                 <a:ea typeface="Calibri" pitchFamily="34" charset="-122"/>
                 <a:cs typeface="Calibri" pitchFamily="34" charset="-120"/>
               </a:rPr>
-              <a:t>€2–3  (Cisk Lager, seit 1928)</a:t>
+              <a:t>€5–7  (Nastro Azzurro)</a:t>
             </a:r>
             <a:endParaRPr lang="en-US" sz="1000" dirty="0"/>
           </a:p>
@@ -8586,7 +8351,7 @@
                 <a:ea typeface="Calibri" pitchFamily="34" charset="-122"/>
                 <a:cs typeface="Calibri" pitchFamily="34" charset="-120"/>
               </a:rPr>
-              <a:t>22–24°C  ☀☀  (wärmer!)</a:t>
+              <a:t>12–16°C  🧥</a:t>
             </a:r>
             <a:endParaRPr lang="en-US" sz="1000" dirty="0"/>
           </a:p>
@@ -8778,7 +8543,7 @@
                 <a:ea typeface="Calibri" pitchFamily="34" charset="-122"/>
                 <a:cs typeface="Calibri" pitchFamily="34" charset="-120"/>
               </a:rPr>
-              <a:t>⭐⭐⭐⭐  Paceville bis 4 Uhr</a:t>
+              <a:t>⭐⭐⭐⭐  Corso Como bis 5 Uhr</a:t>
             </a:r>
             <a:endParaRPr lang="en-US" sz="1000" dirty="0"/>
           </a:p>
@@ -8970,7 +8735,7 @@
                 <a:ea typeface="Calibri" pitchFamily="34" charset="-122"/>
                 <a:cs typeface="Calibri" pitchFamily="34" charset="-120"/>
               </a:rPr>
-              <a:t>Paceville · St. Julian's</a:t>
+              <a:t>Navigli · Corso Como · Isola</a:t>
             </a:r>
             <a:endParaRPr lang="en-US" sz="1000" dirty="0"/>
           </a:p>
@@ -9034,7 +8799,7 @@
                 <a:ea typeface="Calibri" pitchFamily="34" charset="-122"/>
                 <a:cs typeface="Calibri" pitchFamily="34" charset="-120"/>
               </a:rPr>
-              <a:t>🌊 Highlight</a:t>
+              <a:t>🌟 Highlight</a:t>
             </a:r>
             <a:endParaRPr lang="en-US" sz="1000" dirty="0"/>
           </a:p>
@@ -9162,7 +8927,7 @@
                 <a:ea typeface="Calibri" pitchFamily="34" charset="-122"/>
                 <a:cs typeface="Calibri" pitchFamily="34" charset="-120"/>
               </a:rPr>
-              <a:t>Blaue Lagune · Schwimmen!</a:t>
+              <a:t>Aperitivo + gratis Buffet ab 18h</a:t>
             </a:r>
             <a:endParaRPr lang="en-US" sz="1000" dirty="0"/>
           </a:p>
@@ -9354,7 +9119,7 @@
                 <a:ea typeface="Calibri" pitchFamily="34" charset="-122"/>
                 <a:cs typeface="Calibri" pitchFamily="34" charset="-120"/>
               </a:rPr>
-              <a:t>€65 p.P.</a:t>
+              <a:t>€70 p.P.</a:t>
             </a:r>
             <a:endParaRPr lang="en-US" sz="1000" dirty="0"/>
           </a:p>
@@ -9546,7 +9311,7 @@
                 <a:ea typeface="Calibri" pitchFamily="34" charset="-122"/>
                 <a:cs typeface="Calibri" pitchFamily="34" charset="-120"/>
               </a:rPr>
-              <a:t>~€84–89</a:t>
+              <a:t>~€113–118</a:t>
             </a:r>
             <a:endParaRPr lang="en-US" sz="1000" dirty="0"/>
           </a:p>
@@ -9674,7 +9439,7 @@
                 <a:ea typeface="Trebuchet MS" pitchFamily="34" charset="-122"/>
                 <a:cs typeface="Trebuchet MS" pitchFamily="34" charset="-120"/>
               </a:rPr>
-              <a:t>Nightlife-Weltklasse</a:t>
+              <a:t>Nightlife-Weltklasse + Wärme</a:t>
             </a:r>
             <a:endParaRPr lang="en-US" sz="1100" dirty="0"/>
           </a:p>
@@ -9699,7 +9464,7 @@
           </a:solidFill>
           <a:ln w="12700">
             <a:solidFill>
-              <a:srgbClr val="1EB4C8"/>
+              <a:srgbClr val="C8003C"/>
             </a:solidFill>
             <a:prstDash val="solid"/>
           </a:ln>
@@ -9732,13 +9497,13 @@
             <a:r>
               <a:rPr lang="en-US" sz="1100" b="1" dirty="0">
                 <a:solidFill>
-                  <a:srgbClr val="1EB4C8"/>
+                  <a:srgbClr val="C8003C"/>
                 </a:solidFill>
                 <a:latin typeface="Trebuchet MS" pitchFamily="34" charset="0"/>
                 <a:ea typeface="Trebuchet MS" pitchFamily="34" charset="-122"/>
                 <a:cs typeface="Trebuchet MS" pitchFamily="34" charset="-120"/>
               </a:rPr>
-              <a:t>Wärme + Meer + Preis</a:t>
+              <a:t>Kürzester Flug + Fashion + Pasta</a:t>
             </a:r>
             <a:endParaRPr lang="en-US" sz="1100" dirty="0"/>
           </a:p>
@@ -11301,7 +11066,7 @@
           </a:solidFill>
           <a:ln w="12700">
             <a:solidFill>
-              <a:srgbClr val="1EB4C8"/>
+              <a:srgbClr val="C8003C"/>
             </a:solidFill>
             <a:prstDash val="solid"/>
           </a:ln>
@@ -11334,13 +11099,13 @@
             <a:r>
               <a:rPr lang="en-US" sz="1800" b="1" dirty="0">
                 <a:solidFill>
-                  <a:srgbClr val="1EB4C8"/>
+                  <a:srgbClr val="C8003C"/>
                 </a:solidFill>
                 <a:latin typeface="Trebuchet MS" pitchFamily="34" charset="0"/>
                 <a:ea typeface="Trebuchet MS" pitchFamily="34" charset="-122"/>
                 <a:cs typeface="Trebuchet MS" pitchFamily="34" charset="-120"/>
               </a:rPr>
-              <a:t>🇲🇹  MALTA</a:t>
+              <a:t>🇮🇹  MAILAND</a:t>
             </a:r>
             <a:endParaRPr lang="en-US" sz="1800" dirty="0"/>
           </a:p>
@@ -11379,7 +11144,7 @@
                 <a:ea typeface="Calibri" pitchFamily="34" charset="-122"/>
                 <a:cs typeface="Calibri" pitchFamily="34" charset="-120"/>
               </a:rPr>
-              <a:t>Wärmstes Ziel · Blaue</a:t>
+              <a:t>Kürzester Flug (1h40)</a:t>
             </a:r>
             <a:endParaRPr lang="en-US" sz="950" dirty="0"/>
           </a:p>
@@ -11396,7 +11161,7 @@
                 <a:ea typeface="Calibri" pitchFamily="34" charset="-122"/>
                 <a:cs typeface="Calibri" pitchFamily="34" charset="-120"/>
               </a:rPr>
-              <a:t>Lagune · 22–24°C</a:t>
+              <a:t>Navigli · Aperitivo · Mode</a:t>
             </a:r>
             <a:endParaRPr lang="en-US" sz="950" dirty="0"/>
           </a:p>
@@ -23074,11 +22839,11 @@
             <a:avLst/>
           </a:prstGeom>
           <a:solidFill>
-            <a:srgbClr val="1EB4C8"/>
+            <a:srgbClr val="C8003C"/>
           </a:solidFill>
           <a:ln w="12700">
             <a:solidFill>
-              <a:srgbClr val="1EB4C8"/>
+              <a:srgbClr val="C8003C"/>
             </a:solidFill>
             <a:prstDash val="solid"/>
           </a:ln>
@@ -23142,7 +22907,7 @@
                 <a:ea typeface="Trebuchet MS" pitchFamily="34" charset="-122"/>
                 <a:cs typeface="Trebuchet MS" pitchFamily="34" charset="-120"/>
               </a:rPr>
-              <a:t>🇲🇹  REISEZIEL 4 — MALTA, VALLETTA</a:t>
+              <a:t>🇮🇹  REISEZIEL 2 — MAILAND, ITALIEN</a:t>
             </a:r>
             <a:endParaRPr lang="en-US" sz="2200" dirty="0"/>
           </a:p>
@@ -23163,11 +22928,11 @@
             <a:avLst/>
           </a:prstGeom>
           <a:solidFill>
-            <a:srgbClr val="1EB4C8"/>
+            <a:srgbClr val="C8003C"/>
           </a:solidFill>
           <a:ln w="12700">
             <a:solidFill>
-              <a:srgbClr val="1EB4C8"/>
+              <a:srgbClr val="C8003C"/>
             </a:solidFill>
             <a:prstDash val="solid"/>
           </a:ln>
@@ -23175,7 +22940,7 @@
       </p:sp>
       <p:pic>
         <p:nvPicPr>
-          <p:cNvPr id="6" name="Image 0" descr="/home/user/Excelhaus/halloween_trip/malta_hero.png">    </p:cNvPr>
+          <p:cNvPr id="6" name="Image 0" descr="/home/user/Excelhaus/halloween_trip/milan_hero.png">    </p:cNvPr>
           <p:cNvPicPr>
             <a:picLocks noChangeAspect="1"/>
           </p:cNvPicPr>
@@ -23249,13 +23014,13 @@
             <a:r>
               <a:rPr lang="en-US" sz="1600" b="1" dirty="0">
                 <a:solidFill>
-                  <a:srgbClr val="1EB4C8"/>
+                  <a:srgbClr val="C8003C"/>
                 </a:solidFill>
                 <a:latin typeface="Trebuchet MS" pitchFamily="34" charset="0"/>
                 <a:ea typeface="Trebuchet MS" pitchFamily="34" charset="-122"/>
                 <a:cs typeface="Trebuchet MS" pitchFamily="34" charset="-120"/>
               </a:rPr>
-              <a:t>Wärmstes Ziel — Mittelmeer im Oktober</a:t>
+              <a:t>Aperitivo, Mode &amp; Nachtleben an den Navigli</a:t>
             </a:r>
             <a:endParaRPr lang="en-US" sz="1600" dirty="0"/>
           </a:p>
@@ -23294,7 +23059,7 @@
                 <a:ea typeface="Calibri" pitchFamily="34" charset="-122"/>
                 <a:cs typeface="Calibri" pitchFamily="34" charset="-120"/>
               </a:rPr>
-              <a:t>Paceville · Sliema · Valletta · Blaue Lagune · Cisk Lager</a:t>
+              <a:t>Navigli · Corso Como · Duomo · Brera · Clubs bis 5 Uhr</a:t>
             </a:r>
             <a:endParaRPr lang="en-US" sz="1000" dirty="0"/>
           </a:p>
@@ -23319,7 +23084,7 @@
           </a:solidFill>
           <a:ln w="12700">
             <a:solidFill>
-              <a:srgbClr val="1EB4C8"/>
+              <a:srgbClr val="C8003C"/>
             </a:solidFill>
             <a:prstDash val="solid"/>
           </a:ln>
@@ -23391,13 +23156,13 @@
             <a:r>
               <a:rPr lang="en-US" sz="1600" b="1" dirty="0">
                 <a:solidFill>
-                  <a:srgbClr val="1EB4C8"/>
+                  <a:srgbClr val="C8003C"/>
                 </a:solidFill>
                 <a:latin typeface="Trebuchet MS" pitchFamily="34" charset="0"/>
                 <a:ea typeface="Trebuchet MS" pitchFamily="34" charset="-122"/>
                 <a:cs typeface="Trebuchet MS" pitchFamily="34" charset="-120"/>
               </a:rPr>
-              <a:t>~3h 00m</a:t>
+              <a:t>1h 40m</a:t>
             </a:r>
             <a:endParaRPr lang="en-US" sz="1600" dirty="0"/>
           </a:p>
@@ -23408,7 +23173,7 @@
             <a:r>
               <a:rPr lang="en-US" sz="1600" b="1" dirty="0">
                 <a:solidFill>
-                  <a:srgbClr val="1EB4C8"/>
+                  <a:srgbClr val="C8003C"/>
                 </a:solidFill>
                 <a:latin typeface="Trebuchet MS" pitchFamily="34" charset="0"/>
                 <a:ea typeface="Trebuchet MS" pitchFamily="34" charset="-122"/>
@@ -23439,7 +23204,7 @@
           </a:solidFill>
           <a:ln w="12700">
             <a:solidFill>
-              <a:srgbClr val="1EB4C8"/>
+              <a:srgbClr val="C8003C"/>
             </a:solidFill>
             <a:prstDash val="solid"/>
           </a:ln>
@@ -23511,13 +23276,13 @@
             <a:r>
               <a:rPr lang="en-US" sz="1600" b="1" dirty="0">
                 <a:solidFill>
-                  <a:srgbClr val="1EB4C8"/>
+                  <a:srgbClr val="C8003C"/>
                 </a:solidFill>
                 <a:latin typeface="Trebuchet MS" pitchFamily="34" charset="0"/>
                 <a:ea typeface="Trebuchet MS" pitchFamily="34" charset="-122"/>
                 <a:cs typeface="Trebuchet MS" pitchFamily="34" charset="-120"/>
               </a:rPr>
-              <a:t>€2 – €3</a:t>
+              <a:t>€5–7</a:t>
             </a:r>
             <a:endParaRPr lang="en-US" sz="1600" dirty="0"/>
           </a:p>
@@ -23528,13 +23293,13 @@
             <a:r>
               <a:rPr lang="en-US" sz="1600" b="1" dirty="0">
                 <a:solidFill>
-                  <a:srgbClr val="1EB4C8"/>
+                  <a:srgbClr val="C8003C"/>
                 </a:solidFill>
                 <a:latin typeface="Trebuchet MS" pitchFamily="34" charset="0"/>
                 <a:ea typeface="Trebuchet MS" pitchFamily="34" charset="-122"/>
                 <a:cs typeface="Trebuchet MS" pitchFamily="34" charset="-120"/>
               </a:rPr>
-              <a:t>(Cisk Lager)</a:t>
+              <a:t>(Nastro Azzurro)</a:t>
             </a:r>
             <a:endParaRPr lang="en-US" sz="1600" dirty="0"/>
           </a:p>
@@ -23559,7 +23324,7 @@
           </a:solidFill>
           <a:ln w="12700">
             <a:solidFill>
-              <a:srgbClr val="1EB4C8"/>
+              <a:srgbClr val="C8003C"/>
             </a:solidFill>
             <a:prstDash val="solid"/>
           </a:ln>
@@ -23631,13 +23396,13 @@
             <a:r>
               <a:rPr lang="en-US" sz="1600" b="1" dirty="0">
                 <a:solidFill>
-                  <a:srgbClr val="1EB4C8"/>
+                  <a:srgbClr val="C8003C"/>
                 </a:solidFill>
                 <a:latin typeface="Trebuchet MS" pitchFamily="34" charset="0"/>
                 <a:ea typeface="Trebuchet MS" pitchFamily="34" charset="-122"/>
                 <a:cs typeface="Trebuchet MS" pitchFamily="34" charset="-120"/>
               </a:rPr>
-              <a:t>22–24°C ☀☀</a:t>
+              <a:t>12–16°C</a:t>
             </a:r>
             <a:endParaRPr lang="en-US" sz="1600" dirty="0"/>
           </a:p>
@@ -23648,13 +23413,13 @@
             <a:r>
               <a:rPr lang="en-US" sz="1600" b="1" dirty="0">
                 <a:solidFill>
-                  <a:srgbClr val="1EB4C8"/>
+                  <a:srgbClr val="C8003C"/>
                 </a:solidFill>
                 <a:latin typeface="Trebuchet MS" pitchFamily="34" charset="0"/>
                 <a:ea typeface="Trebuchet MS" pitchFamily="34" charset="-122"/>
                 <a:cs typeface="Trebuchet MS" pitchFamily="34" charset="-120"/>
               </a:rPr>
-              <a:t>Wärmstes Ziel!</a:t>
+              <a:t>Ende Oktober</a:t>
             </a:r>
             <a:endParaRPr lang="en-US" sz="1600" dirty="0"/>
           </a:p>
@@ -23679,7 +23444,7 @@
           </a:solidFill>
           <a:ln w="12700">
             <a:solidFill>
-              <a:srgbClr val="1EB4C8"/>
+              <a:srgbClr val="C8003C"/>
             </a:solidFill>
             <a:prstDash val="solid"/>
           </a:ln>
@@ -23751,13 +23516,13 @@
             <a:r>
               <a:rPr lang="en-US" sz="1600" b="1" dirty="0">
                 <a:solidFill>
-                  <a:srgbClr val="1EB4C8"/>
+                  <a:srgbClr val="C8003C"/>
                 </a:solidFill>
                 <a:latin typeface="Trebuchet MS" pitchFamily="34" charset="0"/>
                 <a:ea typeface="Trebuchet MS" pitchFamily="34" charset="-122"/>
                 <a:cs typeface="Trebuchet MS" pitchFamily="34" charset="-120"/>
               </a:rPr>
-              <a:t>~€631</a:t>
+              <a:t>~€700</a:t>
             </a:r>
             <a:endParaRPr lang="en-US" sz="1600" dirty="0"/>
           </a:p>
@@ -23768,7 +23533,7 @@
             <a:r>
               <a:rPr lang="en-US" sz="1600" b="1" dirty="0">
                 <a:solidFill>
-                  <a:srgbClr val="1EB4C8"/>
+                  <a:srgbClr val="C8003C"/>
                 </a:solidFill>
                 <a:latin typeface="Trebuchet MS" pitchFamily="34" charset="0"/>
                 <a:ea typeface="Trebuchet MS" pitchFamily="34" charset="-122"/>
@@ -23799,7 +23564,7 @@
           </a:solidFill>
           <a:ln w="12700">
             <a:solidFill>
-              <a:srgbClr val="1EB4C8"/>
+              <a:srgbClr val="C8003C"/>
             </a:solidFill>
             <a:prstDash val="solid"/>
           </a:ln>
@@ -23871,7 +23636,7 @@
             <a:r>
               <a:rPr lang="en-US" sz="1600" b="1" dirty="0">
                 <a:solidFill>
-                  <a:srgbClr val="1EB4C8"/>
+                  <a:srgbClr val="C8003C"/>
                 </a:solidFill>
                 <a:latin typeface="Trebuchet MS" pitchFamily="34" charset="0"/>
                 <a:ea typeface="Trebuchet MS" pitchFamily="34" charset="-122"/>
@@ -23888,13 +23653,13 @@
             <a:r>
               <a:rPr lang="en-US" sz="1600" b="1" dirty="0">
                 <a:solidFill>
-                  <a:srgbClr val="1EB4C8"/>
+                  <a:srgbClr val="C8003C"/>
                 </a:solidFill>
                 <a:latin typeface="Trebuchet MS" pitchFamily="34" charset="0"/>
                 <a:ea typeface="Trebuchet MS" pitchFamily="34" charset="-122"/>
                 <a:cs typeface="Trebuchet MS" pitchFamily="34" charset="-120"/>
               </a:rPr>
-              <a:t>Paceville Clubs</a:t>
+              <a:t>Navigli &amp; Corso Como</a:t>
             </a:r>
             <a:endParaRPr lang="en-US" sz="1600" dirty="0"/>
           </a:p>
@@ -23919,7 +23684,7 @@
           </a:solidFill>
           <a:ln w="12700">
             <a:solidFill>
-              <a:srgbClr val="1EB4C8"/>
+              <a:srgbClr val="C8003C"/>
             </a:solidFill>
             <a:prstDash val="solid"/>
           </a:ln>
@@ -23991,13 +23756,13 @@
             <a:r>
               <a:rPr lang="en-US" sz="1600" b="1" dirty="0">
                 <a:solidFill>
-                  <a:srgbClr val="1EB4C8"/>
+                  <a:srgbClr val="C8003C"/>
                 </a:solidFill>
                 <a:latin typeface="Trebuchet MS" pitchFamily="34" charset="0"/>
                 <a:ea typeface="Trebuchet MS" pitchFamily="34" charset="-122"/>
                 <a:cs typeface="Trebuchet MS" pitchFamily="34" charset="-120"/>
               </a:rPr>
-              <a:t>FMO / DTM</a:t>
+              <a:t>DUS direkt!</a:t>
             </a:r>
             <a:endParaRPr lang="en-US" sz="1600" dirty="0"/>
           </a:p>
@@ -24008,13 +23773,13 @@
             <a:r>
               <a:rPr lang="en-US" sz="1600" b="1" dirty="0">
                 <a:solidFill>
-                  <a:srgbClr val="1EB4C8"/>
+                  <a:srgbClr val="C8003C"/>
                 </a:solidFill>
                 <a:latin typeface="Trebuchet MS" pitchFamily="34" charset="0"/>
                 <a:ea typeface="Trebuchet MS" pitchFamily="34" charset="-122"/>
                 <a:cs typeface="Trebuchet MS" pitchFamily="34" charset="-120"/>
               </a:rPr>
-              <a:t>(Ryanair direkt)</a:t>
+              <a:t>(Eurowings/ITA)</a:t>
             </a:r>
             <a:endParaRPr lang="en-US" sz="1600" dirty="0"/>
           </a:p>
@@ -24078,7 +23843,7 @@
                 <a:ea typeface="Calibri" pitchFamily="34" charset="-122"/>
                 <a:cs typeface="Calibri" pitchFamily="34" charset="-120"/>
               </a:rPr>
-              <a:t>Malta ist mit 22–24°C das WÄRMSTE europäische Ziel dieser Auswahl — und Ende Oktober noch Badesaison! Die Insel bietet UNESCO-Welterbe Valletta, das mittelalterliche Mdina und das Nachtleben von Paceville (St. Julian's). Halloween in den Clubs von Paceville ist eine eigene Kategorie. Und das Cisk Lager gehört zu den günstigsten Bieren Europas.</a:t>
+              <a:t>Mailand ist mit nur 1h 40m Flugzeit das nächste Ziel — Direktflug ab DUS mit Eurowings. Das Navigli-Viertel mit seinen Kanälen ist die Aperitivo-Hochburg Italiens: ab 18 Uhr Drinks + gratis Buffet für ~€10. Corso Como und die Isola-Szene bieten Clubs bis 5 Uhr. Das Duomo di Milano leuchtet nachts orange — perfekt für Halloween-Fotos. Und die Mailänder feiern Halloween ausgiebig.</a:t>
             </a:r>
             <a:endParaRPr lang="en-US" sz="1050" dirty="0"/>
           </a:p>
@@ -24156,11 +23921,11 @@
             <a:avLst/>
           </a:prstGeom>
           <a:solidFill>
-            <a:srgbClr val="1EB4C8"/>
+            <a:srgbClr val="C8003C"/>
           </a:solidFill>
           <a:ln w="12700">
             <a:solidFill>
-              <a:srgbClr val="1EB4C8"/>
+              <a:srgbClr val="C8003C"/>
             </a:solidFill>
             <a:prstDash val="solid"/>
           </a:ln>
@@ -24224,7 +23989,7 @@
                 <a:ea typeface="Trebuchet MS" pitchFamily="34" charset="-122"/>
                 <a:cs typeface="Trebuchet MS" pitchFamily="34" charset="-120"/>
               </a:rPr>
-              <a:t>🇲🇹  MALTA — FLÜGE</a:t>
+              <a:t>🇮🇹  MAILAND — FLÜGE</a:t>
             </a:r>
             <a:endParaRPr lang="en-US" sz="2200" dirty="0"/>
           </a:p>
@@ -24245,11 +24010,11 @@
             <a:avLst/>
           </a:prstGeom>
           <a:solidFill>
-            <a:srgbClr val="1EB4C8"/>
+            <a:srgbClr val="C8003C"/>
           </a:solidFill>
           <a:ln w="12700">
             <a:solidFill>
-              <a:srgbClr val="1EB4C8"/>
+              <a:srgbClr val="C8003C"/>
             </a:solidFill>
             <a:prstDash val="solid"/>
           </a:ln>
@@ -24282,13 +24047,13 @@
             <a:r>
               <a:rPr lang="en-US" sz="1300" b="1" dirty="0">
                 <a:solidFill>
-                  <a:srgbClr val="1EB4C8"/>
+                  <a:srgbClr val="C8003C"/>
                 </a:solidFill>
                 <a:latin typeface="Trebuchet MS" pitchFamily="34" charset="0"/>
                 <a:ea typeface="Trebuchet MS" pitchFamily="34" charset="-122"/>
                 <a:cs typeface="Trebuchet MS" pitchFamily="34" charset="-120"/>
               </a:rPr>
-              <a:t>HINFLUG: Deutschland → MLA (Malta)</a:t>
+              <a:t>HINFLUG: Deutschland → MXP (Mailand-Malpensa)</a:t>
             </a:r>
             <a:endParaRPr lang="en-US" sz="1300" dirty="0"/>
           </a:p>
@@ -24338,7 +24103,7 @@
                       <a:r>
                         <a:rPr lang="en-US" sz="1100" b="1" dirty="0">
                           <a:solidFill>
-                            <a:srgbClr val="1EB4C8"/>
+                            <a:srgbClr val="C8003C"/>
                           </a:solidFill>
                           <a:latin typeface="Trebuchet MS" pitchFamily="34" charset="0"/>
                           <a:ea typeface="Trebuchet MS" pitchFamily="34" charset="-122"/>
@@ -24406,7 +24171,7 @@
                       <a:r>
                         <a:rPr lang="en-US" sz="1100" b="1" dirty="0">
                           <a:solidFill>
-                            <a:srgbClr val="1EB4C8"/>
+                            <a:srgbClr val="C8003C"/>
                           </a:solidFill>
                           <a:latin typeface="Trebuchet MS" pitchFamily="34" charset="0"/>
                           <a:ea typeface="Trebuchet MS" pitchFamily="34" charset="-122"/>
@@ -24474,7 +24239,7 @@
                       <a:r>
                         <a:rPr lang="en-US" sz="1100" b="1" dirty="0">
                           <a:solidFill>
-                            <a:srgbClr val="1EB4C8"/>
+                            <a:srgbClr val="C8003C"/>
                           </a:solidFill>
                           <a:latin typeface="Trebuchet MS" pitchFamily="34" charset="0"/>
                           <a:ea typeface="Trebuchet MS" pitchFamily="34" charset="-122"/>
@@ -24542,7 +24307,7 @@
                       <a:r>
                         <a:rPr lang="en-US" sz="1100" b="1" dirty="0">
                           <a:solidFill>
-                            <a:srgbClr val="1EB4C8"/>
+                            <a:srgbClr val="C8003C"/>
                           </a:solidFill>
                           <a:latin typeface="Trebuchet MS" pitchFamily="34" charset="0"/>
                           <a:ea typeface="Trebuchet MS" pitchFamily="34" charset="-122"/>
@@ -24610,7 +24375,7 @@
                       <a:r>
                         <a:rPr lang="en-US" sz="1100" b="1" dirty="0">
                           <a:solidFill>
-                            <a:srgbClr val="1EB4C8"/>
+                            <a:srgbClr val="C8003C"/>
                           </a:solidFill>
                           <a:latin typeface="Trebuchet MS" pitchFamily="34" charset="0"/>
                           <a:ea typeface="Trebuchet MS" pitchFamily="34" charset="-122"/>
@@ -24678,7 +24443,7 @@
                       <a:r>
                         <a:rPr lang="en-US" sz="1100" b="1" dirty="0">
                           <a:solidFill>
-                            <a:srgbClr val="1EB4C8"/>
+                            <a:srgbClr val="C8003C"/>
                           </a:solidFill>
                           <a:latin typeface="Trebuchet MS" pitchFamily="34" charset="0"/>
                           <a:ea typeface="Trebuchet MS" pitchFamily="34" charset="-122"/>
@@ -24746,7 +24511,7 @@
                       <a:r>
                         <a:rPr lang="en-US" sz="1100" b="1" dirty="0">
                           <a:solidFill>
-                            <a:srgbClr val="1EB4C8"/>
+                            <a:srgbClr val="C8003C"/>
                           </a:solidFill>
                           <a:latin typeface="Trebuchet MS" pitchFamily="34" charset="0"/>
                           <a:ea typeface="Trebuchet MS" pitchFamily="34" charset="-122"/>
@@ -24814,7 +24579,7 @@
                       <a:r>
                         <a:rPr lang="en-US" sz="1100" b="1" dirty="0">
                           <a:solidFill>
-                            <a:srgbClr val="1EB4C8"/>
+                            <a:srgbClr val="C8003C"/>
                           </a:solidFill>
                           <a:latin typeface="Trebuchet MS" pitchFamily="34" charset="0"/>
                           <a:ea typeface="Trebuchet MS" pitchFamily="34" charset="-122"/>
@@ -24958,7 +24723,7 @@
                           <a:ea typeface="Calibri" pitchFamily="34" charset="-122"/>
                           <a:cs typeface="Calibri" pitchFamily="34" charset="-120"/>
                         </a:rPr>
-                        <a:t>FR</a:t>
+                        <a:t>EW</a:t>
                       </a:r>
                       <a:endParaRPr lang="en-US" sz="1000" dirty="0">
                         <a:latin typeface="Calibri" charset="0"/>
@@ -24979,7 +24744,7 @@
                           <a:ea typeface="Calibri" pitchFamily="34" charset="-122"/>
                           <a:cs typeface="Calibri" pitchFamily="34" charset="-120"/>
                         </a:rPr>
-                        <a:t>Ryanair</a:t>
+                        <a:t>Eurowings</a:t>
                       </a:r>
                       <a:endParaRPr lang="en-US" sz="1000" dirty="0">
                         <a:latin typeface="Calibri" charset="0"/>
@@ -25047,7 +24812,1183 @@
                           <a:ea typeface="Calibri" pitchFamily="34" charset="-122"/>
                           <a:cs typeface="Calibri" pitchFamily="34" charset="-120"/>
                         </a:rPr>
-                        <a:t>FMO → MLA</a:t>
+                        <a:t>DUS → MXP</a:t>
+                      </a:r>
+                      <a:endParaRPr lang="en-US" sz="1000" dirty="0">
+                        <a:latin typeface="Calibri" charset="0"/>
+                        <a:ea typeface="Calibri" charset="0"/>
+                        <a:cs typeface="Calibri" charset="0"/>
+                      </a:endParaRPr>
+                    </a:p>
+                    <a:p>
+                      <a:pPr algn="ctr" indent="0" marL="0">
+                        <a:buNone/>
+                      </a:pPr>
+                      <a:r>
+                        <a:rPr lang="en-US" sz="1000" dirty="0">
+                          <a:solidFill>
+                            <a:srgbClr val="E8E8E8"/>
+                          </a:solidFill>
+                          <a:latin typeface="Calibri" pitchFamily="34" charset="0"/>
+                          <a:ea typeface="Calibri" pitchFamily="34" charset="-122"/>
+                          <a:cs typeface="Calibri" pitchFamily="34" charset="-120"/>
+                        </a:rPr>
+                        <a:t>30. Okt. früh</a:t>
+                      </a:r>
+                      <a:endParaRPr lang="en-US" sz="1000" dirty="0">
+                        <a:latin typeface="Calibri" charset="0"/>
+                        <a:ea typeface="Calibri" charset="0"/>
+                        <a:cs typeface="Calibri" charset="0"/>
+                      </a:endParaRPr>
+                    </a:p>
+                  </a:txBody>
+                  <a:tcPr marL="91440" marR="91440" marT="45720" marB="45720">
+                    <a:lnL w="12700" cap="flat" cmpd="sng" algn="ctr">
+                      <a:solidFill>
+                        <a:srgbClr val="0F3460"/>
+                      </a:solidFill>
+                      <a:prstDash val="solid"/>
+                      <a:round/>
+                      <a:headEnd type="none" w="med" len="med"/>
+                      <a:tailEnd type="none" w="med" len="med"/>
+                    </a:lnL>
+                    <a:lnR w="12700" cap="flat" cmpd="sng" algn="ctr">
+                      <a:solidFill>
+                        <a:srgbClr val="0F3460"/>
+                      </a:solidFill>
+                      <a:prstDash val="solid"/>
+                      <a:round/>
+                      <a:headEnd type="none" w="med" len="med"/>
+                      <a:tailEnd type="none" w="med" len="med"/>
+                    </a:lnR>
+                    <a:lnT w="12700" cap="flat" cmpd="sng" algn="ctr">
+                      <a:solidFill>
+                        <a:srgbClr val="0F3460"/>
+                      </a:solidFill>
+                      <a:prstDash val="solid"/>
+                      <a:round/>
+                      <a:headEnd type="none" w="med" len="med"/>
+                      <a:tailEnd type="none" w="med" len="med"/>
+                    </a:lnT>
+                    <a:lnB w="12700" cap="flat" cmpd="sng" algn="ctr">
+                      <a:solidFill>
+                        <a:srgbClr val="0F3460"/>
+                      </a:solidFill>
+                      <a:prstDash val="solid"/>
+                      <a:round/>
+                      <a:headEnd type="none" w="med" len="med"/>
+                      <a:tailEnd type="none" w="med" len="med"/>
+                    </a:lnB>
+                    <a:solidFill>
+                      <a:srgbClr val="16213E"/>
+                    </a:solidFill>
+                  </a:tcPr>
+                </a:tc>
+                <a:tc>
+                  <a:txBody>
+                    <a:bodyPr/>
+                    <a:lstStyle/>
+                    <a:p>
+                      <a:pPr algn="ctr" indent="0" marL="0">
+                        <a:buNone/>
+                      </a:pPr>
+                      <a:r>
+                        <a:rPr lang="en-US" sz="1000" dirty="0">
+                          <a:solidFill>
+                            <a:srgbClr val="E8E8E8"/>
+                          </a:solidFill>
+                          <a:latin typeface="Calibri" pitchFamily="34" charset="0"/>
+                          <a:ea typeface="Calibri" pitchFamily="34" charset="-122"/>
+                          <a:cs typeface="Calibri" pitchFamily="34" charset="-120"/>
+                        </a:rPr>
+                        <a:t>~07:00</a:t>
+                      </a:r>
+                      <a:endParaRPr lang="en-US" sz="1000" dirty="0">
+                        <a:latin typeface="Calibri" charset="0"/>
+                        <a:ea typeface="Calibri" charset="0"/>
+                        <a:cs typeface="Calibri" charset="0"/>
+                      </a:endParaRPr>
+                    </a:p>
+                  </a:txBody>
+                  <a:tcPr marL="91440" marR="91440" marT="45720" marB="45720">
+                    <a:lnL w="12700" cap="flat" cmpd="sng" algn="ctr">
+                      <a:solidFill>
+                        <a:srgbClr val="0F3460"/>
+                      </a:solidFill>
+                      <a:prstDash val="solid"/>
+                      <a:round/>
+                      <a:headEnd type="none" w="med" len="med"/>
+                      <a:tailEnd type="none" w="med" len="med"/>
+                    </a:lnL>
+                    <a:lnR w="12700" cap="flat" cmpd="sng" algn="ctr">
+                      <a:solidFill>
+                        <a:srgbClr val="0F3460"/>
+                      </a:solidFill>
+                      <a:prstDash val="solid"/>
+                      <a:round/>
+                      <a:headEnd type="none" w="med" len="med"/>
+                      <a:tailEnd type="none" w="med" len="med"/>
+                    </a:lnR>
+                    <a:lnT w="12700" cap="flat" cmpd="sng" algn="ctr">
+                      <a:solidFill>
+                        <a:srgbClr val="0F3460"/>
+                      </a:solidFill>
+                      <a:prstDash val="solid"/>
+                      <a:round/>
+                      <a:headEnd type="none" w="med" len="med"/>
+                      <a:tailEnd type="none" w="med" len="med"/>
+                    </a:lnT>
+                    <a:lnB w="12700" cap="flat" cmpd="sng" algn="ctr">
+                      <a:solidFill>
+                        <a:srgbClr val="0F3460"/>
+                      </a:solidFill>
+                      <a:prstDash val="solid"/>
+                      <a:round/>
+                      <a:headEnd type="none" w="med" len="med"/>
+                      <a:tailEnd type="none" w="med" len="med"/>
+                    </a:lnB>
+                    <a:solidFill>
+                      <a:srgbClr val="16213E"/>
+                    </a:solidFill>
+                  </a:tcPr>
+                </a:tc>
+                <a:tc>
+                  <a:txBody>
+                    <a:bodyPr/>
+                    <a:lstStyle/>
+                    <a:p>
+                      <a:pPr algn="ctr" indent="0" marL="0">
+                        <a:buNone/>
+                      </a:pPr>
+                      <a:r>
+                        <a:rPr lang="en-US" sz="1000" dirty="0">
+                          <a:solidFill>
+                            <a:srgbClr val="E8E8E8"/>
+                          </a:solidFill>
+                          <a:latin typeface="Calibri" pitchFamily="34" charset="0"/>
+                          <a:ea typeface="Calibri" pitchFamily="34" charset="-122"/>
+                          <a:cs typeface="Calibri" pitchFamily="34" charset="-120"/>
+                        </a:rPr>
+                        <a:t>~08:40</a:t>
+                      </a:r>
+                      <a:endParaRPr lang="en-US" sz="1000" dirty="0">
+                        <a:latin typeface="Calibri" charset="0"/>
+                        <a:ea typeface="Calibri" charset="0"/>
+                        <a:cs typeface="Calibri" charset="0"/>
+                      </a:endParaRPr>
+                    </a:p>
+                  </a:txBody>
+                  <a:tcPr marL="91440" marR="91440" marT="45720" marB="45720">
+                    <a:lnL w="12700" cap="flat" cmpd="sng" algn="ctr">
+                      <a:solidFill>
+                        <a:srgbClr val="0F3460"/>
+                      </a:solidFill>
+                      <a:prstDash val="solid"/>
+                      <a:round/>
+                      <a:headEnd type="none" w="med" len="med"/>
+                      <a:tailEnd type="none" w="med" len="med"/>
+                    </a:lnL>
+                    <a:lnR w="12700" cap="flat" cmpd="sng" algn="ctr">
+                      <a:solidFill>
+                        <a:srgbClr val="0F3460"/>
+                      </a:solidFill>
+                      <a:prstDash val="solid"/>
+                      <a:round/>
+                      <a:headEnd type="none" w="med" len="med"/>
+                      <a:tailEnd type="none" w="med" len="med"/>
+                    </a:lnR>
+                    <a:lnT w="12700" cap="flat" cmpd="sng" algn="ctr">
+                      <a:solidFill>
+                        <a:srgbClr val="0F3460"/>
+                      </a:solidFill>
+                      <a:prstDash val="solid"/>
+                      <a:round/>
+                      <a:headEnd type="none" w="med" len="med"/>
+                      <a:tailEnd type="none" w="med" len="med"/>
+                    </a:lnT>
+                    <a:lnB w="12700" cap="flat" cmpd="sng" algn="ctr">
+                      <a:solidFill>
+                        <a:srgbClr val="0F3460"/>
+                      </a:solidFill>
+                      <a:prstDash val="solid"/>
+                      <a:round/>
+                      <a:headEnd type="none" w="med" len="med"/>
+                      <a:tailEnd type="none" w="med" len="med"/>
+                    </a:lnB>
+                    <a:solidFill>
+                      <a:srgbClr val="16213E"/>
+                    </a:solidFill>
+                  </a:tcPr>
+                </a:tc>
+                <a:tc>
+                  <a:txBody>
+                    <a:bodyPr/>
+                    <a:lstStyle/>
+                    <a:p>
+                      <a:pPr algn="ctr" indent="0" marL="0">
+                        <a:buNone/>
+                      </a:pPr>
+                      <a:r>
+                        <a:rPr lang="en-US" sz="1000" dirty="0">
+                          <a:solidFill>
+                            <a:srgbClr val="E8E8E8"/>
+                          </a:solidFill>
+                          <a:latin typeface="Calibri" pitchFamily="34" charset="0"/>
+                          <a:ea typeface="Calibri" pitchFamily="34" charset="-122"/>
+                          <a:cs typeface="Calibri" pitchFamily="34" charset="-120"/>
+                        </a:rPr>
+                        <a:t>1h 40m</a:t>
+                      </a:r>
+                      <a:endParaRPr lang="en-US" sz="1000" dirty="0">
+                        <a:latin typeface="Calibri" charset="0"/>
+                        <a:ea typeface="Calibri" charset="0"/>
+                        <a:cs typeface="Calibri" charset="0"/>
+                      </a:endParaRPr>
+                    </a:p>
+                  </a:txBody>
+                  <a:tcPr marL="91440" marR="91440" marT="45720" marB="45720">
+                    <a:lnL w="12700" cap="flat" cmpd="sng" algn="ctr">
+                      <a:solidFill>
+                        <a:srgbClr val="0F3460"/>
+                      </a:solidFill>
+                      <a:prstDash val="solid"/>
+                      <a:round/>
+                      <a:headEnd type="none" w="med" len="med"/>
+                      <a:tailEnd type="none" w="med" len="med"/>
+                    </a:lnL>
+                    <a:lnR w="12700" cap="flat" cmpd="sng" algn="ctr">
+                      <a:solidFill>
+                        <a:srgbClr val="0F3460"/>
+                      </a:solidFill>
+                      <a:prstDash val="solid"/>
+                      <a:round/>
+                      <a:headEnd type="none" w="med" len="med"/>
+                      <a:tailEnd type="none" w="med" len="med"/>
+                    </a:lnR>
+                    <a:lnT w="12700" cap="flat" cmpd="sng" algn="ctr">
+                      <a:solidFill>
+                        <a:srgbClr val="0F3460"/>
+                      </a:solidFill>
+                      <a:prstDash val="solid"/>
+                      <a:round/>
+                      <a:headEnd type="none" w="med" len="med"/>
+                      <a:tailEnd type="none" w="med" len="med"/>
+                    </a:lnT>
+                    <a:lnB w="12700" cap="flat" cmpd="sng" algn="ctr">
+                      <a:solidFill>
+                        <a:srgbClr val="0F3460"/>
+                      </a:solidFill>
+                      <a:prstDash val="solid"/>
+                      <a:round/>
+                      <a:headEnd type="none" w="med" len="med"/>
+                      <a:tailEnd type="none" w="med" len="med"/>
+                    </a:lnB>
+                    <a:solidFill>
+                      <a:srgbClr val="16213E"/>
+                    </a:solidFill>
+                  </a:tcPr>
+                </a:tc>
+                <a:tc>
+                  <a:txBody>
+                    <a:bodyPr/>
+                    <a:lstStyle/>
+                    <a:p>
+                      <a:pPr algn="ctr" indent="0" marL="0">
+                        <a:buNone/>
+                      </a:pPr>
+                      <a:r>
+                        <a:rPr lang="en-US" sz="1000" dirty="0">
+                          <a:solidFill>
+                            <a:srgbClr val="E8E8E8"/>
+                          </a:solidFill>
+                          <a:latin typeface="Calibri" pitchFamily="34" charset="0"/>
+                          <a:ea typeface="Calibri" pitchFamily="34" charset="-122"/>
+                          <a:cs typeface="Calibri" pitchFamily="34" charset="-120"/>
+                        </a:rPr>
+                        <a:t>~€80</a:t>
+                      </a:r>
+                      <a:endParaRPr lang="en-US" sz="1000" dirty="0">
+                        <a:latin typeface="Calibri" charset="0"/>
+                        <a:ea typeface="Calibri" charset="0"/>
+                        <a:cs typeface="Calibri" charset="0"/>
+                      </a:endParaRPr>
+                    </a:p>
+                  </a:txBody>
+                  <a:tcPr marL="91440" marR="91440" marT="45720" marB="45720">
+                    <a:lnL w="12700" cap="flat" cmpd="sng" algn="ctr">
+                      <a:solidFill>
+                        <a:srgbClr val="0F3460"/>
+                      </a:solidFill>
+                      <a:prstDash val="solid"/>
+                      <a:round/>
+                      <a:headEnd type="none" w="med" len="med"/>
+                      <a:tailEnd type="none" w="med" len="med"/>
+                    </a:lnL>
+                    <a:lnR w="12700" cap="flat" cmpd="sng" algn="ctr">
+                      <a:solidFill>
+                        <a:srgbClr val="0F3460"/>
+                      </a:solidFill>
+                      <a:prstDash val="solid"/>
+                      <a:round/>
+                      <a:headEnd type="none" w="med" len="med"/>
+                      <a:tailEnd type="none" w="med" len="med"/>
+                    </a:lnR>
+                    <a:lnT w="12700" cap="flat" cmpd="sng" algn="ctr">
+                      <a:solidFill>
+                        <a:srgbClr val="0F3460"/>
+                      </a:solidFill>
+                      <a:prstDash val="solid"/>
+                      <a:round/>
+                      <a:headEnd type="none" w="med" len="med"/>
+                      <a:tailEnd type="none" w="med" len="med"/>
+                    </a:lnT>
+                    <a:lnB w="12700" cap="flat" cmpd="sng" algn="ctr">
+                      <a:solidFill>
+                        <a:srgbClr val="0F3460"/>
+                      </a:solidFill>
+                      <a:prstDash val="solid"/>
+                      <a:round/>
+                      <a:headEnd type="none" w="med" len="med"/>
+                      <a:tailEnd type="none" w="med" len="med"/>
+                    </a:lnB>
+                    <a:solidFill>
+                      <a:srgbClr val="16213E"/>
+                    </a:solidFill>
+                  </a:tcPr>
+                </a:tc>
+                <a:tc>
+                  <a:txBody>
+                    <a:bodyPr/>
+                    <a:lstStyle/>
+                    <a:p>
+                      <a:pPr algn="ctr" indent="0" marL="0">
+                        <a:buNone/>
+                      </a:pPr>
+                      <a:r>
+                        <a:rPr lang="en-US" sz="1000" b="1" dirty="0">
+                          <a:solidFill>
+                            <a:srgbClr val="FF8C00"/>
+                          </a:solidFill>
+                          <a:latin typeface="Calibri" pitchFamily="34" charset="0"/>
+                          <a:ea typeface="Calibri" pitchFamily="34" charset="-122"/>
+                          <a:cs typeface="Calibri" pitchFamily="34" charset="-120"/>
+                        </a:rPr>
+                        <a:t>~€320</a:t>
+                      </a:r>
+                      <a:endParaRPr lang="en-US" sz="1000" dirty="0">
+                        <a:latin typeface="Calibri" charset="0"/>
+                        <a:ea typeface="Calibri" charset="0"/>
+                        <a:cs typeface="Calibri" charset="0"/>
+                      </a:endParaRPr>
+                    </a:p>
+                  </a:txBody>
+                  <a:tcPr marL="91440" marR="91440" marT="45720" marB="45720">
+                    <a:lnL w="12700" cap="flat" cmpd="sng" algn="ctr">
+                      <a:solidFill>
+                        <a:srgbClr val="0F3460"/>
+                      </a:solidFill>
+                      <a:prstDash val="solid"/>
+                      <a:round/>
+                      <a:headEnd type="none" w="med" len="med"/>
+                      <a:tailEnd type="none" w="med" len="med"/>
+                    </a:lnL>
+                    <a:lnR w="12700" cap="flat" cmpd="sng" algn="ctr">
+                      <a:solidFill>
+                        <a:srgbClr val="0F3460"/>
+                      </a:solidFill>
+                      <a:prstDash val="solid"/>
+                      <a:round/>
+                      <a:headEnd type="none" w="med" len="med"/>
+                      <a:tailEnd type="none" w="med" len="med"/>
+                    </a:lnR>
+                    <a:lnT w="12700" cap="flat" cmpd="sng" algn="ctr">
+                      <a:solidFill>
+                        <a:srgbClr val="0F3460"/>
+                      </a:solidFill>
+                      <a:prstDash val="solid"/>
+                      <a:round/>
+                      <a:headEnd type="none" w="med" len="med"/>
+                      <a:tailEnd type="none" w="med" len="med"/>
+                    </a:lnT>
+                    <a:lnB w="12700" cap="flat" cmpd="sng" algn="ctr">
+                      <a:solidFill>
+                        <a:srgbClr val="0F3460"/>
+                      </a:solidFill>
+                      <a:prstDash val="solid"/>
+                      <a:round/>
+                      <a:headEnd type="none" w="med" len="med"/>
+                      <a:tailEnd type="none" w="med" len="med"/>
+                    </a:lnB>
+                    <a:solidFill>
+                      <a:srgbClr val="16213E"/>
+                    </a:solidFill>
+                  </a:tcPr>
+                </a:tc>
+              </a:tr>
+              <a:tr h="475488">
+                <a:tc>
+                  <a:txBody>
+                    <a:bodyPr/>
+                    <a:lstStyle/>
+                    <a:p>
+                      <a:pPr algn="ctr" indent="0" marL="0">
+                        <a:buNone/>
+                      </a:pPr>
+                      <a:r>
+                        <a:rPr lang="en-US" sz="1000" dirty="0">
+                          <a:solidFill>
+                            <a:srgbClr val="E8E8E8"/>
+                          </a:solidFill>
+                          <a:latin typeface="Calibri" pitchFamily="34" charset="0"/>
+                          <a:ea typeface="Calibri" pitchFamily="34" charset="-122"/>
+                          <a:cs typeface="Calibri" pitchFamily="34" charset="-120"/>
+                        </a:rPr>
+                        <a:t>Vorabend</a:t>
+                      </a:r>
+                      <a:endParaRPr lang="en-US" sz="1000" dirty="0">
+                        <a:latin typeface="Calibri" charset="0"/>
+                        <a:ea typeface="Calibri" charset="0"/>
+                        <a:cs typeface="Calibri" charset="0"/>
+                      </a:endParaRPr>
+                    </a:p>
+                  </a:txBody>
+                  <a:tcPr marL="91440" marR="91440" marT="45720" marB="45720">
+                    <a:lnL w="12700" cap="flat" cmpd="sng" algn="ctr">
+                      <a:solidFill>
+                        <a:srgbClr val="0F3460"/>
+                      </a:solidFill>
+                      <a:prstDash val="solid"/>
+                      <a:round/>
+                      <a:headEnd type="none" w="med" len="med"/>
+                      <a:tailEnd type="none" w="med" len="med"/>
+                    </a:lnL>
+                    <a:lnR w="12700" cap="flat" cmpd="sng" algn="ctr">
+                      <a:solidFill>
+                        <a:srgbClr val="0F3460"/>
+                      </a:solidFill>
+                      <a:prstDash val="solid"/>
+                      <a:round/>
+                      <a:headEnd type="none" w="med" len="med"/>
+                      <a:tailEnd type="none" w="med" len="med"/>
+                    </a:lnR>
+                    <a:lnT w="12700" cap="flat" cmpd="sng" algn="ctr">
+                      <a:solidFill>
+                        <a:srgbClr val="0F3460"/>
+                      </a:solidFill>
+                      <a:prstDash val="solid"/>
+                      <a:round/>
+                      <a:headEnd type="none" w="med" len="med"/>
+                      <a:tailEnd type="none" w="med" len="med"/>
+                    </a:lnT>
+                    <a:lnB w="12700" cap="flat" cmpd="sng" algn="ctr">
+                      <a:solidFill>
+                        <a:srgbClr val="0F3460"/>
+                      </a:solidFill>
+                      <a:prstDash val="solid"/>
+                      <a:round/>
+                      <a:headEnd type="none" w="med" len="med"/>
+                      <a:tailEnd type="none" w="med" len="med"/>
+                    </a:lnB>
+                    <a:solidFill>
+                      <a:srgbClr val="1A1A2E"/>
+                    </a:solidFill>
+                  </a:tcPr>
+                </a:tc>
+                <a:tc>
+                  <a:txBody>
+                    <a:bodyPr/>
+                    <a:lstStyle/>
+                    <a:p>
+                      <a:pPr algn="ctr" indent="0" marL="0">
+                        <a:buNone/>
+                      </a:pPr>
+                      <a:r>
+                        <a:rPr lang="en-US" sz="1000" dirty="0">
+                          <a:solidFill>
+                            <a:srgbClr val="E8E8E8"/>
+                          </a:solidFill>
+                          <a:latin typeface="Calibri" pitchFamily="34" charset="0"/>
+                          <a:ea typeface="Calibri" pitchFamily="34" charset="-122"/>
+                          <a:cs typeface="Calibri" pitchFamily="34" charset="-120"/>
+                        </a:rPr>
+                        <a:t>EW</a:t>
+                      </a:r>
+                      <a:endParaRPr lang="en-US" sz="1000" dirty="0">
+                        <a:latin typeface="Calibri" charset="0"/>
+                        <a:ea typeface="Calibri" charset="0"/>
+                        <a:cs typeface="Calibri" charset="0"/>
+                      </a:endParaRPr>
+                    </a:p>
+                    <a:p>
+                      <a:pPr algn="ctr" indent="0" marL="0">
+                        <a:buNone/>
+                      </a:pPr>
+                      <a:r>
+                        <a:rPr lang="en-US" sz="1000" dirty="0">
+                          <a:solidFill>
+                            <a:srgbClr val="E8E8E8"/>
+                          </a:solidFill>
+                          <a:latin typeface="Calibri" pitchFamily="34" charset="0"/>
+                          <a:ea typeface="Calibri" pitchFamily="34" charset="-122"/>
+                          <a:cs typeface="Calibri" pitchFamily="34" charset="-120"/>
+                        </a:rPr>
+                        <a:t>Eurowings</a:t>
+                      </a:r>
+                      <a:endParaRPr lang="en-US" sz="1000" dirty="0">
+                        <a:latin typeface="Calibri" charset="0"/>
+                        <a:ea typeface="Calibri" charset="0"/>
+                        <a:cs typeface="Calibri" charset="0"/>
+                      </a:endParaRPr>
+                    </a:p>
+                  </a:txBody>
+                  <a:tcPr marL="91440" marR="91440" marT="45720" marB="45720">
+                    <a:lnL w="12700" cap="flat" cmpd="sng" algn="ctr">
+                      <a:solidFill>
+                        <a:srgbClr val="0F3460"/>
+                      </a:solidFill>
+                      <a:prstDash val="solid"/>
+                      <a:round/>
+                      <a:headEnd type="none" w="med" len="med"/>
+                      <a:tailEnd type="none" w="med" len="med"/>
+                    </a:lnL>
+                    <a:lnR w="12700" cap="flat" cmpd="sng" algn="ctr">
+                      <a:solidFill>
+                        <a:srgbClr val="0F3460"/>
+                      </a:solidFill>
+                      <a:prstDash val="solid"/>
+                      <a:round/>
+                      <a:headEnd type="none" w="med" len="med"/>
+                      <a:tailEnd type="none" w="med" len="med"/>
+                    </a:lnR>
+                    <a:lnT w="12700" cap="flat" cmpd="sng" algn="ctr">
+                      <a:solidFill>
+                        <a:srgbClr val="0F3460"/>
+                      </a:solidFill>
+                      <a:prstDash val="solid"/>
+                      <a:round/>
+                      <a:headEnd type="none" w="med" len="med"/>
+                      <a:tailEnd type="none" w="med" len="med"/>
+                    </a:lnT>
+                    <a:lnB w="12700" cap="flat" cmpd="sng" algn="ctr">
+                      <a:solidFill>
+                        <a:srgbClr val="0F3460"/>
+                      </a:solidFill>
+                      <a:prstDash val="solid"/>
+                      <a:round/>
+                      <a:headEnd type="none" w="med" len="med"/>
+                      <a:tailEnd type="none" w="med" len="med"/>
+                    </a:lnB>
+                    <a:solidFill>
+                      <a:srgbClr val="1A1A2E"/>
+                    </a:solidFill>
+                  </a:tcPr>
+                </a:tc>
+                <a:tc>
+                  <a:txBody>
+                    <a:bodyPr/>
+                    <a:lstStyle/>
+                    <a:p>
+                      <a:pPr algn="ctr" indent="0" marL="0">
+                        <a:buNone/>
+                      </a:pPr>
+                      <a:r>
+                        <a:rPr lang="en-US" sz="1000" dirty="0">
+                          <a:solidFill>
+                            <a:srgbClr val="E8E8E8"/>
+                          </a:solidFill>
+                          <a:latin typeface="Calibri" pitchFamily="34" charset="0"/>
+                          <a:ea typeface="Calibri" pitchFamily="34" charset="-122"/>
+                          <a:cs typeface="Calibri" pitchFamily="34" charset="-120"/>
+                        </a:rPr>
+                        <a:t>DUS → MXP</a:t>
+                      </a:r>
+                      <a:endParaRPr lang="en-US" sz="1000" dirty="0">
+                        <a:latin typeface="Calibri" charset="0"/>
+                        <a:ea typeface="Calibri" charset="0"/>
+                        <a:cs typeface="Calibri" charset="0"/>
+                      </a:endParaRPr>
+                    </a:p>
+                    <a:p>
+                      <a:pPr algn="ctr" indent="0" marL="0">
+                        <a:buNone/>
+                      </a:pPr>
+                      <a:r>
+                        <a:rPr lang="en-US" sz="1000" dirty="0">
+                          <a:solidFill>
+                            <a:srgbClr val="E8E8E8"/>
+                          </a:solidFill>
+                          <a:latin typeface="Calibri" pitchFamily="34" charset="0"/>
+                          <a:ea typeface="Calibri" pitchFamily="34" charset="-122"/>
+                          <a:cs typeface="Calibri" pitchFamily="34" charset="-120"/>
+                        </a:rPr>
+                        <a:t>29. Okt. abends</a:t>
+                      </a:r>
+                      <a:endParaRPr lang="en-US" sz="1000" dirty="0">
+                        <a:latin typeface="Calibri" charset="0"/>
+                        <a:ea typeface="Calibri" charset="0"/>
+                        <a:cs typeface="Calibri" charset="0"/>
+                      </a:endParaRPr>
+                    </a:p>
+                  </a:txBody>
+                  <a:tcPr marL="91440" marR="91440" marT="45720" marB="45720">
+                    <a:lnL w="12700" cap="flat" cmpd="sng" algn="ctr">
+                      <a:solidFill>
+                        <a:srgbClr val="0F3460"/>
+                      </a:solidFill>
+                      <a:prstDash val="solid"/>
+                      <a:round/>
+                      <a:headEnd type="none" w="med" len="med"/>
+                      <a:tailEnd type="none" w="med" len="med"/>
+                    </a:lnL>
+                    <a:lnR w="12700" cap="flat" cmpd="sng" algn="ctr">
+                      <a:solidFill>
+                        <a:srgbClr val="0F3460"/>
+                      </a:solidFill>
+                      <a:prstDash val="solid"/>
+                      <a:round/>
+                      <a:headEnd type="none" w="med" len="med"/>
+                      <a:tailEnd type="none" w="med" len="med"/>
+                    </a:lnR>
+                    <a:lnT w="12700" cap="flat" cmpd="sng" algn="ctr">
+                      <a:solidFill>
+                        <a:srgbClr val="0F3460"/>
+                      </a:solidFill>
+                      <a:prstDash val="solid"/>
+                      <a:round/>
+                      <a:headEnd type="none" w="med" len="med"/>
+                      <a:tailEnd type="none" w="med" len="med"/>
+                    </a:lnT>
+                    <a:lnB w="12700" cap="flat" cmpd="sng" algn="ctr">
+                      <a:solidFill>
+                        <a:srgbClr val="0F3460"/>
+                      </a:solidFill>
+                      <a:prstDash val="solid"/>
+                      <a:round/>
+                      <a:headEnd type="none" w="med" len="med"/>
+                      <a:tailEnd type="none" w="med" len="med"/>
+                    </a:lnB>
+                    <a:solidFill>
+                      <a:srgbClr val="1A1A2E"/>
+                    </a:solidFill>
+                  </a:tcPr>
+                </a:tc>
+                <a:tc>
+                  <a:txBody>
+                    <a:bodyPr/>
+                    <a:lstStyle/>
+                    <a:p>
+                      <a:pPr algn="ctr" indent="0" marL="0">
+                        <a:buNone/>
+                      </a:pPr>
+                      <a:r>
+                        <a:rPr lang="en-US" sz="1000" dirty="0">
+                          <a:solidFill>
+                            <a:srgbClr val="E8E8E8"/>
+                          </a:solidFill>
+                          <a:latin typeface="Calibri" pitchFamily="34" charset="0"/>
+                          <a:ea typeface="Calibri" pitchFamily="34" charset="-122"/>
+                          <a:cs typeface="Calibri" pitchFamily="34" charset="-120"/>
+                        </a:rPr>
+                        <a:t>~18:xx</a:t>
+                      </a:r>
+                      <a:endParaRPr lang="en-US" sz="1000" dirty="0">
+                        <a:latin typeface="Calibri" charset="0"/>
+                        <a:ea typeface="Calibri" charset="0"/>
+                        <a:cs typeface="Calibri" charset="0"/>
+                      </a:endParaRPr>
+                    </a:p>
+                  </a:txBody>
+                  <a:tcPr marL="91440" marR="91440" marT="45720" marB="45720">
+                    <a:lnL w="12700" cap="flat" cmpd="sng" algn="ctr">
+                      <a:solidFill>
+                        <a:srgbClr val="0F3460"/>
+                      </a:solidFill>
+                      <a:prstDash val="solid"/>
+                      <a:round/>
+                      <a:headEnd type="none" w="med" len="med"/>
+                      <a:tailEnd type="none" w="med" len="med"/>
+                    </a:lnL>
+                    <a:lnR w="12700" cap="flat" cmpd="sng" algn="ctr">
+                      <a:solidFill>
+                        <a:srgbClr val="0F3460"/>
+                      </a:solidFill>
+                      <a:prstDash val="solid"/>
+                      <a:round/>
+                      <a:headEnd type="none" w="med" len="med"/>
+                      <a:tailEnd type="none" w="med" len="med"/>
+                    </a:lnR>
+                    <a:lnT w="12700" cap="flat" cmpd="sng" algn="ctr">
+                      <a:solidFill>
+                        <a:srgbClr val="0F3460"/>
+                      </a:solidFill>
+                      <a:prstDash val="solid"/>
+                      <a:round/>
+                      <a:headEnd type="none" w="med" len="med"/>
+                      <a:tailEnd type="none" w="med" len="med"/>
+                    </a:lnT>
+                    <a:lnB w="12700" cap="flat" cmpd="sng" algn="ctr">
+                      <a:solidFill>
+                        <a:srgbClr val="0F3460"/>
+                      </a:solidFill>
+                      <a:prstDash val="solid"/>
+                      <a:round/>
+                      <a:headEnd type="none" w="med" len="med"/>
+                      <a:tailEnd type="none" w="med" len="med"/>
+                    </a:lnB>
+                    <a:solidFill>
+                      <a:srgbClr val="1A1A2E"/>
+                    </a:solidFill>
+                  </a:tcPr>
+                </a:tc>
+                <a:tc>
+                  <a:txBody>
+                    <a:bodyPr/>
+                    <a:lstStyle/>
+                    <a:p>
+                      <a:pPr algn="ctr" indent="0" marL="0">
+                        <a:buNone/>
+                      </a:pPr>
+                      <a:r>
+                        <a:rPr lang="en-US" sz="1000" dirty="0">
+                          <a:solidFill>
+                            <a:srgbClr val="E8E8E8"/>
+                          </a:solidFill>
+                          <a:latin typeface="Calibri" pitchFamily="34" charset="0"/>
+                          <a:ea typeface="Calibri" pitchFamily="34" charset="-122"/>
+                          <a:cs typeface="Calibri" pitchFamily="34" charset="-120"/>
+                        </a:rPr>
+                        <a:t>~19:40</a:t>
+                      </a:r>
+                      <a:endParaRPr lang="en-US" sz="1000" dirty="0">
+                        <a:latin typeface="Calibri" charset="0"/>
+                        <a:ea typeface="Calibri" charset="0"/>
+                        <a:cs typeface="Calibri" charset="0"/>
+                      </a:endParaRPr>
+                    </a:p>
+                  </a:txBody>
+                  <a:tcPr marL="91440" marR="91440" marT="45720" marB="45720">
+                    <a:lnL w="12700" cap="flat" cmpd="sng" algn="ctr">
+                      <a:solidFill>
+                        <a:srgbClr val="0F3460"/>
+                      </a:solidFill>
+                      <a:prstDash val="solid"/>
+                      <a:round/>
+                      <a:headEnd type="none" w="med" len="med"/>
+                      <a:tailEnd type="none" w="med" len="med"/>
+                    </a:lnL>
+                    <a:lnR w="12700" cap="flat" cmpd="sng" algn="ctr">
+                      <a:solidFill>
+                        <a:srgbClr val="0F3460"/>
+                      </a:solidFill>
+                      <a:prstDash val="solid"/>
+                      <a:round/>
+                      <a:headEnd type="none" w="med" len="med"/>
+                      <a:tailEnd type="none" w="med" len="med"/>
+                    </a:lnR>
+                    <a:lnT w="12700" cap="flat" cmpd="sng" algn="ctr">
+                      <a:solidFill>
+                        <a:srgbClr val="0F3460"/>
+                      </a:solidFill>
+                      <a:prstDash val="solid"/>
+                      <a:round/>
+                      <a:headEnd type="none" w="med" len="med"/>
+                      <a:tailEnd type="none" w="med" len="med"/>
+                    </a:lnT>
+                    <a:lnB w="12700" cap="flat" cmpd="sng" algn="ctr">
+                      <a:solidFill>
+                        <a:srgbClr val="0F3460"/>
+                      </a:solidFill>
+                      <a:prstDash val="solid"/>
+                      <a:round/>
+                      <a:headEnd type="none" w="med" len="med"/>
+                      <a:tailEnd type="none" w="med" len="med"/>
+                    </a:lnB>
+                    <a:solidFill>
+                      <a:srgbClr val="1A1A2E"/>
+                    </a:solidFill>
+                  </a:tcPr>
+                </a:tc>
+                <a:tc>
+                  <a:txBody>
+                    <a:bodyPr/>
+                    <a:lstStyle/>
+                    <a:p>
+                      <a:pPr algn="ctr" indent="0" marL="0">
+                        <a:buNone/>
+                      </a:pPr>
+                      <a:r>
+                        <a:rPr lang="en-US" sz="1000" dirty="0">
+                          <a:solidFill>
+                            <a:srgbClr val="E8E8E8"/>
+                          </a:solidFill>
+                          <a:latin typeface="Calibri" pitchFamily="34" charset="0"/>
+                          <a:ea typeface="Calibri" pitchFamily="34" charset="-122"/>
+                          <a:cs typeface="Calibri" pitchFamily="34" charset="-120"/>
+                        </a:rPr>
+                        <a:t>1h 40m</a:t>
+                      </a:r>
+                      <a:endParaRPr lang="en-US" sz="1000" dirty="0">
+                        <a:latin typeface="Calibri" charset="0"/>
+                        <a:ea typeface="Calibri" charset="0"/>
+                        <a:cs typeface="Calibri" charset="0"/>
+                      </a:endParaRPr>
+                    </a:p>
+                  </a:txBody>
+                  <a:tcPr marL="91440" marR="91440" marT="45720" marB="45720">
+                    <a:lnL w="12700" cap="flat" cmpd="sng" algn="ctr">
+                      <a:solidFill>
+                        <a:srgbClr val="0F3460"/>
+                      </a:solidFill>
+                      <a:prstDash val="solid"/>
+                      <a:round/>
+                      <a:headEnd type="none" w="med" len="med"/>
+                      <a:tailEnd type="none" w="med" len="med"/>
+                    </a:lnL>
+                    <a:lnR w="12700" cap="flat" cmpd="sng" algn="ctr">
+                      <a:solidFill>
+                        <a:srgbClr val="0F3460"/>
+                      </a:solidFill>
+                      <a:prstDash val="solid"/>
+                      <a:round/>
+                      <a:headEnd type="none" w="med" len="med"/>
+                      <a:tailEnd type="none" w="med" len="med"/>
+                    </a:lnR>
+                    <a:lnT w="12700" cap="flat" cmpd="sng" algn="ctr">
+                      <a:solidFill>
+                        <a:srgbClr val="0F3460"/>
+                      </a:solidFill>
+                      <a:prstDash val="solid"/>
+                      <a:round/>
+                      <a:headEnd type="none" w="med" len="med"/>
+                      <a:tailEnd type="none" w="med" len="med"/>
+                    </a:lnT>
+                    <a:lnB w="12700" cap="flat" cmpd="sng" algn="ctr">
+                      <a:solidFill>
+                        <a:srgbClr val="0F3460"/>
+                      </a:solidFill>
+                      <a:prstDash val="solid"/>
+                      <a:round/>
+                      <a:headEnd type="none" w="med" len="med"/>
+                      <a:tailEnd type="none" w="med" len="med"/>
+                    </a:lnB>
+                    <a:solidFill>
+                      <a:srgbClr val="1A1A2E"/>
+                    </a:solidFill>
+                  </a:tcPr>
+                </a:tc>
+                <a:tc>
+                  <a:txBody>
+                    <a:bodyPr/>
+                    <a:lstStyle/>
+                    <a:p>
+                      <a:pPr algn="ctr" indent="0" marL="0">
+                        <a:buNone/>
+                      </a:pPr>
+                      <a:r>
+                        <a:rPr lang="en-US" sz="1000" dirty="0">
+                          <a:solidFill>
+                            <a:srgbClr val="E8E8E8"/>
+                          </a:solidFill>
+                          <a:latin typeface="Calibri" pitchFamily="34" charset="0"/>
+                          <a:ea typeface="Calibri" pitchFamily="34" charset="-122"/>
+                          <a:cs typeface="Calibri" pitchFamily="34" charset="-120"/>
+                        </a:rPr>
+                        <a:t>~€90</a:t>
+                      </a:r>
+                      <a:endParaRPr lang="en-US" sz="1000" dirty="0">
+                        <a:latin typeface="Calibri" charset="0"/>
+                        <a:ea typeface="Calibri" charset="0"/>
+                        <a:cs typeface="Calibri" charset="0"/>
+                      </a:endParaRPr>
+                    </a:p>
+                  </a:txBody>
+                  <a:tcPr marL="91440" marR="91440" marT="45720" marB="45720">
+                    <a:lnL w="12700" cap="flat" cmpd="sng" algn="ctr">
+                      <a:solidFill>
+                        <a:srgbClr val="0F3460"/>
+                      </a:solidFill>
+                      <a:prstDash val="solid"/>
+                      <a:round/>
+                      <a:headEnd type="none" w="med" len="med"/>
+                      <a:tailEnd type="none" w="med" len="med"/>
+                    </a:lnL>
+                    <a:lnR w="12700" cap="flat" cmpd="sng" algn="ctr">
+                      <a:solidFill>
+                        <a:srgbClr val="0F3460"/>
+                      </a:solidFill>
+                      <a:prstDash val="solid"/>
+                      <a:round/>
+                      <a:headEnd type="none" w="med" len="med"/>
+                      <a:tailEnd type="none" w="med" len="med"/>
+                    </a:lnR>
+                    <a:lnT w="12700" cap="flat" cmpd="sng" algn="ctr">
+                      <a:solidFill>
+                        <a:srgbClr val="0F3460"/>
+                      </a:solidFill>
+                      <a:prstDash val="solid"/>
+                      <a:round/>
+                      <a:headEnd type="none" w="med" len="med"/>
+                      <a:tailEnd type="none" w="med" len="med"/>
+                    </a:lnT>
+                    <a:lnB w="12700" cap="flat" cmpd="sng" algn="ctr">
+                      <a:solidFill>
+                        <a:srgbClr val="0F3460"/>
+                      </a:solidFill>
+                      <a:prstDash val="solid"/>
+                      <a:round/>
+                      <a:headEnd type="none" w="med" len="med"/>
+                      <a:tailEnd type="none" w="med" len="med"/>
+                    </a:lnB>
+                    <a:solidFill>
+                      <a:srgbClr val="1A1A2E"/>
+                    </a:solidFill>
+                  </a:tcPr>
+                </a:tc>
+                <a:tc>
+                  <a:txBody>
+                    <a:bodyPr/>
+                    <a:lstStyle/>
+                    <a:p>
+                      <a:pPr algn="ctr" indent="0" marL="0">
+                        <a:buNone/>
+                      </a:pPr>
+                      <a:r>
+                        <a:rPr lang="en-US" sz="1000" dirty="0">
+                          <a:solidFill>
+                            <a:srgbClr val="FFC107"/>
+                          </a:solidFill>
+                          <a:latin typeface="Calibri" pitchFamily="34" charset="0"/>
+                          <a:ea typeface="Calibri" pitchFamily="34" charset="-122"/>
+                          <a:cs typeface="Calibri" pitchFamily="34" charset="-120"/>
+                        </a:rPr>
+                        <a:t>~€360</a:t>
+                      </a:r>
+                      <a:endParaRPr lang="en-US" sz="1000" dirty="0">
+                        <a:latin typeface="Calibri" charset="0"/>
+                        <a:ea typeface="Calibri" charset="0"/>
+                        <a:cs typeface="Calibri" charset="0"/>
+                      </a:endParaRPr>
+                    </a:p>
+                  </a:txBody>
+                  <a:tcPr marL="91440" marR="91440" marT="45720" marB="45720">
+                    <a:lnL w="12700" cap="flat" cmpd="sng" algn="ctr">
+                      <a:solidFill>
+                        <a:srgbClr val="0F3460"/>
+                      </a:solidFill>
+                      <a:prstDash val="solid"/>
+                      <a:round/>
+                      <a:headEnd type="none" w="med" len="med"/>
+                      <a:tailEnd type="none" w="med" len="med"/>
+                    </a:lnL>
+                    <a:lnR w="12700" cap="flat" cmpd="sng" algn="ctr">
+                      <a:solidFill>
+                        <a:srgbClr val="0F3460"/>
+                      </a:solidFill>
+                      <a:prstDash val="solid"/>
+                      <a:round/>
+                      <a:headEnd type="none" w="med" len="med"/>
+                      <a:tailEnd type="none" w="med" len="med"/>
+                    </a:lnR>
+                    <a:lnT w="12700" cap="flat" cmpd="sng" algn="ctr">
+                      <a:solidFill>
+                        <a:srgbClr val="0F3460"/>
+                      </a:solidFill>
+                      <a:prstDash val="solid"/>
+                      <a:round/>
+                      <a:headEnd type="none" w="med" len="med"/>
+                      <a:tailEnd type="none" w="med" len="med"/>
+                    </a:lnT>
+                    <a:lnB w="12700" cap="flat" cmpd="sng" algn="ctr">
+                      <a:solidFill>
+                        <a:srgbClr val="0F3460"/>
+                      </a:solidFill>
+                      <a:prstDash val="solid"/>
+                      <a:round/>
+                      <a:headEnd type="none" w="med" len="med"/>
+                      <a:tailEnd type="none" w="med" len="med"/>
+                    </a:lnB>
+                    <a:solidFill>
+                      <a:srgbClr val="1A1A2E"/>
+                    </a:solidFill>
+                  </a:tcPr>
+                </a:tc>
+              </a:tr>
+              <a:tr h="475488">
+                <a:tc>
+                  <a:txBody>
+                    <a:bodyPr/>
+                    <a:lstStyle/>
+                    <a:p>
+                      <a:pPr algn="ctr" indent="0" marL="0">
+                        <a:buNone/>
+                      </a:pPr>
+                      <a:r>
+                        <a:rPr lang="en-US" sz="1000" dirty="0">
+                          <a:solidFill>
+                            <a:srgbClr val="E8E8E8"/>
+                          </a:solidFill>
+                          <a:latin typeface="Calibri" pitchFamily="34" charset="0"/>
+                          <a:ea typeface="Calibri" pitchFamily="34" charset="-122"/>
+                          <a:cs typeface="Calibri" pitchFamily="34" charset="-120"/>
+                        </a:rPr>
+                        <a:t>Mittag</a:t>
+                      </a:r>
+                      <a:endParaRPr lang="en-US" sz="1000" dirty="0">
+                        <a:latin typeface="Calibri" charset="0"/>
+                        <a:ea typeface="Calibri" charset="0"/>
+                        <a:cs typeface="Calibri" charset="0"/>
+                      </a:endParaRPr>
+                    </a:p>
+                  </a:txBody>
+                  <a:tcPr marL="91440" marR="91440" marT="45720" marB="45720">
+                    <a:lnL w="12700" cap="flat" cmpd="sng" algn="ctr">
+                      <a:solidFill>
+                        <a:srgbClr val="0F3460"/>
+                      </a:solidFill>
+                      <a:prstDash val="solid"/>
+                      <a:round/>
+                      <a:headEnd type="none" w="med" len="med"/>
+                      <a:tailEnd type="none" w="med" len="med"/>
+                    </a:lnL>
+                    <a:lnR w="12700" cap="flat" cmpd="sng" algn="ctr">
+                      <a:solidFill>
+                        <a:srgbClr val="0F3460"/>
+                      </a:solidFill>
+                      <a:prstDash val="solid"/>
+                      <a:round/>
+                      <a:headEnd type="none" w="med" len="med"/>
+                      <a:tailEnd type="none" w="med" len="med"/>
+                    </a:lnR>
+                    <a:lnT w="12700" cap="flat" cmpd="sng" algn="ctr">
+                      <a:solidFill>
+                        <a:srgbClr val="0F3460"/>
+                      </a:solidFill>
+                      <a:prstDash val="solid"/>
+                      <a:round/>
+                      <a:headEnd type="none" w="med" len="med"/>
+                      <a:tailEnd type="none" w="med" len="med"/>
+                    </a:lnT>
+                    <a:lnB w="12700" cap="flat" cmpd="sng" algn="ctr">
+                      <a:solidFill>
+                        <a:srgbClr val="0F3460"/>
+                      </a:solidFill>
+                      <a:prstDash val="solid"/>
+                      <a:round/>
+                      <a:headEnd type="none" w="med" len="med"/>
+                      <a:tailEnd type="none" w="med" len="med"/>
+                    </a:lnB>
+                    <a:solidFill>
+                      <a:srgbClr val="16213E"/>
+                    </a:solidFill>
+                  </a:tcPr>
+                </a:tc>
+                <a:tc>
+                  <a:txBody>
+                    <a:bodyPr/>
+                    <a:lstStyle/>
+                    <a:p>
+                      <a:pPr algn="ctr" indent="0" marL="0">
+                        <a:buNone/>
+                      </a:pPr>
+                      <a:r>
+                        <a:rPr lang="en-US" sz="1000" dirty="0">
+                          <a:solidFill>
+                            <a:srgbClr val="E8E8E8"/>
+                          </a:solidFill>
+                          <a:latin typeface="Calibri" pitchFamily="34" charset="0"/>
+                          <a:ea typeface="Calibri" pitchFamily="34" charset="-122"/>
+                          <a:cs typeface="Calibri" pitchFamily="34" charset="-120"/>
+                        </a:rPr>
+                        <a:t>ITA Airways</a:t>
+                      </a:r>
+                      <a:endParaRPr lang="en-US" sz="1000" dirty="0">
+                        <a:latin typeface="Calibri" charset="0"/>
+                        <a:ea typeface="Calibri" charset="0"/>
+                        <a:cs typeface="Calibri" charset="0"/>
+                      </a:endParaRPr>
+                    </a:p>
+                    <a:p>
+                      <a:pPr algn="ctr" indent="0" marL="0">
+                        <a:buNone/>
+                      </a:pPr>
+                      <a:r>
+                        <a:rPr lang="en-US" sz="1000" dirty="0">
+                          <a:solidFill>
+                            <a:srgbClr val="E8E8E8"/>
+                          </a:solidFill>
+                          <a:latin typeface="Calibri" pitchFamily="34" charset="0"/>
+                          <a:ea typeface="Calibri" pitchFamily="34" charset="-122"/>
+                          <a:cs typeface="Calibri" pitchFamily="34" charset="-120"/>
+                        </a:rPr>
+                        <a:t>(ex-Alitalia)</a:t>
+                      </a:r>
+                      <a:endParaRPr lang="en-US" sz="1000" dirty="0">
+                        <a:latin typeface="Calibri" charset="0"/>
+                        <a:ea typeface="Calibri" charset="0"/>
+                        <a:cs typeface="Calibri" charset="0"/>
+                      </a:endParaRPr>
+                    </a:p>
+                  </a:txBody>
+                  <a:tcPr marL="91440" marR="91440" marT="45720" marB="45720">
+                    <a:lnL w="12700" cap="flat" cmpd="sng" algn="ctr">
+                      <a:solidFill>
+                        <a:srgbClr val="0F3460"/>
+                      </a:solidFill>
+                      <a:prstDash val="solid"/>
+                      <a:round/>
+                      <a:headEnd type="none" w="med" len="med"/>
+                      <a:tailEnd type="none" w="med" len="med"/>
+                    </a:lnL>
+                    <a:lnR w="12700" cap="flat" cmpd="sng" algn="ctr">
+                      <a:solidFill>
+                        <a:srgbClr val="0F3460"/>
+                      </a:solidFill>
+                      <a:prstDash val="solid"/>
+                      <a:round/>
+                      <a:headEnd type="none" w="med" len="med"/>
+                      <a:tailEnd type="none" w="med" len="med"/>
+                    </a:lnR>
+                    <a:lnT w="12700" cap="flat" cmpd="sng" algn="ctr">
+                      <a:solidFill>
+                        <a:srgbClr val="0F3460"/>
+                      </a:solidFill>
+                      <a:prstDash val="solid"/>
+                      <a:round/>
+                      <a:headEnd type="none" w="med" len="med"/>
+                      <a:tailEnd type="none" w="med" len="med"/>
+                    </a:lnT>
+                    <a:lnB w="12700" cap="flat" cmpd="sng" algn="ctr">
+                      <a:solidFill>
+                        <a:srgbClr val="0F3460"/>
+                      </a:solidFill>
+                      <a:prstDash val="solid"/>
+                      <a:round/>
+                      <a:headEnd type="none" w="med" len="med"/>
+                      <a:tailEnd type="none" w="med" len="med"/>
+                    </a:lnB>
+                    <a:solidFill>
+                      <a:srgbClr val="16213E"/>
+                    </a:solidFill>
+                  </a:tcPr>
+                </a:tc>
+                <a:tc>
+                  <a:txBody>
+                    <a:bodyPr/>
+                    <a:lstStyle/>
+                    <a:p>
+                      <a:pPr algn="ctr" indent="0" marL="0">
+                        <a:buNone/>
+                      </a:pPr>
+                      <a:r>
+                        <a:rPr lang="en-US" sz="1000" dirty="0">
+                          <a:solidFill>
+                            <a:srgbClr val="E8E8E8"/>
+                          </a:solidFill>
+                          <a:latin typeface="Calibri" pitchFamily="34" charset="0"/>
+                          <a:ea typeface="Calibri" pitchFamily="34" charset="-122"/>
+                          <a:cs typeface="Calibri" pitchFamily="34" charset="-120"/>
+                        </a:rPr>
+                        <a:t>DUS → MXP</a:t>
                       </a:r>
                       <a:endParaRPr lang="en-US" sz="1000" dirty="0">
                         <a:latin typeface="Calibri" charset="0"/>
@@ -25136,7 +26077,7 @@
                           <a:ea typeface="Calibri" pitchFamily="34" charset="-122"/>
                           <a:cs typeface="Calibri" pitchFamily="34" charset="-120"/>
                         </a:rPr>
-                        <a:t>Morgens</a:t>
+                        <a:t>~12:xx</a:t>
                       </a:r>
                       <a:endParaRPr lang="en-US" sz="1000" dirty="0">
                         <a:latin typeface="Calibri" charset="0"/>
@@ -25204,7 +26145,7 @@
                           <a:ea typeface="Calibri" pitchFamily="34" charset="-122"/>
                           <a:cs typeface="Calibri" pitchFamily="34" charset="-120"/>
                         </a:rPr>
-                        <a:t>~10:30</a:t>
+                        <a:t>~13:50</a:t>
                       </a:r>
                       <a:endParaRPr lang="en-US" sz="1000" dirty="0">
                         <a:latin typeface="Calibri" charset="0"/>
@@ -25272,7 +26213,7 @@
                           <a:ea typeface="Calibri" pitchFamily="34" charset="-122"/>
                           <a:cs typeface="Calibri" pitchFamily="34" charset="-120"/>
                         </a:rPr>
-                        <a:t>~3h 00m</a:t>
+                        <a:t>1h 40m</a:t>
                       </a:r>
                       <a:endParaRPr lang="en-US" sz="1000" dirty="0">
                         <a:latin typeface="Calibri" charset="0"/>
@@ -25340,7 +26281,7 @@
                           <a:ea typeface="Calibri" pitchFamily="34" charset="-122"/>
                           <a:cs typeface="Calibri" pitchFamily="34" charset="-120"/>
                         </a:rPr>
-                        <a:t>~€60–90</a:t>
+                        <a:t>~€100–130</a:t>
                       </a:r>
                       <a:endParaRPr lang="en-US" sz="1000" dirty="0">
                         <a:latin typeface="Calibri" charset="0"/>
@@ -25400,15 +26341,15 @@
                         <a:buNone/>
                       </a:pPr>
                       <a:r>
-                        <a:rPr lang="en-US" sz="1000" b="1" dirty="0">
+                        <a:rPr lang="en-US" sz="1000" dirty="0">
                           <a:solidFill>
-                            <a:srgbClr val="FF8C00"/>
+                            <a:srgbClr val="FFC107"/>
                           </a:solidFill>
                           <a:latin typeface="Calibri" pitchFamily="34" charset="0"/>
                           <a:ea typeface="Calibri" pitchFamily="34" charset="-122"/>
                           <a:cs typeface="Calibri" pitchFamily="34" charset="-120"/>
                         </a:rPr>
-                        <a:t>~€240–360</a:t>
+                        <a:t>~€400–520</a:t>
                       </a:r>
                       <a:endParaRPr lang="en-US" sz="1000" dirty="0">
                         <a:latin typeface="Calibri" charset="0"/>
@@ -25478,7 +26419,7 @@
                           <a:ea typeface="Calibri" pitchFamily="34" charset="-122"/>
                           <a:cs typeface="Calibri" pitchFamily="34" charset="-120"/>
                         </a:rPr>
-                        <a:t>Option 2</a:t>
+                        <a:t>Budget</a:t>
                       </a:r>
                       <a:endParaRPr lang="en-US" sz="1000" dirty="0">
                         <a:latin typeface="Calibri" charset="0"/>
@@ -25635,7 +26576,7 @@
                           <a:ea typeface="Calibri" pitchFamily="34" charset="-122"/>
                           <a:cs typeface="Calibri" pitchFamily="34" charset="-120"/>
                         </a:rPr>
-                        <a:t>DTM → MLA</a:t>
+                        <a:t>DUS → BGY</a:t>
                       </a:r>
                       <a:endParaRPr lang="en-US" sz="1000" dirty="0">
                         <a:latin typeface="Calibri" charset="0"/>
@@ -25724,7 +26665,7 @@
                           <a:ea typeface="Calibri" pitchFamily="34" charset="-122"/>
                           <a:cs typeface="Calibri" pitchFamily="34" charset="-120"/>
                         </a:rPr>
-                        <a:t>Morgens</a:t>
+                        <a:t>Verschieden</a:t>
                       </a:r>
                       <a:endParaRPr lang="en-US" sz="1000" dirty="0">
                         <a:latin typeface="Calibri" charset="0"/>
@@ -25792,7 +26733,7 @@
                           <a:ea typeface="Calibri" pitchFamily="34" charset="-122"/>
                           <a:cs typeface="Calibri" pitchFamily="34" charset="-120"/>
                         </a:rPr>
-                        <a:t>~10:45</a:t>
+                        <a:t>Verschieden</a:t>
                       </a:r>
                       <a:endParaRPr lang="en-US" sz="1000" dirty="0">
                         <a:latin typeface="Calibri" charset="0"/>
@@ -25860,7 +26801,7 @@
                           <a:ea typeface="Calibri" pitchFamily="34" charset="-122"/>
                           <a:cs typeface="Calibri" pitchFamily="34" charset="-120"/>
                         </a:rPr>
-                        <a:t>~3h 00m</a:t>
+                        <a:t>1h 45m</a:t>
                       </a:r>
                       <a:endParaRPr lang="en-US" sz="1000" dirty="0">
                         <a:latin typeface="Calibri" charset="0"/>
@@ -25928,7 +26869,7 @@
                           <a:ea typeface="Calibri" pitchFamily="34" charset="-122"/>
                           <a:cs typeface="Calibri" pitchFamily="34" charset="-120"/>
                         </a:rPr>
-                        <a:t>~€65–95</a:t>
+                        <a:t>~€50–80</a:t>
                       </a:r>
                       <a:endParaRPr lang="en-US" sz="1000" dirty="0">
                         <a:latin typeface="Calibri" charset="0"/>
@@ -25996,1204 +26937,7 @@
                           <a:ea typeface="Calibri" pitchFamily="34" charset="-122"/>
                           <a:cs typeface="Calibri" pitchFamily="34" charset="-120"/>
                         </a:rPr>
-                        <a:t>~€260–380</a:t>
-                      </a:r>
-                      <a:endParaRPr lang="en-US" sz="1000" dirty="0">
-                        <a:latin typeface="Calibri" charset="0"/>
-                        <a:ea typeface="Calibri" charset="0"/>
-                        <a:cs typeface="Calibri" charset="0"/>
-                      </a:endParaRPr>
-                    </a:p>
-                  </a:txBody>
-                  <a:tcPr marL="91440" marR="91440" marT="45720" marB="45720">
-                    <a:lnL w="12700" cap="flat" cmpd="sng" algn="ctr">
-                      <a:solidFill>
-                        <a:srgbClr val="0F3460"/>
-                      </a:solidFill>
-                      <a:prstDash val="solid"/>
-                      <a:round/>
-                      <a:headEnd type="none" w="med" len="med"/>
-                      <a:tailEnd type="none" w="med" len="med"/>
-                    </a:lnL>
-                    <a:lnR w="12700" cap="flat" cmpd="sng" algn="ctr">
-                      <a:solidFill>
-                        <a:srgbClr val="0F3460"/>
-                      </a:solidFill>
-                      <a:prstDash val="solid"/>
-                      <a:round/>
-                      <a:headEnd type="none" w="med" len="med"/>
-                      <a:tailEnd type="none" w="med" len="med"/>
-                    </a:lnR>
-                    <a:lnT w="12700" cap="flat" cmpd="sng" algn="ctr">
-                      <a:solidFill>
-                        <a:srgbClr val="0F3460"/>
-                      </a:solidFill>
-                      <a:prstDash val="solid"/>
-                      <a:round/>
-                      <a:headEnd type="none" w="med" len="med"/>
-                      <a:tailEnd type="none" w="med" len="med"/>
-                    </a:lnT>
-                    <a:lnB w="12700" cap="flat" cmpd="sng" algn="ctr">
-                      <a:solidFill>
-                        <a:srgbClr val="0F3460"/>
-                      </a:solidFill>
-                      <a:prstDash val="solid"/>
-                      <a:round/>
-                      <a:headEnd type="none" w="med" len="med"/>
-                      <a:tailEnd type="none" w="med" len="med"/>
-                    </a:lnB>
-                    <a:solidFill>
-                      <a:srgbClr val="1A1A2E"/>
-                    </a:solidFill>
-                  </a:tcPr>
-                </a:tc>
-              </a:tr>
-              <a:tr h="475488">
-                <a:tc>
-                  <a:txBody>
-                    <a:bodyPr/>
-                    <a:lstStyle/>
-                    <a:p>
-                      <a:pPr algn="ctr" indent="0" marL="0">
-                        <a:buNone/>
-                      </a:pPr>
-                      <a:r>
-                        <a:rPr lang="en-US" sz="1000" dirty="0">
-                          <a:solidFill>
-                            <a:srgbClr val="E8E8E8"/>
-                          </a:solidFill>
-                          <a:latin typeface="Calibri" pitchFamily="34" charset="0"/>
-                          <a:ea typeface="Calibri" pitchFamily="34" charset="-122"/>
-                          <a:cs typeface="Calibri" pitchFamily="34" charset="-120"/>
-                        </a:rPr>
-                        <a:t>Vorabend</a:t>
-                      </a:r>
-                      <a:endParaRPr lang="en-US" sz="1000" dirty="0">
-                        <a:latin typeface="Calibri" charset="0"/>
-                        <a:ea typeface="Calibri" charset="0"/>
-                        <a:cs typeface="Calibri" charset="0"/>
-                      </a:endParaRPr>
-                    </a:p>
-                    <a:p>
-                      <a:pPr algn="ctr" indent="0" marL="0">
-                        <a:buNone/>
-                      </a:pPr>
-                      <a:r>
-                        <a:rPr lang="en-US" sz="1000" dirty="0">
-                          <a:solidFill>
-                            <a:srgbClr val="E8E8E8"/>
-                          </a:solidFill>
-                          <a:latin typeface="Calibri" pitchFamily="34" charset="0"/>
-                          <a:ea typeface="Calibri" pitchFamily="34" charset="-122"/>
-                          <a:cs typeface="Calibri" pitchFamily="34" charset="-120"/>
-                        </a:rPr>
-                        <a:t>29. Okt.</a:t>
-                      </a:r>
-                      <a:endParaRPr lang="en-US" sz="1000" dirty="0">
-                        <a:latin typeface="Calibri" charset="0"/>
-                        <a:ea typeface="Calibri" charset="0"/>
-                        <a:cs typeface="Calibri" charset="0"/>
-                      </a:endParaRPr>
-                    </a:p>
-                  </a:txBody>
-                  <a:tcPr marL="91440" marR="91440" marT="45720" marB="45720">
-                    <a:lnL w="12700" cap="flat" cmpd="sng" algn="ctr">
-                      <a:solidFill>
-                        <a:srgbClr val="0F3460"/>
-                      </a:solidFill>
-                      <a:prstDash val="solid"/>
-                      <a:round/>
-                      <a:headEnd type="none" w="med" len="med"/>
-                      <a:tailEnd type="none" w="med" len="med"/>
-                    </a:lnL>
-                    <a:lnR w="12700" cap="flat" cmpd="sng" algn="ctr">
-                      <a:solidFill>
-                        <a:srgbClr val="0F3460"/>
-                      </a:solidFill>
-                      <a:prstDash val="solid"/>
-                      <a:round/>
-                      <a:headEnd type="none" w="med" len="med"/>
-                      <a:tailEnd type="none" w="med" len="med"/>
-                    </a:lnR>
-                    <a:lnT w="12700" cap="flat" cmpd="sng" algn="ctr">
-                      <a:solidFill>
-                        <a:srgbClr val="0F3460"/>
-                      </a:solidFill>
-                      <a:prstDash val="solid"/>
-                      <a:round/>
-                      <a:headEnd type="none" w="med" len="med"/>
-                      <a:tailEnd type="none" w="med" len="med"/>
-                    </a:lnT>
-                    <a:lnB w="12700" cap="flat" cmpd="sng" algn="ctr">
-                      <a:solidFill>
-                        <a:srgbClr val="0F3460"/>
-                      </a:solidFill>
-                      <a:prstDash val="solid"/>
-                      <a:round/>
-                      <a:headEnd type="none" w="med" len="med"/>
-                      <a:tailEnd type="none" w="med" len="med"/>
-                    </a:lnB>
-                    <a:solidFill>
-                      <a:srgbClr val="16213E"/>
-                    </a:solidFill>
-                  </a:tcPr>
-                </a:tc>
-                <a:tc>
-                  <a:txBody>
-                    <a:bodyPr/>
-                    <a:lstStyle/>
-                    <a:p>
-                      <a:pPr algn="ctr" indent="0" marL="0">
-                        <a:buNone/>
-                      </a:pPr>
-                      <a:r>
-                        <a:rPr lang="en-US" sz="1000" dirty="0">
-                          <a:solidFill>
-                            <a:srgbClr val="E8E8E8"/>
-                          </a:solidFill>
-                          <a:latin typeface="Calibri" pitchFamily="34" charset="0"/>
-                          <a:ea typeface="Calibri" pitchFamily="34" charset="-122"/>
-                          <a:cs typeface="Calibri" pitchFamily="34" charset="-120"/>
-                        </a:rPr>
-                        <a:t>FR</a:t>
-                      </a:r>
-                      <a:endParaRPr lang="en-US" sz="1000" dirty="0">
-                        <a:latin typeface="Calibri" charset="0"/>
-                        <a:ea typeface="Calibri" charset="0"/>
-                        <a:cs typeface="Calibri" charset="0"/>
-                      </a:endParaRPr>
-                    </a:p>
-                    <a:p>
-                      <a:pPr algn="ctr" indent="0" marL="0">
-                        <a:buNone/>
-                      </a:pPr>
-                      <a:r>
-                        <a:rPr lang="en-US" sz="1000" dirty="0">
-                          <a:solidFill>
-                            <a:srgbClr val="E8E8E8"/>
-                          </a:solidFill>
-                          <a:latin typeface="Calibri" pitchFamily="34" charset="0"/>
-                          <a:ea typeface="Calibri" pitchFamily="34" charset="-122"/>
-                          <a:cs typeface="Calibri" pitchFamily="34" charset="-120"/>
-                        </a:rPr>
-                        <a:t>Ryanair</a:t>
-                      </a:r>
-                      <a:endParaRPr lang="en-US" sz="1000" dirty="0">
-                        <a:latin typeface="Calibri" charset="0"/>
-                        <a:ea typeface="Calibri" charset="0"/>
-                        <a:cs typeface="Calibri" charset="0"/>
-                      </a:endParaRPr>
-                    </a:p>
-                  </a:txBody>
-                  <a:tcPr marL="91440" marR="91440" marT="45720" marB="45720">
-                    <a:lnL w="12700" cap="flat" cmpd="sng" algn="ctr">
-                      <a:solidFill>
-                        <a:srgbClr val="0F3460"/>
-                      </a:solidFill>
-                      <a:prstDash val="solid"/>
-                      <a:round/>
-                      <a:headEnd type="none" w="med" len="med"/>
-                      <a:tailEnd type="none" w="med" len="med"/>
-                    </a:lnL>
-                    <a:lnR w="12700" cap="flat" cmpd="sng" algn="ctr">
-                      <a:solidFill>
-                        <a:srgbClr val="0F3460"/>
-                      </a:solidFill>
-                      <a:prstDash val="solid"/>
-                      <a:round/>
-                      <a:headEnd type="none" w="med" len="med"/>
-                      <a:tailEnd type="none" w="med" len="med"/>
-                    </a:lnR>
-                    <a:lnT w="12700" cap="flat" cmpd="sng" algn="ctr">
-                      <a:solidFill>
-                        <a:srgbClr val="0F3460"/>
-                      </a:solidFill>
-                      <a:prstDash val="solid"/>
-                      <a:round/>
-                      <a:headEnd type="none" w="med" len="med"/>
-                      <a:tailEnd type="none" w="med" len="med"/>
-                    </a:lnT>
-                    <a:lnB w="12700" cap="flat" cmpd="sng" algn="ctr">
-                      <a:solidFill>
-                        <a:srgbClr val="0F3460"/>
-                      </a:solidFill>
-                      <a:prstDash val="solid"/>
-                      <a:round/>
-                      <a:headEnd type="none" w="med" len="med"/>
-                      <a:tailEnd type="none" w="med" len="med"/>
-                    </a:lnB>
-                    <a:solidFill>
-                      <a:srgbClr val="16213E"/>
-                    </a:solidFill>
-                  </a:tcPr>
-                </a:tc>
-                <a:tc>
-                  <a:txBody>
-                    <a:bodyPr/>
-                    <a:lstStyle/>
-                    <a:p>
-                      <a:pPr algn="ctr" indent="0" marL="0">
-                        <a:buNone/>
-                      </a:pPr>
-                      <a:r>
-                        <a:rPr lang="en-US" sz="1000" dirty="0">
-                          <a:solidFill>
-                            <a:srgbClr val="E8E8E8"/>
-                          </a:solidFill>
-                          <a:latin typeface="Calibri" pitchFamily="34" charset="0"/>
-                          <a:ea typeface="Calibri" pitchFamily="34" charset="-122"/>
-                          <a:cs typeface="Calibri" pitchFamily="34" charset="-120"/>
-                        </a:rPr>
-                        <a:t>FMO → MLA</a:t>
-                      </a:r>
-                      <a:endParaRPr lang="en-US" sz="1000" dirty="0">
-                        <a:latin typeface="Calibri" charset="0"/>
-                        <a:ea typeface="Calibri" charset="0"/>
-                        <a:cs typeface="Calibri" charset="0"/>
-                      </a:endParaRPr>
-                    </a:p>
-                    <a:p>
-                      <a:pPr algn="ctr" indent="0" marL="0">
-                        <a:buNone/>
-                      </a:pPr>
-                      <a:r>
-                        <a:rPr lang="en-US" sz="1000" dirty="0">
-                          <a:solidFill>
-                            <a:srgbClr val="E8E8E8"/>
-                          </a:solidFill>
-                          <a:latin typeface="Calibri" pitchFamily="34" charset="0"/>
-                          <a:ea typeface="Calibri" pitchFamily="34" charset="-122"/>
-                          <a:cs typeface="Calibri" pitchFamily="34" charset="-120"/>
-                        </a:rPr>
-                        <a:t>29. Okt.</a:t>
-                      </a:r>
-                      <a:endParaRPr lang="en-US" sz="1000" dirty="0">
-                        <a:latin typeface="Calibri" charset="0"/>
-                        <a:ea typeface="Calibri" charset="0"/>
-                        <a:cs typeface="Calibri" charset="0"/>
-                      </a:endParaRPr>
-                    </a:p>
-                  </a:txBody>
-                  <a:tcPr marL="91440" marR="91440" marT="45720" marB="45720">
-                    <a:lnL w="12700" cap="flat" cmpd="sng" algn="ctr">
-                      <a:solidFill>
-                        <a:srgbClr val="0F3460"/>
-                      </a:solidFill>
-                      <a:prstDash val="solid"/>
-                      <a:round/>
-                      <a:headEnd type="none" w="med" len="med"/>
-                      <a:tailEnd type="none" w="med" len="med"/>
-                    </a:lnL>
-                    <a:lnR w="12700" cap="flat" cmpd="sng" algn="ctr">
-                      <a:solidFill>
-                        <a:srgbClr val="0F3460"/>
-                      </a:solidFill>
-                      <a:prstDash val="solid"/>
-                      <a:round/>
-                      <a:headEnd type="none" w="med" len="med"/>
-                      <a:tailEnd type="none" w="med" len="med"/>
-                    </a:lnR>
-                    <a:lnT w="12700" cap="flat" cmpd="sng" algn="ctr">
-                      <a:solidFill>
-                        <a:srgbClr val="0F3460"/>
-                      </a:solidFill>
-                      <a:prstDash val="solid"/>
-                      <a:round/>
-                      <a:headEnd type="none" w="med" len="med"/>
-                      <a:tailEnd type="none" w="med" len="med"/>
-                    </a:lnT>
-                    <a:lnB w="12700" cap="flat" cmpd="sng" algn="ctr">
-                      <a:solidFill>
-                        <a:srgbClr val="0F3460"/>
-                      </a:solidFill>
-                      <a:prstDash val="solid"/>
-                      <a:round/>
-                      <a:headEnd type="none" w="med" len="med"/>
-                      <a:tailEnd type="none" w="med" len="med"/>
-                    </a:lnB>
-                    <a:solidFill>
-                      <a:srgbClr val="16213E"/>
-                    </a:solidFill>
-                  </a:tcPr>
-                </a:tc>
-                <a:tc>
-                  <a:txBody>
-                    <a:bodyPr/>
-                    <a:lstStyle/>
-                    <a:p>
-                      <a:pPr algn="ctr" indent="0" marL="0">
-                        <a:buNone/>
-                      </a:pPr>
-                      <a:r>
-                        <a:rPr lang="en-US" sz="1000" dirty="0">
-                          <a:solidFill>
-                            <a:srgbClr val="E8E8E8"/>
-                          </a:solidFill>
-                          <a:latin typeface="Calibri" pitchFamily="34" charset="0"/>
-                          <a:ea typeface="Calibri" pitchFamily="34" charset="-122"/>
-                          <a:cs typeface="Calibri" pitchFamily="34" charset="-120"/>
-                        </a:rPr>
-                        <a:t>Abends</a:t>
-                      </a:r>
-                      <a:endParaRPr lang="en-US" sz="1000" dirty="0">
-                        <a:latin typeface="Calibri" charset="0"/>
-                        <a:ea typeface="Calibri" charset="0"/>
-                        <a:cs typeface="Calibri" charset="0"/>
-                      </a:endParaRPr>
-                    </a:p>
-                  </a:txBody>
-                  <a:tcPr marL="91440" marR="91440" marT="45720" marB="45720">
-                    <a:lnL w="12700" cap="flat" cmpd="sng" algn="ctr">
-                      <a:solidFill>
-                        <a:srgbClr val="0F3460"/>
-                      </a:solidFill>
-                      <a:prstDash val="solid"/>
-                      <a:round/>
-                      <a:headEnd type="none" w="med" len="med"/>
-                      <a:tailEnd type="none" w="med" len="med"/>
-                    </a:lnL>
-                    <a:lnR w="12700" cap="flat" cmpd="sng" algn="ctr">
-                      <a:solidFill>
-                        <a:srgbClr val="0F3460"/>
-                      </a:solidFill>
-                      <a:prstDash val="solid"/>
-                      <a:round/>
-                      <a:headEnd type="none" w="med" len="med"/>
-                      <a:tailEnd type="none" w="med" len="med"/>
-                    </a:lnR>
-                    <a:lnT w="12700" cap="flat" cmpd="sng" algn="ctr">
-                      <a:solidFill>
-                        <a:srgbClr val="0F3460"/>
-                      </a:solidFill>
-                      <a:prstDash val="solid"/>
-                      <a:round/>
-                      <a:headEnd type="none" w="med" len="med"/>
-                      <a:tailEnd type="none" w="med" len="med"/>
-                    </a:lnT>
-                    <a:lnB w="12700" cap="flat" cmpd="sng" algn="ctr">
-                      <a:solidFill>
-                        <a:srgbClr val="0F3460"/>
-                      </a:solidFill>
-                      <a:prstDash val="solid"/>
-                      <a:round/>
-                      <a:headEnd type="none" w="med" len="med"/>
-                      <a:tailEnd type="none" w="med" len="med"/>
-                    </a:lnB>
-                    <a:solidFill>
-                      <a:srgbClr val="16213E"/>
-                    </a:solidFill>
-                  </a:tcPr>
-                </a:tc>
-                <a:tc>
-                  <a:txBody>
-                    <a:bodyPr/>
-                    <a:lstStyle/>
-                    <a:p>
-                      <a:pPr algn="ctr" indent="0" marL="0">
-                        <a:buNone/>
-                      </a:pPr>
-                      <a:r>
-                        <a:rPr lang="en-US" sz="1000" dirty="0">
-                          <a:solidFill>
-                            <a:srgbClr val="E8E8E8"/>
-                          </a:solidFill>
-                          <a:latin typeface="Calibri" pitchFamily="34" charset="0"/>
-                          <a:ea typeface="Calibri" pitchFamily="34" charset="-122"/>
-                          <a:cs typeface="Calibri" pitchFamily="34" charset="-120"/>
-                        </a:rPr>
-                        <a:t>Abends</a:t>
-                      </a:r>
-                      <a:endParaRPr lang="en-US" sz="1000" dirty="0">
-                        <a:latin typeface="Calibri" charset="0"/>
-                        <a:ea typeface="Calibri" charset="0"/>
-                        <a:cs typeface="Calibri" charset="0"/>
-                      </a:endParaRPr>
-                    </a:p>
-                  </a:txBody>
-                  <a:tcPr marL="91440" marR="91440" marT="45720" marB="45720">
-                    <a:lnL w="12700" cap="flat" cmpd="sng" algn="ctr">
-                      <a:solidFill>
-                        <a:srgbClr val="0F3460"/>
-                      </a:solidFill>
-                      <a:prstDash val="solid"/>
-                      <a:round/>
-                      <a:headEnd type="none" w="med" len="med"/>
-                      <a:tailEnd type="none" w="med" len="med"/>
-                    </a:lnL>
-                    <a:lnR w="12700" cap="flat" cmpd="sng" algn="ctr">
-                      <a:solidFill>
-                        <a:srgbClr val="0F3460"/>
-                      </a:solidFill>
-                      <a:prstDash val="solid"/>
-                      <a:round/>
-                      <a:headEnd type="none" w="med" len="med"/>
-                      <a:tailEnd type="none" w="med" len="med"/>
-                    </a:lnR>
-                    <a:lnT w="12700" cap="flat" cmpd="sng" algn="ctr">
-                      <a:solidFill>
-                        <a:srgbClr val="0F3460"/>
-                      </a:solidFill>
-                      <a:prstDash val="solid"/>
-                      <a:round/>
-                      <a:headEnd type="none" w="med" len="med"/>
-                      <a:tailEnd type="none" w="med" len="med"/>
-                    </a:lnT>
-                    <a:lnB w="12700" cap="flat" cmpd="sng" algn="ctr">
-                      <a:solidFill>
-                        <a:srgbClr val="0F3460"/>
-                      </a:solidFill>
-                      <a:prstDash val="solid"/>
-                      <a:round/>
-                      <a:headEnd type="none" w="med" len="med"/>
-                      <a:tailEnd type="none" w="med" len="med"/>
-                    </a:lnB>
-                    <a:solidFill>
-                      <a:srgbClr val="16213E"/>
-                    </a:solidFill>
-                  </a:tcPr>
-                </a:tc>
-                <a:tc>
-                  <a:txBody>
-                    <a:bodyPr/>
-                    <a:lstStyle/>
-                    <a:p>
-                      <a:pPr algn="ctr" indent="0" marL="0">
-                        <a:buNone/>
-                      </a:pPr>
-                      <a:r>
-                        <a:rPr lang="en-US" sz="1000" dirty="0">
-                          <a:solidFill>
-                            <a:srgbClr val="E8E8E8"/>
-                          </a:solidFill>
-                          <a:latin typeface="Calibri" pitchFamily="34" charset="0"/>
-                          <a:ea typeface="Calibri" pitchFamily="34" charset="-122"/>
-                          <a:cs typeface="Calibri" pitchFamily="34" charset="-120"/>
-                        </a:rPr>
-                        <a:t>~3h 00m</a:t>
-                      </a:r>
-                      <a:endParaRPr lang="en-US" sz="1000" dirty="0">
-                        <a:latin typeface="Calibri" charset="0"/>
-                        <a:ea typeface="Calibri" charset="0"/>
-                        <a:cs typeface="Calibri" charset="0"/>
-                      </a:endParaRPr>
-                    </a:p>
-                  </a:txBody>
-                  <a:tcPr marL="91440" marR="91440" marT="45720" marB="45720">
-                    <a:lnL w="12700" cap="flat" cmpd="sng" algn="ctr">
-                      <a:solidFill>
-                        <a:srgbClr val="0F3460"/>
-                      </a:solidFill>
-                      <a:prstDash val="solid"/>
-                      <a:round/>
-                      <a:headEnd type="none" w="med" len="med"/>
-                      <a:tailEnd type="none" w="med" len="med"/>
-                    </a:lnL>
-                    <a:lnR w="12700" cap="flat" cmpd="sng" algn="ctr">
-                      <a:solidFill>
-                        <a:srgbClr val="0F3460"/>
-                      </a:solidFill>
-                      <a:prstDash val="solid"/>
-                      <a:round/>
-                      <a:headEnd type="none" w="med" len="med"/>
-                      <a:tailEnd type="none" w="med" len="med"/>
-                    </a:lnR>
-                    <a:lnT w="12700" cap="flat" cmpd="sng" algn="ctr">
-                      <a:solidFill>
-                        <a:srgbClr val="0F3460"/>
-                      </a:solidFill>
-                      <a:prstDash val="solid"/>
-                      <a:round/>
-                      <a:headEnd type="none" w="med" len="med"/>
-                      <a:tailEnd type="none" w="med" len="med"/>
-                    </a:lnT>
-                    <a:lnB w="12700" cap="flat" cmpd="sng" algn="ctr">
-                      <a:solidFill>
-                        <a:srgbClr val="0F3460"/>
-                      </a:solidFill>
-                      <a:prstDash val="solid"/>
-                      <a:round/>
-                      <a:headEnd type="none" w="med" len="med"/>
-                      <a:tailEnd type="none" w="med" len="med"/>
-                    </a:lnB>
-                    <a:solidFill>
-                      <a:srgbClr val="16213E"/>
-                    </a:solidFill>
-                  </a:tcPr>
-                </a:tc>
-                <a:tc>
-                  <a:txBody>
-                    <a:bodyPr/>
-                    <a:lstStyle/>
-                    <a:p>
-                      <a:pPr algn="ctr" indent="0" marL="0">
-                        <a:buNone/>
-                      </a:pPr>
-                      <a:r>
-                        <a:rPr lang="en-US" sz="1000" dirty="0">
-                          <a:solidFill>
-                            <a:srgbClr val="E8E8E8"/>
-                          </a:solidFill>
-                          <a:latin typeface="Calibri" pitchFamily="34" charset="0"/>
-                          <a:ea typeface="Calibri" pitchFamily="34" charset="-122"/>
-                          <a:cs typeface="Calibri" pitchFamily="34" charset="-120"/>
-                        </a:rPr>
-                        <a:t>~€70–100</a:t>
-                      </a:r>
-                      <a:endParaRPr lang="en-US" sz="1000" dirty="0">
-                        <a:latin typeface="Calibri" charset="0"/>
-                        <a:ea typeface="Calibri" charset="0"/>
-                        <a:cs typeface="Calibri" charset="0"/>
-                      </a:endParaRPr>
-                    </a:p>
-                  </a:txBody>
-                  <a:tcPr marL="91440" marR="91440" marT="45720" marB="45720">
-                    <a:lnL w="12700" cap="flat" cmpd="sng" algn="ctr">
-                      <a:solidFill>
-                        <a:srgbClr val="0F3460"/>
-                      </a:solidFill>
-                      <a:prstDash val="solid"/>
-                      <a:round/>
-                      <a:headEnd type="none" w="med" len="med"/>
-                      <a:tailEnd type="none" w="med" len="med"/>
-                    </a:lnL>
-                    <a:lnR w="12700" cap="flat" cmpd="sng" algn="ctr">
-                      <a:solidFill>
-                        <a:srgbClr val="0F3460"/>
-                      </a:solidFill>
-                      <a:prstDash val="solid"/>
-                      <a:round/>
-                      <a:headEnd type="none" w="med" len="med"/>
-                      <a:tailEnd type="none" w="med" len="med"/>
-                    </a:lnR>
-                    <a:lnT w="12700" cap="flat" cmpd="sng" algn="ctr">
-                      <a:solidFill>
-                        <a:srgbClr val="0F3460"/>
-                      </a:solidFill>
-                      <a:prstDash val="solid"/>
-                      <a:round/>
-                      <a:headEnd type="none" w="med" len="med"/>
-                      <a:tailEnd type="none" w="med" len="med"/>
-                    </a:lnT>
-                    <a:lnB w="12700" cap="flat" cmpd="sng" algn="ctr">
-                      <a:solidFill>
-                        <a:srgbClr val="0F3460"/>
-                      </a:solidFill>
-                      <a:prstDash val="solid"/>
-                      <a:round/>
-                      <a:headEnd type="none" w="med" len="med"/>
-                      <a:tailEnd type="none" w="med" len="med"/>
-                    </a:lnB>
-                    <a:solidFill>
-                      <a:srgbClr val="16213E"/>
-                    </a:solidFill>
-                  </a:tcPr>
-                </a:tc>
-                <a:tc>
-                  <a:txBody>
-                    <a:bodyPr/>
-                    <a:lstStyle/>
-                    <a:p>
-                      <a:pPr algn="ctr" indent="0" marL="0">
-                        <a:buNone/>
-                      </a:pPr>
-                      <a:r>
-                        <a:rPr lang="en-US" sz="1000" dirty="0">
-                          <a:solidFill>
-                            <a:srgbClr val="FFC107"/>
-                          </a:solidFill>
-                          <a:latin typeface="Calibri" pitchFamily="34" charset="0"/>
-                          <a:ea typeface="Calibri" pitchFamily="34" charset="-122"/>
-                          <a:cs typeface="Calibri" pitchFamily="34" charset="-120"/>
-                        </a:rPr>
-                        <a:t>~€280–400</a:t>
-                      </a:r>
-                      <a:endParaRPr lang="en-US" sz="1000" dirty="0">
-                        <a:latin typeface="Calibri" charset="0"/>
-                        <a:ea typeface="Calibri" charset="0"/>
-                        <a:cs typeface="Calibri" charset="0"/>
-                      </a:endParaRPr>
-                    </a:p>
-                  </a:txBody>
-                  <a:tcPr marL="91440" marR="91440" marT="45720" marB="45720">
-                    <a:lnL w="12700" cap="flat" cmpd="sng" algn="ctr">
-                      <a:solidFill>
-                        <a:srgbClr val="0F3460"/>
-                      </a:solidFill>
-                      <a:prstDash val="solid"/>
-                      <a:round/>
-                      <a:headEnd type="none" w="med" len="med"/>
-                      <a:tailEnd type="none" w="med" len="med"/>
-                    </a:lnL>
-                    <a:lnR w="12700" cap="flat" cmpd="sng" algn="ctr">
-                      <a:solidFill>
-                        <a:srgbClr val="0F3460"/>
-                      </a:solidFill>
-                      <a:prstDash val="solid"/>
-                      <a:round/>
-                      <a:headEnd type="none" w="med" len="med"/>
-                      <a:tailEnd type="none" w="med" len="med"/>
-                    </a:lnR>
-                    <a:lnT w="12700" cap="flat" cmpd="sng" algn="ctr">
-                      <a:solidFill>
-                        <a:srgbClr val="0F3460"/>
-                      </a:solidFill>
-                      <a:prstDash val="solid"/>
-                      <a:round/>
-                      <a:headEnd type="none" w="med" len="med"/>
-                      <a:tailEnd type="none" w="med" len="med"/>
-                    </a:lnT>
-                    <a:lnB w="12700" cap="flat" cmpd="sng" algn="ctr">
-                      <a:solidFill>
-                        <a:srgbClr val="0F3460"/>
-                      </a:solidFill>
-                      <a:prstDash val="solid"/>
-                      <a:round/>
-                      <a:headEnd type="none" w="med" len="med"/>
-                      <a:tailEnd type="none" w="med" len="med"/>
-                    </a:lnB>
-                    <a:solidFill>
-                      <a:srgbClr val="16213E"/>
-                    </a:solidFill>
-                  </a:tcPr>
-                </a:tc>
-              </a:tr>
-              <a:tr h="475488">
-                <a:tc>
-                  <a:txBody>
-                    <a:bodyPr/>
-                    <a:lstStyle/>
-                    <a:p>
-                      <a:pPr algn="ctr" indent="0" marL="0">
-                        <a:buNone/>
-                      </a:pPr>
-                      <a:r>
-                        <a:rPr lang="en-US" sz="1000" dirty="0">
-                          <a:solidFill>
-                            <a:srgbClr val="E8E8E8"/>
-                          </a:solidFill>
-                          <a:latin typeface="Calibri" pitchFamily="34" charset="0"/>
-                          <a:ea typeface="Calibri" pitchFamily="34" charset="-122"/>
-                          <a:cs typeface="Calibri" pitchFamily="34" charset="-120"/>
-                        </a:rPr>
-                        <a:t>DUS-Passagiere</a:t>
-                      </a:r>
-                      <a:endParaRPr lang="en-US" sz="1000" dirty="0">
-                        <a:latin typeface="Calibri" charset="0"/>
-                        <a:ea typeface="Calibri" charset="0"/>
-                        <a:cs typeface="Calibri" charset="0"/>
-                      </a:endParaRPr>
-                    </a:p>
-                  </a:txBody>
-                  <a:tcPr marL="91440" marR="91440" marT="45720" marB="45720">
-                    <a:lnL w="12700" cap="flat" cmpd="sng" algn="ctr">
-                      <a:solidFill>
-                        <a:srgbClr val="0F3460"/>
-                      </a:solidFill>
-                      <a:prstDash val="solid"/>
-                      <a:round/>
-                      <a:headEnd type="none" w="med" len="med"/>
-                      <a:tailEnd type="none" w="med" len="med"/>
-                    </a:lnL>
-                    <a:lnR w="12700" cap="flat" cmpd="sng" algn="ctr">
-                      <a:solidFill>
-                        <a:srgbClr val="0F3460"/>
-                      </a:solidFill>
-                      <a:prstDash val="solid"/>
-                      <a:round/>
-                      <a:headEnd type="none" w="med" len="med"/>
-                      <a:tailEnd type="none" w="med" len="med"/>
-                    </a:lnR>
-                    <a:lnT w="12700" cap="flat" cmpd="sng" algn="ctr">
-                      <a:solidFill>
-                        <a:srgbClr val="0F3460"/>
-                      </a:solidFill>
-                      <a:prstDash val="solid"/>
-                      <a:round/>
-                      <a:headEnd type="none" w="med" len="med"/>
-                      <a:tailEnd type="none" w="med" len="med"/>
-                    </a:lnT>
-                    <a:lnB w="12700" cap="flat" cmpd="sng" algn="ctr">
-                      <a:solidFill>
-                        <a:srgbClr val="0F3460"/>
-                      </a:solidFill>
-                      <a:prstDash val="solid"/>
-                      <a:round/>
-                      <a:headEnd type="none" w="med" len="med"/>
-                      <a:tailEnd type="none" w="med" len="med"/>
-                    </a:lnB>
-                    <a:solidFill>
-                      <a:srgbClr val="1A1A2E"/>
-                    </a:solidFill>
-                  </a:tcPr>
-                </a:tc>
-                <a:tc>
-                  <a:txBody>
-                    <a:bodyPr/>
-                    <a:lstStyle/>
-                    <a:p>
-                      <a:pPr algn="ctr" indent="0" marL="0">
-                        <a:buNone/>
-                      </a:pPr>
-                      <a:r>
-                        <a:rPr lang="en-US" sz="1000" dirty="0">
-                          <a:solidFill>
-                            <a:srgbClr val="E8E8E8"/>
-                          </a:solidFill>
-                          <a:latin typeface="Calibri" pitchFamily="34" charset="0"/>
-                          <a:ea typeface="Calibri" pitchFamily="34" charset="-122"/>
-                          <a:cs typeface="Calibri" pitchFamily="34" charset="-120"/>
-                        </a:rPr>
-                        <a:t>Umstieg</a:t>
-                      </a:r>
-                      <a:endParaRPr lang="en-US" sz="1000" dirty="0">
-                        <a:latin typeface="Calibri" charset="0"/>
-                        <a:ea typeface="Calibri" charset="0"/>
-                        <a:cs typeface="Calibri" charset="0"/>
-                      </a:endParaRPr>
-                    </a:p>
-                    <a:p>
-                      <a:pPr algn="ctr" indent="0" marL="0">
-                        <a:buNone/>
-                      </a:pPr>
-                      <a:r>
-                        <a:rPr lang="en-US" sz="1000" dirty="0">
-                          <a:solidFill>
-                            <a:srgbClr val="E8E8E8"/>
-                          </a:solidFill>
-                          <a:latin typeface="Calibri" pitchFamily="34" charset="0"/>
-                          <a:ea typeface="Calibri" pitchFamily="34" charset="-122"/>
-                          <a:cs typeface="Calibri" pitchFamily="34" charset="-120"/>
-                        </a:rPr>
-                        <a:t>(z.B. LH/EW)</a:t>
-                      </a:r>
-                      <a:endParaRPr lang="en-US" sz="1000" dirty="0">
-                        <a:latin typeface="Calibri" charset="0"/>
-                        <a:ea typeface="Calibri" charset="0"/>
-                        <a:cs typeface="Calibri" charset="0"/>
-                      </a:endParaRPr>
-                    </a:p>
-                  </a:txBody>
-                  <a:tcPr marL="91440" marR="91440" marT="45720" marB="45720">
-                    <a:lnL w="12700" cap="flat" cmpd="sng" algn="ctr">
-                      <a:solidFill>
-                        <a:srgbClr val="0F3460"/>
-                      </a:solidFill>
-                      <a:prstDash val="solid"/>
-                      <a:round/>
-                      <a:headEnd type="none" w="med" len="med"/>
-                      <a:tailEnd type="none" w="med" len="med"/>
-                    </a:lnL>
-                    <a:lnR w="12700" cap="flat" cmpd="sng" algn="ctr">
-                      <a:solidFill>
-                        <a:srgbClr val="0F3460"/>
-                      </a:solidFill>
-                      <a:prstDash val="solid"/>
-                      <a:round/>
-                      <a:headEnd type="none" w="med" len="med"/>
-                      <a:tailEnd type="none" w="med" len="med"/>
-                    </a:lnR>
-                    <a:lnT w="12700" cap="flat" cmpd="sng" algn="ctr">
-                      <a:solidFill>
-                        <a:srgbClr val="0F3460"/>
-                      </a:solidFill>
-                      <a:prstDash val="solid"/>
-                      <a:round/>
-                      <a:headEnd type="none" w="med" len="med"/>
-                      <a:tailEnd type="none" w="med" len="med"/>
-                    </a:lnT>
-                    <a:lnB w="12700" cap="flat" cmpd="sng" algn="ctr">
-                      <a:solidFill>
-                        <a:srgbClr val="0F3460"/>
-                      </a:solidFill>
-                      <a:prstDash val="solid"/>
-                      <a:round/>
-                      <a:headEnd type="none" w="med" len="med"/>
-                      <a:tailEnd type="none" w="med" len="med"/>
-                    </a:lnB>
-                    <a:solidFill>
-                      <a:srgbClr val="1A1A2E"/>
-                    </a:solidFill>
-                  </a:tcPr>
-                </a:tc>
-                <a:tc>
-                  <a:txBody>
-                    <a:bodyPr/>
-                    <a:lstStyle/>
-                    <a:p>
-                      <a:pPr algn="ctr" indent="0" marL="0">
-                        <a:buNone/>
-                      </a:pPr>
-                      <a:r>
-                        <a:rPr lang="en-US" sz="1000" dirty="0">
-                          <a:solidFill>
-                            <a:srgbClr val="E8E8E8"/>
-                          </a:solidFill>
-                          <a:latin typeface="Calibri" pitchFamily="34" charset="0"/>
-                          <a:ea typeface="Calibri" pitchFamily="34" charset="-122"/>
-                          <a:cs typeface="Calibri" pitchFamily="34" charset="-120"/>
-                        </a:rPr>
-                        <a:t>DUS → FRA/MUC</a:t>
-                      </a:r>
-                      <a:endParaRPr lang="en-US" sz="1000" dirty="0">
-                        <a:latin typeface="Calibri" charset="0"/>
-                        <a:ea typeface="Calibri" charset="0"/>
-                        <a:cs typeface="Calibri" charset="0"/>
-                      </a:endParaRPr>
-                    </a:p>
-                    <a:p>
-                      <a:pPr algn="ctr" indent="0" marL="0">
-                        <a:buNone/>
-                      </a:pPr>
-                      <a:r>
-                        <a:rPr lang="en-US" sz="1000" dirty="0">
-                          <a:solidFill>
-                            <a:srgbClr val="E8E8E8"/>
-                          </a:solidFill>
-                          <a:latin typeface="Calibri" pitchFamily="34" charset="0"/>
-                          <a:ea typeface="Calibri" pitchFamily="34" charset="-122"/>
-                          <a:cs typeface="Calibri" pitchFamily="34" charset="-120"/>
-                        </a:rPr>
-                        <a:t>→ MLA</a:t>
-                      </a:r>
-                      <a:endParaRPr lang="en-US" sz="1000" dirty="0">
-                        <a:latin typeface="Calibri" charset="0"/>
-                        <a:ea typeface="Calibri" charset="0"/>
-                        <a:cs typeface="Calibri" charset="0"/>
-                      </a:endParaRPr>
-                    </a:p>
-                  </a:txBody>
-                  <a:tcPr marL="91440" marR="91440" marT="45720" marB="45720">
-                    <a:lnL w="12700" cap="flat" cmpd="sng" algn="ctr">
-                      <a:solidFill>
-                        <a:srgbClr val="0F3460"/>
-                      </a:solidFill>
-                      <a:prstDash val="solid"/>
-                      <a:round/>
-                      <a:headEnd type="none" w="med" len="med"/>
-                      <a:tailEnd type="none" w="med" len="med"/>
-                    </a:lnL>
-                    <a:lnR w="12700" cap="flat" cmpd="sng" algn="ctr">
-                      <a:solidFill>
-                        <a:srgbClr val="0F3460"/>
-                      </a:solidFill>
-                      <a:prstDash val="solid"/>
-                      <a:round/>
-                      <a:headEnd type="none" w="med" len="med"/>
-                      <a:tailEnd type="none" w="med" len="med"/>
-                    </a:lnR>
-                    <a:lnT w="12700" cap="flat" cmpd="sng" algn="ctr">
-                      <a:solidFill>
-                        <a:srgbClr val="0F3460"/>
-                      </a:solidFill>
-                      <a:prstDash val="solid"/>
-                      <a:round/>
-                      <a:headEnd type="none" w="med" len="med"/>
-                      <a:tailEnd type="none" w="med" len="med"/>
-                    </a:lnT>
-                    <a:lnB w="12700" cap="flat" cmpd="sng" algn="ctr">
-                      <a:solidFill>
-                        <a:srgbClr val="0F3460"/>
-                      </a:solidFill>
-                      <a:prstDash val="solid"/>
-                      <a:round/>
-                      <a:headEnd type="none" w="med" len="med"/>
-                      <a:tailEnd type="none" w="med" len="med"/>
-                    </a:lnB>
-                    <a:solidFill>
-                      <a:srgbClr val="1A1A2E"/>
-                    </a:solidFill>
-                  </a:tcPr>
-                </a:tc>
-                <a:tc>
-                  <a:txBody>
-                    <a:bodyPr/>
-                    <a:lstStyle/>
-                    <a:p>
-                      <a:pPr algn="ctr" indent="0" marL="0">
-                        <a:buNone/>
-                      </a:pPr>
-                      <a:r>
-                        <a:rPr lang="en-US" sz="1000" dirty="0">
-                          <a:solidFill>
-                            <a:srgbClr val="E8E8E8"/>
-                          </a:solidFill>
-                          <a:latin typeface="Calibri" pitchFamily="34" charset="0"/>
-                          <a:ea typeface="Calibri" pitchFamily="34" charset="-122"/>
-                          <a:cs typeface="Calibri" pitchFamily="34" charset="-120"/>
-                        </a:rPr>
-                        <a:t>—</a:t>
-                      </a:r>
-                      <a:endParaRPr lang="en-US" sz="1000" dirty="0">
-                        <a:latin typeface="Calibri" charset="0"/>
-                        <a:ea typeface="Calibri" charset="0"/>
-                        <a:cs typeface="Calibri" charset="0"/>
-                      </a:endParaRPr>
-                    </a:p>
-                  </a:txBody>
-                  <a:tcPr marL="91440" marR="91440" marT="45720" marB="45720">
-                    <a:lnL w="12700" cap="flat" cmpd="sng" algn="ctr">
-                      <a:solidFill>
-                        <a:srgbClr val="0F3460"/>
-                      </a:solidFill>
-                      <a:prstDash val="solid"/>
-                      <a:round/>
-                      <a:headEnd type="none" w="med" len="med"/>
-                      <a:tailEnd type="none" w="med" len="med"/>
-                    </a:lnL>
-                    <a:lnR w="12700" cap="flat" cmpd="sng" algn="ctr">
-                      <a:solidFill>
-                        <a:srgbClr val="0F3460"/>
-                      </a:solidFill>
-                      <a:prstDash val="solid"/>
-                      <a:round/>
-                      <a:headEnd type="none" w="med" len="med"/>
-                      <a:tailEnd type="none" w="med" len="med"/>
-                    </a:lnR>
-                    <a:lnT w="12700" cap="flat" cmpd="sng" algn="ctr">
-                      <a:solidFill>
-                        <a:srgbClr val="0F3460"/>
-                      </a:solidFill>
-                      <a:prstDash val="solid"/>
-                      <a:round/>
-                      <a:headEnd type="none" w="med" len="med"/>
-                      <a:tailEnd type="none" w="med" len="med"/>
-                    </a:lnT>
-                    <a:lnB w="12700" cap="flat" cmpd="sng" algn="ctr">
-                      <a:solidFill>
-                        <a:srgbClr val="0F3460"/>
-                      </a:solidFill>
-                      <a:prstDash val="solid"/>
-                      <a:round/>
-                      <a:headEnd type="none" w="med" len="med"/>
-                      <a:tailEnd type="none" w="med" len="med"/>
-                    </a:lnB>
-                    <a:solidFill>
-                      <a:srgbClr val="1A1A2E"/>
-                    </a:solidFill>
-                  </a:tcPr>
-                </a:tc>
-                <a:tc>
-                  <a:txBody>
-                    <a:bodyPr/>
-                    <a:lstStyle/>
-                    <a:p>
-                      <a:pPr algn="ctr" indent="0" marL="0">
-                        <a:buNone/>
-                      </a:pPr>
-                      <a:r>
-                        <a:rPr lang="en-US" sz="1000" dirty="0">
-                          <a:solidFill>
-                            <a:srgbClr val="E8E8E8"/>
-                          </a:solidFill>
-                          <a:latin typeface="Calibri" pitchFamily="34" charset="0"/>
-                          <a:ea typeface="Calibri" pitchFamily="34" charset="-122"/>
-                          <a:cs typeface="Calibri" pitchFamily="34" charset="-120"/>
-                        </a:rPr>
-                        <a:t>—</a:t>
-                      </a:r>
-                      <a:endParaRPr lang="en-US" sz="1000" dirty="0">
-                        <a:latin typeface="Calibri" charset="0"/>
-                        <a:ea typeface="Calibri" charset="0"/>
-                        <a:cs typeface="Calibri" charset="0"/>
-                      </a:endParaRPr>
-                    </a:p>
-                  </a:txBody>
-                  <a:tcPr marL="91440" marR="91440" marT="45720" marB="45720">
-                    <a:lnL w="12700" cap="flat" cmpd="sng" algn="ctr">
-                      <a:solidFill>
-                        <a:srgbClr val="0F3460"/>
-                      </a:solidFill>
-                      <a:prstDash val="solid"/>
-                      <a:round/>
-                      <a:headEnd type="none" w="med" len="med"/>
-                      <a:tailEnd type="none" w="med" len="med"/>
-                    </a:lnL>
-                    <a:lnR w="12700" cap="flat" cmpd="sng" algn="ctr">
-                      <a:solidFill>
-                        <a:srgbClr val="0F3460"/>
-                      </a:solidFill>
-                      <a:prstDash val="solid"/>
-                      <a:round/>
-                      <a:headEnd type="none" w="med" len="med"/>
-                      <a:tailEnd type="none" w="med" len="med"/>
-                    </a:lnR>
-                    <a:lnT w="12700" cap="flat" cmpd="sng" algn="ctr">
-                      <a:solidFill>
-                        <a:srgbClr val="0F3460"/>
-                      </a:solidFill>
-                      <a:prstDash val="solid"/>
-                      <a:round/>
-                      <a:headEnd type="none" w="med" len="med"/>
-                      <a:tailEnd type="none" w="med" len="med"/>
-                    </a:lnT>
-                    <a:lnB w="12700" cap="flat" cmpd="sng" algn="ctr">
-                      <a:solidFill>
-                        <a:srgbClr val="0F3460"/>
-                      </a:solidFill>
-                      <a:prstDash val="solid"/>
-                      <a:round/>
-                      <a:headEnd type="none" w="med" len="med"/>
-                      <a:tailEnd type="none" w="med" len="med"/>
-                    </a:lnB>
-                    <a:solidFill>
-                      <a:srgbClr val="1A1A2E"/>
-                    </a:solidFill>
-                  </a:tcPr>
-                </a:tc>
-                <a:tc>
-                  <a:txBody>
-                    <a:bodyPr/>
-                    <a:lstStyle/>
-                    <a:p>
-                      <a:pPr algn="ctr" indent="0" marL="0">
-                        <a:buNone/>
-                      </a:pPr>
-                      <a:r>
-                        <a:rPr lang="en-US" sz="1000" dirty="0">
-                          <a:solidFill>
-                            <a:srgbClr val="E8E8E8"/>
-                          </a:solidFill>
-                          <a:latin typeface="Calibri" pitchFamily="34" charset="0"/>
-                          <a:ea typeface="Calibri" pitchFamily="34" charset="-122"/>
-                          <a:cs typeface="Calibri" pitchFamily="34" charset="-120"/>
-                        </a:rPr>
-                        <a:t>5–7h</a:t>
-                      </a:r>
-                      <a:endParaRPr lang="en-US" sz="1000" dirty="0">
-                        <a:latin typeface="Calibri" charset="0"/>
-                        <a:ea typeface="Calibri" charset="0"/>
-                        <a:cs typeface="Calibri" charset="0"/>
-                      </a:endParaRPr>
-                    </a:p>
-                  </a:txBody>
-                  <a:tcPr marL="91440" marR="91440" marT="45720" marB="45720">
-                    <a:lnL w="12700" cap="flat" cmpd="sng" algn="ctr">
-                      <a:solidFill>
-                        <a:srgbClr val="0F3460"/>
-                      </a:solidFill>
-                      <a:prstDash val="solid"/>
-                      <a:round/>
-                      <a:headEnd type="none" w="med" len="med"/>
-                      <a:tailEnd type="none" w="med" len="med"/>
-                    </a:lnL>
-                    <a:lnR w="12700" cap="flat" cmpd="sng" algn="ctr">
-                      <a:solidFill>
-                        <a:srgbClr val="0F3460"/>
-                      </a:solidFill>
-                      <a:prstDash val="solid"/>
-                      <a:round/>
-                      <a:headEnd type="none" w="med" len="med"/>
-                      <a:tailEnd type="none" w="med" len="med"/>
-                    </a:lnR>
-                    <a:lnT w="12700" cap="flat" cmpd="sng" algn="ctr">
-                      <a:solidFill>
-                        <a:srgbClr val="0F3460"/>
-                      </a:solidFill>
-                      <a:prstDash val="solid"/>
-                      <a:round/>
-                      <a:headEnd type="none" w="med" len="med"/>
-                      <a:tailEnd type="none" w="med" len="med"/>
-                    </a:lnT>
-                    <a:lnB w="12700" cap="flat" cmpd="sng" algn="ctr">
-                      <a:solidFill>
-                        <a:srgbClr val="0F3460"/>
-                      </a:solidFill>
-                      <a:prstDash val="solid"/>
-                      <a:round/>
-                      <a:headEnd type="none" w="med" len="med"/>
-                      <a:tailEnd type="none" w="med" len="med"/>
-                    </a:lnB>
-                    <a:solidFill>
-                      <a:srgbClr val="1A1A2E"/>
-                    </a:solidFill>
-                  </a:tcPr>
-                </a:tc>
-                <a:tc>
-                  <a:txBody>
-                    <a:bodyPr/>
-                    <a:lstStyle/>
-                    <a:p>
-                      <a:pPr algn="ctr" indent="0" marL="0">
-                        <a:buNone/>
-                      </a:pPr>
-                      <a:r>
-                        <a:rPr lang="en-US" sz="1000" dirty="0">
-                          <a:solidFill>
-                            <a:srgbClr val="E8E8E8"/>
-                          </a:solidFill>
-                          <a:latin typeface="Calibri" pitchFamily="34" charset="0"/>
-                          <a:ea typeface="Calibri" pitchFamily="34" charset="-122"/>
-                          <a:cs typeface="Calibri" pitchFamily="34" charset="-120"/>
-                        </a:rPr>
-                        <a:t>~€120–180</a:t>
-                      </a:r>
-                      <a:endParaRPr lang="en-US" sz="1000" dirty="0">
-                        <a:latin typeface="Calibri" charset="0"/>
-                        <a:ea typeface="Calibri" charset="0"/>
-                        <a:cs typeface="Calibri" charset="0"/>
-                      </a:endParaRPr>
-                    </a:p>
-                  </a:txBody>
-                  <a:tcPr marL="91440" marR="91440" marT="45720" marB="45720">
-                    <a:lnL w="12700" cap="flat" cmpd="sng" algn="ctr">
-                      <a:solidFill>
-                        <a:srgbClr val="0F3460"/>
-                      </a:solidFill>
-                      <a:prstDash val="solid"/>
-                      <a:round/>
-                      <a:headEnd type="none" w="med" len="med"/>
-                      <a:tailEnd type="none" w="med" len="med"/>
-                    </a:lnL>
-                    <a:lnR w="12700" cap="flat" cmpd="sng" algn="ctr">
-                      <a:solidFill>
-                        <a:srgbClr val="0F3460"/>
-                      </a:solidFill>
-                      <a:prstDash val="solid"/>
-                      <a:round/>
-                      <a:headEnd type="none" w="med" len="med"/>
-                      <a:tailEnd type="none" w="med" len="med"/>
-                    </a:lnR>
-                    <a:lnT w="12700" cap="flat" cmpd="sng" algn="ctr">
-                      <a:solidFill>
-                        <a:srgbClr val="0F3460"/>
-                      </a:solidFill>
-                      <a:prstDash val="solid"/>
-                      <a:round/>
-                      <a:headEnd type="none" w="med" len="med"/>
-                      <a:tailEnd type="none" w="med" len="med"/>
-                    </a:lnT>
-                    <a:lnB w="12700" cap="flat" cmpd="sng" algn="ctr">
-                      <a:solidFill>
-                        <a:srgbClr val="0F3460"/>
-                      </a:solidFill>
-                      <a:prstDash val="solid"/>
-                      <a:round/>
-                      <a:headEnd type="none" w="med" len="med"/>
-                      <a:tailEnd type="none" w="med" len="med"/>
-                    </a:lnB>
-                    <a:solidFill>
-                      <a:srgbClr val="1A1A2E"/>
-                    </a:solidFill>
-                  </a:tcPr>
-                </a:tc>
-                <a:tc>
-                  <a:txBody>
-                    <a:bodyPr/>
-                    <a:lstStyle/>
-                    <a:p>
-                      <a:pPr algn="ctr" indent="0" marL="0">
-                        <a:buNone/>
-                      </a:pPr>
-                      <a:r>
-                        <a:rPr lang="en-US" sz="1000" dirty="0">
-                          <a:solidFill>
-                            <a:srgbClr val="FFC107"/>
-                          </a:solidFill>
-                          <a:latin typeface="Calibri" pitchFamily="34" charset="0"/>
-                          <a:ea typeface="Calibri" pitchFamily="34" charset="-122"/>
-                          <a:cs typeface="Calibri" pitchFamily="34" charset="-120"/>
-                        </a:rPr>
-                        <a:t>~€480–720</a:t>
+                        <a:t>~€200–320</a:t>
                       </a:r>
                       <a:endParaRPr lang="en-US" sz="1000" dirty="0">
                         <a:latin typeface="Calibri" charset="0"/>
@@ -27276,13 +27020,13 @@
             <a:r>
               <a:rPr lang="en-US" sz="1300" b="1" dirty="0">
                 <a:solidFill>
-                  <a:srgbClr val="1EB4C8"/>
+                  <a:srgbClr val="C8003C"/>
                 </a:solidFill>
                 <a:latin typeface="Trebuchet MS" pitchFamily="34" charset="0"/>
                 <a:ea typeface="Trebuchet MS" pitchFamily="34" charset="-122"/>
                 <a:cs typeface="Trebuchet MS" pitchFamily="34" charset="-120"/>
               </a:rPr>
-              <a:t>RÜCKFLUG: MLA (Malta) → Deutschland (2. Nov.)</a:t>
+              <a:t>RÜCKFLUG: MXP (Mailand-Malpensa) → Deutschland (2. Nov.)</a:t>
             </a:r>
             <a:endParaRPr lang="en-US" sz="1300" dirty="0"/>
           </a:p>
@@ -27331,7 +27075,7 @@
                       <a:r>
                         <a:rPr lang="en-US" sz="1100" b="1" dirty="0">
                           <a:solidFill>
-                            <a:srgbClr val="1EB4C8"/>
+                            <a:srgbClr val="C8003C"/>
                           </a:solidFill>
                           <a:latin typeface="Trebuchet MS" pitchFamily="34" charset="0"/>
                           <a:ea typeface="Trebuchet MS" pitchFamily="34" charset="-122"/>
@@ -27399,7 +27143,7 @@
                       <a:r>
                         <a:rPr lang="en-US" sz="1100" b="1" dirty="0">
                           <a:solidFill>
-                            <a:srgbClr val="1EB4C8"/>
+                            <a:srgbClr val="C8003C"/>
                           </a:solidFill>
                           <a:latin typeface="Trebuchet MS" pitchFamily="34" charset="0"/>
                           <a:ea typeface="Trebuchet MS" pitchFamily="34" charset="-122"/>
@@ -27467,7 +27211,7 @@
                       <a:r>
                         <a:rPr lang="en-US" sz="1100" b="1" dirty="0">
                           <a:solidFill>
-                            <a:srgbClr val="1EB4C8"/>
+                            <a:srgbClr val="C8003C"/>
                           </a:solidFill>
                           <a:latin typeface="Trebuchet MS" pitchFamily="34" charset="0"/>
                           <a:ea typeface="Trebuchet MS" pitchFamily="34" charset="-122"/>
@@ -27535,7 +27279,7 @@
                       <a:r>
                         <a:rPr lang="en-US" sz="1100" b="1" dirty="0">
                           <a:solidFill>
-                            <a:srgbClr val="1EB4C8"/>
+                            <a:srgbClr val="C8003C"/>
                           </a:solidFill>
                           <a:latin typeface="Trebuchet MS" pitchFamily="34" charset="0"/>
                           <a:ea typeface="Trebuchet MS" pitchFamily="34" charset="-122"/>
@@ -27603,7 +27347,7 @@
                       <a:r>
                         <a:rPr lang="en-US" sz="1100" b="1" dirty="0">
                           <a:solidFill>
-                            <a:srgbClr val="1EB4C8"/>
+                            <a:srgbClr val="C8003C"/>
                           </a:solidFill>
                           <a:latin typeface="Trebuchet MS" pitchFamily="34" charset="0"/>
                           <a:ea typeface="Trebuchet MS" pitchFamily="34" charset="-122"/>
@@ -27671,7 +27415,7 @@
                       <a:r>
                         <a:rPr lang="en-US" sz="1100" b="1" dirty="0">
                           <a:solidFill>
-                            <a:srgbClr val="1EB4C8"/>
+                            <a:srgbClr val="C8003C"/>
                           </a:solidFill>
                           <a:latin typeface="Trebuchet MS" pitchFamily="34" charset="0"/>
                           <a:ea typeface="Trebuchet MS" pitchFamily="34" charset="-122"/>
@@ -27739,7 +27483,7 @@
                       <a:r>
                         <a:rPr lang="en-US" sz="1100" b="1" dirty="0">
                           <a:solidFill>
-                            <a:srgbClr val="1EB4C8"/>
+                            <a:srgbClr val="C8003C"/>
                           </a:solidFill>
                           <a:latin typeface="Trebuchet MS" pitchFamily="34" charset="0"/>
                           <a:ea typeface="Trebuchet MS" pitchFamily="34" charset="-122"/>
@@ -27815,7 +27559,7 @@
                           <a:ea typeface="Calibri" pitchFamily="34" charset="-122"/>
                           <a:cs typeface="Calibri" pitchFamily="34" charset="-120"/>
                         </a:rPr>
-                        <a:t>FR Ryanair  (MLA→FMO/DTM)</a:t>
+                        <a:t>Eurowings / Ryanair  (MXP/BGY→DUS)</a:t>
                       </a:r>
                       <a:endParaRPr lang="en-US" sz="1000" dirty="0">
                         <a:latin typeface="Calibri" charset="0"/>
@@ -27883,7 +27627,7 @@
                           <a:ea typeface="Calibri" pitchFamily="34" charset="-122"/>
                           <a:cs typeface="Calibri" pitchFamily="34" charset="-120"/>
                         </a:rPr>
-                        <a:t>MLA → FMO oder DTM  /  2. Nov.</a:t>
+                        <a:t>MXP → DUS  /  2. Nov.</a:t>
                       </a:r>
                       <a:endParaRPr lang="en-US" sz="1000" dirty="0">
                         <a:latin typeface="Calibri" charset="0"/>
@@ -28087,7 +27831,7 @@
                           <a:ea typeface="Calibri" pitchFamily="34" charset="-122"/>
                           <a:cs typeface="Calibri" pitchFamily="34" charset="-120"/>
                         </a:rPr>
-                        <a:t>~3h 00m</a:t>
+                        <a:t>1h 40m</a:t>
                       </a:r>
                       <a:endParaRPr lang="en-US" sz="1000" dirty="0">
                         <a:latin typeface="Calibri" charset="0"/>
@@ -28155,7 +27899,7 @@
                           <a:ea typeface="Calibri" pitchFamily="34" charset="-122"/>
                           <a:cs typeface="Calibri" pitchFamily="34" charset="-120"/>
                         </a:rPr>
-                        <a:t>~€50–90</a:t>
+                        <a:t>~€70–100</a:t>
                       </a:r>
                       <a:endParaRPr lang="en-US" sz="1000" dirty="0">
                         <a:latin typeface="Calibri" charset="0"/>
@@ -28223,7 +27967,7 @@
                           <a:ea typeface="Calibri" pitchFamily="34" charset="-122"/>
                           <a:cs typeface="Calibri" pitchFamily="34" charset="-120"/>
                         </a:rPr>
-                        <a:t>~€200–360</a:t>
+                        <a:t>~€280–400</a:t>
                       </a:r>
                       <a:endParaRPr lang="en-US" sz="1000" dirty="0">
                         <a:latin typeface="Calibri" charset="0"/>
@@ -28337,7 +28081,7 @@
                 <a:ea typeface="Calibri" pitchFamily="34" charset="-122"/>
                 <a:cs typeface="Calibri" pitchFamily="34" charset="-120"/>
               </a:rPr>
-              <a:t>⚠️  KEIN Direktflug ab DUS (Düsseldorf) nach Malta!  Direktflüge ab FMO (Münster/Osnabrück) und DTM (Dortmund) mit Ryanair.  FMO liegt ~100 km von DUS entfernt (1,5h Fahrt), DTM ~70 km (1h Fahrt).  Empfehlung: Fahrgemeinschaft nach FMO oder DTM zum Abflug.  Buchen: ryanair.com · skyscanner.de</a:t>
+              <a:t>✅  DUS (Düsseldorf) → MXP (Mailand-Malpensa): Direktflug mit Eurowings täglich, ~1h 40m.  Malpensa liegt 45 km nordwestlich vom Zentrum — Malpensa Express Zug ~52 Min., €13 ins Stadtzentrum.  Budget-Option: DUS → BGY (Bergamo/Orio al Serio) mit Ryanair — Bus nach Mailand ~1h, €5–6.  Buchen: eurowings.com · ryanair.com</a:t>
             </a:r>
             <a:endParaRPr lang="en-US" sz="1000" dirty="0"/>
           </a:p>
@@ -28362,7 +28106,7 @@
           </a:solidFill>
           <a:ln w="12700">
             <a:solidFill>
-              <a:srgbClr val="1EB4C8"/>
+              <a:srgbClr val="C8003C"/>
             </a:solidFill>
             <a:prstDash val="solid"/>
           </a:ln>
@@ -28434,13 +28178,13 @@
             <a:r>
               <a:rPr lang="en-US" sz="2000" b="1" dirty="0">
                 <a:solidFill>
-                  <a:srgbClr val="1EB4C8"/>
+                  <a:srgbClr val="C8003C"/>
                 </a:solidFill>
                 <a:latin typeface="Trebuchet MS" pitchFamily="34" charset="0"/>
                 <a:ea typeface="Trebuchet MS" pitchFamily="34" charset="-122"/>
                 <a:cs typeface="Trebuchet MS" pitchFamily="34" charset="-120"/>
               </a:rPr>
-              <a:t>€400 – €560 gesamt</a:t>
+              <a:t>€480 – €640 gesamt</a:t>
             </a:r>
             <a:endParaRPr lang="en-US" sz="2000" dirty="0"/>
           </a:p>
@@ -28518,11 +28262,11 @@
             <a:avLst/>
           </a:prstGeom>
           <a:solidFill>
-            <a:srgbClr val="1EB4C8"/>
+            <a:srgbClr val="C8003C"/>
           </a:solidFill>
           <a:ln w="12700">
             <a:solidFill>
-              <a:srgbClr val="1EB4C8"/>
+              <a:srgbClr val="C8003C"/>
             </a:solidFill>
             <a:prstDash val="solid"/>
           </a:ln>
@@ -28586,7 +28330,7 @@
                 <a:ea typeface="Trebuchet MS" pitchFamily="34" charset="-122"/>
                 <a:cs typeface="Trebuchet MS" pitchFamily="34" charset="-120"/>
               </a:rPr>
-              <a:t>🇲🇹  MALTA — UNTERKUNFT</a:t>
+              <a:t>🇮🇹  MAILAND — UNTERKUNFT</a:t>
             </a:r>
             <a:endParaRPr lang="en-US" sz="2200" dirty="0"/>
           </a:p>
@@ -28607,11 +28351,11 @@
             <a:avLst/>
           </a:prstGeom>
           <a:solidFill>
-            <a:srgbClr val="1EB4C8"/>
+            <a:srgbClr val="C8003C"/>
           </a:solidFill>
           <a:ln w="12700">
             <a:solidFill>
-              <a:srgbClr val="1EB4C8"/>
+              <a:srgbClr val="C8003C"/>
             </a:solidFill>
             <a:prstDash val="solid"/>
           </a:ln>
@@ -28619,7 +28363,7 @@
       </p:sp>
       <p:pic>
         <p:nvPicPr>
-          <p:cNvPr id="6" name="Image 0" descr="/home/user/Excelhaus/halloween_trip/malta_airbnb.png">    </p:cNvPr>
+          <p:cNvPr id="6" name="Image 0" descr="/home/user/Excelhaus/halloween_trip/milan_airbnb.png">    </p:cNvPr>
           <p:cNvPicPr>
             <a:picLocks noChangeAspect="1"/>
           </p:cNvPicPr>
@@ -28643,7 +28387,7 @@
       </p:pic>
       <p:pic>
         <p:nvPicPr>
-          <p:cNvPr id="7" name="Image 1" descr="/home/user/Excelhaus/halloween_trip/malta_map.png">    </p:cNvPr>
+          <p:cNvPr id="7" name="Image 1" descr="/home/user/Excelhaus/halloween_trip/milan_map.png">    </p:cNvPr>
           <p:cNvPicPr>
             <a:picLocks noChangeAspect="1"/>
           </p:cNvPicPr>
@@ -28684,7 +28428,7 @@
           </a:solidFill>
           <a:ln w="12700">
             <a:solidFill>
-              <a:srgbClr val="1EB4C8"/>
+              <a:srgbClr val="C8003C"/>
             </a:solidFill>
             <a:prstDash val="solid"/>
           </a:ln>
@@ -28723,7 +28467,7 @@
                 <a:ea typeface="Trebuchet MS" pitchFamily="34" charset="-122"/>
                 <a:cs typeface="Trebuchet MS" pitchFamily="34" charset="-120"/>
               </a:rPr>
-              <a:t>St. Julian's / Sliema — 2-Zi.-Wohnung mit Terrasse &amp; Meerblick</a:t>
+              <a:t>Navigli / Porta Ticinese — 2-Zi.-Wohnung am Kanal</a:t>
             </a:r>
             <a:endParaRPr lang="en-US" sz="1400" dirty="0"/>
           </a:p>
@@ -28748,7 +28492,7 @@
           </a:solidFill>
           <a:ln w="12700">
             <a:solidFill>
-              <a:srgbClr val="1EB4C8"/>
+              <a:srgbClr val="C8003C"/>
             </a:solidFill>
             <a:prstDash val="solid"/>
           </a:ln>
@@ -28781,7 +28525,7 @@
             <a:r>
               <a:rPr lang="en-US" sz="1100" b="1" dirty="0">
                 <a:solidFill>
-                  <a:srgbClr val="1EB4C8"/>
+                  <a:srgbClr val="C8003C"/>
                 </a:solidFill>
                 <a:latin typeface="Calibri" pitchFamily="34" charset="0"/>
                 <a:ea typeface="Calibri" pitchFamily="34" charset="-122"/>
@@ -28812,7 +28556,7 @@
           </a:solidFill>
           <a:ln w="12700">
             <a:solidFill>
-              <a:srgbClr val="1EB4C8"/>
+              <a:srgbClr val="C8003C"/>
             </a:solidFill>
             <a:prstDash val="solid"/>
           </a:ln>
@@ -28845,7 +28589,7 @@
             <a:r>
               <a:rPr lang="en-US" sz="1100" b="1" dirty="0">
                 <a:solidFill>
-                  <a:srgbClr val="1EB4C8"/>
+                  <a:srgbClr val="C8003C"/>
                 </a:solidFill>
                 <a:latin typeface="Calibri" pitchFamily="34" charset="0"/>
                 <a:ea typeface="Calibri" pitchFamily="34" charset="-122"/>
@@ -28915,7 +28659,7 @@
                 <a:ea typeface="Calibri" pitchFamily="34" charset="-122"/>
                 <a:cs typeface="Calibri" pitchFamily="34" charset="-120"/>
               </a:rPr>
-              <a:t>🏗 Terrasse ✓</a:t>
+              <a:t>🏗 Balkon/Terrasse</a:t>
             </a:r>
             <a:endParaRPr lang="en-US" sz="1100" dirty="0"/>
           </a:p>
@@ -28940,7 +28684,7 @@
           </a:solidFill>
           <a:ln w="12700">
             <a:solidFill>
-              <a:srgbClr val="1EB4C8"/>
+              <a:srgbClr val="C8003C"/>
             </a:solidFill>
             <a:prstDash val="solid"/>
           </a:ln>
@@ -28973,7 +28717,7 @@
             <a:r>
               <a:rPr lang="en-US" sz="1100" b="1" dirty="0">
                 <a:solidFill>
-                  <a:srgbClr val="1EB4C8"/>
+                  <a:srgbClr val="C8003C"/>
                 </a:solidFill>
                 <a:latin typeface="Calibri" pitchFamily="34" charset="0"/>
                 <a:ea typeface="Calibri" pitchFamily="34" charset="-122"/>
@@ -29004,7 +28748,7 @@
           </a:solidFill>
           <a:ln w="12700">
             <a:solidFill>
-              <a:srgbClr val="1EB4C8"/>
+              <a:srgbClr val="C8003C"/>
             </a:solidFill>
             <a:prstDash val="solid"/>
           </a:ln>
@@ -29037,7 +28781,7 @@
             <a:r>
               <a:rPr lang="en-US" sz="1100" b="1" dirty="0">
                 <a:solidFill>
-                  <a:srgbClr val="1EB4C8"/>
+                  <a:srgbClr val="C8003C"/>
                 </a:solidFill>
                 <a:latin typeface="Calibri" pitchFamily="34" charset="0"/>
                 <a:ea typeface="Calibri" pitchFamily="34" charset="-122"/>
@@ -29068,7 +28812,7 @@
           </a:solidFill>
           <a:ln w="12700">
             <a:solidFill>
-              <a:srgbClr val="1EB4C8"/>
+              <a:srgbClr val="C8003C"/>
             </a:solidFill>
             <a:prstDash val="solid"/>
           </a:ln>
@@ -29101,13 +28845,13 @@
             <a:r>
               <a:rPr lang="en-US" sz="1100" b="1" dirty="0">
                 <a:solidFill>
-                  <a:srgbClr val="1EB4C8"/>
+                  <a:srgbClr val="C8003C"/>
                 </a:solidFill>
                 <a:latin typeface="Calibri" pitchFamily="34" charset="0"/>
                 <a:ea typeface="Calibri" pitchFamily="34" charset="-122"/>
                 <a:cs typeface="Calibri" pitchFamily="34" charset="-120"/>
               </a:rPr>
-              <a:t>🌊 Meerblick mögl.</a:t>
+              <a:t>🍹 Navigli Bars 1 Min</a:t>
             </a:r>
             <a:endParaRPr lang="en-US" sz="1100" dirty="0"/>
           </a:p>
@@ -29171,7 +28915,7 @@
                 <a:ea typeface="Calibri" pitchFamily="34" charset="-122"/>
                 <a:cs typeface="Calibri" pitchFamily="34" charset="-120"/>
               </a:rPr>
-              <a:t>📌 St. Julian's / Paceville — direkt am Nachtleben, 2 Min. zu Hugo's Lounge &amp; Beach Clubs</a:t>
+              <a:t>📌 Navigli — direkt an der Aperitivo-Meile, 15 Min. per Metro/Tram zum Duomo &amp; Corso Como</a:t>
             </a:r>
             <a:endParaRPr lang="en-US" sz="1050" dirty="0"/>
           </a:p>
@@ -29196,7 +28940,7 @@
           </a:solidFill>
           <a:ln w="12700">
             <a:solidFill>
-              <a:srgbClr val="1EB4C8"/>
+              <a:srgbClr val="C8003C"/>
             </a:solidFill>
             <a:prstDash val="solid"/>
           </a:ln>
@@ -29229,7 +28973,7 @@
             <a:r>
               <a:rPr lang="en-US" sz="1100" b="1" dirty="0">
                 <a:solidFill>
-                  <a:srgbClr val="1EB4C8"/>
+                  <a:srgbClr val="C8003C"/>
                 </a:solidFill>
                 <a:latin typeface="Trebuchet MS" pitchFamily="34" charset="0"/>
                 <a:ea typeface="Trebuchet MS" pitchFamily="34" charset="-122"/>
@@ -29313,7 +29057,7 @@
                 <a:ea typeface="Trebuchet MS" pitchFamily="34" charset="-122"/>
                 <a:cs typeface="Trebuchet MS" pitchFamily="34" charset="-120"/>
               </a:rPr>
-              <a:t>~€95</a:t>
+              <a:t>~€130</a:t>
             </a:r>
             <a:endParaRPr lang="en-US" sz="1000" dirty="0"/>
           </a:p>
@@ -29391,7 +29135,7 @@
                 <a:ea typeface="Trebuchet MS" pitchFamily="34" charset="-122"/>
                 <a:cs typeface="Trebuchet MS" pitchFamily="34" charset="-120"/>
               </a:rPr>
-              <a:t>~€285</a:t>
+              <a:t>~€390</a:t>
             </a:r>
             <a:endParaRPr lang="en-US" sz="1000" dirty="0"/>
           </a:p>
@@ -29469,7 +29213,7 @@
                 <a:ea typeface="Trebuchet MS" pitchFamily="34" charset="-122"/>
                 <a:cs typeface="Trebuchet MS" pitchFamily="34" charset="-120"/>
               </a:rPr>
-              <a:t>~€50–70</a:t>
+              <a:t>~€60–80</a:t>
             </a:r>
             <a:endParaRPr lang="en-US" sz="1000" dirty="0"/>
           </a:p>
@@ -29541,13 +29285,13 @@
             <a:r>
               <a:rPr lang="en-US" sz="1000" b="1" dirty="0">
                 <a:solidFill>
-                  <a:srgbClr val="1EB4C8"/>
+                  <a:srgbClr val="C8003C"/>
                 </a:solidFill>
                 <a:latin typeface="Trebuchet MS" pitchFamily="34" charset="0"/>
                 <a:ea typeface="Trebuchet MS" pitchFamily="34" charset="-122"/>
                 <a:cs typeface="Trebuchet MS" pitchFamily="34" charset="-120"/>
               </a:rPr>
-              <a:t>~€335–355</a:t>
+              <a:t>~€450–470</a:t>
             </a:r>
             <a:endParaRPr lang="en-US" sz="1000" dirty="0"/>
           </a:p>
@@ -29625,7 +29369,7 @@
                 <a:ea typeface="Trebuchet MS" pitchFamily="34" charset="-122"/>
                 <a:cs typeface="Trebuchet MS" pitchFamily="34" charset="-120"/>
               </a:rPr>
-              <a:t>~€84–89</a:t>
+              <a:t>~€113–118</a:t>
             </a:r>
             <a:endParaRPr lang="en-US" sz="1000" dirty="0"/>
           </a:p>
@@ -29646,11 +29390,11 @@
             <a:avLst/>
           </a:prstGeom>
           <a:solidFill>
-            <a:srgbClr val="1EB4C8"/>
+            <a:srgbClr val="C8003C"/>
           </a:solidFill>
           <a:ln w="12700">
             <a:solidFill>
-              <a:srgbClr val="1EB4C8"/>
+              <a:srgbClr val="C8003C"/>
             </a:solidFill>
             <a:prstDash val="solid"/>
           </a:ln>
@@ -29698,7 +29442,7 @@
                   </a:extLst>
                 </a:hlinkClick>
               </a:rPr>
-              <a:t>🔍  Airbnb: Malta durchsuchen  →</a:t>
+              <a:t>🔍  Airbnb: Mailand durchsuchen  →</a:t>
             </a:r>
             <a:endParaRPr lang="en-US" sz="1500" dirty="0"/>
           </a:p>
@@ -29746,7 +29490,7 @@
                   </a:extLst>
                 </a:hlinkClick>
               </a:rPr>
-              <a:t>📍 Alternativ in Sliema suchen: airbnb.com/s/Sliema--Malta (ruhiger, Wasserfront, gleiche Daten)</a:t>
+              <a:t>📍 Alternativ in Brera/Isola suchen: airbnb.com/s/Brera--Milan (Designviertel, gleiche Daten)</a:t>
             </a:r>
             <a:endParaRPr lang="en-US" sz="900" dirty="0"/>
           </a:p>

--- a/halloween_trip_2025.pptx
+++ b/halloween_trip_2025.pptx
@@ -2324,7 +2324,7 @@
           </a:solidFill>
           <a:ln w="12700">
             <a:solidFill>
-              <a:srgbClr val="C8003C"/>
+              <a:srgbClr val="8C52E8"/>
             </a:solidFill>
             <a:prstDash val="solid"/>
           </a:ln>
@@ -2363,7 +2363,7 @@
                 <a:ea typeface="Trebuchet MS" pitchFamily="34" charset="-122"/>
                 <a:cs typeface="Trebuchet MS" pitchFamily="34" charset="-120"/>
               </a:rPr>
-              <a:t>🇮🇹 MAILAND</a:t>
+              <a:t>🇧🇬 SOFIA</a:t>
             </a:r>
             <a:endParaRPr lang="en-US" sz="2400" dirty="0"/>
           </a:p>
@@ -2402,7 +2402,7 @@
                 <a:ea typeface="Calibri" pitchFamily="34" charset="-122"/>
                 <a:cs typeface="Calibri" pitchFamily="34" charset="-120"/>
               </a:rPr>
-              <a:t>Beide Ziele: Direktflug ab DUS  ·  Lissabon 17–22°C · Mailand 12–16°C</a:t>
+              <a:t>Beide Ziele: Direktflug ab DUS  ·  Lissabon 17–22°C · Sofia 10–14°C</a:t>
             </a:r>
             <a:endParaRPr lang="en-US" sz="1300" dirty="0"/>
           </a:p>
@@ -2480,11 +2480,11 @@
             <a:avLst/>
           </a:prstGeom>
           <a:solidFill>
-            <a:srgbClr val="C8003C"/>
+            <a:srgbClr val="8C52E8"/>
           </a:solidFill>
           <a:ln w="12700">
             <a:solidFill>
-              <a:srgbClr val="C8003C"/>
+              <a:srgbClr val="8C52E8"/>
             </a:solidFill>
             <a:prstDash val="solid"/>
           </a:ln>
@@ -2548,7 +2548,7 @@
                 <a:ea typeface="Trebuchet MS" pitchFamily="34" charset="-122"/>
                 <a:cs typeface="Trebuchet MS" pitchFamily="34" charset="-120"/>
               </a:rPr>
-              <a:t>🇮🇹  MAILAND — TAGESPROGRAMM</a:t>
+              <a:t>🇧🇬  SOFIA — TAGESPROGRAMM</a:t>
             </a:r>
             <a:endParaRPr lang="en-US" sz="2200" dirty="0"/>
           </a:p>
@@ -2569,11 +2569,11 @@
             <a:avLst/>
           </a:prstGeom>
           <a:solidFill>
-            <a:srgbClr val="C8003C"/>
+            <a:srgbClr val="8C52E8"/>
           </a:solidFill>
           <a:ln w="12700">
             <a:solidFill>
-              <a:srgbClr val="C8003C"/>
+              <a:srgbClr val="8C52E8"/>
             </a:solidFill>
             <a:prstDash val="solid"/>
           </a:ln>
@@ -2598,7 +2598,7 @@
           </a:solidFill>
           <a:ln w="12700">
             <a:solidFill>
-              <a:srgbClr val="C8003C"/>
+              <a:srgbClr val="8C52E8"/>
             </a:solidFill>
             <a:prstDash val="solid"/>
           </a:ln>
@@ -2656,7 +2656,7 @@
             <a:r>
               <a:rPr lang="en-US" sz="1100" b="1" dirty="0">
                 <a:solidFill>
-                  <a:srgbClr val="C8003C"/>
+                  <a:srgbClr val="8C52E8"/>
                 </a:solidFill>
                 <a:latin typeface="Trebuchet MS" pitchFamily="34" charset="0"/>
                 <a:ea typeface="Trebuchet MS" pitchFamily="34" charset="-122"/>
@@ -2740,7 +2740,7 @@
                 <a:ea typeface="Calibri" pitchFamily="34" charset="-122"/>
                 <a:cs typeface="Calibri" pitchFamily="34" charset="-120"/>
               </a:rPr>
-              <a:t>✈  Eurowings landet MXP ~08:40 · Malpensa Express ins Zentrum</a:t>
+              <a:t>✈  Landet SOF ~11:00 · Metro M1 ins Zentrum (€0,80!)</a:t>
             </a:r>
             <a:endParaRPr lang="en-US" sz="900" dirty="0"/>
           </a:p>
@@ -2779,7 +2779,7 @@
                 <a:ea typeface="Calibri" pitchFamily="34" charset="-122"/>
                 <a:cs typeface="Calibri" pitchFamily="34" charset="-120"/>
               </a:rPr>
-              <a:t>🏠  Einchecken in Navigli (Check-in ab 15 Uhr)</a:t>
+              <a:t>🏠  Einchecken in der Vitosha-Nähe</a:t>
             </a:r>
             <a:endParaRPr lang="en-US" sz="900" dirty="0"/>
           </a:p>
@@ -2818,7 +2818,7 @@
                 <a:ea typeface="Calibri" pitchFamily="34" charset="-122"/>
                 <a:cs typeface="Calibri" pitchFamily="34" charset="-120"/>
               </a:rPr>
-              <a:t>🚶  SANDEMANs Stadtführung 14:30 @ Duomo (2,5h, Trinkgeld)</a:t>
+              <a:t>🚶  SANDEMANs Free Tour 14:30 @ Alexander-Nevsky-Platz</a:t>
             </a:r>
             <a:endParaRPr lang="en-US" sz="900" dirty="0"/>
           </a:p>
@@ -2857,7 +2857,7 @@
                 <a:ea typeface="Calibri" pitchFamily="34" charset="-122"/>
                 <a:cs typeface="Calibri" pitchFamily="34" charset="-120"/>
               </a:rPr>
-              <a:t>   Duomo, Galleria Vittorio Emanuele, Castello Sforzesco</a:t>
+              <a:t>   Kathedrale, Präsidentenpalast, Rotunde Sveti Georgi</a:t>
             </a:r>
             <a:endParaRPr lang="en-US" sz="900" dirty="0"/>
           </a:p>
@@ -2896,7 +2896,7 @@
                 <a:ea typeface="Calibri" pitchFamily="34" charset="-122"/>
                 <a:cs typeface="Calibri" pitchFamily="34" charset="-120"/>
               </a:rPr>
-              <a:t>🍹  Aperitivo ab 18 Uhr am Naviglio Grande</a:t>
+              <a:t>🍺  Erste Biere am Vitosha Blvd: €1–2 pro Bier (kein Tippfehler!)</a:t>
             </a:r>
             <a:endParaRPr lang="en-US" sz="900" dirty="0"/>
           </a:p>
@@ -2935,7 +2935,7 @@
                 <a:ea typeface="Calibri" pitchFamily="34" charset="-122"/>
                 <a:cs typeface="Calibri" pitchFamily="34" charset="-120"/>
               </a:rPr>
-              <a:t>   €8–10 Drink + gratis Buffet — Mailänder Tradition!</a:t>
+              <a:t>🌃  Erste Nacht: Vitosha Blvd Bars &amp; Lounge-Cafés</a:t>
             </a:r>
             <a:endParaRPr lang="en-US" sz="900" dirty="0"/>
           </a:p>
@@ -2943,46 +2943,7 @@
       </p:sp>
       <p:sp>
         <p:nvSpPr>
-          <p:cNvPr id="16" name="Text 14"/>
-          <p:cNvSpPr/>
-          <p:nvPr/>
-        </p:nvSpPr>
-        <p:spPr>
-          <a:xfrm>
-            <a:off x="365760" y="2926080"/>
-            <a:ext cx="5486400" cy="256032"/>
-          </a:xfrm>
-          <a:prstGeom prst="rect">
-            <a:avLst/>
-          </a:prstGeom>
-          <a:noFill/>
-          <a:ln/>
-        </p:spPr>
-        <p:txBody>
-          <a:bodyPr wrap="square" rtlCol="0" anchor="t"/>
-          <a:lstStyle/>
-          <a:p>
-            <a:pPr indent="0" marL="0">
-              <a:buNone/>
-            </a:pPr>
-            <a:r>
-              <a:rPr lang="en-US" sz="900" dirty="0">
-                <a:solidFill>
-                  <a:srgbClr val="E8E8E8"/>
-                </a:solidFill>
-                <a:latin typeface="Calibri" pitchFamily="34" charset="0"/>
-                <a:ea typeface="Calibri" pitchFamily="34" charset="-122"/>
-                <a:cs typeface="Calibri" pitchFamily="34" charset="-120"/>
-              </a:rPr>
-              <a:t>🌃  Erste Nacht: Navigli-Bars &amp; Darsena-Platz</a:t>
-            </a:r>
-            <a:endParaRPr lang="en-US" sz="900" dirty="0"/>
-          </a:p>
-        </p:txBody>
-      </p:sp>
-      <p:sp>
-        <p:nvSpPr>
-          <p:cNvPr id="17" name="Shape 15"/>
+          <p:cNvPr id="16" name="Shape 14"/>
           <p:cNvSpPr/>
           <p:nvPr/>
         </p:nvSpPr>
@@ -2999,7 +2960,7 @@
           </a:solidFill>
           <a:ln w="12700">
             <a:solidFill>
-              <a:srgbClr val="C8003C"/>
+              <a:srgbClr val="8C52E8"/>
             </a:solidFill>
             <a:prstDash val="solid"/>
           </a:ln>
@@ -3007,7 +2968,7 @@
       </p:sp>
       <p:sp>
         <p:nvSpPr>
-          <p:cNvPr id="18" name="Shape 16"/>
+          <p:cNvPr id="17" name="Shape 15"/>
           <p:cNvSpPr/>
           <p:nvPr/>
         </p:nvSpPr>
@@ -3032,7 +2993,7 @@
       </p:sp>
       <p:sp>
         <p:nvSpPr>
-          <p:cNvPr id="19" name="Text 17"/>
+          <p:cNvPr id="18" name="Text 16"/>
           <p:cNvSpPr/>
           <p:nvPr/>
         </p:nvSpPr>
@@ -3057,7 +3018,7 @@
             <a:r>
               <a:rPr lang="en-US" sz="1100" b="1" dirty="0">
                 <a:solidFill>
-                  <a:srgbClr val="C8003C"/>
+                  <a:srgbClr val="8C52E8"/>
                 </a:solidFill>
                 <a:latin typeface="Trebuchet MS" pitchFamily="34" charset="0"/>
                 <a:ea typeface="Trebuchet MS" pitchFamily="34" charset="-122"/>
@@ -3071,7 +3032,7 @@
       </p:sp>
       <p:sp>
         <p:nvSpPr>
-          <p:cNvPr id="20" name="Text 18"/>
+          <p:cNvPr id="19" name="Text 17"/>
           <p:cNvSpPr/>
           <p:nvPr/>
         </p:nvSpPr>
@@ -3110,7 +3071,7 @@
       </p:sp>
       <p:sp>
         <p:nvSpPr>
-          <p:cNvPr id="21" name="Text 19"/>
+          <p:cNvPr id="20" name="Text 18"/>
           <p:cNvSpPr/>
           <p:nvPr/>
         </p:nvSpPr>
@@ -3141,7 +3102,7 @@
                 <a:ea typeface="Calibri" pitchFamily="34" charset="-122"/>
                 <a:cs typeface="Calibri" pitchFamily="34" charset="-120"/>
               </a:rPr>
-              <a:t>🍳  Pasta-Kochkurs 10:00 Uhr (3h, €70 p.P., Navigli)</a:t>
+              <a:t>🏔  Morgens: Vitosha-Berg Wanderung (Bus/Gondel ab Stadtrand)</a:t>
             </a:r>
             <a:endParaRPr lang="en-US" sz="900" dirty="0"/>
           </a:p>
@@ -3149,7 +3110,7 @@
       </p:sp>
       <p:sp>
         <p:nvSpPr>
-          <p:cNvPr id="22" name="Text 20"/>
+          <p:cNvPr id="21" name="Text 19"/>
           <p:cNvSpPr/>
           <p:nvPr/>
         </p:nvSpPr>
@@ -3180,7 +3141,7 @@
                 <a:ea typeface="Calibri" pitchFamily="34" charset="-122"/>
                 <a:cs typeface="Calibri" pitchFamily="34" charset="-120"/>
               </a:rPr>
-              <a:t>   Risotto alla Milanese + Ossobuco + Tiramisu</a:t>
+              <a:t>   Bergblick über ganz Sofia — kostenloser Nationalpark</a:t>
             </a:r>
             <a:endParaRPr lang="en-US" sz="900" dirty="0"/>
           </a:p>
@@ -3188,7 +3149,7 @@
       </p:sp>
       <p:sp>
         <p:nvSpPr>
-          <p:cNvPr id="23" name="Text 21"/>
+          <p:cNvPr id="22" name="Text 20"/>
           <p:cNvSpPr/>
           <p:nvPr/>
         </p:nvSpPr>
@@ -3219,7 +3180,7 @@
                 <a:ea typeface="Calibri" pitchFamily="34" charset="-122"/>
                 <a:cs typeface="Calibri" pitchFamily="34" charset="-120"/>
               </a:rPr>
-              <a:t>🛍  Nachmittags: Brera Designviertel oder Modeboulevard</a:t>
+              <a:t>🍳  Bulgarischer Kochkurs 15:00 Uhr (3h, ~€45 p.P.)</a:t>
             </a:r>
             <a:endParaRPr lang="en-US" sz="900" dirty="0"/>
           </a:p>
@@ -3227,7 +3188,7 @@
       </p:sp>
       <p:sp>
         <p:nvSpPr>
-          <p:cNvPr id="24" name="Text 22"/>
+          <p:cNvPr id="23" name="Text 21"/>
           <p:cNvSpPr/>
           <p:nvPr/>
         </p:nvSpPr>
@@ -3258,7 +3219,7 @@
                 <a:ea typeface="Calibri" pitchFamily="34" charset="-122"/>
                 <a:cs typeface="Calibri" pitchFamily="34" charset="-120"/>
               </a:rPr>
-              <a:t>🎃  Halloween Kneipentour Navigli ab 21 Uhr · ~€20 p.P.</a:t>
+              <a:t>   Shopska-Salat + Moussaka + Rakija-Verkostung</a:t>
             </a:r>
             <a:endParaRPr lang="en-US" sz="900" dirty="0"/>
           </a:p>
@@ -3266,7 +3227,7 @@
       </p:sp>
       <p:sp>
         <p:nvSpPr>
-          <p:cNvPr id="25" name="Text 23"/>
+          <p:cNvPr id="24" name="Text 22"/>
           <p:cNvSpPr/>
           <p:nvPr/>
         </p:nvSpPr>
@@ -3297,7 +3258,7 @@
                 <a:ea typeface="Calibri" pitchFamily="34" charset="-122"/>
                 <a:cs typeface="Calibri" pitchFamily="34" charset="-120"/>
               </a:rPr>
-              <a:t>   Treffpunkt Darsena · 4 Bars · Shots · Kostüm-Contest</a:t>
+              <a:t>🎃  Halloween Kneipentour ab 22 Uhr · ~€15 p.P.</a:t>
             </a:r>
             <a:endParaRPr lang="en-US" sz="900" dirty="0"/>
           </a:p>
@@ -3305,7 +3266,7 @@
       </p:sp>
       <p:sp>
         <p:nvSpPr>
-          <p:cNvPr id="26" name="Text 24"/>
+          <p:cNvPr id="25" name="Text 23"/>
           <p:cNvSpPr/>
           <p:nvPr/>
         </p:nvSpPr>
@@ -3336,7 +3297,7 @@
                 <a:ea typeface="Calibri" pitchFamily="34" charset="-122"/>
                 <a:cs typeface="Calibri" pitchFamily="34" charset="-120"/>
               </a:rPr>
-              <a:t>🎶  Ab 1 Uhr: Alcatraz oder Volt Club — Halloween Special</a:t>
+              <a:t>   Studentski Grad: Sin City · Yalta Club · Mixtape 5</a:t>
             </a:r>
             <a:endParaRPr lang="en-US" sz="900" dirty="0"/>
           </a:p>
@@ -3344,7 +3305,7 @@
       </p:sp>
       <p:sp>
         <p:nvSpPr>
-          <p:cNvPr id="27" name="Text 25"/>
+          <p:cNvPr id="26" name="Text 24"/>
           <p:cNvSpPr/>
           <p:nvPr/>
         </p:nvSpPr>
@@ -3375,7 +3336,7 @@
                 <a:ea typeface="Calibri" pitchFamily="34" charset="-122"/>
                 <a:cs typeface="Calibri" pitchFamily="34" charset="-120"/>
               </a:rPr>
-              <a:t>   Corso Como Party bis 5 Uhr morgens</a:t>
+              <a:t>   Clubs bis 5 Uhr morgens · €1 Bier die ganze Nacht</a:t>
             </a:r>
             <a:endParaRPr lang="en-US" sz="900" dirty="0"/>
           </a:p>
@@ -3383,7 +3344,7 @@
       </p:sp>
       <p:sp>
         <p:nvSpPr>
-          <p:cNvPr id="28" name="Shape 26"/>
+          <p:cNvPr id="27" name="Shape 25"/>
           <p:cNvSpPr/>
           <p:nvPr/>
         </p:nvSpPr>
@@ -3400,7 +3361,7 @@
           </a:solidFill>
           <a:ln w="12700">
             <a:solidFill>
-              <a:srgbClr val="C8003C"/>
+              <a:srgbClr val="8C52E8"/>
             </a:solidFill>
             <a:prstDash val="solid"/>
           </a:ln>
@@ -3408,7 +3369,7 @@
       </p:sp>
       <p:sp>
         <p:nvSpPr>
-          <p:cNvPr id="29" name="Shape 27"/>
+          <p:cNvPr id="28" name="Shape 26"/>
           <p:cNvSpPr/>
           <p:nvPr/>
         </p:nvSpPr>
@@ -3433,7 +3394,7 @@
       </p:sp>
       <p:sp>
         <p:nvSpPr>
-          <p:cNvPr id="30" name="Text 28"/>
+          <p:cNvPr id="29" name="Text 27"/>
           <p:cNvSpPr/>
           <p:nvPr/>
         </p:nvSpPr>
@@ -3458,7 +3419,7 @@
             <a:r>
               <a:rPr lang="en-US" sz="1100" b="1" dirty="0">
                 <a:solidFill>
-                  <a:srgbClr val="C8003C"/>
+                  <a:srgbClr val="8C52E8"/>
                 </a:solidFill>
                 <a:latin typeface="Trebuchet MS" pitchFamily="34" charset="0"/>
                 <a:ea typeface="Trebuchet MS" pitchFamily="34" charset="-122"/>
@@ -3472,7 +3433,7 @@
       </p:sp>
       <p:sp>
         <p:nvSpPr>
-          <p:cNvPr id="31" name="Text 29"/>
+          <p:cNvPr id="30" name="Text 28"/>
           <p:cNvSpPr/>
           <p:nvPr/>
         </p:nvSpPr>
@@ -3511,7 +3472,7 @@
       </p:sp>
       <p:sp>
         <p:nvSpPr>
-          <p:cNvPr id="32" name="Text 30"/>
+          <p:cNvPr id="31" name="Text 29"/>
           <p:cNvSpPr/>
           <p:nvPr/>
         </p:nvSpPr>
@@ -3542,7 +3503,7 @@
                 <a:ea typeface="Calibri" pitchFamily="34" charset="-122"/>
                 <a:cs typeface="Calibri" pitchFamily="34" charset="-120"/>
               </a:rPr>
-              <a:t>🌅  Ausschlafen — Mailands Nächte enden spät</a:t>
+              <a:t>🕌  Alexander-Nevsky-Kathedrale innen (kostenlos, atemberaubend)</a:t>
             </a:r>
             <a:endParaRPr lang="en-US" sz="900" dirty="0"/>
           </a:p>
@@ -3550,7 +3511,7 @@
       </p:sp>
       <p:sp>
         <p:nvSpPr>
-          <p:cNvPr id="33" name="Text 31"/>
+          <p:cNvPr id="32" name="Text 30"/>
           <p:cNvSpPr/>
           <p:nvPr/>
         </p:nvSpPr>
@@ -3581,7 +3542,7 @@
                 <a:ea typeface="Calibri" pitchFamily="34" charset="-122"/>
                 <a:cs typeface="Calibri" pitchFamily="34" charset="-120"/>
               </a:rPr>
-              <a:t>☕  Frühstück: Cappuccino + Cornetto an der Bar (€2)</a:t>
+              <a:t>🏛  Nationales Historisches Museum (optional)</a:t>
             </a:r>
             <a:endParaRPr lang="en-US" sz="900" dirty="0"/>
           </a:p>
@@ -3589,7 +3550,7 @@
       </p:sp>
       <p:sp>
         <p:nvSpPr>
-          <p:cNvPr id="34" name="Text 32"/>
+          <p:cNvPr id="33" name="Text 31"/>
           <p:cNvSpPr/>
           <p:nvPr/>
         </p:nvSpPr>
@@ -3620,7 +3581,7 @@
                 <a:ea typeface="Calibri" pitchFamily="34" charset="-122"/>
                 <a:cs typeface="Calibri" pitchFamily="34" charset="-120"/>
               </a:rPr>
-              <a:t>🏛  Duomo Dachterrasse (Blick über ganz Mailand, ~€14)</a:t>
+              <a:t>🛒  Weiblicher Markt (Ženski Pazar): lokales Essen &amp; Gewürze</a:t>
             </a:r>
             <a:endParaRPr lang="en-US" sz="900" dirty="0"/>
           </a:p>
@@ -3628,7 +3589,7 @@
       </p:sp>
       <p:sp>
         <p:nvSpPr>
-          <p:cNvPr id="35" name="Text 33"/>
+          <p:cNvPr id="34" name="Text 32"/>
           <p:cNvSpPr/>
           <p:nvPr/>
         </p:nvSpPr>
@@ -3659,7 +3620,7 @@
                 <a:ea typeface="Calibri" pitchFamily="34" charset="-122"/>
                 <a:cs typeface="Calibri" pitchFamily="34" charset="-120"/>
               </a:rPr>
-              <a:t>🛒  Mercato Metropolitano oder Fiera di Sinigaglia</a:t>
+              <a:t>🍽  Abendessen: Mehana-Restaurant — Schopska + Bier €8 gesamt</a:t>
             </a:r>
             <a:endParaRPr lang="en-US" sz="900" dirty="0"/>
           </a:p>
@@ -3667,7 +3628,7 @@
       </p:sp>
       <p:sp>
         <p:nvSpPr>
-          <p:cNvPr id="36" name="Text 34"/>
+          <p:cNvPr id="35" name="Text 33"/>
           <p:cNvSpPr/>
           <p:nvPr/>
         </p:nvSpPr>
@@ -3698,7 +3659,7 @@
                 <a:ea typeface="Calibri" pitchFamily="34" charset="-122"/>
                 <a:cs typeface="Calibri" pitchFamily="34" charset="-120"/>
               </a:rPr>
-              <a:t>🍝  Abendessen: Risotto Milanese in der Navigli-Trattoria</a:t>
+              <a:t>🌃  Letzte Nacht: Lozenets-Viertel Bars oder Yalta-Club-Afterparty</a:t>
             </a:r>
             <a:endParaRPr lang="en-US" sz="900" dirty="0"/>
           </a:p>
@@ -3706,46 +3667,7 @@
       </p:sp>
       <p:sp>
         <p:nvSpPr>
-          <p:cNvPr id="37" name="Text 35"/>
-          <p:cNvSpPr/>
-          <p:nvPr/>
-        </p:nvSpPr>
-        <p:spPr>
-          <a:xfrm>
-            <a:off x="365760" y="5541264"/>
-            <a:ext cx="5486400" cy="256032"/>
-          </a:xfrm>
-          <a:prstGeom prst="rect">
-            <a:avLst/>
-          </a:prstGeom>
-          <a:noFill/>
-          <a:ln/>
-        </p:spPr>
-        <p:txBody>
-          <a:bodyPr wrap="square" rtlCol="0" anchor="t"/>
-          <a:lstStyle/>
-          <a:p>
-            <a:pPr indent="0" marL="0">
-              <a:buNone/>
-            </a:pPr>
-            <a:r>
-              <a:rPr lang="en-US" sz="900" dirty="0">
-                <a:solidFill>
-                  <a:srgbClr val="E8E8E8"/>
-                </a:solidFill>
-                <a:latin typeface="Calibri" pitchFamily="34" charset="0"/>
-                <a:ea typeface="Calibri" pitchFamily="34" charset="-122"/>
-                <a:cs typeface="Calibri" pitchFamily="34" charset="-120"/>
-              </a:rPr>
-              <a:t>🌃  Letzte Nacht: Isola-Viertel Bars + Corso Como</a:t>
-            </a:r>
-            <a:endParaRPr lang="en-US" sz="900" dirty="0"/>
-          </a:p>
-        </p:txBody>
-      </p:sp>
-      <p:sp>
-        <p:nvSpPr>
-          <p:cNvPr id="38" name="Shape 36"/>
+          <p:cNvPr id="36" name="Shape 34"/>
           <p:cNvSpPr/>
           <p:nvPr/>
         </p:nvSpPr>
@@ -3762,7 +3684,7 @@
           </a:solidFill>
           <a:ln w="12700">
             <a:solidFill>
-              <a:srgbClr val="C8003C"/>
+              <a:srgbClr val="8C52E8"/>
             </a:solidFill>
             <a:prstDash val="solid"/>
           </a:ln>
@@ -3770,7 +3692,7 @@
       </p:sp>
       <p:sp>
         <p:nvSpPr>
-          <p:cNvPr id="39" name="Shape 37"/>
+          <p:cNvPr id="37" name="Shape 35"/>
           <p:cNvSpPr/>
           <p:nvPr/>
         </p:nvSpPr>
@@ -3795,7 +3717,7 @@
       </p:sp>
       <p:sp>
         <p:nvSpPr>
-          <p:cNvPr id="40" name="Text 38"/>
+          <p:cNvPr id="38" name="Text 36"/>
           <p:cNvSpPr/>
           <p:nvPr/>
         </p:nvSpPr>
@@ -3820,7 +3742,7 @@
             <a:r>
               <a:rPr lang="en-US" sz="1100" b="1" dirty="0">
                 <a:solidFill>
-                  <a:srgbClr val="C8003C"/>
+                  <a:srgbClr val="8C52E8"/>
                 </a:solidFill>
                 <a:latin typeface="Trebuchet MS" pitchFamily="34" charset="0"/>
                 <a:ea typeface="Trebuchet MS" pitchFamily="34" charset="-122"/>
@@ -3834,7 +3756,7 @@
       </p:sp>
       <p:sp>
         <p:nvSpPr>
-          <p:cNvPr id="41" name="Text 39"/>
+          <p:cNvPr id="39" name="Text 37"/>
           <p:cNvSpPr/>
           <p:nvPr/>
         </p:nvSpPr>
@@ -3873,7 +3795,7 @@
       </p:sp>
       <p:sp>
         <p:nvSpPr>
-          <p:cNvPr id="42" name="Text 40"/>
+          <p:cNvPr id="40" name="Text 38"/>
           <p:cNvSpPr/>
           <p:nvPr/>
         </p:nvSpPr>
@@ -3904,7 +3826,7 @@
                 <a:ea typeface="Calibri" pitchFamily="34" charset="-122"/>
                 <a:cs typeface="Calibri" pitchFamily="34" charset="-120"/>
               </a:rPr>
-              <a:t>☕  Letzter Cappuccino an der Bar — nie im Sitzen!</a:t>
+              <a:t>☕  Banitsa (bulgarisches Blätterteig-Gebäck) zum Frühstück (€0,50)</a:t>
             </a:r>
             <a:endParaRPr lang="en-US" sz="900" dirty="0"/>
           </a:p>
@@ -3912,7 +3834,7 @@
       </p:sp>
       <p:sp>
         <p:nvSpPr>
-          <p:cNvPr id="43" name="Text 41"/>
+          <p:cNvPr id="41" name="Text 39"/>
           <p:cNvSpPr/>
           <p:nvPr/>
         </p:nvSpPr>
@@ -3943,7 +3865,7 @@
                 <a:ea typeface="Calibri" pitchFamily="34" charset="-122"/>
                 <a:cs typeface="Calibri" pitchFamily="34" charset="-120"/>
               </a:rPr>
-              <a:t>🛍  Souvenirs: Panettone, Amaro, Design-Mitbringsel</a:t>
+              <a:t>🛍  Souvenirs: Rosen-Öl, Rakija, Mamarnitsa (Glücksbringer)</a:t>
             </a:r>
             <a:endParaRPr lang="en-US" sz="900" dirty="0"/>
           </a:p>
@@ -3951,7 +3873,7 @@
       </p:sp>
       <p:sp>
         <p:nvSpPr>
-          <p:cNvPr id="44" name="Text 42"/>
+          <p:cNvPr id="42" name="Text 40"/>
           <p:cNvSpPr/>
           <p:nvPr/>
         </p:nvSpPr>
@@ -3982,7 +3904,7 @@
                 <a:ea typeface="Calibri" pitchFamily="34" charset="-122"/>
                 <a:cs typeface="Calibri" pitchFamily="34" charset="-120"/>
               </a:rPr>
-              <a:t>🚂  Malpensa Express zum Flughafen (52 Min.)</a:t>
+              <a:t>🚇  Metro M1 zum Flughafen (€0,80, 20 Min.)</a:t>
             </a:r>
             <a:endParaRPr lang="en-US" sz="900" dirty="0"/>
           </a:p>
@@ -3990,7 +3912,7 @@
       </p:sp>
       <p:sp>
         <p:nvSpPr>
-          <p:cNvPr id="45" name="Text 43"/>
+          <p:cNvPr id="43" name="Text 41"/>
           <p:cNvSpPr/>
           <p:nvPr/>
         </p:nvSpPr>
@@ -4021,7 +3943,7 @@
                 <a:ea typeface="Calibri" pitchFamily="34" charset="-122"/>
                 <a:cs typeface="Calibri" pitchFamily="34" charset="-120"/>
               </a:rPr>
-              <a:t>✈  Eurowings MXP → DUS (Nachmittag)</a:t>
+              <a:t>✈  Bulgaria Air / Ryanair SOF → DUS (Nachmittag)</a:t>
             </a:r>
             <a:endParaRPr lang="en-US" sz="900" dirty="0"/>
           </a:p>
@@ -4029,7 +3951,7 @@
       </p:sp>
       <p:sp>
         <p:nvSpPr>
-          <p:cNvPr id="46" name="Shape 44"/>
+          <p:cNvPr id="44" name="Shape 42"/>
           <p:cNvSpPr/>
           <p:nvPr/>
         </p:nvSpPr>
@@ -4054,7 +3976,7 @@
       </p:sp>
       <p:sp>
         <p:nvSpPr>
-          <p:cNvPr id="47" name="Text 45"/>
+          <p:cNvPr id="45" name="Text 43"/>
           <p:cNvSpPr/>
           <p:nvPr/>
         </p:nvSpPr>
@@ -4085,7 +4007,7 @@
                 <a:ea typeface="Calibri" pitchFamily="34" charset="-122"/>
                 <a:cs typeface="Calibri" pitchFamily="34" charset="-120"/>
               </a:rPr>
-              <a:t>Halloween Kneipentour: eventbrite.it → "Milan Halloween Bar Crawl"  ·  Kochkurs: cookly.app → "Milan Pasta Class"  ·  Stadtführung: neweuropetours.eu/milan  ·  Alcatraz Club: alcatrazmilano.com</a:t>
+              <a:t>Kneipentour: eventbrite.com → "Sofia Halloween Bar Crawl"  ·  Kochkurs: cookly.app → "Sofia Cooking Class"  ·  Stadtführung: neweuropetours.eu/sofia  ·  Yalta Club: yaltaclub.com</a:t>
             </a:r>
             <a:endParaRPr lang="en-US" sz="800" dirty="0"/>
           </a:p>
@@ -4093,7 +4015,7 @@
       </p:sp>
       <p:sp>
         <p:nvSpPr>
-          <p:cNvPr id="48" name="Shape 46"/>
+          <p:cNvPr id="46" name="Shape 44"/>
           <p:cNvSpPr/>
           <p:nvPr/>
         </p:nvSpPr>
@@ -4163,11 +4085,11 @@
             <a:avLst/>
           </a:prstGeom>
           <a:solidFill>
-            <a:srgbClr val="C8003C"/>
+            <a:srgbClr val="8C52E8"/>
           </a:solidFill>
           <a:ln w="12700">
             <a:solidFill>
-              <a:srgbClr val="C8003C"/>
+              <a:srgbClr val="8C52E8"/>
             </a:solidFill>
             <a:prstDash val="solid"/>
           </a:ln>
@@ -4231,7 +4153,7 @@
                 <a:ea typeface="Trebuchet MS" pitchFamily="34" charset="-122"/>
                 <a:cs typeface="Trebuchet MS" pitchFamily="34" charset="-120"/>
               </a:rPr>
-              <a:t>🇮🇹  MAILAND — KOSTENÜBERSICHT</a:t>
+              <a:t>🇧🇬  SOFIA — KOSTENÜBERSICHT</a:t>
             </a:r>
             <a:endParaRPr lang="en-US" sz="2200" dirty="0"/>
           </a:p>
@@ -4252,11 +4174,11 @@
             <a:avLst/>
           </a:prstGeom>
           <a:solidFill>
-            <a:srgbClr val="C8003C"/>
+            <a:srgbClr val="8C52E8"/>
           </a:solidFill>
           <a:ln w="12700">
             <a:solidFill>
-              <a:srgbClr val="C8003C"/>
+              <a:srgbClr val="8C52E8"/>
             </a:solidFill>
             <a:prstDash val="solid"/>
           </a:ln>
@@ -4302,7 +4224,7 @@
                       <a:r>
                         <a:rPr lang="en-US" sz="1200" b="1" dirty="0">
                           <a:solidFill>
-                            <a:srgbClr val="C8003C"/>
+                            <a:srgbClr val="8C52E8"/>
                           </a:solidFill>
                           <a:latin typeface="Trebuchet MS" pitchFamily="34" charset="0"/>
                           <a:ea typeface="Trebuchet MS" pitchFamily="34" charset="-122"/>
@@ -4370,7 +4292,7 @@
                       <a:r>
                         <a:rPr lang="en-US" sz="1200" b="1" dirty="0">
                           <a:solidFill>
-                            <a:srgbClr val="C8003C"/>
+                            <a:srgbClr val="8C52E8"/>
                           </a:solidFill>
                           <a:latin typeface="Trebuchet MS" pitchFamily="34" charset="0"/>
                           <a:ea typeface="Trebuchet MS" pitchFamily="34" charset="-122"/>
@@ -4438,7 +4360,7 @@
                       <a:r>
                         <a:rPr lang="en-US" sz="1200" b="1" dirty="0">
                           <a:solidFill>
-                            <a:srgbClr val="C8003C"/>
+                            <a:srgbClr val="8C52E8"/>
                           </a:solidFill>
                           <a:latin typeface="Trebuchet MS" pitchFamily="34" charset="0"/>
                           <a:ea typeface="Trebuchet MS" pitchFamily="34" charset="-122"/>
@@ -4650,7 +4572,7 @@
                           <a:ea typeface="Calibri" pitchFamily="34" charset="-122"/>
                           <a:cs typeface="Calibri" pitchFamily="34" charset="-120"/>
                         </a:rPr>
-                        <a:t>Eurowings EW  DUS ↔ MXP (Direktflug)</a:t>
+                        <a:t>Bulgaria Air / Ryanair  DUS ↔ SOF</a:t>
                       </a:r>
                       <a:endParaRPr lang="en-US" sz="1100" dirty="0">
                         <a:latin typeface="Calibri" charset="0"/>
@@ -4718,7 +4640,7 @@
                           <a:ea typeface="Calibri" pitchFamily="34" charset="-122"/>
                           <a:cs typeface="Calibri" pitchFamily="34" charset="-120"/>
                         </a:rPr>
-                        <a:t>~€170</a:t>
+                        <a:t>~€140</a:t>
                       </a:r>
                       <a:endParaRPr lang="en-US" sz="1100" dirty="0">
                         <a:latin typeface="Calibri" charset="0"/>
@@ -4786,7 +4708,7 @@
                           <a:ea typeface="Calibri" pitchFamily="34" charset="-122"/>
                           <a:cs typeface="Calibri" pitchFamily="34" charset="-120"/>
                         </a:rPr>
-                        <a:t>~€680</a:t>
+                        <a:t>~€560</a:t>
                       </a:r>
                       <a:endParaRPr lang="en-US" sz="1100" dirty="0">
                         <a:latin typeface="Calibri" charset="0"/>
@@ -4924,7 +4846,7 @@
                           <a:ea typeface="Calibri" pitchFamily="34" charset="-122"/>
                           <a:cs typeface="Calibri" pitchFamily="34" charset="-120"/>
                         </a:rPr>
-                        <a:t>Airbnb Navigli — 3 Nächte (inkl. Gebühren)</a:t>
+                        <a:t>Airbnb Zentrum — 3 Nächte (inkl. Gebühren)</a:t>
                       </a:r>
                       <a:endParaRPr lang="en-US" sz="1100" dirty="0">
                         <a:latin typeface="Calibri" charset="0"/>
@@ -4992,7 +4914,7 @@
                           <a:ea typeface="Calibri" pitchFamily="34" charset="-122"/>
                           <a:cs typeface="Calibri" pitchFamily="34" charset="-120"/>
                         </a:rPr>
-                        <a:t>~€115</a:t>
+                        <a:t>~€65</a:t>
                       </a:r>
                       <a:endParaRPr lang="en-US" sz="1100" dirty="0">
                         <a:latin typeface="Calibri" charset="0"/>
@@ -5060,7 +4982,7 @@
                           <a:ea typeface="Calibri" pitchFamily="34" charset="-122"/>
                           <a:cs typeface="Calibri" pitchFamily="34" charset="-120"/>
                         </a:rPr>
-                        <a:t>~€460</a:t>
+                        <a:t>~€260</a:t>
                       </a:r>
                       <a:endParaRPr lang="en-US" sz="1100" dirty="0">
                         <a:latin typeface="Calibri" charset="0"/>
@@ -5198,7 +5120,7 @@
                           <a:ea typeface="Calibri" pitchFamily="34" charset="-122"/>
                           <a:cs typeface="Calibri" pitchFamily="34" charset="-120"/>
                         </a:rPr>
-                        <a:t>Bar Crawl Navigli / Darsena (31. Okt.)</a:t>
+                        <a:t>Bar Crawl Sofia (31. Okt.)</a:t>
                       </a:r>
                       <a:endParaRPr lang="en-US" sz="1100" dirty="0">
                         <a:latin typeface="Calibri" charset="0"/>
@@ -5266,7 +5188,7 @@
                           <a:ea typeface="Calibri" pitchFamily="34" charset="-122"/>
                           <a:cs typeface="Calibri" pitchFamily="34" charset="-120"/>
                         </a:rPr>
-                        <a:t>€20</a:t>
+                        <a:t>~€15</a:t>
                       </a:r>
                       <a:endParaRPr lang="en-US" sz="1100" dirty="0">
                         <a:latin typeface="Calibri" charset="0"/>
@@ -5334,7 +5256,7 @@
                           <a:ea typeface="Calibri" pitchFamily="34" charset="-122"/>
                           <a:cs typeface="Calibri" pitchFamily="34" charset="-120"/>
                         </a:rPr>
-                        <a:t>€80</a:t>
+                        <a:t>~€60</a:t>
                       </a:r>
                       <a:endParaRPr lang="en-US" sz="1100" dirty="0">
                         <a:latin typeface="Calibri" charset="0"/>
@@ -5472,7 +5394,7 @@
                           <a:ea typeface="Calibri" pitchFamily="34" charset="-122"/>
                           <a:cs typeface="Calibri" pitchFamily="34" charset="-120"/>
                         </a:rPr>
-                        <a:t>Pasta-Kochkurs Navigli — Risotto + Ossobuco</a:t>
+                        <a:t>Bulgarische Küche — Moussaka + Rakija</a:t>
                       </a:r>
                       <a:endParaRPr lang="en-US" sz="1100" dirty="0">
                         <a:latin typeface="Calibri" charset="0"/>
@@ -5540,7 +5462,7 @@
                           <a:ea typeface="Calibri" pitchFamily="34" charset="-122"/>
                           <a:cs typeface="Calibri" pitchFamily="34" charset="-120"/>
                         </a:rPr>
-                        <a:t>€70</a:t>
+                        <a:t>~€45</a:t>
                       </a:r>
                       <a:endParaRPr lang="en-US" sz="1100" dirty="0">
                         <a:latin typeface="Calibri" charset="0"/>
@@ -5608,7 +5530,7 @@
                           <a:ea typeface="Calibri" pitchFamily="34" charset="-122"/>
                           <a:cs typeface="Calibri" pitchFamily="34" charset="-120"/>
                         </a:rPr>
-                        <a:t>€280</a:t>
+                        <a:t>~€180</a:t>
                       </a:r>
                       <a:endParaRPr lang="en-US" sz="1100" dirty="0">
                         <a:latin typeface="Calibri" charset="0"/>
@@ -5746,7 +5668,7 @@
                           <a:ea typeface="Calibri" pitchFamily="34" charset="-122"/>
                           <a:cs typeface="Calibri" pitchFamily="34" charset="-120"/>
                         </a:rPr>
-                        <a:t>SANDEMANs — Duomo (Trinkgeld)</a:t>
+                        <a:t>SANDEMANs — Alexander-Nevsky (Trinkgeld)</a:t>
                       </a:r>
                       <a:endParaRPr lang="en-US" sz="1100" dirty="0">
                         <a:latin typeface="Calibri" charset="0"/>
@@ -5814,7 +5736,7 @@
                           <a:ea typeface="Calibri" pitchFamily="34" charset="-122"/>
                           <a:cs typeface="Calibri" pitchFamily="34" charset="-120"/>
                         </a:rPr>
-                        <a:t>~€12</a:t>
+                        <a:t>~€10</a:t>
                       </a:r>
                       <a:endParaRPr lang="en-US" sz="1100" dirty="0">
                         <a:latin typeface="Calibri" charset="0"/>
@@ -5882,7 +5804,7 @@
                           <a:ea typeface="Calibri" pitchFamily="34" charset="-122"/>
                           <a:cs typeface="Calibri" pitchFamily="34" charset="-120"/>
                         </a:rPr>
-                        <a:t>~€48</a:t>
+                        <a:t>~€40</a:t>
                       </a:r>
                       <a:endParaRPr lang="en-US" sz="1100" dirty="0">
                         <a:latin typeface="Calibri" charset="0"/>
@@ -6020,7 +5942,7 @@
                           <a:ea typeface="Calibri" pitchFamily="34" charset="-122"/>
                           <a:cs typeface="Calibri" pitchFamily="34" charset="-120"/>
                         </a:rPr>
-                        <a:t>Trattoria, Aperitivo-Buffet, Bar-Frühstück</a:t>
+                        <a:t>Mehana, Banitsa, Markt — Ø €10–15/Mahlzeit</a:t>
                       </a:r>
                       <a:endParaRPr lang="en-US" sz="1100" dirty="0">
                         <a:latin typeface="Calibri" charset="0"/>
@@ -6088,7 +6010,7 @@
                           <a:ea typeface="Calibri" pitchFamily="34" charset="-122"/>
                           <a:cs typeface="Calibri" pitchFamily="34" charset="-120"/>
                         </a:rPr>
-                        <a:t>~€130</a:t>
+                        <a:t>~€90</a:t>
                       </a:r>
                       <a:endParaRPr lang="en-US" sz="1100" dirty="0">
                         <a:latin typeface="Calibri" charset="0"/>
@@ -6156,7 +6078,7 @@
                           <a:ea typeface="Calibri" pitchFamily="34" charset="-122"/>
                           <a:cs typeface="Calibri" pitchFamily="34" charset="-120"/>
                         </a:rPr>
-                        <a:t>~€520</a:t>
+                        <a:t>~€360</a:t>
                       </a:r>
                       <a:endParaRPr lang="en-US" sz="1100" dirty="0">
                         <a:latin typeface="Calibri" charset="0"/>
@@ -6294,7 +6216,7 @@
                           <a:ea typeface="Calibri" pitchFamily="34" charset="-122"/>
                           <a:cs typeface="Calibri" pitchFamily="34" charset="-120"/>
                         </a:rPr>
-                        <a:t>Navigli + Corso Como + Clubs (3 Nächte)</a:t>
+                        <a:t>Vitosha Blvd + Clubs (€1 Bier, 3 Nächte)</a:t>
                       </a:r>
                       <a:endParaRPr lang="en-US" sz="1100" dirty="0">
                         <a:latin typeface="Calibri" charset="0"/>
@@ -6362,7 +6284,7 @@
                           <a:ea typeface="Calibri" pitchFamily="34" charset="-122"/>
                           <a:cs typeface="Calibri" pitchFamily="34" charset="-120"/>
                         </a:rPr>
-                        <a:t>~€160</a:t>
+                        <a:t>~€120</a:t>
                       </a:r>
                       <a:endParaRPr lang="en-US" sz="1100" dirty="0">
                         <a:latin typeface="Calibri" charset="0"/>
@@ -6430,7 +6352,7 @@
                           <a:ea typeface="Calibri" pitchFamily="34" charset="-122"/>
                           <a:cs typeface="Calibri" pitchFamily="34" charset="-120"/>
                         </a:rPr>
-                        <a:t>~€640</a:t>
+                        <a:t>~€480</a:t>
                       </a:r>
                       <a:endParaRPr lang="en-US" sz="1100" dirty="0">
                         <a:latin typeface="Calibri" charset="0"/>
@@ -6568,7 +6490,7 @@
                           <a:ea typeface="Calibri" pitchFamily="34" charset="-122"/>
                           <a:cs typeface="Calibri" pitchFamily="34" charset="-120"/>
                         </a:rPr>
-                        <a:t>Malpensa Express, Tram, Souvenirs</a:t>
+                        <a:t>Metro, Uber, Souvenirs</a:t>
                       </a:r>
                       <a:endParaRPr lang="en-US" sz="1100" dirty="0">
                         <a:latin typeface="Calibri" charset="0"/>
@@ -6636,7 +6558,7 @@
                           <a:ea typeface="Calibri" pitchFamily="34" charset="-122"/>
                           <a:cs typeface="Calibri" pitchFamily="34" charset="-120"/>
                         </a:rPr>
-                        <a:t>~€30</a:t>
+                        <a:t>~€25</a:t>
                       </a:r>
                       <a:endParaRPr lang="en-US" sz="1100" dirty="0">
                         <a:latin typeface="Calibri" charset="0"/>
@@ -6704,7 +6626,7 @@
                           <a:ea typeface="Calibri" pitchFamily="34" charset="-122"/>
                           <a:cs typeface="Calibri" pitchFamily="34" charset="-120"/>
                         </a:rPr>
-                        <a:t>~€120</a:t>
+                        <a:t>~€100</a:t>
                       </a:r>
                       <a:endParaRPr lang="en-US" sz="1100" dirty="0">
                         <a:latin typeface="Calibri" charset="0"/>
@@ -6842,7 +6764,7 @@
                           <a:ea typeface="Trebuchet MS" pitchFamily="34" charset="-122"/>
                           <a:cs typeface="Trebuchet MS" pitchFamily="34" charset="-120"/>
                         </a:rPr>
-                        <a:t>Mailand, 30. Okt. – 2. Nov. 2025</a:t>
+                        <a:t>Sofia, 30. Okt. – 2. Nov. 2025</a:t>
                       </a:r>
                       <a:endParaRPr lang="en-US" sz="1300" dirty="0">
                         <a:latin typeface="Trebuchet MS" charset="0"/>
@@ -6904,13 +6826,13 @@
                       <a:r>
                         <a:rPr lang="en-US" sz="1300" b="1" dirty="0">
                           <a:solidFill>
-                            <a:srgbClr val="C8003C"/>
+                            <a:srgbClr val="8C52E8"/>
                           </a:solidFill>
                           <a:latin typeface="Trebuchet MS" pitchFamily="34" charset="0"/>
                           <a:ea typeface="Trebuchet MS" pitchFamily="34" charset="-122"/>
                           <a:cs typeface="Trebuchet MS" pitchFamily="34" charset="-120"/>
                         </a:rPr>
-                        <a:t>~€707</a:t>
+                        <a:t>~€510</a:t>
                       </a:r>
                       <a:endParaRPr lang="en-US" sz="1300" dirty="0">
                         <a:latin typeface="Trebuchet MS" charset="0"/>
@@ -6978,7 +6900,7 @@
                           <a:ea typeface="Trebuchet MS" pitchFamily="34" charset="-122"/>
                           <a:cs typeface="Trebuchet MS" pitchFamily="34" charset="-120"/>
                         </a:rPr>
-                        <a:t>~€2.828</a:t>
+                        <a:t>~€2.040</a:t>
                       </a:r>
                       <a:endParaRPr lang="en-US" sz="1300" dirty="0">
                         <a:latin typeface="Trebuchet MS" charset="0"/>
@@ -7053,7 +6975,7 @@
           </a:solidFill>
           <a:ln w="12700">
             <a:solidFill>
-              <a:srgbClr val="C8003C"/>
+              <a:srgbClr val="8C52E8"/>
             </a:solidFill>
             <a:prstDash val="solid"/>
           </a:ln>
@@ -7092,7 +7014,7 @@
                 <a:ea typeface="Calibri" pitchFamily="34" charset="-122"/>
                 <a:cs typeface="Calibri" pitchFamily="34" charset="-120"/>
               </a:rPr>
-              <a:t>💡 Kürzester Flug dieser Auswahl (1h 40m ab DUS)!  Aperitivo-Zeit (18–21 Uhr): Drink + gratis Buffet ~€10 — spart Abendessenkosten.  Cappuccino an der Bar stehend: €1,50.  Budgetrahmen: €600–850 p.P.</a:t>
+              <a:t>💡 GÜNSTIGSTES ZIEL überhaupt: €1–2 Bier, €8 Abendessen, €0,80 Metro!  Budgetrahmen: €400–650 p.P.  Ideal wenn Ihr nach dem letzten Trip die Kasse schonen wollt — ohne auf Spaß zu verzichten.</a:t>
             </a:r>
             <a:endParaRPr lang="en-US" sz="1050" dirty="0"/>
           </a:p>
@@ -7238,7 +7160,7 @@
                 <a:ea typeface="Trebuchet MS" pitchFamily="34" charset="-122"/>
                 <a:cs typeface="Trebuchet MS" pitchFamily="34" charset="-120"/>
               </a:rPr>
-              <a:t>⚔️  DIREKTVERGLEICH — LISSABON vs. MAILAND</a:t>
+              <a:t>⚔️  DIREKTVERGLEICH — LISSABON vs. SOFIA</a:t>
             </a:r>
             <a:endParaRPr lang="en-US" sz="2200" dirty="0"/>
           </a:p>
@@ -7352,7 +7274,7 @@
           </a:solidFill>
           <a:ln w="12700">
             <a:solidFill>
-              <a:srgbClr val="C8003C"/>
+              <a:srgbClr val="8C52E8"/>
             </a:solidFill>
             <a:prstDash val="solid"/>
           </a:ln>
@@ -7385,13 +7307,13 @@
             <a:r>
               <a:rPr lang="en-US" sz="1800" b="1" dirty="0">
                 <a:solidFill>
-                  <a:srgbClr val="C8003C"/>
+                  <a:srgbClr val="8C52E8"/>
                 </a:solidFill>
                 <a:latin typeface="Trebuchet MS" pitchFamily="34" charset="0"/>
                 <a:ea typeface="Trebuchet MS" pitchFamily="34" charset="-122"/>
                 <a:cs typeface="Trebuchet MS" pitchFamily="34" charset="-120"/>
               </a:rPr>
-              <a:t>🇮🇹 MAILAND</a:t>
+              <a:t>🇧🇬 SOFIA</a:t>
             </a:r>
             <a:endParaRPr lang="en-US" sz="1800" dirty="0"/>
           </a:p>
@@ -7583,7 +7505,7 @@
                 <a:ea typeface="Calibri" pitchFamily="34" charset="-122"/>
                 <a:cs typeface="Calibri" pitchFamily="34" charset="-120"/>
               </a:rPr>
-              <a:t>~€707</a:t>
+              <a:t>~€510  💸 Günstigster!</a:t>
             </a:r>
             <a:endParaRPr lang="en-US" sz="1000" dirty="0"/>
           </a:p>
@@ -7775,7 +7697,7 @@
                 <a:ea typeface="Calibri" pitchFamily="34" charset="-122"/>
                 <a:cs typeface="Calibri" pitchFamily="34" charset="-120"/>
               </a:rPr>
-              <a:t>1h 40m  ab DUS  ✈ schnellste!</a:t>
+              <a:t>~2h 30m  ab DUS</a:t>
             </a:r>
             <a:endParaRPr lang="en-US" sz="1000" dirty="0"/>
           </a:p>
@@ -7967,7 +7889,7 @@
                 <a:ea typeface="Calibri" pitchFamily="34" charset="-122"/>
                 <a:cs typeface="Calibri" pitchFamily="34" charset="-120"/>
               </a:rPr>
-              <a:t>DUS — Eurowings / ITA / Ryanair</a:t>
+              <a:t>DUS — Bulgaria Air / Ryanair</a:t>
             </a:r>
             <a:endParaRPr lang="en-US" sz="1000" dirty="0"/>
           </a:p>
@@ -8159,7 +8081,7 @@
                 <a:ea typeface="Calibri" pitchFamily="34" charset="-122"/>
                 <a:cs typeface="Calibri" pitchFamily="34" charset="-120"/>
               </a:rPr>
-              <a:t>€5–7  (Nastro Azzurro)</a:t>
+              <a:t>€1–2  (günstigstes Eu. 🏆)</a:t>
             </a:r>
             <a:endParaRPr lang="en-US" sz="1000" dirty="0"/>
           </a:p>
@@ -8351,7 +8273,7 @@
                 <a:ea typeface="Calibri" pitchFamily="34" charset="-122"/>
                 <a:cs typeface="Calibri" pitchFamily="34" charset="-120"/>
               </a:rPr>
-              <a:t>12–16°C  🧥</a:t>
+              <a:t>10–14°C  🧥</a:t>
             </a:r>
             <a:endParaRPr lang="en-US" sz="1000" dirty="0"/>
           </a:p>
@@ -8543,7 +8465,7 @@
                 <a:ea typeface="Calibri" pitchFamily="34" charset="-122"/>
                 <a:cs typeface="Calibri" pitchFamily="34" charset="-120"/>
               </a:rPr>
-              <a:t>⭐⭐⭐⭐  Corso Como bis 5 Uhr</a:t>
+              <a:t>⭐⭐⭐⭐  Yalta · Sin City bis 5h</a:t>
             </a:r>
             <a:endParaRPr lang="en-US" sz="1000" dirty="0"/>
           </a:p>
@@ -8735,7 +8657,7 @@
                 <a:ea typeface="Calibri" pitchFamily="34" charset="-122"/>
                 <a:cs typeface="Calibri" pitchFamily="34" charset="-120"/>
               </a:rPr>
-              <a:t>Navigli · Corso Como · Isola</a:t>
+              <a:t>Vitosha Blvd · Studentski Grad</a:t>
             </a:r>
             <a:endParaRPr lang="en-US" sz="1000" dirty="0"/>
           </a:p>
@@ -8927,7 +8849,7 @@
                 <a:ea typeface="Calibri" pitchFamily="34" charset="-122"/>
                 <a:cs typeface="Calibri" pitchFamily="34" charset="-120"/>
               </a:rPr>
-              <a:t>Aperitivo + gratis Buffet ab 18h</a:t>
+              <a:t>Alexander-Nevsky · Vitosha-Berg</a:t>
             </a:r>
             <a:endParaRPr lang="en-US" sz="1000" dirty="0"/>
           </a:p>
@@ -9119,7 +9041,7 @@
                 <a:ea typeface="Calibri" pitchFamily="34" charset="-122"/>
                 <a:cs typeface="Calibri" pitchFamily="34" charset="-120"/>
               </a:rPr>
-              <a:t>€70 p.P.</a:t>
+              <a:t>~€45 p.P.</a:t>
             </a:r>
             <a:endParaRPr lang="en-US" sz="1000" dirty="0"/>
           </a:p>
@@ -9311,7 +9233,7 @@
                 <a:ea typeface="Calibri" pitchFamily="34" charset="-122"/>
                 <a:cs typeface="Calibri" pitchFamily="34" charset="-120"/>
               </a:rPr>
-              <a:t>~€113–118</a:t>
+              <a:t>~€53–73  (3× günstiger!)</a:t>
             </a:r>
             <a:endParaRPr lang="en-US" sz="1000" dirty="0"/>
           </a:p>
@@ -9464,7 +9386,7 @@
           </a:solidFill>
           <a:ln w="12700">
             <a:solidFill>
-              <a:srgbClr val="C8003C"/>
+              <a:srgbClr val="8C52E8"/>
             </a:solidFill>
             <a:prstDash val="solid"/>
           </a:ln>
@@ -9497,13 +9419,13 @@
             <a:r>
               <a:rPr lang="en-US" sz="1100" b="1" dirty="0">
                 <a:solidFill>
-                  <a:srgbClr val="C8003C"/>
+                  <a:srgbClr val="8C52E8"/>
                 </a:solidFill>
                 <a:latin typeface="Trebuchet MS" pitchFamily="34" charset="0"/>
                 <a:ea typeface="Trebuchet MS" pitchFamily="34" charset="-122"/>
                 <a:cs typeface="Trebuchet MS" pitchFamily="34" charset="-120"/>
               </a:rPr>
-              <a:t>Kürzester Flug + Fashion + Pasta</a:t>
+              <a:t>Extremes Budget + Überraschung</a:t>
             </a:r>
             <a:endParaRPr lang="en-US" sz="1100" dirty="0"/>
           </a:p>
@@ -11066,7 +10988,7 @@
           </a:solidFill>
           <a:ln w="12700">
             <a:solidFill>
-              <a:srgbClr val="C8003C"/>
+              <a:srgbClr val="8C52E8"/>
             </a:solidFill>
             <a:prstDash val="solid"/>
           </a:ln>
@@ -11099,13 +11021,13 @@
             <a:r>
               <a:rPr lang="en-US" sz="1800" b="1" dirty="0">
                 <a:solidFill>
-                  <a:srgbClr val="C8003C"/>
+                  <a:srgbClr val="8C52E8"/>
                 </a:solidFill>
                 <a:latin typeface="Trebuchet MS" pitchFamily="34" charset="0"/>
                 <a:ea typeface="Trebuchet MS" pitchFamily="34" charset="-122"/>
                 <a:cs typeface="Trebuchet MS" pitchFamily="34" charset="-120"/>
               </a:rPr>
-              <a:t>🇮🇹  MAILAND</a:t>
+              <a:t>🇧🇬  SOFIA</a:t>
             </a:r>
             <a:endParaRPr lang="en-US" sz="1800" dirty="0"/>
           </a:p>
@@ -11144,7 +11066,7 @@
                 <a:ea typeface="Calibri" pitchFamily="34" charset="-122"/>
                 <a:cs typeface="Calibri" pitchFamily="34" charset="-120"/>
               </a:rPr>
-              <a:t>Kürzester Flug (1h40)</a:t>
+              <a:t>Günstigstes Ziel: €1 Bier</a:t>
             </a:r>
             <a:endParaRPr lang="en-US" sz="950" dirty="0"/>
           </a:p>
@@ -11161,7 +11083,7 @@
                 <a:ea typeface="Calibri" pitchFamily="34" charset="-122"/>
                 <a:cs typeface="Calibri" pitchFamily="34" charset="-120"/>
               </a:rPr>
-              <a:t>Navigli · Aperitivo · Mode</a:t>
+              <a:t>Vitosha · Clubs · Kathedrale</a:t>
             </a:r>
             <a:endParaRPr lang="en-US" sz="950" dirty="0"/>
           </a:p>
@@ -22839,11 +22761,11 @@
             <a:avLst/>
           </a:prstGeom>
           <a:solidFill>
-            <a:srgbClr val="C8003C"/>
+            <a:srgbClr val="8C52E8"/>
           </a:solidFill>
           <a:ln w="12700">
             <a:solidFill>
-              <a:srgbClr val="C8003C"/>
+              <a:srgbClr val="8C52E8"/>
             </a:solidFill>
             <a:prstDash val="solid"/>
           </a:ln>
@@ -22907,7 +22829,7 @@
                 <a:ea typeface="Trebuchet MS" pitchFamily="34" charset="-122"/>
                 <a:cs typeface="Trebuchet MS" pitchFamily="34" charset="-120"/>
               </a:rPr>
-              <a:t>🇮🇹  REISEZIEL 2 — MAILAND, ITALIEN</a:t>
+              <a:t>🇧🇬  REISEZIEL 2 — SOFIA, BULGARIEN</a:t>
             </a:r>
             <a:endParaRPr lang="en-US" sz="2200" dirty="0"/>
           </a:p>
@@ -22928,11 +22850,11 @@
             <a:avLst/>
           </a:prstGeom>
           <a:solidFill>
-            <a:srgbClr val="C8003C"/>
+            <a:srgbClr val="8C52E8"/>
           </a:solidFill>
           <a:ln w="12700">
             <a:solidFill>
-              <a:srgbClr val="C8003C"/>
+              <a:srgbClr val="8C52E8"/>
             </a:solidFill>
             <a:prstDash val="solid"/>
           </a:ln>
@@ -22940,7 +22862,7 @@
       </p:sp>
       <p:pic>
         <p:nvPicPr>
-          <p:cNvPr id="6" name="Image 0" descr="/home/user/Excelhaus/halloween_trip/milan_hero.png">    </p:cNvPr>
+          <p:cNvPr id="6" name="Image 0" descr="/home/user/Excelhaus/halloween_trip/sofia_hero.png">    </p:cNvPr>
           <p:cNvPicPr>
             <a:picLocks noChangeAspect="1"/>
           </p:cNvPicPr>
@@ -23014,13 +22936,13 @@
             <a:r>
               <a:rPr lang="en-US" sz="1600" b="1" dirty="0">
                 <a:solidFill>
-                  <a:srgbClr val="C8003C"/>
+                  <a:srgbClr val="8C52E8"/>
                 </a:solidFill>
                 <a:latin typeface="Trebuchet MS" pitchFamily="34" charset="0"/>
                 <a:ea typeface="Trebuchet MS" pitchFamily="34" charset="-122"/>
                 <a:cs typeface="Trebuchet MS" pitchFamily="34" charset="-120"/>
               </a:rPr>
-              <a:t>Aperitivo, Mode &amp; Nachtleben an den Navigli</a:t>
+              <a:t>Günstigstes Ziel — €1 Bier &amp; Vitosha-Bergblick</a:t>
             </a:r>
             <a:endParaRPr lang="en-US" sz="1600" dirty="0"/>
           </a:p>
@@ -23059,7 +22981,7 @@
                 <a:ea typeface="Calibri" pitchFamily="34" charset="-122"/>
                 <a:cs typeface="Calibri" pitchFamily="34" charset="-120"/>
               </a:rPr>
-              <a:t>Navigli · Corso Como · Duomo · Brera · Clubs bis 5 Uhr</a:t>
+              <a:t>Vitosha Blvd · Yalta Club · Alexander-Nevsky-Kathedrale · Studentski Grad</a:t>
             </a:r>
             <a:endParaRPr lang="en-US" sz="1000" dirty="0"/>
           </a:p>
@@ -23084,7 +23006,7 @@
           </a:solidFill>
           <a:ln w="12700">
             <a:solidFill>
-              <a:srgbClr val="C8003C"/>
+              <a:srgbClr val="8C52E8"/>
             </a:solidFill>
             <a:prstDash val="solid"/>
           </a:ln>
@@ -23156,13 +23078,13 @@
             <a:r>
               <a:rPr lang="en-US" sz="1600" b="1" dirty="0">
                 <a:solidFill>
-                  <a:srgbClr val="C8003C"/>
+                  <a:srgbClr val="8C52E8"/>
                 </a:solidFill>
                 <a:latin typeface="Trebuchet MS" pitchFamily="34" charset="0"/>
                 <a:ea typeface="Trebuchet MS" pitchFamily="34" charset="-122"/>
                 <a:cs typeface="Trebuchet MS" pitchFamily="34" charset="-120"/>
               </a:rPr>
-              <a:t>1h 40m</a:t>
+              <a:t>~2h 30m</a:t>
             </a:r>
             <a:endParaRPr lang="en-US" sz="1600" dirty="0"/>
           </a:p>
@@ -23173,7 +23095,7 @@
             <a:r>
               <a:rPr lang="en-US" sz="1600" b="1" dirty="0">
                 <a:solidFill>
-                  <a:srgbClr val="C8003C"/>
+                  <a:srgbClr val="8C52E8"/>
                 </a:solidFill>
                 <a:latin typeface="Trebuchet MS" pitchFamily="34" charset="0"/>
                 <a:ea typeface="Trebuchet MS" pitchFamily="34" charset="-122"/>
@@ -23204,7 +23126,7 @@
           </a:solidFill>
           <a:ln w="12700">
             <a:solidFill>
-              <a:srgbClr val="C8003C"/>
+              <a:srgbClr val="8C52E8"/>
             </a:solidFill>
             <a:prstDash val="solid"/>
           </a:ln>
@@ -23276,13 +23198,13 @@
             <a:r>
               <a:rPr lang="en-US" sz="1600" b="1" dirty="0">
                 <a:solidFill>
-                  <a:srgbClr val="C8003C"/>
+                  <a:srgbClr val="8C52E8"/>
                 </a:solidFill>
                 <a:latin typeface="Trebuchet MS" pitchFamily="34" charset="0"/>
                 <a:ea typeface="Trebuchet MS" pitchFamily="34" charset="-122"/>
                 <a:cs typeface="Trebuchet MS" pitchFamily="34" charset="-120"/>
               </a:rPr>
-              <a:t>€5–7</a:t>
+              <a:t>€1 – €2</a:t>
             </a:r>
             <a:endParaRPr lang="en-US" sz="1600" dirty="0"/>
           </a:p>
@@ -23293,13 +23215,13 @@
             <a:r>
               <a:rPr lang="en-US" sz="1600" b="1" dirty="0">
                 <a:solidFill>
-                  <a:srgbClr val="C8003C"/>
+                  <a:srgbClr val="8C52E8"/>
                 </a:solidFill>
                 <a:latin typeface="Trebuchet MS" pitchFamily="34" charset="0"/>
                 <a:ea typeface="Trebuchet MS" pitchFamily="34" charset="-122"/>
                 <a:cs typeface="Trebuchet MS" pitchFamily="34" charset="-120"/>
               </a:rPr>
-              <a:t>(Nastro Azzurro)</a:t>
+              <a:t>(günstigstes Eu.!)</a:t>
             </a:r>
             <a:endParaRPr lang="en-US" sz="1600" dirty="0"/>
           </a:p>
@@ -23324,7 +23246,7 @@
           </a:solidFill>
           <a:ln w="12700">
             <a:solidFill>
-              <a:srgbClr val="C8003C"/>
+              <a:srgbClr val="8C52E8"/>
             </a:solidFill>
             <a:prstDash val="solid"/>
           </a:ln>
@@ -23396,13 +23318,13 @@
             <a:r>
               <a:rPr lang="en-US" sz="1600" b="1" dirty="0">
                 <a:solidFill>
-                  <a:srgbClr val="C8003C"/>
+                  <a:srgbClr val="8C52E8"/>
                 </a:solidFill>
                 <a:latin typeface="Trebuchet MS" pitchFamily="34" charset="0"/>
                 <a:ea typeface="Trebuchet MS" pitchFamily="34" charset="-122"/>
                 <a:cs typeface="Trebuchet MS" pitchFamily="34" charset="-120"/>
               </a:rPr>
-              <a:t>12–16°C</a:t>
+              <a:t>10–14°C 🧥</a:t>
             </a:r>
             <a:endParaRPr lang="en-US" sz="1600" dirty="0"/>
           </a:p>
@@ -23413,7 +23335,7 @@
             <a:r>
               <a:rPr lang="en-US" sz="1600" b="1" dirty="0">
                 <a:solidFill>
-                  <a:srgbClr val="C8003C"/>
+                  <a:srgbClr val="8C52E8"/>
                 </a:solidFill>
                 <a:latin typeface="Trebuchet MS" pitchFamily="34" charset="0"/>
                 <a:ea typeface="Trebuchet MS" pitchFamily="34" charset="-122"/>
@@ -23444,7 +23366,7 @@
           </a:solidFill>
           <a:ln w="12700">
             <a:solidFill>
-              <a:srgbClr val="C8003C"/>
+              <a:srgbClr val="8C52E8"/>
             </a:solidFill>
             <a:prstDash val="solid"/>
           </a:ln>
@@ -23516,13 +23438,13 @@
             <a:r>
               <a:rPr lang="en-US" sz="1600" b="1" dirty="0">
                 <a:solidFill>
-                  <a:srgbClr val="C8003C"/>
+                  <a:srgbClr val="8C52E8"/>
                 </a:solidFill>
                 <a:latin typeface="Trebuchet MS" pitchFamily="34" charset="0"/>
                 <a:ea typeface="Trebuchet MS" pitchFamily="34" charset="-122"/>
                 <a:cs typeface="Trebuchet MS" pitchFamily="34" charset="-120"/>
               </a:rPr>
-              <a:t>~€700</a:t>
+              <a:t>~€520</a:t>
             </a:r>
             <a:endParaRPr lang="en-US" sz="1600" dirty="0"/>
           </a:p>
@@ -23533,7 +23455,7 @@
             <a:r>
               <a:rPr lang="en-US" sz="1600" b="1" dirty="0">
                 <a:solidFill>
-                  <a:srgbClr val="C8003C"/>
+                  <a:srgbClr val="8C52E8"/>
                 </a:solidFill>
                 <a:latin typeface="Trebuchet MS" pitchFamily="34" charset="0"/>
                 <a:ea typeface="Trebuchet MS" pitchFamily="34" charset="-122"/>
@@ -23564,7 +23486,7 @@
           </a:solidFill>
           <a:ln w="12700">
             <a:solidFill>
-              <a:srgbClr val="C8003C"/>
+              <a:srgbClr val="8C52E8"/>
             </a:solidFill>
             <a:prstDash val="solid"/>
           </a:ln>
@@ -23636,7 +23558,7 @@
             <a:r>
               <a:rPr lang="en-US" sz="1600" b="1" dirty="0">
                 <a:solidFill>
-                  <a:srgbClr val="C8003C"/>
+                  <a:srgbClr val="8C52E8"/>
                 </a:solidFill>
                 <a:latin typeface="Trebuchet MS" pitchFamily="34" charset="0"/>
                 <a:ea typeface="Trebuchet MS" pitchFamily="34" charset="-122"/>
@@ -23653,13 +23575,13 @@
             <a:r>
               <a:rPr lang="en-US" sz="1600" b="1" dirty="0">
                 <a:solidFill>
-                  <a:srgbClr val="C8003C"/>
+                  <a:srgbClr val="8C52E8"/>
                 </a:solidFill>
                 <a:latin typeface="Trebuchet MS" pitchFamily="34" charset="0"/>
                 <a:ea typeface="Trebuchet MS" pitchFamily="34" charset="-122"/>
                 <a:cs typeface="Trebuchet MS" pitchFamily="34" charset="-120"/>
               </a:rPr>
-              <a:t>Navigli &amp; Corso Como</a:t>
+              <a:t>Yalta · Sin City</a:t>
             </a:r>
             <a:endParaRPr lang="en-US" sz="1600" dirty="0"/>
           </a:p>
@@ -23684,7 +23606,7 @@
           </a:solidFill>
           <a:ln w="12700">
             <a:solidFill>
-              <a:srgbClr val="C8003C"/>
+              <a:srgbClr val="8C52E8"/>
             </a:solidFill>
             <a:prstDash val="solid"/>
           </a:ln>
@@ -23756,13 +23678,13 @@
             <a:r>
               <a:rPr lang="en-US" sz="1600" b="1" dirty="0">
                 <a:solidFill>
-                  <a:srgbClr val="C8003C"/>
+                  <a:srgbClr val="8C52E8"/>
                 </a:solidFill>
                 <a:latin typeface="Trebuchet MS" pitchFamily="34" charset="0"/>
                 <a:ea typeface="Trebuchet MS" pitchFamily="34" charset="-122"/>
                 <a:cs typeface="Trebuchet MS" pitchFamily="34" charset="-120"/>
               </a:rPr>
-              <a:t>DUS direkt!</a:t>
+              <a:t>DUS direkt</a:t>
             </a:r>
             <a:endParaRPr lang="en-US" sz="1600" dirty="0"/>
           </a:p>
@@ -23773,13 +23695,13 @@
             <a:r>
               <a:rPr lang="en-US" sz="1600" b="1" dirty="0">
                 <a:solidFill>
-                  <a:srgbClr val="C8003C"/>
+                  <a:srgbClr val="8C52E8"/>
                 </a:solidFill>
                 <a:latin typeface="Trebuchet MS" pitchFamily="34" charset="0"/>
                 <a:ea typeface="Trebuchet MS" pitchFamily="34" charset="-122"/>
                 <a:cs typeface="Trebuchet MS" pitchFamily="34" charset="-120"/>
               </a:rPr>
-              <a:t>(Eurowings/ITA)</a:t>
+              <a:t>(Bulgaria Air/Ryanair)</a:t>
             </a:r>
             <a:endParaRPr lang="en-US" sz="1600" dirty="0"/>
           </a:p>
@@ -23843,7 +23765,7 @@
                 <a:ea typeface="Calibri" pitchFamily="34" charset="-122"/>
                 <a:cs typeface="Calibri" pitchFamily="34" charset="-120"/>
               </a:rPr>
-              <a:t>Mailand ist mit nur 1h 40m Flugzeit das nächste Ziel — Direktflug ab DUS mit Eurowings. Das Navigli-Viertel mit seinen Kanälen ist die Aperitivo-Hochburg Italiens: ab 18 Uhr Drinks + gratis Buffet für ~€10. Corso Como und die Isola-Szene bieten Clubs bis 5 Uhr. Das Duomo di Milano leuchtet nachts orange — perfekt für Halloween-Fotos. Und die Mailänder feiern Halloween ausgiebig.</a:t>
+              <a:t>Sofia ist mit Abstand das günstigste Ziel — ein Bier kostet €1–2, Abendessen in einem guten Restaurant ~€8–12. Die bulgarische Hauptstadt überrascht mit einer lebhaften Ausgehszene rund um den Vitosha Boulevard und den Studentenvierteln. Im Hintergrund: das Vitosha-Gebirge, direkt an der Stadtgrenze. Die Alexander-Nevsky-Kathedrale leuchtet nachts golden — perfekte Halloween-Kulisse.</a:t>
             </a:r>
             <a:endParaRPr lang="en-US" sz="1050" dirty="0"/>
           </a:p>
@@ -23921,11 +23843,11 @@
             <a:avLst/>
           </a:prstGeom>
           <a:solidFill>
-            <a:srgbClr val="C8003C"/>
+            <a:srgbClr val="8C52E8"/>
           </a:solidFill>
           <a:ln w="12700">
             <a:solidFill>
-              <a:srgbClr val="C8003C"/>
+              <a:srgbClr val="8C52E8"/>
             </a:solidFill>
             <a:prstDash val="solid"/>
           </a:ln>
@@ -23989,7 +23911,7 @@
                 <a:ea typeface="Trebuchet MS" pitchFamily="34" charset="-122"/>
                 <a:cs typeface="Trebuchet MS" pitchFamily="34" charset="-120"/>
               </a:rPr>
-              <a:t>🇮🇹  MAILAND — FLÜGE</a:t>
+              <a:t>🇧🇬  SOFIA — FLÜGE</a:t>
             </a:r>
             <a:endParaRPr lang="en-US" sz="2200" dirty="0"/>
           </a:p>
@@ -24010,11 +23932,11 @@
             <a:avLst/>
           </a:prstGeom>
           <a:solidFill>
-            <a:srgbClr val="C8003C"/>
+            <a:srgbClr val="8C52E8"/>
           </a:solidFill>
           <a:ln w="12700">
             <a:solidFill>
-              <a:srgbClr val="C8003C"/>
+              <a:srgbClr val="8C52E8"/>
             </a:solidFill>
             <a:prstDash val="solid"/>
           </a:ln>
@@ -24047,13 +23969,13 @@
             <a:r>
               <a:rPr lang="en-US" sz="1300" b="1" dirty="0">
                 <a:solidFill>
-                  <a:srgbClr val="C8003C"/>
+                  <a:srgbClr val="8C52E8"/>
                 </a:solidFill>
                 <a:latin typeface="Trebuchet MS" pitchFamily="34" charset="0"/>
                 <a:ea typeface="Trebuchet MS" pitchFamily="34" charset="-122"/>
                 <a:cs typeface="Trebuchet MS" pitchFamily="34" charset="-120"/>
               </a:rPr>
-              <a:t>HINFLUG: Deutschland → MXP (Mailand-Malpensa)</a:t>
+              <a:t>HINFLUG: Deutschland → SOF (Sofia)</a:t>
             </a:r>
             <a:endParaRPr lang="en-US" sz="1300" dirty="0"/>
           </a:p>
@@ -24103,7 +24025,7 @@
                       <a:r>
                         <a:rPr lang="en-US" sz="1100" b="1" dirty="0">
                           <a:solidFill>
-                            <a:srgbClr val="C8003C"/>
+                            <a:srgbClr val="8C52E8"/>
                           </a:solidFill>
                           <a:latin typeface="Trebuchet MS" pitchFamily="34" charset="0"/>
                           <a:ea typeface="Trebuchet MS" pitchFamily="34" charset="-122"/>
@@ -24171,7 +24093,7 @@
                       <a:r>
                         <a:rPr lang="en-US" sz="1100" b="1" dirty="0">
                           <a:solidFill>
-                            <a:srgbClr val="C8003C"/>
+                            <a:srgbClr val="8C52E8"/>
                           </a:solidFill>
                           <a:latin typeface="Trebuchet MS" pitchFamily="34" charset="0"/>
                           <a:ea typeface="Trebuchet MS" pitchFamily="34" charset="-122"/>
@@ -24239,7 +24161,7 @@
                       <a:r>
                         <a:rPr lang="en-US" sz="1100" b="1" dirty="0">
                           <a:solidFill>
-                            <a:srgbClr val="C8003C"/>
+                            <a:srgbClr val="8C52E8"/>
                           </a:solidFill>
                           <a:latin typeface="Trebuchet MS" pitchFamily="34" charset="0"/>
                           <a:ea typeface="Trebuchet MS" pitchFamily="34" charset="-122"/>
@@ -24307,7 +24229,7 @@
                       <a:r>
                         <a:rPr lang="en-US" sz="1100" b="1" dirty="0">
                           <a:solidFill>
-                            <a:srgbClr val="C8003C"/>
+                            <a:srgbClr val="8C52E8"/>
                           </a:solidFill>
                           <a:latin typeface="Trebuchet MS" pitchFamily="34" charset="0"/>
                           <a:ea typeface="Trebuchet MS" pitchFamily="34" charset="-122"/>
@@ -24375,7 +24297,7 @@
                       <a:r>
                         <a:rPr lang="en-US" sz="1100" b="1" dirty="0">
                           <a:solidFill>
-                            <a:srgbClr val="C8003C"/>
+                            <a:srgbClr val="8C52E8"/>
                           </a:solidFill>
                           <a:latin typeface="Trebuchet MS" pitchFamily="34" charset="0"/>
                           <a:ea typeface="Trebuchet MS" pitchFamily="34" charset="-122"/>
@@ -24443,7 +24365,7 @@
                       <a:r>
                         <a:rPr lang="en-US" sz="1100" b="1" dirty="0">
                           <a:solidFill>
-                            <a:srgbClr val="C8003C"/>
+                            <a:srgbClr val="8C52E8"/>
                           </a:solidFill>
                           <a:latin typeface="Trebuchet MS" pitchFamily="34" charset="0"/>
                           <a:ea typeface="Trebuchet MS" pitchFamily="34" charset="-122"/>
@@ -24511,7 +24433,7 @@
                       <a:r>
                         <a:rPr lang="en-US" sz="1100" b="1" dirty="0">
                           <a:solidFill>
-                            <a:srgbClr val="C8003C"/>
+                            <a:srgbClr val="8C52E8"/>
                           </a:solidFill>
                           <a:latin typeface="Trebuchet MS" pitchFamily="34" charset="0"/>
                           <a:ea typeface="Trebuchet MS" pitchFamily="34" charset="-122"/>
@@ -24579,7 +24501,7 @@
                       <a:r>
                         <a:rPr lang="en-US" sz="1100" b="1" dirty="0">
                           <a:solidFill>
-                            <a:srgbClr val="C8003C"/>
+                            <a:srgbClr val="8C52E8"/>
                           </a:solidFill>
                           <a:latin typeface="Trebuchet MS" pitchFamily="34" charset="0"/>
                           <a:ea typeface="Trebuchet MS" pitchFamily="34" charset="-122"/>
@@ -24723,7 +24645,7 @@
                           <a:ea typeface="Calibri" pitchFamily="34" charset="-122"/>
                           <a:cs typeface="Calibri" pitchFamily="34" charset="-120"/>
                         </a:rPr>
-                        <a:t>EW</a:t>
+                        <a:t>Bulgaria Air</a:t>
                       </a:r>
                       <a:endParaRPr lang="en-US" sz="1000" dirty="0">
                         <a:latin typeface="Calibri" charset="0"/>
@@ -24744,7 +24666,7 @@
                           <a:ea typeface="Calibri" pitchFamily="34" charset="-122"/>
                           <a:cs typeface="Calibri" pitchFamily="34" charset="-120"/>
                         </a:rPr>
-                        <a:t>Eurowings</a:t>
+                        <a:t>(FB)</a:t>
                       </a:r>
                       <a:endParaRPr lang="en-US" sz="1000" dirty="0">
                         <a:latin typeface="Calibri" charset="0"/>
@@ -24812,1183 +24734,7 @@
                           <a:ea typeface="Calibri" pitchFamily="34" charset="-122"/>
                           <a:cs typeface="Calibri" pitchFamily="34" charset="-120"/>
                         </a:rPr>
-                        <a:t>DUS → MXP</a:t>
-                      </a:r>
-                      <a:endParaRPr lang="en-US" sz="1000" dirty="0">
-                        <a:latin typeface="Calibri" charset="0"/>
-                        <a:ea typeface="Calibri" charset="0"/>
-                        <a:cs typeface="Calibri" charset="0"/>
-                      </a:endParaRPr>
-                    </a:p>
-                    <a:p>
-                      <a:pPr algn="ctr" indent="0" marL="0">
-                        <a:buNone/>
-                      </a:pPr>
-                      <a:r>
-                        <a:rPr lang="en-US" sz="1000" dirty="0">
-                          <a:solidFill>
-                            <a:srgbClr val="E8E8E8"/>
-                          </a:solidFill>
-                          <a:latin typeface="Calibri" pitchFamily="34" charset="0"/>
-                          <a:ea typeface="Calibri" pitchFamily="34" charset="-122"/>
-                          <a:cs typeface="Calibri" pitchFamily="34" charset="-120"/>
-                        </a:rPr>
-                        <a:t>30. Okt. früh</a:t>
-                      </a:r>
-                      <a:endParaRPr lang="en-US" sz="1000" dirty="0">
-                        <a:latin typeface="Calibri" charset="0"/>
-                        <a:ea typeface="Calibri" charset="0"/>
-                        <a:cs typeface="Calibri" charset="0"/>
-                      </a:endParaRPr>
-                    </a:p>
-                  </a:txBody>
-                  <a:tcPr marL="91440" marR="91440" marT="45720" marB="45720">
-                    <a:lnL w="12700" cap="flat" cmpd="sng" algn="ctr">
-                      <a:solidFill>
-                        <a:srgbClr val="0F3460"/>
-                      </a:solidFill>
-                      <a:prstDash val="solid"/>
-                      <a:round/>
-                      <a:headEnd type="none" w="med" len="med"/>
-                      <a:tailEnd type="none" w="med" len="med"/>
-                    </a:lnL>
-                    <a:lnR w="12700" cap="flat" cmpd="sng" algn="ctr">
-                      <a:solidFill>
-                        <a:srgbClr val="0F3460"/>
-                      </a:solidFill>
-                      <a:prstDash val="solid"/>
-                      <a:round/>
-                      <a:headEnd type="none" w="med" len="med"/>
-                      <a:tailEnd type="none" w="med" len="med"/>
-                    </a:lnR>
-                    <a:lnT w="12700" cap="flat" cmpd="sng" algn="ctr">
-                      <a:solidFill>
-                        <a:srgbClr val="0F3460"/>
-                      </a:solidFill>
-                      <a:prstDash val="solid"/>
-                      <a:round/>
-                      <a:headEnd type="none" w="med" len="med"/>
-                      <a:tailEnd type="none" w="med" len="med"/>
-                    </a:lnT>
-                    <a:lnB w="12700" cap="flat" cmpd="sng" algn="ctr">
-                      <a:solidFill>
-                        <a:srgbClr val="0F3460"/>
-                      </a:solidFill>
-                      <a:prstDash val="solid"/>
-                      <a:round/>
-                      <a:headEnd type="none" w="med" len="med"/>
-                      <a:tailEnd type="none" w="med" len="med"/>
-                    </a:lnB>
-                    <a:solidFill>
-                      <a:srgbClr val="16213E"/>
-                    </a:solidFill>
-                  </a:tcPr>
-                </a:tc>
-                <a:tc>
-                  <a:txBody>
-                    <a:bodyPr/>
-                    <a:lstStyle/>
-                    <a:p>
-                      <a:pPr algn="ctr" indent="0" marL="0">
-                        <a:buNone/>
-                      </a:pPr>
-                      <a:r>
-                        <a:rPr lang="en-US" sz="1000" dirty="0">
-                          <a:solidFill>
-                            <a:srgbClr val="E8E8E8"/>
-                          </a:solidFill>
-                          <a:latin typeface="Calibri" pitchFamily="34" charset="0"/>
-                          <a:ea typeface="Calibri" pitchFamily="34" charset="-122"/>
-                          <a:cs typeface="Calibri" pitchFamily="34" charset="-120"/>
-                        </a:rPr>
-                        <a:t>~07:00</a:t>
-                      </a:r>
-                      <a:endParaRPr lang="en-US" sz="1000" dirty="0">
-                        <a:latin typeface="Calibri" charset="0"/>
-                        <a:ea typeface="Calibri" charset="0"/>
-                        <a:cs typeface="Calibri" charset="0"/>
-                      </a:endParaRPr>
-                    </a:p>
-                  </a:txBody>
-                  <a:tcPr marL="91440" marR="91440" marT="45720" marB="45720">
-                    <a:lnL w="12700" cap="flat" cmpd="sng" algn="ctr">
-                      <a:solidFill>
-                        <a:srgbClr val="0F3460"/>
-                      </a:solidFill>
-                      <a:prstDash val="solid"/>
-                      <a:round/>
-                      <a:headEnd type="none" w="med" len="med"/>
-                      <a:tailEnd type="none" w="med" len="med"/>
-                    </a:lnL>
-                    <a:lnR w="12700" cap="flat" cmpd="sng" algn="ctr">
-                      <a:solidFill>
-                        <a:srgbClr val="0F3460"/>
-                      </a:solidFill>
-                      <a:prstDash val="solid"/>
-                      <a:round/>
-                      <a:headEnd type="none" w="med" len="med"/>
-                      <a:tailEnd type="none" w="med" len="med"/>
-                    </a:lnR>
-                    <a:lnT w="12700" cap="flat" cmpd="sng" algn="ctr">
-                      <a:solidFill>
-                        <a:srgbClr val="0F3460"/>
-                      </a:solidFill>
-                      <a:prstDash val="solid"/>
-                      <a:round/>
-                      <a:headEnd type="none" w="med" len="med"/>
-                      <a:tailEnd type="none" w="med" len="med"/>
-                    </a:lnT>
-                    <a:lnB w="12700" cap="flat" cmpd="sng" algn="ctr">
-                      <a:solidFill>
-                        <a:srgbClr val="0F3460"/>
-                      </a:solidFill>
-                      <a:prstDash val="solid"/>
-                      <a:round/>
-                      <a:headEnd type="none" w="med" len="med"/>
-                      <a:tailEnd type="none" w="med" len="med"/>
-                    </a:lnB>
-                    <a:solidFill>
-                      <a:srgbClr val="16213E"/>
-                    </a:solidFill>
-                  </a:tcPr>
-                </a:tc>
-                <a:tc>
-                  <a:txBody>
-                    <a:bodyPr/>
-                    <a:lstStyle/>
-                    <a:p>
-                      <a:pPr algn="ctr" indent="0" marL="0">
-                        <a:buNone/>
-                      </a:pPr>
-                      <a:r>
-                        <a:rPr lang="en-US" sz="1000" dirty="0">
-                          <a:solidFill>
-                            <a:srgbClr val="E8E8E8"/>
-                          </a:solidFill>
-                          <a:latin typeface="Calibri" pitchFamily="34" charset="0"/>
-                          <a:ea typeface="Calibri" pitchFamily="34" charset="-122"/>
-                          <a:cs typeface="Calibri" pitchFamily="34" charset="-120"/>
-                        </a:rPr>
-                        <a:t>~08:40</a:t>
-                      </a:r>
-                      <a:endParaRPr lang="en-US" sz="1000" dirty="0">
-                        <a:latin typeface="Calibri" charset="0"/>
-                        <a:ea typeface="Calibri" charset="0"/>
-                        <a:cs typeface="Calibri" charset="0"/>
-                      </a:endParaRPr>
-                    </a:p>
-                  </a:txBody>
-                  <a:tcPr marL="91440" marR="91440" marT="45720" marB="45720">
-                    <a:lnL w="12700" cap="flat" cmpd="sng" algn="ctr">
-                      <a:solidFill>
-                        <a:srgbClr val="0F3460"/>
-                      </a:solidFill>
-                      <a:prstDash val="solid"/>
-                      <a:round/>
-                      <a:headEnd type="none" w="med" len="med"/>
-                      <a:tailEnd type="none" w="med" len="med"/>
-                    </a:lnL>
-                    <a:lnR w="12700" cap="flat" cmpd="sng" algn="ctr">
-                      <a:solidFill>
-                        <a:srgbClr val="0F3460"/>
-                      </a:solidFill>
-                      <a:prstDash val="solid"/>
-                      <a:round/>
-                      <a:headEnd type="none" w="med" len="med"/>
-                      <a:tailEnd type="none" w="med" len="med"/>
-                    </a:lnR>
-                    <a:lnT w="12700" cap="flat" cmpd="sng" algn="ctr">
-                      <a:solidFill>
-                        <a:srgbClr val="0F3460"/>
-                      </a:solidFill>
-                      <a:prstDash val="solid"/>
-                      <a:round/>
-                      <a:headEnd type="none" w="med" len="med"/>
-                      <a:tailEnd type="none" w="med" len="med"/>
-                    </a:lnT>
-                    <a:lnB w="12700" cap="flat" cmpd="sng" algn="ctr">
-                      <a:solidFill>
-                        <a:srgbClr val="0F3460"/>
-                      </a:solidFill>
-                      <a:prstDash val="solid"/>
-                      <a:round/>
-                      <a:headEnd type="none" w="med" len="med"/>
-                      <a:tailEnd type="none" w="med" len="med"/>
-                    </a:lnB>
-                    <a:solidFill>
-                      <a:srgbClr val="16213E"/>
-                    </a:solidFill>
-                  </a:tcPr>
-                </a:tc>
-                <a:tc>
-                  <a:txBody>
-                    <a:bodyPr/>
-                    <a:lstStyle/>
-                    <a:p>
-                      <a:pPr algn="ctr" indent="0" marL="0">
-                        <a:buNone/>
-                      </a:pPr>
-                      <a:r>
-                        <a:rPr lang="en-US" sz="1000" dirty="0">
-                          <a:solidFill>
-                            <a:srgbClr val="E8E8E8"/>
-                          </a:solidFill>
-                          <a:latin typeface="Calibri" pitchFamily="34" charset="0"/>
-                          <a:ea typeface="Calibri" pitchFamily="34" charset="-122"/>
-                          <a:cs typeface="Calibri" pitchFamily="34" charset="-120"/>
-                        </a:rPr>
-                        <a:t>1h 40m</a:t>
-                      </a:r>
-                      <a:endParaRPr lang="en-US" sz="1000" dirty="0">
-                        <a:latin typeface="Calibri" charset="0"/>
-                        <a:ea typeface="Calibri" charset="0"/>
-                        <a:cs typeface="Calibri" charset="0"/>
-                      </a:endParaRPr>
-                    </a:p>
-                  </a:txBody>
-                  <a:tcPr marL="91440" marR="91440" marT="45720" marB="45720">
-                    <a:lnL w="12700" cap="flat" cmpd="sng" algn="ctr">
-                      <a:solidFill>
-                        <a:srgbClr val="0F3460"/>
-                      </a:solidFill>
-                      <a:prstDash val="solid"/>
-                      <a:round/>
-                      <a:headEnd type="none" w="med" len="med"/>
-                      <a:tailEnd type="none" w="med" len="med"/>
-                    </a:lnL>
-                    <a:lnR w="12700" cap="flat" cmpd="sng" algn="ctr">
-                      <a:solidFill>
-                        <a:srgbClr val="0F3460"/>
-                      </a:solidFill>
-                      <a:prstDash val="solid"/>
-                      <a:round/>
-                      <a:headEnd type="none" w="med" len="med"/>
-                      <a:tailEnd type="none" w="med" len="med"/>
-                    </a:lnR>
-                    <a:lnT w="12700" cap="flat" cmpd="sng" algn="ctr">
-                      <a:solidFill>
-                        <a:srgbClr val="0F3460"/>
-                      </a:solidFill>
-                      <a:prstDash val="solid"/>
-                      <a:round/>
-                      <a:headEnd type="none" w="med" len="med"/>
-                      <a:tailEnd type="none" w="med" len="med"/>
-                    </a:lnT>
-                    <a:lnB w="12700" cap="flat" cmpd="sng" algn="ctr">
-                      <a:solidFill>
-                        <a:srgbClr val="0F3460"/>
-                      </a:solidFill>
-                      <a:prstDash val="solid"/>
-                      <a:round/>
-                      <a:headEnd type="none" w="med" len="med"/>
-                      <a:tailEnd type="none" w="med" len="med"/>
-                    </a:lnB>
-                    <a:solidFill>
-                      <a:srgbClr val="16213E"/>
-                    </a:solidFill>
-                  </a:tcPr>
-                </a:tc>
-                <a:tc>
-                  <a:txBody>
-                    <a:bodyPr/>
-                    <a:lstStyle/>
-                    <a:p>
-                      <a:pPr algn="ctr" indent="0" marL="0">
-                        <a:buNone/>
-                      </a:pPr>
-                      <a:r>
-                        <a:rPr lang="en-US" sz="1000" dirty="0">
-                          <a:solidFill>
-                            <a:srgbClr val="E8E8E8"/>
-                          </a:solidFill>
-                          <a:latin typeface="Calibri" pitchFamily="34" charset="0"/>
-                          <a:ea typeface="Calibri" pitchFamily="34" charset="-122"/>
-                          <a:cs typeface="Calibri" pitchFamily="34" charset="-120"/>
-                        </a:rPr>
-                        <a:t>~€80</a:t>
-                      </a:r>
-                      <a:endParaRPr lang="en-US" sz="1000" dirty="0">
-                        <a:latin typeface="Calibri" charset="0"/>
-                        <a:ea typeface="Calibri" charset="0"/>
-                        <a:cs typeface="Calibri" charset="0"/>
-                      </a:endParaRPr>
-                    </a:p>
-                  </a:txBody>
-                  <a:tcPr marL="91440" marR="91440" marT="45720" marB="45720">
-                    <a:lnL w="12700" cap="flat" cmpd="sng" algn="ctr">
-                      <a:solidFill>
-                        <a:srgbClr val="0F3460"/>
-                      </a:solidFill>
-                      <a:prstDash val="solid"/>
-                      <a:round/>
-                      <a:headEnd type="none" w="med" len="med"/>
-                      <a:tailEnd type="none" w="med" len="med"/>
-                    </a:lnL>
-                    <a:lnR w="12700" cap="flat" cmpd="sng" algn="ctr">
-                      <a:solidFill>
-                        <a:srgbClr val="0F3460"/>
-                      </a:solidFill>
-                      <a:prstDash val="solid"/>
-                      <a:round/>
-                      <a:headEnd type="none" w="med" len="med"/>
-                      <a:tailEnd type="none" w="med" len="med"/>
-                    </a:lnR>
-                    <a:lnT w="12700" cap="flat" cmpd="sng" algn="ctr">
-                      <a:solidFill>
-                        <a:srgbClr val="0F3460"/>
-                      </a:solidFill>
-                      <a:prstDash val="solid"/>
-                      <a:round/>
-                      <a:headEnd type="none" w="med" len="med"/>
-                      <a:tailEnd type="none" w="med" len="med"/>
-                    </a:lnT>
-                    <a:lnB w="12700" cap="flat" cmpd="sng" algn="ctr">
-                      <a:solidFill>
-                        <a:srgbClr val="0F3460"/>
-                      </a:solidFill>
-                      <a:prstDash val="solid"/>
-                      <a:round/>
-                      <a:headEnd type="none" w="med" len="med"/>
-                      <a:tailEnd type="none" w="med" len="med"/>
-                    </a:lnB>
-                    <a:solidFill>
-                      <a:srgbClr val="16213E"/>
-                    </a:solidFill>
-                  </a:tcPr>
-                </a:tc>
-                <a:tc>
-                  <a:txBody>
-                    <a:bodyPr/>
-                    <a:lstStyle/>
-                    <a:p>
-                      <a:pPr algn="ctr" indent="0" marL="0">
-                        <a:buNone/>
-                      </a:pPr>
-                      <a:r>
-                        <a:rPr lang="en-US" sz="1000" b="1" dirty="0">
-                          <a:solidFill>
-                            <a:srgbClr val="FF8C00"/>
-                          </a:solidFill>
-                          <a:latin typeface="Calibri" pitchFamily="34" charset="0"/>
-                          <a:ea typeface="Calibri" pitchFamily="34" charset="-122"/>
-                          <a:cs typeface="Calibri" pitchFamily="34" charset="-120"/>
-                        </a:rPr>
-                        <a:t>~€320</a:t>
-                      </a:r>
-                      <a:endParaRPr lang="en-US" sz="1000" dirty="0">
-                        <a:latin typeface="Calibri" charset="0"/>
-                        <a:ea typeface="Calibri" charset="0"/>
-                        <a:cs typeface="Calibri" charset="0"/>
-                      </a:endParaRPr>
-                    </a:p>
-                  </a:txBody>
-                  <a:tcPr marL="91440" marR="91440" marT="45720" marB="45720">
-                    <a:lnL w="12700" cap="flat" cmpd="sng" algn="ctr">
-                      <a:solidFill>
-                        <a:srgbClr val="0F3460"/>
-                      </a:solidFill>
-                      <a:prstDash val="solid"/>
-                      <a:round/>
-                      <a:headEnd type="none" w="med" len="med"/>
-                      <a:tailEnd type="none" w="med" len="med"/>
-                    </a:lnL>
-                    <a:lnR w="12700" cap="flat" cmpd="sng" algn="ctr">
-                      <a:solidFill>
-                        <a:srgbClr val="0F3460"/>
-                      </a:solidFill>
-                      <a:prstDash val="solid"/>
-                      <a:round/>
-                      <a:headEnd type="none" w="med" len="med"/>
-                      <a:tailEnd type="none" w="med" len="med"/>
-                    </a:lnR>
-                    <a:lnT w="12700" cap="flat" cmpd="sng" algn="ctr">
-                      <a:solidFill>
-                        <a:srgbClr val="0F3460"/>
-                      </a:solidFill>
-                      <a:prstDash val="solid"/>
-                      <a:round/>
-                      <a:headEnd type="none" w="med" len="med"/>
-                      <a:tailEnd type="none" w="med" len="med"/>
-                    </a:lnT>
-                    <a:lnB w="12700" cap="flat" cmpd="sng" algn="ctr">
-                      <a:solidFill>
-                        <a:srgbClr val="0F3460"/>
-                      </a:solidFill>
-                      <a:prstDash val="solid"/>
-                      <a:round/>
-                      <a:headEnd type="none" w="med" len="med"/>
-                      <a:tailEnd type="none" w="med" len="med"/>
-                    </a:lnB>
-                    <a:solidFill>
-                      <a:srgbClr val="16213E"/>
-                    </a:solidFill>
-                  </a:tcPr>
-                </a:tc>
-              </a:tr>
-              <a:tr h="475488">
-                <a:tc>
-                  <a:txBody>
-                    <a:bodyPr/>
-                    <a:lstStyle/>
-                    <a:p>
-                      <a:pPr algn="ctr" indent="0" marL="0">
-                        <a:buNone/>
-                      </a:pPr>
-                      <a:r>
-                        <a:rPr lang="en-US" sz="1000" dirty="0">
-                          <a:solidFill>
-                            <a:srgbClr val="E8E8E8"/>
-                          </a:solidFill>
-                          <a:latin typeface="Calibri" pitchFamily="34" charset="0"/>
-                          <a:ea typeface="Calibri" pitchFamily="34" charset="-122"/>
-                          <a:cs typeface="Calibri" pitchFamily="34" charset="-120"/>
-                        </a:rPr>
-                        <a:t>Vorabend</a:t>
-                      </a:r>
-                      <a:endParaRPr lang="en-US" sz="1000" dirty="0">
-                        <a:latin typeface="Calibri" charset="0"/>
-                        <a:ea typeface="Calibri" charset="0"/>
-                        <a:cs typeface="Calibri" charset="0"/>
-                      </a:endParaRPr>
-                    </a:p>
-                  </a:txBody>
-                  <a:tcPr marL="91440" marR="91440" marT="45720" marB="45720">
-                    <a:lnL w="12700" cap="flat" cmpd="sng" algn="ctr">
-                      <a:solidFill>
-                        <a:srgbClr val="0F3460"/>
-                      </a:solidFill>
-                      <a:prstDash val="solid"/>
-                      <a:round/>
-                      <a:headEnd type="none" w="med" len="med"/>
-                      <a:tailEnd type="none" w="med" len="med"/>
-                    </a:lnL>
-                    <a:lnR w="12700" cap="flat" cmpd="sng" algn="ctr">
-                      <a:solidFill>
-                        <a:srgbClr val="0F3460"/>
-                      </a:solidFill>
-                      <a:prstDash val="solid"/>
-                      <a:round/>
-                      <a:headEnd type="none" w="med" len="med"/>
-                      <a:tailEnd type="none" w="med" len="med"/>
-                    </a:lnR>
-                    <a:lnT w="12700" cap="flat" cmpd="sng" algn="ctr">
-                      <a:solidFill>
-                        <a:srgbClr val="0F3460"/>
-                      </a:solidFill>
-                      <a:prstDash val="solid"/>
-                      <a:round/>
-                      <a:headEnd type="none" w="med" len="med"/>
-                      <a:tailEnd type="none" w="med" len="med"/>
-                    </a:lnT>
-                    <a:lnB w="12700" cap="flat" cmpd="sng" algn="ctr">
-                      <a:solidFill>
-                        <a:srgbClr val="0F3460"/>
-                      </a:solidFill>
-                      <a:prstDash val="solid"/>
-                      <a:round/>
-                      <a:headEnd type="none" w="med" len="med"/>
-                      <a:tailEnd type="none" w="med" len="med"/>
-                    </a:lnB>
-                    <a:solidFill>
-                      <a:srgbClr val="1A1A2E"/>
-                    </a:solidFill>
-                  </a:tcPr>
-                </a:tc>
-                <a:tc>
-                  <a:txBody>
-                    <a:bodyPr/>
-                    <a:lstStyle/>
-                    <a:p>
-                      <a:pPr algn="ctr" indent="0" marL="0">
-                        <a:buNone/>
-                      </a:pPr>
-                      <a:r>
-                        <a:rPr lang="en-US" sz="1000" dirty="0">
-                          <a:solidFill>
-                            <a:srgbClr val="E8E8E8"/>
-                          </a:solidFill>
-                          <a:latin typeface="Calibri" pitchFamily="34" charset="0"/>
-                          <a:ea typeface="Calibri" pitchFamily="34" charset="-122"/>
-                          <a:cs typeface="Calibri" pitchFamily="34" charset="-120"/>
-                        </a:rPr>
-                        <a:t>EW</a:t>
-                      </a:r>
-                      <a:endParaRPr lang="en-US" sz="1000" dirty="0">
-                        <a:latin typeface="Calibri" charset="0"/>
-                        <a:ea typeface="Calibri" charset="0"/>
-                        <a:cs typeface="Calibri" charset="0"/>
-                      </a:endParaRPr>
-                    </a:p>
-                    <a:p>
-                      <a:pPr algn="ctr" indent="0" marL="0">
-                        <a:buNone/>
-                      </a:pPr>
-                      <a:r>
-                        <a:rPr lang="en-US" sz="1000" dirty="0">
-                          <a:solidFill>
-                            <a:srgbClr val="E8E8E8"/>
-                          </a:solidFill>
-                          <a:latin typeface="Calibri" pitchFamily="34" charset="0"/>
-                          <a:ea typeface="Calibri" pitchFamily="34" charset="-122"/>
-                          <a:cs typeface="Calibri" pitchFamily="34" charset="-120"/>
-                        </a:rPr>
-                        <a:t>Eurowings</a:t>
-                      </a:r>
-                      <a:endParaRPr lang="en-US" sz="1000" dirty="0">
-                        <a:latin typeface="Calibri" charset="0"/>
-                        <a:ea typeface="Calibri" charset="0"/>
-                        <a:cs typeface="Calibri" charset="0"/>
-                      </a:endParaRPr>
-                    </a:p>
-                  </a:txBody>
-                  <a:tcPr marL="91440" marR="91440" marT="45720" marB="45720">
-                    <a:lnL w="12700" cap="flat" cmpd="sng" algn="ctr">
-                      <a:solidFill>
-                        <a:srgbClr val="0F3460"/>
-                      </a:solidFill>
-                      <a:prstDash val="solid"/>
-                      <a:round/>
-                      <a:headEnd type="none" w="med" len="med"/>
-                      <a:tailEnd type="none" w="med" len="med"/>
-                    </a:lnL>
-                    <a:lnR w="12700" cap="flat" cmpd="sng" algn="ctr">
-                      <a:solidFill>
-                        <a:srgbClr val="0F3460"/>
-                      </a:solidFill>
-                      <a:prstDash val="solid"/>
-                      <a:round/>
-                      <a:headEnd type="none" w="med" len="med"/>
-                      <a:tailEnd type="none" w="med" len="med"/>
-                    </a:lnR>
-                    <a:lnT w="12700" cap="flat" cmpd="sng" algn="ctr">
-                      <a:solidFill>
-                        <a:srgbClr val="0F3460"/>
-                      </a:solidFill>
-                      <a:prstDash val="solid"/>
-                      <a:round/>
-                      <a:headEnd type="none" w="med" len="med"/>
-                      <a:tailEnd type="none" w="med" len="med"/>
-                    </a:lnT>
-                    <a:lnB w="12700" cap="flat" cmpd="sng" algn="ctr">
-                      <a:solidFill>
-                        <a:srgbClr val="0F3460"/>
-                      </a:solidFill>
-                      <a:prstDash val="solid"/>
-                      <a:round/>
-                      <a:headEnd type="none" w="med" len="med"/>
-                      <a:tailEnd type="none" w="med" len="med"/>
-                    </a:lnB>
-                    <a:solidFill>
-                      <a:srgbClr val="1A1A2E"/>
-                    </a:solidFill>
-                  </a:tcPr>
-                </a:tc>
-                <a:tc>
-                  <a:txBody>
-                    <a:bodyPr/>
-                    <a:lstStyle/>
-                    <a:p>
-                      <a:pPr algn="ctr" indent="0" marL="0">
-                        <a:buNone/>
-                      </a:pPr>
-                      <a:r>
-                        <a:rPr lang="en-US" sz="1000" dirty="0">
-                          <a:solidFill>
-                            <a:srgbClr val="E8E8E8"/>
-                          </a:solidFill>
-                          <a:latin typeface="Calibri" pitchFamily="34" charset="0"/>
-                          <a:ea typeface="Calibri" pitchFamily="34" charset="-122"/>
-                          <a:cs typeface="Calibri" pitchFamily="34" charset="-120"/>
-                        </a:rPr>
-                        <a:t>DUS → MXP</a:t>
-                      </a:r>
-                      <a:endParaRPr lang="en-US" sz="1000" dirty="0">
-                        <a:latin typeface="Calibri" charset="0"/>
-                        <a:ea typeface="Calibri" charset="0"/>
-                        <a:cs typeface="Calibri" charset="0"/>
-                      </a:endParaRPr>
-                    </a:p>
-                    <a:p>
-                      <a:pPr algn="ctr" indent="0" marL="0">
-                        <a:buNone/>
-                      </a:pPr>
-                      <a:r>
-                        <a:rPr lang="en-US" sz="1000" dirty="0">
-                          <a:solidFill>
-                            <a:srgbClr val="E8E8E8"/>
-                          </a:solidFill>
-                          <a:latin typeface="Calibri" pitchFamily="34" charset="0"/>
-                          <a:ea typeface="Calibri" pitchFamily="34" charset="-122"/>
-                          <a:cs typeface="Calibri" pitchFamily="34" charset="-120"/>
-                        </a:rPr>
-                        <a:t>29. Okt. abends</a:t>
-                      </a:r>
-                      <a:endParaRPr lang="en-US" sz="1000" dirty="0">
-                        <a:latin typeface="Calibri" charset="0"/>
-                        <a:ea typeface="Calibri" charset="0"/>
-                        <a:cs typeface="Calibri" charset="0"/>
-                      </a:endParaRPr>
-                    </a:p>
-                  </a:txBody>
-                  <a:tcPr marL="91440" marR="91440" marT="45720" marB="45720">
-                    <a:lnL w="12700" cap="flat" cmpd="sng" algn="ctr">
-                      <a:solidFill>
-                        <a:srgbClr val="0F3460"/>
-                      </a:solidFill>
-                      <a:prstDash val="solid"/>
-                      <a:round/>
-                      <a:headEnd type="none" w="med" len="med"/>
-                      <a:tailEnd type="none" w="med" len="med"/>
-                    </a:lnL>
-                    <a:lnR w="12700" cap="flat" cmpd="sng" algn="ctr">
-                      <a:solidFill>
-                        <a:srgbClr val="0F3460"/>
-                      </a:solidFill>
-                      <a:prstDash val="solid"/>
-                      <a:round/>
-                      <a:headEnd type="none" w="med" len="med"/>
-                      <a:tailEnd type="none" w="med" len="med"/>
-                    </a:lnR>
-                    <a:lnT w="12700" cap="flat" cmpd="sng" algn="ctr">
-                      <a:solidFill>
-                        <a:srgbClr val="0F3460"/>
-                      </a:solidFill>
-                      <a:prstDash val="solid"/>
-                      <a:round/>
-                      <a:headEnd type="none" w="med" len="med"/>
-                      <a:tailEnd type="none" w="med" len="med"/>
-                    </a:lnT>
-                    <a:lnB w="12700" cap="flat" cmpd="sng" algn="ctr">
-                      <a:solidFill>
-                        <a:srgbClr val="0F3460"/>
-                      </a:solidFill>
-                      <a:prstDash val="solid"/>
-                      <a:round/>
-                      <a:headEnd type="none" w="med" len="med"/>
-                      <a:tailEnd type="none" w="med" len="med"/>
-                    </a:lnB>
-                    <a:solidFill>
-                      <a:srgbClr val="1A1A2E"/>
-                    </a:solidFill>
-                  </a:tcPr>
-                </a:tc>
-                <a:tc>
-                  <a:txBody>
-                    <a:bodyPr/>
-                    <a:lstStyle/>
-                    <a:p>
-                      <a:pPr algn="ctr" indent="0" marL="0">
-                        <a:buNone/>
-                      </a:pPr>
-                      <a:r>
-                        <a:rPr lang="en-US" sz="1000" dirty="0">
-                          <a:solidFill>
-                            <a:srgbClr val="E8E8E8"/>
-                          </a:solidFill>
-                          <a:latin typeface="Calibri" pitchFamily="34" charset="0"/>
-                          <a:ea typeface="Calibri" pitchFamily="34" charset="-122"/>
-                          <a:cs typeface="Calibri" pitchFamily="34" charset="-120"/>
-                        </a:rPr>
-                        <a:t>~18:xx</a:t>
-                      </a:r>
-                      <a:endParaRPr lang="en-US" sz="1000" dirty="0">
-                        <a:latin typeface="Calibri" charset="0"/>
-                        <a:ea typeface="Calibri" charset="0"/>
-                        <a:cs typeface="Calibri" charset="0"/>
-                      </a:endParaRPr>
-                    </a:p>
-                  </a:txBody>
-                  <a:tcPr marL="91440" marR="91440" marT="45720" marB="45720">
-                    <a:lnL w="12700" cap="flat" cmpd="sng" algn="ctr">
-                      <a:solidFill>
-                        <a:srgbClr val="0F3460"/>
-                      </a:solidFill>
-                      <a:prstDash val="solid"/>
-                      <a:round/>
-                      <a:headEnd type="none" w="med" len="med"/>
-                      <a:tailEnd type="none" w="med" len="med"/>
-                    </a:lnL>
-                    <a:lnR w="12700" cap="flat" cmpd="sng" algn="ctr">
-                      <a:solidFill>
-                        <a:srgbClr val="0F3460"/>
-                      </a:solidFill>
-                      <a:prstDash val="solid"/>
-                      <a:round/>
-                      <a:headEnd type="none" w="med" len="med"/>
-                      <a:tailEnd type="none" w="med" len="med"/>
-                    </a:lnR>
-                    <a:lnT w="12700" cap="flat" cmpd="sng" algn="ctr">
-                      <a:solidFill>
-                        <a:srgbClr val="0F3460"/>
-                      </a:solidFill>
-                      <a:prstDash val="solid"/>
-                      <a:round/>
-                      <a:headEnd type="none" w="med" len="med"/>
-                      <a:tailEnd type="none" w="med" len="med"/>
-                    </a:lnT>
-                    <a:lnB w="12700" cap="flat" cmpd="sng" algn="ctr">
-                      <a:solidFill>
-                        <a:srgbClr val="0F3460"/>
-                      </a:solidFill>
-                      <a:prstDash val="solid"/>
-                      <a:round/>
-                      <a:headEnd type="none" w="med" len="med"/>
-                      <a:tailEnd type="none" w="med" len="med"/>
-                    </a:lnB>
-                    <a:solidFill>
-                      <a:srgbClr val="1A1A2E"/>
-                    </a:solidFill>
-                  </a:tcPr>
-                </a:tc>
-                <a:tc>
-                  <a:txBody>
-                    <a:bodyPr/>
-                    <a:lstStyle/>
-                    <a:p>
-                      <a:pPr algn="ctr" indent="0" marL="0">
-                        <a:buNone/>
-                      </a:pPr>
-                      <a:r>
-                        <a:rPr lang="en-US" sz="1000" dirty="0">
-                          <a:solidFill>
-                            <a:srgbClr val="E8E8E8"/>
-                          </a:solidFill>
-                          <a:latin typeface="Calibri" pitchFamily="34" charset="0"/>
-                          <a:ea typeface="Calibri" pitchFamily="34" charset="-122"/>
-                          <a:cs typeface="Calibri" pitchFamily="34" charset="-120"/>
-                        </a:rPr>
-                        <a:t>~19:40</a:t>
-                      </a:r>
-                      <a:endParaRPr lang="en-US" sz="1000" dirty="0">
-                        <a:latin typeface="Calibri" charset="0"/>
-                        <a:ea typeface="Calibri" charset="0"/>
-                        <a:cs typeface="Calibri" charset="0"/>
-                      </a:endParaRPr>
-                    </a:p>
-                  </a:txBody>
-                  <a:tcPr marL="91440" marR="91440" marT="45720" marB="45720">
-                    <a:lnL w="12700" cap="flat" cmpd="sng" algn="ctr">
-                      <a:solidFill>
-                        <a:srgbClr val="0F3460"/>
-                      </a:solidFill>
-                      <a:prstDash val="solid"/>
-                      <a:round/>
-                      <a:headEnd type="none" w="med" len="med"/>
-                      <a:tailEnd type="none" w="med" len="med"/>
-                    </a:lnL>
-                    <a:lnR w="12700" cap="flat" cmpd="sng" algn="ctr">
-                      <a:solidFill>
-                        <a:srgbClr val="0F3460"/>
-                      </a:solidFill>
-                      <a:prstDash val="solid"/>
-                      <a:round/>
-                      <a:headEnd type="none" w="med" len="med"/>
-                      <a:tailEnd type="none" w="med" len="med"/>
-                    </a:lnR>
-                    <a:lnT w="12700" cap="flat" cmpd="sng" algn="ctr">
-                      <a:solidFill>
-                        <a:srgbClr val="0F3460"/>
-                      </a:solidFill>
-                      <a:prstDash val="solid"/>
-                      <a:round/>
-                      <a:headEnd type="none" w="med" len="med"/>
-                      <a:tailEnd type="none" w="med" len="med"/>
-                    </a:lnT>
-                    <a:lnB w="12700" cap="flat" cmpd="sng" algn="ctr">
-                      <a:solidFill>
-                        <a:srgbClr val="0F3460"/>
-                      </a:solidFill>
-                      <a:prstDash val="solid"/>
-                      <a:round/>
-                      <a:headEnd type="none" w="med" len="med"/>
-                      <a:tailEnd type="none" w="med" len="med"/>
-                    </a:lnB>
-                    <a:solidFill>
-                      <a:srgbClr val="1A1A2E"/>
-                    </a:solidFill>
-                  </a:tcPr>
-                </a:tc>
-                <a:tc>
-                  <a:txBody>
-                    <a:bodyPr/>
-                    <a:lstStyle/>
-                    <a:p>
-                      <a:pPr algn="ctr" indent="0" marL="0">
-                        <a:buNone/>
-                      </a:pPr>
-                      <a:r>
-                        <a:rPr lang="en-US" sz="1000" dirty="0">
-                          <a:solidFill>
-                            <a:srgbClr val="E8E8E8"/>
-                          </a:solidFill>
-                          <a:latin typeface="Calibri" pitchFamily="34" charset="0"/>
-                          <a:ea typeface="Calibri" pitchFamily="34" charset="-122"/>
-                          <a:cs typeface="Calibri" pitchFamily="34" charset="-120"/>
-                        </a:rPr>
-                        <a:t>1h 40m</a:t>
-                      </a:r>
-                      <a:endParaRPr lang="en-US" sz="1000" dirty="0">
-                        <a:latin typeface="Calibri" charset="0"/>
-                        <a:ea typeface="Calibri" charset="0"/>
-                        <a:cs typeface="Calibri" charset="0"/>
-                      </a:endParaRPr>
-                    </a:p>
-                  </a:txBody>
-                  <a:tcPr marL="91440" marR="91440" marT="45720" marB="45720">
-                    <a:lnL w="12700" cap="flat" cmpd="sng" algn="ctr">
-                      <a:solidFill>
-                        <a:srgbClr val="0F3460"/>
-                      </a:solidFill>
-                      <a:prstDash val="solid"/>
-                      <a:round/>
-                      <a:headEnd type="none" w="med" len="med"/>
-                      <a:tailEnd type="none" w="med" len="med"/>
-                    </a:lnL>
-                    <a:lnR w="12700" cap="flat" cmpd="sng" algn="ctr">
-                      <a:solidFill>
-                        <a:srgbClr val="0F3460"/>
-                      </a:solidFill>
-                      <a:prstDash val="solid"/>
-                      <a:round/>
-                      <a:headEnd type="none" w="med" len="med"/>
-                      <a:tailEnd type="none" w="med" len="med"/>
-                    </a:lnR>
-                    <a:lnT w="12700" cap="flat" cmpd="sng" algn="ctr">
-                      <a:solidFill>
-                        <a:srgbClr val="0F3460"/>
-                      </a:solidFill>
-                      <a:prstDash val="solid"/>
-                      <a:round/>
-                      <a:headEnd type="none" w="med" len="med"/>
-                      <a:tailEnd type="none" w="med" len="med"/>
-                    </a:lnT>
-                    <a:lnB w="12700" cap="flat" cmpd="sng" algn="ctr">
-                      <a:solidFill>
-                        <a:srgbClr val="0F3460"/>
-                      </a:solidFill>
-                      <a:prstDash val="solid"/>
-                      <a:round/>
-                      <a:headEnd type="none" w="med" len="med"/>
-                      <a:tailEnd type="none" w="med" len="med"/>
-                    </a:lnB>
-                    <a:solidFill>
-                      <a:srgbClr val="1A1A2E"/>
-                    </a:solidFill>
-                  </a:tcPr>
-                </a:tc>
-                <a:tc>
-                  <a:txBody>
-                    <a:bodyPr/>
-                    <a:lstStyle/>
-                    <a:p>
-                      <a:pPr algn="ctr" indent="0" marL="0">
-                        <a:buNone/>
-                      </a:pPr>
-                      <a:r>
-                        <a:rPr lang="en-US" sz="1000" dirty="0">
-                          <a:solidFill>
-                            <a:srgbClr val="E8E8E8"/>
-                          </a:solidFill>
-                          <a:latin typeface="Calibri" pitchFamily="34" charset="0"/>
-                          <a:ea typeface="Calibri" pitchFamily="34" charset="-122"/>
-                          <a:cs typeface="Calibri" pitchFamily="34" charset="-120"/>
-                        </a:rPr>
-                        <a:t>~€90</a:t>
-                      </a:r>
-                      <a:endParaRPr lang="en-US" sz="1000" dirty="0">
-                        <a:latin typeface="Calibri" charset="0"/>
-                        <a:ea typeface="Calibri" charset="0"/>
-                        <a:cs typeface="Calibri" charset="0"/>
-                      </a:endParaRPr>
-                    </a:p>
-                  </a:txBody>
-                  <a:tcPr marL="91440" marR="91440" marT="45720" marB="45720">
-                    <a:lnL w="12700" cap="flat" cmpd="sng" algn="ctr">
-                      <a:solidFill>
-                        <a:srgbClr val="0F3460"/>
-                      </a:solidFill>
-                      <a:prstDash val="solid"/>
-                      <a:round/>
-                      <a:headEnd type="none" w="med" len="med"/>
-                      <a:tailEnd type="none" w="med" len="med"/>
-                    </a:lnL>
-                    <a:lnR w="12700" cap="flat" cmpd="sng" algn="ctr">
-                      <a:solidFill>
-                        <a:srgbClr val="0F3460"/>
-                      </a:solidFill>
-                      <a:prstDash val="solid"/>
-                      <a:round/>
-                      <a:headEnd type="none" w="med" len="med"/>
-                      <a:tailEnd type="none" w="med" len="med"/>
-                    </a:lnR>
-                    <a:lnT w="12700" cap="flat" cmpd="sng" algn="ctr">
-                      <a:solidFill>
-                        <a:srgbClr val="0F3460"/>
-                      </a:solidFill>
-                      <a:prstDash val="solid"/>
-                      <a:round/>
-                      <a:headEnd type="none" w="med" len="med"/>
-                      <a:tailEnd type="none" w="med" len="med"/>
-                    </a:lnT>
-                    <a:lnB w="12700" cap="flat" cmpd="sng" algn="ctr">
-                      <a:solidFill>
-                        <a:srgbClr val="0F3460"/>
-                      </a:solidFill>
-                      <a:prstDash val="solid"/>
-                      <a:round/>
-                      <a:headEnd type="none" w="med" len="med"/>
-                      <a:tailEnd type="none" w="med" len="med"/>
-                    </a:lnB>
-                    <a:solidFill>
-                      <a:srgbClr val="1A1A2E"/>
-                    </a:solidFill>
-                  </a:tcPr>
-                </a:tc>
-                <a:tc>
-                  <a:txBody>
-                    <a:bodyPr/>
-                    <a:lstStyle/>
-                    <a:p>
-                      <a:pPr algn="ctr" indent="0" marL="0">
-                        <a:buNone/>
-                      </a:pPr>
-                      <a:r>
-                        <a:rPr lang="en-US" sz="1000" dirty="0">
-                          <a:solidFill>
-                            <a:srgbClr val="FFC107"/>
-                          </a:solidFill>
-                          <a:latin typeface="Calibri" pitchFamily="34" charset="0"/>
-                          <a:ea typeface="Calibri" pitchFamily="34" charset="-122"/>
-                          <a:cs typeface="Calibri" pitchFamily="34" charset="-120"/>
-                        </a:rPr>
-                        <a:t>~€360</a:t>
-                      </a:r>
-                      <a:endParaRPr lang="en-US" sz="1000" dirty="0">
-                        <a:latin typeface="Calibri" charset="0"/>
-                        <a:ea typeface="Calibri" charset="0"/>
-                        <a:cs typeface="Calibri" charset="0"/>
-                      </a:endParaRPr>
-                    </a:p>
-                  </a:txBody>
-                  <a:tcPr marL="91440" marR="91440" marT="45720" marB="45720">
-                    <a:lnL w="12700" cap="flat" cmpd="sng" algn="ctr">
-                      <a:solidFill>
-                        <a:srgbClr val="0F3460"/>
-                      </a:solidFill>
-                      <a:prstDash val="solid"/>
-                      <a:round/>
-                      <a:headEnd type="none" w="med" len="med"/>
-                      <a:tailEnd type="none" w="med" len="med"/>
-                    </a:lnL>
-                    <a:lnR w="12700" cap="flat" cmpd="sng" algn="ctr">
-                      <a:solidFill>
-                        <a:srgbClr val="0F3460"/>
-                      </a:solidFill>
-                      <a:prstDash val="solid"/>
-                      <a:round/>
-                      <a:headEnd type="none" w="med" len="med"/>
-                      <a:tailEnd type="none" w="med" len="med"/>
-                    </a:lnR>
-                    <a:lnT w="12700" cap="flat" cmpd="sng" algn="ctr">
-                      <a:solidFill>
-                        <a:srgbClr val="0F3460"/>
-                      </a:solidFill>
-                      <a:prstDash val="solid"/>
-                      <a:round/>
-                      <a:headEnd type="none" w="med" len="med"/>
-                      <a:tailEnd type="none" w="med" len="med"/>
-                    </a:lnT>
-                    <a:lnB w="12700" cap="flat" cmpd="sng" algn="ctr">
-                      <a:solidFill>
-                        <a:srgbClr val="0F3460"/>
-                      </a:solidFill>
-                      <a:prstDash val="solid"/>
-                      <a:round/>
-                      <a:headEnd type="none" w="med" len="med"/>
-                      <a:tailEnd type="none" w="med" len="med"/>
-                    </a:lnB>
-                    <a:solidFill>
-                      <a:srgbClr val="1A1A2E"/>
-                    </a:solidFill>
-                  </a:tcPr>
-                </a:tc>
-              </a:tr>
-              <a:tr h="475488">
-                <a:tc>
-                  <a:txBody>
-                    <a:bodyPr/>
-                    <a:lstStyle/>
-                    <a:p>
-                      <a:pPr algn="ctr" indent="0" marL="0">
-                        <a:buNone/>
-                      </a:pPr>
-                      <a:r>
-                        <a:rPr lang="en-US" sz="1000" dirty="0">
-                          <a:solidFill>
-                            <a:srgbClr val="E8E8E8"/>
-                          </a:solidFill>
-                          <a:latin typeface="Calibri" pitchFamily="34" charset="0"/>
-                          <a:ea typeface="Calibri" pitchFamily="34" charset="-122"/>
-                          <a:cs typeface="Calibri" pitchFamily="34" charset="-120"/>
-                        </a:rPr>
-                        <a:t>Mittag</a:t>
-                      </a:r>
-                      <a:endParaRPr lang="en-US" sz="1000" dirty="0">
-                        <a:latin typeface="Calibri" charset="0"/>
-                        <a:ea typeface="Calibri" charset="0"/>
-                        <a:cs typeface="Calibri" charset="0"/>
-                      </a:endParaRPr>
-                    </a:p>
-                  </a:txBody>
-                  <a:tcPr marL="91440" marR="91440" marT="45720" marB="45720">
-                    <a:lnL w="12700" cap="flat" cmpd="sng" algn="ctr">
-                      <a:solidFill>
-                        <a:srgbClr val="0F3460"/>
-                      </a:solidFill>
-                      <a:prstDash val="solid"/>
-                      <a:round/>
-                      <a:headEnd type="none" w="med" len="med"/>
-                      <a:tailEnd type="none" w="med" len="med"/>
-                    </a:lnL>
-                    <a:lnR w="12700" cap="flat" cmpd="sng" algn="ctr">
-                      <a:solidFill>
-                        <a:srgbClr val="0F3460"/>
-                      </a:solidFill>
-                      <a:prstDash val="solid"/>
-                      <a:round/>
-                      <a:headEnd type="none" w="med" len="med"/>
-                      <a:tailEnd type="none" w="med" len="med"/>
-                    </a:lnR>
-                    <a:lnT w="12700" cap="flat" cmpd="sng" algn="ctr">
-                      <a:solidFill>
-                        <a:srgbClr val="0F3460"/>
-                      </a:solidFill>
-                      <a:prstDash val="solid"/>
-                      <a:round/>
-                      <a:headEnd type="none" w="med" len="med"/>
-                      <a:tailEnd type="none" w="med" len="med"/>
-                    </a:lnT>
-                    <a:lnB w="12700" cap="flat" cmpd="sng" algn="ctr">
-                      <a:solidFill>
-                        <a:srgbClr val="0F3460"/>
-                      </a:solidFill>
-                      <a:prstDash val="solid"/>
-                      <a:round/>
-                      <a:headEnd type="none" w="med" len="med"/>
-                      <a:tailEnd type="none" w="med" len="med"/>
-                    </a:lnB>
-                    <a:solidFill>
-                      <a:srgbClr val="16213E"/>
-                    </a:solidFill>
-                  </a:tcPr>
-                </a:tc>
-                <a:tc>
-                  <a:txBody>
-                    <a:bodyPr/>
-                    <a:lstStyle/>
-                    <a:p>
-                      <a:pPr algn="ctr" indent="0" marL="0">
-                        <a:buNone/>
-                      </a:pPr>
-                      <a:r>
-                        <a:rPr lang="en-US" sz="1000" dirty="0">
-                          <a:solidFill>
-                            <a:srgbClr val="E8E8E8"/>
-                          </a:solidFill>
-                          <a:latin typeface="Calibri" pitchFamily="34" charset="0"/>
-                          <a:ea typeface="Calibri" pitchFamily="34" charset="-122"/>
-                          <a:cs typeface="Calibri" pitchFamily="34" charset="-120"/>
-                        </a:rPr>
-                        <a:t>ITA Airways</a:t>
-                      </a:r>
-                      <a:endParaRPr lang="en-US" sz="1000" dirty="0">
-                        <a:latin typeface="Calibri" charset="0"/>
-                        <a:ea typeface="Calibri" charset="0"/>
-                        <a:cs typeface="Calibri" charset="0"/>
-                      </a:endParaRPr>
-                    </a:p>
-                    <a:p>
-                      <a:pPr algn="ctr" indent="0" marL="0">
-                        <a:buNone/>
-                      </a:pPr>
-                      <a:r>
-                        <a:rPr lang="en-US" sz="1000" dirty="0">
-                          <a:solidFill>
-                            <a:srgbClr val="E8E8E8"/>
-                          </a:solidFill>
-                          <a:latin typeface="Calibri" pitchFamily="34" charset="0"/>
-                          <a:ea typeface="Calibri" pitchFamily="34" charset="-122"/>
-                          <a:cs typeface="Calibri" pitchFamily="34" charset="-120"/>
-                        </a:rPr>
-                        <a:t>(ex-Alitalia)</a:t>
-                      </a:r>
-                      <a:endParaRPr lang="en-US" sz="1000" dirty="0">
-                        <a:latin typeface="Calibri" charset="0"/>
-                        <a:ea typeface="Calibri" charset="0"/>
-                        <a:cs typeface="Calibri" charset="0"/>
-                      </a:endParaRPr>
-                    </a:p>
-                  </a:txBody>
-                  <a:tcPr marL="91440" marR="91440" marT="45720" marB="45720">
-                    <a:lnL w="12700" cap="flat" cmpd="sng" algn="ctr">
-                      <a:solidFill>
-                        <a:srgbClr val="0F3460"/>
-                      </a:solidFill>
-                      <a:prstDash val="solid"/>
-                      <a:round/>
-                      <a:headEnd type="none" w="med" len="med"/>
-                      <a:tailEnd type="none" w="med" len="med"/>
-                    </a:lnL>
-                    <a:lnR w="12700" cap="flat" cmpd="sng" algn="ctr">
-                      <a:solidFill>
-                        <a:srgbClr val="0F3460"/>
-                      </a:solidFill>
-                      <a:prstDash val="solid"/>
-                      <a:round/>
-                      <a:headEnd type="none" w="med" len="med"/>
-                      <a:tailEnd type="none" w="med" len="med"/>
-                    </a:lnR>
-                    <a:lnT w="12700" cap="flat" cmpd="sng" algn="ctr">
-                      <a:solidFill>
-                        <a:srgbClr val="0F3460"/>
-                      </a:solidFill>
-                      <a:prstDash val="solid"/>
-                      <a:round/>
-                      <a:headEnd type="none" w="med" len="med"/>
-                      <a:tailEnd type="none" w="med" len="med"/>
-                    </a:lnT>
-                    <a:lnB w="12700" cap="flat" cmpd="sng" algn="ctr">
-                      <a:solidFill>
-                        <a:srgbClr val="0F3460"/>
-                      </a:solidFill>
-                      <a:prstDash val="solid"/>
-                      <a:round/>
-                      <a:headEnd type="none" w="med" len="med"/>
-                      <a:tailEnd type="none" w="med" len="med"/>
-                    </a:lnB>
-                    <a:solidFill>
-                      <a:srgbClr val="16213E"/>
-                    </a:solidFill>
-                  </a:tcPr>
-                </a:tc>
-                <a:tc>
-                  <a:txBody>
-                    <a:bodyPr/>
-                    <a:lstStyle/>
-                    <a:p>
-                      <a:pPr algn="ctr" indent="0" marL="0">
-                        <a:buNone/>
-                      </a:pPr>
-                      <a:r>
-                        <a:rPr lang="en-US" sz="1000" dirty="0">
-                          <a:solidFill>
-                            <a:srgbClr val="E8E8E8"/>
-                          </a:solidFill>
-                          <a:latin typeface="Calibri" pitchFamily="34" charset="0"/>
-                          <a:ea typeface="Calibri" pitchFamily="34" charset="-122"/>
-                          <a:cs typeface="Calibri" pitchFamily="34" charset="-120"/>
-                        </a:rPr>
-                        <a:t>DUS → MXP</a:t>
+                        <a:t>DUS → SOF</a:t>
                       </a:r>
                       <a:endParaRPr lang="en-US" sz="1000" dirty="0">
                         <a:latin typeface="Calibri" charset="0"/>
@@ -26077,7 +24823,7 @@
                           <a:ea typeface="Calibri" pitchFamily="34" charset="-122"/>
                           <a:cs typeface="Calibri" pitchFamily="34" charset="-120"/>
                         </a:rPr>
-                        <a:t>~12:xx</a:t>
+                        <a:t>Morgens</a:t>
                       </a:r>
                       <a:endParaRPr lang="en-US" sz="1000" dirty="0">
                         <a:latin typeface="Calibri" charset="0"/>
@@ -26145,7 +24891,7 @@
                           <a:ea typeface="Calibri" pitchFamily="34" charset="-122"/>
                           <a:cs typeface="Calibri" pitchFamily="34" charset="-120"/>
                         </a:rPr>
-                        <a:t>~13:50</a:t>
+                        <a:t>~11:00</a:t>
                       </a:r>
                       <a:endParaRPr lang="en-US" sz="1000" dirty="0">
                         <a:latin typeface="Calibri" charset="0"/>
@@ -26213,7 +24959,7 @@
                           <a:ea typeface="Calibri" pitchFamily="34" charset="-122"/>
                           <a:cs typeface="Calibri" pitchFamily="34" charset="-120"/>
                         </a:rPr>
-                        <a:t>1h 40m</a:t>
+                        <a:t>~2h 30m</a:t>
                       </a:r>
                       <a:endParaRPr lang="en-US" sz="1000" dirty="0">
                         <a:latin typeface="Calibri" charset="0"/>
@@ -26281,7 +25027,7 @@
                           <a:ea typeface="Calibri" pitchFamily="34" charset="-122"/>
                           <a:cs typeface="Calibri" pitchFamily="34" charset="-120"/>
                         </a:rPr>
-                        <a:t>~€100–130</a:t>
+                        <a:t>~€80–120</a:t>
                       </a:r>
                       <a:endParaRPr lang="en-US" sz="1000" dirty="0">
                         <a:latin typeface="Calibri" charset="0"/>
@@ -26341,15 +25087,15 @@
                         <a:buNone/>
                       </a:pPr>
                       <a:r>
-                        <a:rPr lang="en-US" sz="1000" dirty="0">
+                        <a:rPr lang="en-US" sz="1000" b="1" dirty="0">
                           <a:solidFill>
-                            <a:srgbClr val="FFC107"/>
+                            <a:srgbClr val="FF8C00"/>
                           </a:solidFill>
                           <a:latin typeface="Calibri" pitchFamily="34" charset="0"/>
                           <a:ea typeface="Calibri" pitchFamily="34" charset="-122"/>
                           <a:cs typeface="Calibri" pitchFamily="34" charset="-120"/>
                         </a:rPr>
-                        <a:t>~€400–520</a:t>
+                        <a:t>~€320–480</a:t>
                       </a:r>
                       <a:endParaRPr lang="en-US" sz="1000" dirty="0">
                         <a:latin typeface="Calibri" charset="0"/>
@@ -26419,7 +25165,7 @@
                           <a:ea typeface="Calibri" pitchFamily="34" charset="-122"/>
                           <a:cs typeface="Calibri" pitchFamily="34" charset="-120"/>
                         </a:rPr>
-                        <a:t>Budget</a:t>
+                        <a:t>Option 2</a:t>
                       </a:r>
                       <a:endParaRPr lang="en-US" sz="1000" dirty="0">
                         <a:latin typeface="Calibri" charset="0"/>
@@ -26487,7 +25233,7 @@
                           <a:ea typeface="Calibri" pitchFamily="34" charset="-122"/>
                           <a:cs typeface="Calibri" pitchFamily="34" charset="-120"/>
                         </a:rPr>
-                        <a:t>FR</a:t>
+                        <a:t>Ryanair</a:t>
                       </a:r>
                       <a:endParaRPr lang="en-US" sz="1000" dirty="0">
                         <a:latin typeface="Calibri" charset="0"/>
@@ -26508,7 +25254,7 @@
                           <a:ea typeface="Calibri" pitchFamily="34" charset="-122"/>
                           <a:cs typeface="Calibri" pitchFamily="34" charset="-120"/>
                         </a:rPr>
-                        <a:t>Ryanair</a:t>
+                        <a:t>(FR)</a:t>
                       </a:r>
                       <a:endParaRPr lang="en-US" sz="1000" dirty="0">
                         <a:latin typeface="Calibri" charset="0"/>
@@ -26576,7 +25322,7 @@
                           <a:ea typeface="Calibri" pitchFamily="34" charset="-122"/>
                           <a:cs typeface="Calibri" pitchFamily="34" charset="-120"/>
                         </a:rPr>
-                        <a:t>DUS → BGY</a:t>
+                        <a:t>DUS → SOF</a:t>
                       </a:r>
                       <a:endParaRPr lang="en-US" sz="1000" dirty="0">
                         <a:latin typeface="Calibri" charset="0"/>
@@ -26801,7 +25547,7 @@
                           <a:ea typeface="Calibri" pitchFamily="34" charset="-122"/>
                           <a:cs typeface="Calibri" pitchFamily="34" charset="-120"/>
                         </a:rPr>
-                        <a:t>1h 45m</a:t>
+                        <a:t>~2h 30m</a:t>
                       </a:r>
                       <a:endParaRPr lang="en-US" sz="1000" dirty="0">
                         <a:latin typeface="Calibri" charset="0"/>
@@ -26869,7 +25615,7 @@
                           <a:ea typeface="Calibri" pitchFamily="34" charset="-122"/>
                           <a:cs typeface="Calibri" pitchFamily="34" charset="-120"/>
                         </a:rPr>
-                        <a:t>~€50–80</a:t>
+                        <a:t>~€50–90</a:t>
                       </a:r>
                       <a:endParaRPr lang="en-US" sz="1000" dirty="0">
                         <a:latin typeface="Calibri" charset="0"/>
@@ -26937,7 +25683,1183 @@
                           <a:ea typeface="Calibri" pitchFamily="34" charset="-122"/>
                           <a:cs typeface="Calibri" pitchFamily="34" charset="-120"/>
                         </a:rPr>
-                        <a:t>~€200–320</a:t>
+                        <a:t>~€200–360</a:t>
+                      </a:r>
+                      <a:endParaRPr lang="en-US" sz="1000" dirty="0">
+                        <a:latin typeface="Calibri" charset="0"/>
+                        <a:ea typeface="Calibri" charset="0"/>
+                        <a:cs typeface="Calibri" charset="0"/>
+                      </a:endParaRPr>
+                    </a:p>
+                  </a:txBody>
+                  <a:tcPr marL="91440" marR="91440" marT="45720" marB="45720">
+                    <a:lnL w="12700" cap="flat" cmpd="sng" algn="ctr">
+                      <a:solidFill>
+                        <a:srgbClr val="0F3460"/>
+                      </a:solidFill>
+                      <a:prstDash val="solid"/>
+                      <a:round/>
+                      <a:headEnd type="none" w="med" len="med"/>
+                      <a:tailEnd type="none" w="med" len="med"/>
+                    </a:lnL>
+                    <a:lnR w="12700" cap="flat" cmpd="sng" algn="ctr">
+                      <a:solidFill>
+                        <a:srgbClr val="0F3460"/>
+                      </a:solidFill>
+                      <a:prstDash val="solid"/>
+                      <a:round/>
+                      <a:headEnd type="none" w="med" len="med"/>
+                      <a:tailEnd type="none" w="med" len="med"/>
+                    </a:lnR>
+                    <a:lnT w="12700" cap="flat" cmpd="sng" algn="ctr">
+                      <a:solidFill>
+                        <a:srgbClr val="0F3460"/>
+                      </a:solidFill>
+                      <a:prstDash val="solid"/>
+                      <a:round/>
+                      <a:headEnd type="none" w="med" len="med"/>
+                      <a:tailEnd type="none" w="med" len="med"/>
+                    </a:lnT>
+                    <a:lnB w="12700" cap="flat" cmpd="sng" algn="ctr">
+                      <a:solidFill>
+                        <a:srgbClr val="0F3460"/>
+                      </a:solidFill>
+                      <a:prstDash val="solid"/>
+                      <a:round/>
+                      <a:headEnd type="none" w="med" len="med"/>
+                      <a:tailEnd type="none" w="med" len="med"/>
+                    </a:lnB>
+                    <a:solidFill>
+                      <a:srgbClr val="1A1A2E"/>
+                    </a:solidFill>
+                  </a:tcPr>
+                </a:tc>
+              </a:tr>
+              <a:tr h="475488">
+                <a:tc>
+                  <a:txBody>
+                    <a:bodyPr/>
+                    <a:lstStyle/>
+                    <a:p>
+                      <a:pPr algn="ctr" indent="0" marL="0">
+                        <a:buNone/>
+                      </a:pPr>
+                      <a:r>
+                        <a:rPr lang="en-US" sz="1000" dirty="0">
+                          <a:solidFill>
+                            <a:srgbClr val="E8E8E8"/>
+                          </a:solidFill>
+                          <a:latin typeface="Calibri" pitchFamily="34" charset="0"/>
+                          <a:ea typeface="Calibri" pitchFamily="34" charset="-122"/>
+                          <a:cs typeface="Calibri" pitchFamily="34" charset="-120"/>
+                        </a:rPr>
+                        <a:t>Vorabend</a:t>
+                      </a:r>
+                      <a:endParaRPr lang="en-US" sz="1000" dirty="0">
+                        <a:latin typeface="Calibri" charset="0"/>
+                        <a:ea typeface="Calibri" charset="0"/>
+                        <a:cs typeface="Calibri" charset="0"/>
+                      </a:endParaRPr>
+                    </a:p>
+                  </a:txBody>
+                  <a:tcPr marL="91440" marR="91440" marT="45720" marB="45720">
+                    <a:lnL w="12700" cap="flat" cmpd="sng" algn="ctr">
+                      <a:solidFill>
+                        <a:srgbClr val="0F3460"/>
+                      </a:solidFill>
+                      <a:prstDash val="solid"/>
+                      <a:round/>
+                      <a:headEnd type="none" w="med" len="med"/>
+                      <a:tailEnd type="none" w="med" len="med"/>
+                    </a:lnL>
+                    <a:lnR w="12700" cap="flat" cmpd="sng" algn="ctr">
+                      <a:solidFill>
+                        <a:srgbClr val="0F3460"/>
+                      </a:solidFill>
+                      <a:prstDash val="solid"/>
+                      <a:round/>
+                      <a:headEnd type="none" w="med" len="med"/>
+                      <a:tailEnd type="none" w="med" len="med"/>
+                    </a:lnR>
+                    <a:lnT w="12700" cap="flat" cmpd="sng" algn="ctr">
+                      <a:solidFill>
+                        <a:srgbClr val="0F3460"/>
+                      </a:solidFill>
+                      <a:prstDash val="solid"/>
+                      <a:round/>
+                      <a:headEnd type="none" w="med" len="med"/>
+                      <a:tailEnd type="none" w="med" len="med"/>
+                    </a:lnT>
+                    <a:lnB w="12700" cap="flat" cmpd="sng" algn="ctr">
+                      <a:solidFill>
+                        <a:srgbClr val="0F3460"/>
+                      </a:solidFill>
+                      <a:prstDash val="solid"/>
+                      <a:round/>
+                      <a:headEnd type="none" w="med" len="med"/>
+                      <a:tailEnd type="none" w="med" len="med"/>
+                    </a:lnB>
+                    <a:solidFill>
+                      <a:srgbClr val="16213E"/>
+                    </a:solidFill>
+                  </a:tcPr>
+                </a:tc>
+                <a:tc>
+                  <a:txBody>
+                    <a:bodyPr/>
+                    <a:lstStyle/>
+                    <a:p>
+                      <a:pPr algn="ctr" indent="0" marL="0">
+                        <a:buNone/>
+                      </a:pPr>
+                      <a:r>
+                        <a:rPr lang="en-US" sz="1000" dirty="0">
+                          <a:solidFill>
+                            <a:srgbClr val="E8E8E8"/>
+                          </a:solidFill>
+                          <a:latin typeface="Calibri" pitchFamily="34" charset="0"/>
+                          <a:ea typeface="Calibri" pitchFamily="34" charset="-122"/>
+                          <a:cs typeface="Calibri" pitchFamily="34" charset="-120"/>
+                        </a:rPr>
+                        <a:t>Bulgaria Air</a:t>
+                      </a:r>
+                      <a:endParaRPr lang="en-US" sz="1000" dirty="0">
+                        <a:latin typeface="Calibri" charset="0"/>
+                        <a:ea typeface="Calibri" charset="0"/>
+                        <a:cs typeface="Calibri" charset="0"/>
+                      </a:endParaRPr>
+                    </a:p>
+                    <a:p>
+                      <a:pPr algn="ctr" indent="0" marL="0">
+                        <a:buNone/>
+                      </a:pPr>
+                      <a:r>
+                        <a:rPr lang="en-US" sz="1000" dirty="0">
+                          <a:solidFill>
+                            <a:srgbClr val="E8E8E8"/>
+                          </a:solidFill>
+                          <a:latin typeface="Calibri" pitchFamily="34" charset="0"/>
+                          <a:ea typeface="Calibri" pitchFamily="34" charset="-122"/>
+                          <a:cs typeface="Calibri" pitchFamily="34" charset="-120"/>
+                        </a:rPr>
+                        <a:t>(FB)</a:t>
+                      </a:r>
+                      <a:endParaRPr lang="en-US" sz="1000" dirty="0">
+                        <a:latin typeface="Calibri" charset="0"/>
+                        <a:ea typeface="Calibri" charset="0"/>
+                        <a:cs typeface="Calibri" charset="0"/>
+                      </a:endParaRPr>
+                    </a:p>
+                  </a:txBody>
+                  <a:tcPr marL="91440" marR="91440" marT="45720" marB="45720">
+                    <a:lnL w="12700" cap="flat" cmpd="sng" algn="ctr">
+                      <a:solidFill>
+                        <a:srgbClr val="0F3460"/>
+                      </a:solidFill>
+                      <a:prstDash val="solid"/>
+                      <a:round/>
+                      <a:headEnd type="none" w="med" len="med"/>
+                      <a:tailEnd type="none" w="med" len="med"/>
+                    </a:lnL>
+                    <a:lnR w="12700" cap="flat" cmpd="sng" algn="ctr">
+                      <a:solidFill>
+                        <a:srgbClr val="0F3460"/>
+                      </a:solidFill>
+                      <a:prstDash val="solid"/>
+                      <a:round/>
+                      <a:headEnd type="none" w="med" len="med"/>
+                      <a:tailEnd type="none" w="med" len="med"/>
+                    </a:lnR>
+                    <a:lnT w="12700" cap="flat" cmpd="sng" algn="ctr">
+                      <a:solidFill>
+                        <a:srgbClr val="0F3460"/>
+                      </a:solidFill>
+                      <a:prstDash val="solid"/>
+                      <a:round/>
+                      <a:headEnd type="none" w="med" len="med"/>
+                      <a:tailEnd type="none" w="med" len="med"/>
+                    </a:lnT>
+                    <a:lnB w="12700" cap="flat" cmpd="sng" algn="ctr">
+                      <a:solidFill>
+                        <a:srgbClr val="0F3460"/>
+                      </a:solidFill>
+                      <a:prstDash val="solid"/>
+                      <a:round/>
+                      <a:headEnd type="none" w="med" len="med"/>
+                      <a:tailEnd type="none" w="med" len="med"/>
+                    </a:lnB>
+                    <a:solidFill>
+                      <a:srgbClr val="16213E"/>
+                    </a:solidFill>
+                  </a:tcPr>
+                </a:tc>
+                <a:tc>
+                  <a:txBody>
+                    <a:bodyPr/>
+                    <a:lstStyle/>
+                    <a:p>
+                      <a:pPr algn="ctr" indent="0" marL="0">
+                        <a:buNone/>
+                      </a:pPr>
+                      <a:r>
+                        <a:rPr lang="en-US" sz="1000" dirty="0">
+                          <a:solidFill>
+                            <a:srgbClr val="E8E8E8"/>
+                          </a:solidFill>
+                          <a:latin typeface="Calibri" pitchFamily="34" charset="0"/>
+                          <a:ea typeface="Calibri" pitchFamily="34" charset="-122"/>
+                          <a:cs typeface="Calibri" pitchFamily="34" charset="-120"/>
+                        </a:rPr>
+                        <a:t>DUS → SOF</a:t>
+                      </a:r>
+                      <a:endParaRPr lang="en-US" sz="1000" dirty="0">
+                        <a:latin typeface="Calibri" charset="0"/>
+                        <a:ea typeface="Calibri" charset="0"/>
+                        <a:cs typeface="Calibri" charset="0"/>
+                      </a:endParaRPr>
+                    </a:p>
+                    <a:p>
+                      <a:pPr algn="ctr" indent="0" marL="0">
+                        <a:buNone/>
+                      </a:pPr>
+                      <a:r>
+                        <a:rPr lang="en-US" sz="1000" dirty="0">
+                          <a:solidFill>
+                            <a:srgbClr val="E8E8E8"/>
+                          </a:solidFill>
+                          <a:latin typeface="Calibri" pitchFamily="34" charset="0"/>
+                          <a:ea typeface="Calibri" pitchFamily="34" charset="-122"/>
+                          <a:cs typeface="Calibri" pitchFamily="34" charset="-120"/>
+                        </a:rPr>
+                        <a:t>29. Okt.</a:t>
+                      </a:r>
+                      <a:endParaRPr lang="en-US" sz="1000" dirty="0">
+                        <a:latin typeface="Calibri" charset="0"/>
+                        <a:ea typeface="Calibri" charset="0"/>
+                        <a:cs typeface="Calibri" charset="0"/>
+                      </a:endParaRPr>
+                    </a:p>
+                  </a:txBody>
+                  <a:tcPr marL="91440" marR="91440" marT="45720" marB="45720">
+                    <a:lnL w="12700" cap="flat" cmpd="sng" algn="ctr">
+                      <a:solidFill>
+                        <a:srgbClr val="0F3460"/>
+                      </a:solidFill>
+                      <a:prstDash val="solid"/>
+                      <a:round/>
+                      <a:headEnd type="none" w="med" len="med"/>
+                      <a:tailEnd type="none" w="med" len="med"/>
+                    </a:lnL>
+                    <a:lnR w="12700" cap="flat" cmpd="sng" algn="ctr">
+                      <a:solidFill>
+                        <a:srgbClr val="0F3460"/>
+                      </a:solidFill>
+                      <a:prstDash val="solid"/>
+                      <a:round/>
+                      <a:headEnd type="none" w="med" len="med"/>
+                      <a:tailEnd type="none" w="med" len="med"/>
+                    </a:lnR>
+                    <a:lnT w="12700" cap="flat" cmpd="sng" algn="ctr">
+                      <a:solidFill>
+                        <a:srgbClr val="0F3460"/>
+                      </a:solidFill>
+                      <a:prstDash val="solid"/>
+                      <a:round/>
+                      <a:headEnd type="none" w="med" len="med"/>
+                      <a:tailEnd type="none" w="med" len="med"/>
+                    </a:lnT>
+                    <a:lnB w="12700" cap="flat" cmpd="sng" algn="ctr">
+                      <a:solidFill>
+                        <a:srgbClr val="0F3460"/>
+                      </a:solidFill>
+                      <a:prstDash val="solid"/>
+                      <a:round/>
+                      <a:headEnd type="none" w="med" len="med"/>
+                      <a:tailEnd type="none" w="med" len="med"/>
+                    </a:lnB>
+                    <a:solidFill>
+                      <a:srgbClr val="16213E"/>
+                    </a:solidFill>
+                  </a:tcPr>
+                </a:tc>
+                <a:tc>
+                  <a:txBody>
+                    <a:bodyPr/>
+                    <a:lstStyle/>
+                    <a:p>
+                      <a:pPr algn="ctr" indent="0" marL="0">
+                        <a:buNone/>
+                      </a:pPr>
+                      <a:r>
+                        <a:rPr lang="en-US" sz="1000" dirty="0">
+                          <a:solidFill>
+                            <a:srgbClr val="E8E8E8"/>
+                          </a:solidFill>
+                          <a:latin typeface="Calibri" pitchFamily="34" charset="0"/>
+                          <a:ea typeface="Calibri" pitchFamily="34" charset="-122"/>
+                          <a:cs typeface="Calibri" pitchFamily="34" charset="-120"/>
+                        </a:rPr>
+                        <a:t>Abends</a:t>
+                      </a:r>
+                      <a:endParaRPr lang="en-US" sz="1000" dirty="0">
+                        <a:latin typeface="Calibri" charset="0"/>
+                        <a:ea typeface="Calibri" charset="0"/>
+                        <a:cs typeface="Calibri" charset="0"/>
+                      </a:endParaRPr>
+                    </a:p>
+                  </a:txBody>
+                  <a:tcPr marL="91440" marR="91440" marT="45720" marB="45720">
+                    <a:lnL w="12700" cap="flat" cmpd="sng" algn="ctr">
+                      <a:solidFill>
+                        <a:srgbClr val="0F3460"/>
+                      </a:solidFill>
+                      <a:prstDash val="solid"/>
+                      <a:round/>
+                      <a:headEnd type="none" w="med" len="med"/>
+                      <a:tailEnd type="none" w="med" len="med"/>
+                    </a:lnL>
+                    <a:lnR w="12700" cap="flat" cmpd="sng" algn="ctr">
+                      <a:solidFill>
+                        <a:srgbClr val="0F3460"/>
+                      </a:solidFill>
+                      <a:prstDash val="solid"/>
+                      <a:round/>
+                      <a:headEnd type="none" w="med" len="med"/>
+                      <a:tailEnd type="none" w="med" len="med"/>
+                    </a:lnR>
+                    <a:lnT w="12700" cap="flat" cmpd="sng" algn="ctr">
+                      <a:solidFill>
+                        <a:srgbClr val="0F3460"/>
+                      </a:solidFill>
+                      <a:prstDash val="solid"/>
+                      <a:round/>
+                      <a:headEnd type="none" w="med" len="med"/>
+                      <a:tailEnd type="none" w="med" len="med"/>
+                    </a:lnT>
+                    <a:lnB w="12700" cap="flat" cmpd="sng" algn="ctr">
+                      <a:solidFill>
+                        <a:srgbClr val="0F3460"/>
+                      </a:solidFill>
+                      <a:prstDash val="solid"/>
+                      <a:round/>
+                      <a:headEnd type="none" w="med" len="med"/>
+                      <a:tailEnd type="none" w="med" len="med"/>
+                    </a:lnB>
+                    <a:solidFill>
+                      <a:srgbClr val="16213E"/>
+                    </a:solidFill>
+                  </a:tcPr>
+                </a:tc>
+                <a:tc>
+                  <a:txBody>
+                    <a:bodyPr/>
+                    <a:lstStyle/>
+                    <a:p>
+                      <a:pPr algn="ctr" indent="0" marL="0">
+                        <a:buNone/>
+                      </a:pPr>
+                      <a:r>
+                        <a:rPr lang="en-US" sz="1000" dirty="0">
+                          <a:solidFill>
+                            <a:srgbClr val="E8E8E8"/>
+                          </a:solidFill>
+                          <a:latin typeface="Calibri" pitchFamily="34" charset="0"/>
+                          <a:ea typeface="Calibri" pitchFamily="34" charset="-122"/>
+                          <a:cs typeface="Calibri" pitchFamily="34" charset="-120"/>
+                        </a:rPr>
+                        <a:t>Abends</a:t>
+                      </a:r>
+                      <a:endParaRPr lang="en-US" sz="1000" dirty="0">
+                        <a:latin typeface="Calibri" charset="0"/>
+                        <a:ea typeface="Calibri" charset="0"/>
+                        <a:cs typeface="Calibri" charset="0"/>
+                      </a:endParaRPr>
+                    </a:p>
+                  </a:txBody>
+                  <a:tcPr marL="91440" marR="91440" marT="45720" marB="45720">
+                    <a:lnL w="12700" cap="flat" cmpd="sng" algn="ctr">
+                      <a:solidFill>
+                        <a:srgbClr val="0F3460"/>
+                      </a:solidFill>
+                      <a:prstDash val="solid"/>
+                      <a:round/>
+                      <a:headEnd type="none" w="med" len="med"/>
+                      <a:tailEnd type="none" w="med" len="med"/>
+                    </a:lnL>
+                    <a:lnR w="12700" cap="flat" cmpd="sng" algn="ctr">
+                      <a:solidFill>
+                        <a:srgbClr val="0F3460"/>
+                      </a:solidFill>
+                      <a:prstDash val="solid"/>
+                      <a:round/>
+                      <a:headEnd type="none" w="med" len="med"/>
+                      <a:tailEnd type="none" w="med" len="med"/>
+                    </a:lnR>
+                    <a:lnT w="12700" cap="flat" cmpd="sng" algn="ctr">
+                      <a:solidFill>
+                        <a:srgbClr val="0F3460"/>
+                      </a:solidFill>
+                      <a:prstDash val="solid"/>
+                      <a:round/>
+                      <a:headEnd type="none" w="med" len="med"/>
+                      <a:tailEnd type="none" w="med" len="med"/>
+                    </a:lnT>
+                    <a:lnB w="12700" cap="flat" cmpd="sng" algn="ctr">
+                      <a:solidFill>
+                        <a:srgbClr val="0F3460"/>
+                      </a:solidFill>
+                      <a:prstDash val="solid"/>
+                      <a:round/>
+                      <a:headEnd type="none" w="med" len="med"/>
+                      <a:tailEnd type="none" w="med" len="med"/>
+                    </a:lnB>
+                    <a:solidFill>
+                      <a:srgbClr val="16213E"/>
+                    </a:solidFill>
+                  </a:tcPr>
+                </a:tc>
+                <a:tc>
+                  <a:txBody>
+                    <a:bodyPr/>
+                    <a:lstStyle/>
+                    <a:p>
+                      <a:pPr algn="ctr" indent="0" marL="0">
+                        <a:buNone/>
+                      </a:pPr>
+                      <a:r>
+                        <a:rPr lang="en-US" sz="1000" dirty="0">
+                          <a:solidFill>
+                            <a:srgbClr val="E8E8E8"/>
+                          </a:solidFill>
+                          <a:latin typeface="Calibri" pitchFamily="34" charset="0"/>
+                          <a:ea typeface="Calibri" pitchFamily="34" charset="-122"/>
+                          <a:cs typeface="Calibri" pitchFamily="34" charset="-120"/>
+                        </a:rPr>
+                        <a:t>~2h 30m</a:t>
+                      </a:r>
+                      <a:endParaRPr lang="en-US" sz="1000" dirty="0">
+                        <a:latin typeface="Calibri" charset="0"/>
+                        <a:ea typeface="Calibri" charset="0"/>
+                        <a:cs typeface="Calibri" charset="0"/>
+                      </a:endParaRPr>
+                    </a:p>
+                  </a:txBody>
+                  <a:tcPr marL="91440" marR="91440" marT="45720" marB="45720">
+                    <a:lnL w="12700" cap="flat" cmpd="sng" algn="ctr">
+                      <a:solidFill>
+                        <a:srgbClr val="0F3460"/>
+                      </a:solidFill>
+                      <a:prstDash val="solid"/>
+                      <a:round/>
+                      <a:headEnd type="none" w="med" len="med"/>
+                      <a:tailEnd type="none" w="med" len="med"/>
+                    </a:lnL>
+                    <a:lnR w="12700" cap="flat" cmpd="sng" algn="ctr">
+                      <a:solidFill>
+                        <a:srgbClr val="0F3460"/>
+                      </a:solidFill>
+                      <a:prstDash val="solid"/>
+                      <a:round/>
+                      <a:headEnd type="none" w="med" len="med"/>
+                      <a:tailEnd type="none" w="med" len="med"/>
+                    </a:lnR>
+                    <a:lnT w="12700" cap="flat" cmpd="sng" algn="ctr">
+                      <a:solidFill>
+                        <a:srgbClr val="0F3460"/>
+                      </a:solidFill>
+                      <a:prstDash val="solid"/>
+                      <a:round/>
+                      <a:headEnd type="none" w="med" len="med"/>
+                      <a:tailEnd type="none" w="med" len="med"/>
+                    </a:lnT>
+                    <a:lnB w="12700" cap="flat" cmpd="sng" algn="ctr">
+                      <a:solidFill>
+                        <a:srgbClr val="0F3460"/>
+                      </a:solidFill>
+                      <a:prstDash val="solid"/>
+                      <a:round/>
+                      <a:headEnd type="none" w="med" len="med"/>
+                      <a:tailEnd type="none" w="med" len="med"/>
+                    </a:lnB>
+                    <a:solidFill>
+                      <a:srgbClr val="16213E"/>
+                    </a:solidFill>
+                  </a:tcPr>
+                </a:tc>
+                <a:tc>
+                  <a:txBody>
+                    <a:bodyPr/>
+                    <a:lstStyle/>
+                    <a:p>
+                      <a:pPr algn="ctr" indent="0" marL="0">
+                        <a:buNone/>
+                      </a:pPr>
+                      <a:r>
+                        <a:rPr lang="en-US" sz="1000" dirty="0">
+                          <a:solidFill>
+                            <a:srgbClr val="E8E8E8"/>
+                          </a:solidFill>
+                          <a:latin typeface="Calibri" pitchFamily="34" charset="0"/>
+                          <a:ea typeface="Calibri" pitchFamily="34" charset="-122"/>
+                          <a:cs typeface="Calibri" pitchFamily="34" charset="-120"/>
+                        </a:rPr>
+                        <a:t>~€90–130</a:t>
+                      </a:r>
+                      <a:endParaRPr lang="en-US" sz="1000" dirty="0">
+                        <a:latin typeface="Calibri" charset="0"/>
+                        <a:ea typeface="Calibri" charset="0"/>
+                        <a:cs typeface="Calibri" charset="0"/>
+                      </a:endParaRPr>
+                    </a:p>
+                  </a:txBody>
+                  <a:tcPr marL="91440" marR="91440" marT="45720" marB="45720">
+                    <a:lnL w="12700" cap="flat" cmpd="sng" algn="ctr">
+                      <a:solidFill>
+                        <a:srgbClr val="0F3460"/>
+                      </a:solidFill>
+                      <a:prstDash val="solid"/>
+                      <a:round/>
+                      <a:headEnd type="none" w="med" len="med"/>
+                      <a:tailEnd type="none" w="med" len="med"/>
+                    </a:lnL>
+                    <a:lnR w="12700" cap="flat" cmpd="sng" algn="ctr">
+                      <a:solidFill>
+                        <a:srgbClr val="0F3460"/>
+                      </a:solidFill>
+                      <a:prstDash val="solid"/>
+                      <a:round/>
+                      <a:headEnd type="none" w="med" len="med"/>
+                      <a:tailEnd type="none" w="med" len="med"/>
+                    </a:lnR>
+                    <a:lnT w="12700" cap="flat" cmpd="sng" algn="ctr">
+                      <a:solidFill>
+                        <a:srgbClr val="0F3460"/>
+                      </a:solidFill>
+                      <a:prstDash val="solid"/>
+                      <a:round/>
+                      <a:headEnd type="none" w="med" len="med"/>
+                      <a:tailEnd type="none" w="med" len="med"/>
+                    </a:lnT>
+                    <a:lnB w="12700" cap="flat" cmpd="sng" algn="ctr">
+                      <a:solidFill>
+                        <a:srgbClr val="0F3460"/>
+                      </a:solidFill>
+                      <a:prstDash val="solid"/>
+                      <a:round/>
+                      <a:headEnd type="none" w="med" len="med"/>
+                      <a:tailEnd type="none" w="med" len="med"/>
+                    </a:lnB>
+                    <a:solidFill>
+                      <a:srgbClr val="16213E"/>
+                    </a:solidFill>
+                  </a:tcPr>
+                </a:tc>
+                <a:tc>
+                  <a:txBody>
+                    <a:bodyPr/>
+                    <a:lstStyle/>
+                    <a:p>
+                      <a:pPr algn="ctr" indent="0" marL="0">
+                        <a:buNone/>
+                      </a:pPr>
+                      <a:r>
+                        <a:rPr lang="en-US" sz="1000" dirty="0">
+                          <a:solidFill>
+                            <a:srgbClr val="FFC107"/>
+                          </a:solidFill>
+                          <a:latin typeface="Calibri" pitchFamily="34" charset="0"/>
+                          <a:ea typeface="Calibri" pitchFamily="34" charset="-122"/>
+                          <a:cs typeface="Calibri" pitchFamily="34" charset="-120"/>
+                        </a:rPr>
+                        <a:t>~€360–520</a:t>
+                      </a:r>
+                      <a:endParaRPr lang="en-US" sz="1000" dirty="0">
+                        <a:latin typeface="Calibri" charset="0"/>
+                        <a:ea typeface="Calibri" charset="0"/>
+                        <a:cs typeface="Calibri" charset="0"/>
+                      </a:endParaRPr>
+                    </a:p>
+                  </a:txBody>
+                  <a:tcPr marL="91440" marR="91440" marT="45720" marB="45720">
+                    <a:lnL w="12700" cap="flat" cmpd="sng" algn="ctr">
+                      <a:solidFill>
+                        <a:srgbClr val="0F3460"/>
+                      </a:solidFill>
+                      <a:prstDash val="solid"/>
+                      <a:round/>
+                      <a:headEnd type="none" w="med" len="med"/>
+                      <a:tailEnd type="none" w="med" len="med"/>
+                    </a:lnL>
+                    <a:lnR w="12700" cap="flat" cmpd="sng" algn="ctr">
+                      <a:solidFill>
+                        <a:srgbClr val="0F3460"/>
+                      </a:solidFill>
+                      <a:prstDash val="solid"/>
+                      <a:round/>
+                      <a:headEnd type="none" w="med" len="med"/>
+                      <a:tailEnd type="none" w="med" len="med"/>
+                    </a:lnR>
+                    <a:lnT w="12700" cap="flat" cmpd="sng" algn="ctr">
+                      <a:solidFill>
+                        <a:srgbClr val="0F3460"/>
+                      </a:solidFill>
+                      <a:prstDash val="solid"/>
+                      <a:round/>
+                      <a:headEnd type="none" w="med" len="med"/>
+                      <a:tailEnd type="none" w="med" len="med"/>
+                    </a:lnT>
+                    <a:lnB w="12700" cap="flat" cmpd="sng" algn="ctr">
+                      <a:solidFill>
+                        <a:srgbClr val="0F3460"/>
+                      </a:solidFill>
+                      <a:prstDash val="solid"/>
+                      <a:round/>
+                      <a:headEnd type="none" w="med" len="med"/>
+                      <a:tailEnd type="none" w="med" len="med"/>
+                    </a:lnB>
+                    <a:solidFill>
+                      <a:srgbClr val="16213E"/>
+                    </a:solidFill>
+                  </a:tcPr>
+                </a:tc>
+              </a:tr>
+              <a:tr h="475488">
+                <a:tc>
+                  <a:txBody>
+                    <a:bodyPr/>
+                    <a:lstStyle/>
+                    <a:p>
+                      <a:pPr algn="ctr" indent="0" marL="0">
+                        <a:buNone/>
+                      </a:pPr>
+                      <a:r>
+                        <a:rPr lang="en-US" sz="1000" dirty="0">
+                          <a:solidFill>
+                            <a:srgbClr val="E8E8E8"/>
+                          </a:solidFill>
+                          <a:latin typeface="Calibri" pitchFamily="34" charset="0"/>
+                          <a:ea typeface="Calibri" pitchFamily="34" charset="-122"/>
+                          <a:cs typeface="Calibri" pitchFamily="34" charset="-120"/>
+                        </a:rPr>
+                        <a:t>Budget+</a:t>
+                      </a:r>
+                      <a:endParaRPr lang="en-US" sz="1000" dirty="0">
+                        <a:latin typeface="Calibri" charset="0"/>
+                        <a:ea typeface="Calibri" charset="0"/>
+                        <a:cs typeface="Calibri" charset="0"/>
+                      </a:endParaRPr>
+                    </a:p>
+                  </a:txBody>
+                  <a:tcPr marL="91440" marR="91440" marT="45720" marB="45720">
+                    <a:lnL w="12700" cap="flat" cmpd="sng" algn="ctr">
+                      <a:solidFill>
+                        <a:srgbClr val="0F3460"/>
+                      </a:solidFill>
+                      <a:prstDash val="solid"/>
+                      <a:round/>
+                      <a:headEnd type="none" w="med" len="med"/>
+                      <a:tailEnd type="none" w="med" len="med"/>
+                    </a:lnL>
+                    <a:lnR w="12700" cap="flat" cmpd="sng" algn="ctr">
+                      <a:solidFill>
+                        <a:srgbClr val="0F3460"/>
+                      </a:solidFill>
+                      <a:prstDash val="solid"/>
+                      <a:round/>
+                      <a:headEnd type="none" w="med" len="med"/>
+                      <a:tailEnd type="none" w="med" len="med"/>
+                    </a:lnR>
+                    <a:lnT w="12700" cap="flat" cmpd="sng" algn="ctr">
+                      <a:solidFill>
+                        <a:srgbClr val="0F3460"/>
+                      </a:solidFill>
+                      <a:prstDash val="solid"/>
+                      <a:round/>
+                      <a:headEnd type="none" w="med" len="med"/>
+                      <a:tailEnd type="none" w="med" len="med"/>
+                    </a:lnT>
+                    <a:lnB w="12700" cap="flat" cmpd="sng" algn="ctr">
+                      <a:solidFill>
+                        <a:srgbClr val="0F3460"/>
+                      </a:solidFill>
+                      <a:prstDash val="solid"/>
+                      <a:round/>
+                      <a:headEnd type="none" w="med" len="med"/>
+                      <a:tailEnd type="none" w="med" len="med"/>
+                    </a:lnB>
+                    <a:solidFill>
+                      <a:srgbClr val="1A1A2E"/>
+                    </a:solidFill>
+                  </a:tcPr>
+                </a:tc>
+                <a:tc>
+                  <a:txBody>
+                    <a:bodyPr/>
+                    <a:lstStyle/>
+                    <a:p>
+                      <a:pPr algn="ctr" indent="0" marL="0">
+                        <a:buNone/>
+                      </a:pPr>
+                      <a:r>
+                        <a:rPr lang="en-US" sz="1000" dirty="0">
+                          <a:solidFill>
+                            <a:srgbClr val="E8E8E8"/>
+                          </a:solidFill>
+                          <a:latin typeface="Calibri" pitchFamily="34" charset="0"/>
+                          <a:ea typeface="Calibri" pitchFamily="34" charset="-122"/>
+                          <a:cs typeface="Calibri" pitchFamily="34" charset="-120"/>
+                        </a:rPr>
+                        <a:t>Wizz Air</a:t>
+                      </a:r>
+                      <a:endParaRPr lang="en-US" sz="1000" dirty="0">
+                        <a:latin typeface="Calibri" charset="0"/>
+                        <a:ea typeface="Calibri" charset="0"/>
+                        <a:cs typeface="Calibri" charset="0"/>
+                      </a:endParaRPr>
+                    </a:p>
+                    <a:p>
+                      <a:pPr algn="ctr" indent="0" marL="0">
+                        <a:buNone/>
+                      </a:pPr>
+                      <a:r>
+                        <a:rPr lang="en-US" sz="1000" dirty="0">
+                          <a:solidFill>
+                            <a:srgbClr val="E8E8E8"/>
+                          </a:solidFill>
+                          <a:latin typeface="Calibri" pitchFamily="34" charset="0"/>
+                          <a:ea typeface="Calibri" pitchFamily="34" charset="-122"/>
+                          <a:cs typeface="Calibri" pitchFamily="34" charset="-120"/>
+                        </a:rPr>
+                        <a:t>(W6)</a:t>
+                      </a:r>
+                      <a:endParaRPr lang="en-US" sz="1000" dirty="0">
+                        <a:latin typeface="Calibri" charset="0"/>
+                        <a:ea typeface="Calibri" charset="0"/>
+                        <a:cs typeface="Calibri" charset="0"/>
+                      </a:endParaRPr>
+                    </a:p>
+                  </a:txBody>
+                  <a:tcPr marL="91440" marR="91440" marT="45720" marB="45720">
+                    <a:lnL w="12700" cap="flat" cmpd="sng" algn="ctr">
+                      <a:solidFill>
+                        <a:srgbClr val="0F3460"/>
+                      </a:solidFill>
+                      <a:prstDash val="solid"/>
+                      <a:round/>
+                      <a:headEnd type="none" w="med" len="med"/>
+                      <a:tailEnd type="none" w="med" len="med"/>
+                    </a:lnL>
+                    <a:lnR w="12700" cap="flat" cmpd="sng" algn="ctr">
+                      <a:solidFill>
+                        <a:srgbClr val="0F3460"/>
+                      </a:solidFill>
+                      <a:prstDash val="solid"/>
+                      <a:round/>
+                      <a:headEnd type="none" w="med" len="med"/>
+                      <a:tailEnd type="none" w="med" len="med"/>
+                    </a:lnR>
+                    <a:lnT w="12700" cap="flat" cmpd="sng" algn="ctr">
+                      <a:solidFill>
+                        <a:srgbClr val="0F3460"/>
+                      </a:solidFill>
+                      <a:prstDash val="solid"/>
+                      <a:round/>
+                      <a:headEnd type="none" w="med" len="med"/>
+                      <a:tailEnd type="none" w="med" len="med"/>
+                    </a:lnT>
+                    <a:lnB w="12700" cap="flat" cmpd="sng" algn="ctr">
+                      <a:solidFill>
+                        <a:srgbClr val="0F3460"/>
+                      </a:solidFill>
+                      <a:prstDash val="solid"/>
+                      <a:round/>
+                      <a:headEnd type="none" w="med" len="med"/>
+                      <a:tailEnd type="none" w="med" len="med"/>
+                    </a:lnB>
+                    <a:solidFill>
+                      <a:srgbClr val="1A1A2E"/>
+                    </a:solidFill>
+                  </a:tcPr>
+                </a:tc>
+                <a:tc>
+                  <a:txBody>
+                    <a:bodyPr/>
+                    <a:lstStyle/>
+                    <a:p>
+                      <a:pPr algn="ctr" indent="0" marL="0">
+                        <a:buNone/>
+                      </a:pPr>
+                      <a:r>
+                        <a:rPr lang="en-US" sz="1000" dirty="0">
+                          <a:solidFill>
+                            <a:srgbClr val="E8E8E8"/>
+                          </a:solidFill>
+                          <a:latin typeface="Calibri" pitchFamily="34" charset="0"/>
+                          <a:ea typeface="Calibri" pitchFamily="34" charset="-122"/>
+                          <a:cs typeface="Calibri" pitchFamily="34" charset="-120"/>
+                        </a:rPr>
+                        <a:t>DUS → SOF</a:t>
+                      </a:r>
+                      <a:endParaRPr lang="en-US" sz="1000" dirty="0">
+                        <a:latin typeface="Calibri" charset="0"/>
+                        <a:ea typeface="Calibri" charset="0"/>
+                        <a:cs typeface="Calibri" charset="0"/>
+                      </a:endParaRPr>
+                    </a:p>
+                    <a:p>
+                      <a:pPr algn="ctr" indent="0" marL="0">
+                        <a:buNone/>
+                      </a:pPr>
+                      <a:r>
+                        <a:rPr lang="en-US" sz="1000" dirty="0">
+                          <a:solidFill>
+                            <a:srgbClr val="E8E8E8"/>
+                          </a:solidFill>
+                          <a:latin typeface="Calibri" pitchFamily="34" charset="0"/>
+                          <a:ea typeface="Calibri" pitchFamily="34" charset="-122"/>
+                          <a:cs typeface="Calibri" pitchFamily="34" charset="-120"/>
+                        </a:rPr>
+                        <a:t>30. Okt.</a:t>
+                      </a:r>
+                      <a:endParaRPr lang="en-US" sz="1000" dirty="0">
+                        <a:latin typeface="Calibri" charset="0"/>
+                        <a:ea typeface="Calibri" charset="0"/>
+                        <a:cs typeface="Calibri" charset="0"/>
+                      </a:endParaRPr>
+                    </a:p>
+                  </a:txBody>
+                  <a:tcPr marL="91440" marR="91440" marT="45720" marB="45720">
+                    <a:lnL w="12700" cap="flat" cmpd="sng" algn="ctr">
+                      <a:solidFill>
+                        <a:srgbClr val="0F3460"/>
+                      </a:solidFill>
+                      <a:prstDash val="solid"/>
+                      <a:round/>
+                      <a:headEnd type="none" w="med" len="med"/>
+                      <a:tailEnd type="none" w="med" len="med"/>
+                    </a:lnL>
+                    <a:lnR w="12700" cap="flat" cmpd="sng" algn="ctr">
+                      <a:solidFill>
+                        <a:srgbClr val="0F3460"/>
+                      </a:solidFill>
+                      <a:prstDash val="solid"/>
+                      <a:round/>
+                      <a:headEnd type="none" w="med" len="med"/>
+                      <a:tailEnd type="none" w="med" len="med"/>
+                    </a:lnR>
+                    <a:lnT w="12700" cap="flat" cmpd="sng" algn="ctr">
+                      <a:solidFill>
+                        <a:srgbClr val="0F3460"/>
+                      </a:solidFill>
+                      <a:prstDash val="solid"/>
+                      <a:round/>
+                      <a:headEnd type="none" w="med" len="med"/>
+                      <a:tailEnd type="none" w="med" len="med"/>
+                    </a:lnT>
+                    <a:lnB w="12700" cap="flat" cmpd="sng" algn="ctr">
+                      <a:solidFill>
+                        <a:srgbClr val="0F3460"/>
+                      </a:solidFill>
+                      <a:prstDash val="solid"/>
+                      <a:round/>
+                      <a:headEnd type="none" w="med" len="med"/>
+                      <a:tailEnd type="none" w="med" len="med"/>
+                    </a:lnB>
+                    <a:solidFill>
+                      <a:srgbClr val="1A1A2E"/>
+                    </a:solidFill>
+                  </a:tcPr>
+                </a:tc>
+                <a:tc>
+                  <a:txBody>
+                    <a:bodyPr/>
+                    <a:lstStyle/>
+                    <a:p>
+                      <a:pPr algn="ctr" indent="0" marL="0">
+                        <a:buNone/>
+                      </a:pPr>
+                      <a:r>
+                        <a:rPr lang="en-US" sz="1000" dirty="0">
+                          <a:solidFill>
+                            <a:srgbClr val="E8E8E8"/>
+                          </a:solidFill>
+                          <a:latin typeface="Calibri" pitchFamily="34" charset="0"/>
+                          <a:ea typeface="Calibri" pitchFamily="34" charset="-122"/>
+                          <a:cs typeface="Calibri" pitchFamily="34" charset="-120"/>
+                        </a:rPr>
+                        <a:t>Verschieden</a:t>
+                      </a:r>
+                      <a:endParaRPr lang="en-US" sz="1000" dirty="0">
+                        <a:latin typeface="Calibri" charset="0"/>
+                        <a:ea typeface="Calibri" charset="0"/>
+                        <a:cs typeface="Calibri" charset="0"/>
+                      </a:endParaRPr>
+                    </a:p>
+                  </a:txBody>
+                  <a:tcPr marL="91440" marR="91440" marT="45720" marB="45720">
+                    <a:lnL w="12700" cap="flat" cmpd="sng" algn="ctr">
+                      <a:solidFill>
+                        <a:srgbClr val="0F3460"/>
+                      </a:solidFill>
+                      <a:prstDash val="solid"/>
+                      <a:round/>
+                      <a:headEnd type="none" w="med" len="med"/>
+                      <a:tailEnd type="none" w="med" len="med"/>
+                    </a:lnL>
+                    <a:lnR w="12700" cap="flat" cmpd="sng" algn="ctr">
+                      <a:solidFill>
+                        <a:srgbClr val="0F3460"/>
+                      </a:solidFill>
+                      <a:prstDash val="solid"/>
+                      <a:round/>
+                      <a:headEnd type="none" w="med" len="med"/>
+                      <a:tailEnd type="none" w="med" len="med"/>
+                    </a:lnR>
+                    <a:lnT w="12700" cap="flat" cmpd="sng" algn="ctr">
+                      <a:solidFill>
+                        <a:srgbClr val="0F3460"/>
+                      </a:solidFill>
+                      <a:prstDash val="solid"/>
+                      <a:round/>
+                      <a:headEnd type="none" w="med" len="med"/>
+                      <a:tailEnd type="none" w="med" len="med"/>
+                    </a:lnT>
+                    <a:lnB w="12700" cap="flat" cmpd="sng" algn="ctr">
+                      <a:solidFill>
+                        <a:srgbClr val="0F3460"/>
+                      </a:solidFill>
+                      <a:prstDash val="solid"/>
+                      <a:round/>
+                      <a:headEnd type="none" w="med" len="med"/>
+                      <a:tailEnd type="none" w="med" len="med"/>
+                    </a:lnB>
+                    <a:solidFill>
+                      <a:srgbClr val="1A1A2E"/>
+                    </a:solidFill>
+                  </a:tcPr>
+                </a:tc>
+                <a:tc>
+                  <a:txBody>
+                    <a:bodyPr/>
+                    <a:lstStyle/>
+                    <a:p>
+                      <a:pPr algn="ctr" indent="0" marL="0">
+                        <a:buNone/>
+                      </a:pPr>
+                      <a:r>
+                        <a:rPr lang="en-US" sz="1000" dirty="0">
+                          <a:solidFill>
+                            <a:srgbClr val="E8E8E8"/>
+                          </a:solidFill>
+                          <a:latin typeface="Calibri" pitchFamily="34" charset="0"/>
+                          <a:ea typeface="Calibri" pitchFamily="34" charset="-122"/>
+                          <a:cs typeface="Calibri" pitchFamily="34" charset="-120"/>
+                        </a:rPr>
+                        <a:t>Verschieden</a:t>
+                      </a:r>
+                      <a:endParaRPr lang="en-US" sz="1000" dirty="0">
+                        <a:latin typeface="Calibri" charset="0"/>
+                        <a:ea typeface="Calibri" charset="0"/>
+                        <a:cs typeface="Calibri" charset="0"/>
+                      </a:endParaRPr>
+                    </a:p>
+                  </a:txBody>
+                  <a:tcPr marL="91440" marR="91440" marT="45720" marB="45720">
+                    <a:lnL w="12700" cap="flat" cmpd="sng" algn="ctr">
+                      <a:solidFill>
+                        <a:srgbClr val="0F3460"/>
+                      </a:solidFill>
+                      <a:prstDash val="solid"/>
+                      <a:round/>
+                      <a:headEnd type="none" w="med" len="med"/>
+                      <a:tailEnd type="none" w="med" len="med"/>
+                    </a:lnL>
+                    <a:lnR w="12700" cap="flat" cmpd="sng" algn="ctr">
+                      <a:solidFill>
+                        <a:srgbClr val="0F3460"/>
+                      </a:solidFill>
+                      <a:prstDash val="solid"/>
+                      <a:round/>
+                      <a:headEnd type="none" w="med" len="med"/>
+                      <a:tailEnd type="none" w="med" len="med"/>
+                    </a:lnR>
+                    <a:lnT w="12700" cap="flat" cmpd="sng" algn="ctr">
+                      <a:solidFill>
+                        <a:srgbClr val="0F3460"/>
+                      </a:solidFill>
+                      <a:prstDash val="solid"/>
+                      <a:round/>
+                      <a:headEnd type="none" w="med" len="med"/>
+                      <a:tailEnd type="none" w="med" len="med"/>
+                    </a:lnT>
+                    <a:lnB w="12700" cap="flat" cmpd="sng" algn="ctr">
+                      <a:solidFill>
+                        <a:srgbClr val="0F3460"/>
+                      </a:solidFill>
+                      <a:prstDash val="solid"/>
+                      <a:round/>
+                      <a:headEnd type="none" w="med" len="med"/>
+                      <a:tailEnd type="none" w="med" len="med"/>
+                    </a:lnB>
+                    <a:solidFill>
+                      <a:srgbClr val="1A1A2E"/>
+                    </a:solidFill>
+                  </a:tcPr>
+                </a:tc>
+                <a:tc>
+                  <a:txBody>
+                    <a:bodyPr/>
+                    <a:lstStyle/>
+                    <a:p>
+                      <a:pPr algn="ctr" indent="0" marL="0">
+                        <a:buNone/>
+                      </a:pPr>
+                      <a:r>
+                        <a:rPr lang="en-US" sz="1000" dirty="0">
+                          <a:solidFill>
+                            <a:srgbClr val="E8E8E8"/>
+                          </a:solidFill>
+                          <a:latin typeface="Calibri" pitchFamily="34" charset="0"/>
+                          <a:ea typeface="Calibri" pitchFamily="34" charset="-122"/>
+                          <a:cs typeface="Calibri" pitchFamily="34" charset="-120"/>
+                        </a:rPr>
+                        <a:t>~2h 30m</a:t>
+                      </a:r>
+                      <a:endParaRPr lang="en-US" sz="1000" dirty="0">
+                        <a:latin typeface="Calibri" charset="0"/>
+                        <a:ea typeface="Calibri" charset="0"/>
+                        <a:cs typeface="Calibri" charset="0"/>
+                      </a:endParaRPr>
+                    </a:p>
+                  </a:txBody>
+                  <a:tcPr marL="91440" marR="91440" marT="45720" marB="45720">
+                    <a:lnL w="12700" cap="flat" cmpd="sng" algn="ctr">
+                      <a:solidFill>
+                        <a:srgbClr val="0F3460"/>
+                      </a:solidFill>
+                      <a:prstDash val="solid"/>
+                      <a:round/>
+                      <a:headEnd type="none" w="med" len="med"/>
+                      <a:tailEnd type="none" w="med" len="med"/>
+                    </a:lnL>
+                    <a:lnR w="12700" cap="flat" cmpd="sng" algn="ctr">
+                      <a:solidFill>
+                        <a:srgbClr val="0F3460"/>
+                      </a:solidFill>
+                      <a:prstDash val="solid"/>
+                      <a:round/>
+                      <a:headEnd type="none" w="med" len="med"/>
+                      <a:tailEnd type="none" w="med" len="med"/>
+                    </a:lnR>
+                    <a:lnT w="12700" cap="flat" cmpd="sng" algn="ctr">
+                      <a:solidFill>
+                        <a:srgbClr val="0F3460"/>
+                      </a:solidFill>
+                      <a:prstDash val="solid"/>
+                      <a:round/>
+                      <a:headEnd type="none" w="med" len="med"/>
+                      <a:tailEnd type="none" w="med" len="med"/>
+                    </a:lnT>
+                    <a:lnB w="12700" cap="flat" cmpd="sng" algn="ctr">
+                      <a:solidFill>
+                        <a:srgbClr val="0F3460"/>
+                      </a:solidFill>
+                      <a:prstDash val="solid"/>
+                      <a:round/>
+                      <a:headEnd type="none" w="med" len="med"/>
+                      <a:tailEnd type="none" w="med" len="med"/>
+                    </a:lnB>
+                    <a:solidFill>
+                      <a:srgbClr val="1A1A2E"/>
+                    </a:solidFill>
+                  </a:tcPr>
+                </a:tc>
+                <a:tc>
+                  <a:txBody>
+                    <a:bodyPr/>
+                    <a:lstStyle/>
+                    <a:p>
+                      <a:pPr algn="ctr" indent="0" marL="0">
+                        <a:buNone/>
+                      </a:pPr>
+                      <a:r>
+                        <a:rPr lang="en-US" sz="1000" dirty="0">
+                          <a:solidFill>
+                            <a:srgbClr val="E8E8E8"/>
+                          </a:solidFill>
+                          <a:latin typeface="Calibri" pitchFamily="34" charset="0"/>
+                          <a:ea typeface="Calibri" pitchFamily="34" charset="-122"/>
+                          <a:cs typeface="Calibri" pitchFamily="34" charset="-120"/>
+                        </a:rPr>
+                        <a:t>~€40–80</a:t>
+                      </a:r>
+                      <a:endParaRPr lang="en-US" sz="1000" dirty="0">
+                        <a:latin typeface="Calibri" charset="0"/>
+                        <a:ea typeface="Calibri" charset="0"/>
+                        <a:cs typeface="Calibri" charset="0"/>
+                      </a:endParaRPr>
+                    </a:p>
+                  </a:txBody>
+                  <a:tcPr marL="91440" marR="91440" marT="45720" marB="45720">
+                    <a:lnL w="12700" cap="flat" cmpd="sng" algn="ctr">
+                      <a:solidFill>
+                        <a:srgbClr val="0F3460"/>
+                      </a:solidFill>
+                      <a:prstDash val="solid"/>
+                      <a:round/>
+                      <a:headEnd type="none" w="med" len="med"/>
+                      <a:tailEnd type="none" w="med" len="med"/>
+                    </a:lnL>
+                    <a:lnR w="12700" cap="flat" cmpd="sng" algn="ctr">
+                      <a:solidFill>
+                        <a:srgbClr val="0F3460"/>
+                      </a:solidFill>
+                      <a:prstDash val="solid"/>
+                      <a:round/>
+                      <a:headEnd type="none" w="med" len="med"/>
+                      <a:tailEnd type="none" w="med" len="med"/>
+                    </a:lnR>
+                    <a:lnT w="12700" cap="flat" cmpd="sng" algn="ctr">
+                      <a:solidFill>
+                        <a:srgbClr val="0F3460"/>
+                      </a:solidFill>
+                      <a:prstDash val="solid"/>
+                      <a:round/>
+                      <a:headEnd type="none" w="med" len="med"/>
+                      <a:tailEnd type="none" w="med" len="med"/>
+                    </a:lnT>
+                    <a:lnB w="12700" cap="flat" cmpd="sng" algn="ctr">
+                      <a:solidFill>
+                        <a:srgbClr val="0F3460"/>
+                      </a:solidFill>
+                      <a:prstDash val="solid"/>
+                      <a:round/>
+                      <a:headEnd type="none" w="med" len="med"/>
+                      <a:tailEnd type="none" w="med" len="med"/>
+                    </a:lnB>
+                    <a:solidFill>
+                      <a:srgbClr val="1A1A2E"/>
+                    </a:solidFill>
+                  </a:tcPr>
+                </a:tc>
+                <a:tc>
+                  <a:txBody>
+                    <a:bodyPr/>
+                    <a:lstStyle/>
+                    <a:p>
+                      <a:pPr algn="ctr" indent="0" marL="0">
+                        <a:buNone/>
+                      </a:pPr>
+                      <a:r>
+                        <a:rPr lang="en-US" sz="1000" dirty="0">
+                          <a:solidFill>
+                            <a:srgbClr val="FFC107"/>
+                          </a:solidFill>
+                          <a:latin typeface="Calibri" pitchFamily="34" charset="0"/>
+                          <a:ea typeface="Calibri" pitchFamily="34" charset="-122"/>
+                          <a:cs typeface="Calibri" pitchFamily="34" charset="-120"/>
+                        </a:rPr>
+                        <a:t>~€160–320</a:t>
                       </a:r>
                       <a:endParaRPr lang="en-US" sz="1000" dirty="0">
                         <a:latin typeface="Calibri" charset="0"/>
@@ -27020,13 +26942,13 @@
             <a:r>
               <a:rPr lang="en-US" sz="1300" b="1" dirty="0">
                 <a:solidFill>
-                  <a:srgbClr val="C8003C"/>
+                  <a:srgbClr val="8C52E8"/>
                 </a:solidFill>
                 <a:latin typeface="Trebuchet MS" pitchFamily="34" charset="0"/>
                 <a:ea typeface="Trebuchet MS" pitchFamily="34" charset="-122"/>
                 <a:cs typeface="Trebuchet MS" pitchFamily="34" charset="-120"/>
               </a:rPr>
-              <a:t>RÜCKFLUG: MXP (Mailand-Malpensa) → Deutschland (2. Nov.)</a:t>
+              <a:t>RÜCKFLUG: SOF (Sofia) → Deutschland (2. Nov.)</a:t>
             </a:r>
             <a:endParaRPr lang="en-US" sz="1300" dirty="0"/>
           </a:p>
@@ -27075,7 +26997,7 @@
                       <a:r>
                         <a:rPr lang="en-US" sz="1100" b="1" dirty="0">
                           <a:solidFill>
-                            <a:srgbClr val="C8003C"/>
+                            <a:srgbClr val="8C52E8"/>
                           </a:solidFill>
                           <a:latin typeface="Trebuchet MS" pitchFamily="34" charset="0"/>
                           <a:ea typeface="Trebuchet MS" pitchFamily="34" charset="-122"/>
@@ -27143,7 +27065,7 @@
                       <a:r>
                         <a:rPr lang="en-US" sz="1100" b="1" dirty="0">
                           <a:solidFill>
-                            <a:srgbClr val="C8003C"/>
+                            <a:srgbClr val="8C52E8"/>
                           </a:solidFill>
                           <a:latin typeface="Trebuchet MS" pitchFamily="34" charset="0"/>
                           <a:ea typeface="Trebuchet MS" pitchFamily="34" charset="-122"/>
@@ -27211,7 +27133,7 @@
                       <a:r>
                         <a:rPr lang="en-US" sz="1100" b="1" dirty="0">
                           <a:solidFill>
-                            <a:srgbClr val="C8003C"/>
+                            <a:srgbClr val="8C52E8"/>
                           </a:solidFill>
                           <a:latin typeface="Trebuchet MS" pitchFamily="34" charset="0"/>
                           <a:ea typeface="Trebuchet MS" pitchFamily="34" charset="-122"/>
@@ -27279,7 +27201,7 @@
                       <a:r>
                         <a:rPr lang="en-US" sz="1100" b="1" dirty="0">
                           <a:solidFill>
-                            <a:srgbClr val="C8003C"/>
+                            <a:srgbClr val="8C52E8"/>
                           </a:solidFill>
                           <a:latin typeface="Trebuchet MS" pitchFamily="34" charset="0"/>
                           <a:ea typeface="Trebuchet MS" pitchFamily="34" charset="-122"/>
@@ -27347,7 +27269,7 @@
                       <a:r>
                         <a:rPr lang="en-US" sz="1100" b="1" dirty="0">
                           <a:solidFill>
-                            <a:srgbClr val="C8003C"/>
+                            <a:srgbClr val="8C52E8"/>
                           </a:solidFill>
                           <a:latin typeface="Trebuchet MS" pitchFamily="34" charset="0"/>
                           <a:ea typeface="Trebuchet MS" pitchFamily="34" charset="-122"/>
@@ -27415,7 +27337,7 @@
                       <a:r>
                         <a:rPr lang="en-US" sz="1100" b="1" dirty="0">
                           <a:solidFill>
-                            <a:srgbClr val="C8003C"/>
+                            <a:srgbClr val="8C52E8"/>
                           </a:solidFill>
                           <a:latin typeface="Trebuchet MS" pitchFamily="34" charset="0"/>
                           <a:ea typeface="Trebuchet MS" pitchFamily="34" charset="-122"/>
@@ -27483,7 +27405,7 @@
                       <a:r>
                         <a:rPr lang="en-US" sz="1100" b="1" dirty="0">
                           <a:solidFill>
-                            <a:srgbClr val="C8003C"/>
+                            <a:srgbClr val="8C52E8"/>
                           </a:solidFill>
                           <a:latin typeface="Trebuchet MS" pitchFamily="34" charset="0"/>
                           <a:ea typeface="Trebuchet MS" pitchFamily="34" charset="-122"/>
@@ -27559,7 +27481,7 @@
                           <a:ea typeface="Calibri" pitchFamily="34" charset="-122"/>
                           <a:cs typeface="Calibri" pitchFamily="34" charset="-120"/>
                         </a:rPr>
-                        <a:t>Eurowings / Ryanair  (MXP/BGY→DUS)</a:t>
+                        <a:t>Bulgaria Air / Ryanair  (SOF→DUS)</a:t>
                       </a:r>
                       <a:endParaRPr lang="en-US" sz="1000" dirty="0">
                         <a:latin typeface="Calibri" charset="0"/>
@@ -27627,7 +27549,7 @@
                           <a:ea typeface="Calibri" pitchFamily="34" charset="-122"/>
                           <a:cs typeface="Calibri" pitchFamily="34" charset="-120"/>
                         </a:rPr>
-                        <a:t>MXP → DUS  /  2. Nov.</a:t>
+                        <a:t>SOF → DUS  /  2. Nov.</a:t>
                       </a:r>
                       <a:endParaRPr lang="en-US" sz="1000" dirty="0">
                         <a:latin typeface="Calibri" charset="0"/>
@@ -27831,7 +27753,7 @@
                           <a:ea typeface="Calibri" pitchFamily="34" charset="-122"/>
                           <a:cs typeface="Calibri" pitchFamily="34" charset="-120"/>
                         </a:rPr>
-                        <a:t>1h 40m</a:t>
+                        <a:t>~2h 30m</a:t>
                       </a:r>
                       <a:endParaRPr lang="en-US" sz="1000" dirty="0">
                         <a:latin typeface="Calibri" charset="0"/>
@@ -27899,7 +27821,7 @@
                           <a:ea typeface="Calibri" pitchFamily="34" charset="-122"/>
                           <a:cs typeface="Calibri" pitchFamily="34" charset="-120"/>
                         </a:rPr>
-                        <a:t>~€70–100</a:t>
+                        <a:t>~€60–100</a:t>
                       </a:r>
                       <a:endParaRPr lang="en-US" sz="1000" dirty="0">
                         <a:latin typeface="Calibri" charset="0"/>
@@ -27967,7 +27889,7 @@
                           <a:ea typeface="Calibri" pitchFamily="34" charset="-122"/>
                           <a:cs typeface="Calibri" pitchFamily="34" charset="-120"/>
                         </a:rPr>
-                        <a:t>~€280–400</a:t>
+                        <a:t>~€240–400</a:t>
                       </a:r>
                       <a:endParaRPr lang="en-US" sz="1000" dirty="0">
                         <a:latin typeface="Calibri" charset="0"/>
@@ -28081,7 +28003,7 @@
                 <a:ea typeface="Calibri" pitchFamily="34" charset="-122"/>
                 <a:cs typeface="Calibri" pitchFamily="34" charset="-120"/>
               </a:rPr>
-              <a:t>✅  DUS (Düsseldorf) → MXP (Mailand-Malpensa): Direktflug mit Eurowings täglich, ~1h 40m.  Malpensa liegt 45 km nordwestlich vom Zentrum — Malpensa Express Zug ~52 Min., €13 ins Stadtzentrum.  Budget-Option: DUS → BGY (Bergamo/Orio al Serio) mit Ryanair — Bus nach Mailand ~1h, €5–6.  Buchen: eurowings.com · ryanair.com</a:t>
+              <a:t>✅  DUS (Düsseldorf) → SOF (Sofia): Direktflüge mit Bulgaria Air und Ryanair.  Flughafen Sofia liegt 10 km östlich vom Zentrum — Metro Linie M1 (€0,80, 20 Min.) direkt ins Zentrum.  Buchen: bulgariaair.com · ryanair.com · wizzair.com · skyscanner.de</a:t>
             </a:r>
             <a:endParaRPr lang="en-US" sz="1000" dirty="0"/>
           </a:p>
@@ -28106,7 +28028,7 @@
           </a:solidFill>
           <a:ln w="12700">
             <a:solidFill>
-              <a:srgbClr val="C8003C"/>
+              <a:srgbClr val="8C52E8"/>
             </a:solidFill>
             <a:prstDash val="solid"/>
           </a:ln>
@@ -28178,13 +28100,13 @@
             <a:r>
               <a:rPr lang="en-US" sz="2000" b="1" dirty="0">
                 <a:solidFill>
-                  <a:srgbClr val="C8003C"/>
+                  <a:srgbClr val="8C52E8"/>
                 </a:solidFill>
                 <a:latin typeface="Trebuchet MS" pitchFamily="34" charset="0"/>
                 <a:ea typeface="Trebuchet MS" pitchFamily="34" charset="-122"/>
                 <a:cs typeface="Trebuchet MS" pitchFamily="34" charset="-120"/>
               </a:rPr>
-              <a:t>€480 – €640 gesamt</a:t>
+              <a:t>€320 – €560 gesamt</a:t>
             </a:r>
             <a:endParaRPr lang="en-US" sz="2000" dirty="0"/>
           </a:p>
@@ -28262,11 +28184,11 @@
             <a:avLst/>
           </a:prstGeom>
           <a:solidFill>
-            <a:srgbClr val="C8003C"/>
+            <a:srgbClr val="8C52E8"/>
           </a:solidFill>
           <a:ln w="12700">
             <a:solidFill>
-              <a:srgbClr val="C8003C"/>
+              <a:srgbClr val="8C52E8"/>
             </a:solidFill>
             <a:prstDash val="solid"/>
           </a:ln>
@@ -28330,7 +28252,7 @@
                 <a:ea typeface="Trebuchet MS" pitchFamily="34" charset="-122"/>
                 <a:cs typeface="Trebuchet MS" pitchFamily="34" charset="-120"/>
               </a:rPr>
-              <a:t>🇮🇹  MAILAND — UNTERKUNFT</a:t>
+              <a:t>🇧🇬  SOFIA — UNTERKUNFT</a:t>
             </a:r>
             <a:endParaRPr lang="en-US" sz="2200" dirty="0"/>
           </a:p>
@@ -28351,11 +28273,11 @@
             <a:avLst/>
           </a:prstGeom>
           <a:solidFill>
-            <a:srgbClr val="C8003C"/>
+            <a:srgbClr val="8C52E8"/>
           </a:solidFill>
           <a:ln w="12700">
             <a:solidFill>
-              <a:srgbClr val="C8003C"/>
+              <a:srgbClr val="8C52E8"/>
             </a:solidFill>
             <a:prstDash val="solid"/>
           </a:ln>
@@ -28363,7 +28285,7 @@
       </p:sp>
       <p:pic>
         <p:nvPicPr>
-          <p:cNvPr id="6" name="Image 0" descr="/home/user/Excelhaus/halloween_trip/milan_airbnb.png">    </p:cNvPr>
+          <p:cNvPr id="6" name="Image 0" descr="/home/user/Excelhaus/halloween_trip/sofia_airbnb.png">    </p:cNvPr>
           <p:cNvPicPr>
             <a:picLocks noChangeAspect="1"/>
           </p:cNvPicPr>
@@ -28387,7 +28309,7 @@
       </p:pic>
       <p:pic>
         <p:nvPicPr>
-          <p:cNvPr id="7" name="Image 1" descr="/home/user/Excelhaus/halloween_trip/milan_map.png">    </p:cNvPr>
+          <p:cNvPr id="7" name="Image 1" descr="/home/user/Excelhaus/halloween_trip/sofia_map.png">    </p:cNvPr>
           <p:cNvPicPr>
             <a:picLocks noChangeAspect="1"/>
           </p:cNvPicPr>
@@ -28428,7 +28350,7 @@
           </a:solidFill>
           <a:ln w="12700">
             <a:solidFill>
-              <a:srgbClr val="C8003C"/>
+              <a:srgbClr val="8C52E8"/>
             </a:solidFill>
             <a:prstDash val="solid"/>
           </a:ln>
@@ -28467,7 +28389,7 @@
                 <a:ea typeface="Trebuchet MS" pitchFamily="34" charset="-122"/>
                 <a:cs typeface="Trebuchet MS" pitchFamily="34" charset="-120"/>
               </a:rPr>
-              <a:t>Navigli / Porta Ticinese — 2-Zi.-Wohnung am Kanal</a:t>
+              <a:t>Vitosha Blvd / Zentrum — 2-Zi.-Wohnung</a:t>
             </a:r>
             <a:endParaRPr lang="en-US" sz="1400" dirty="0"/>
           </a:p>
@@ -28492,7 +28414,7 @@
           </a:solidFill>
           <a:ln w="12700">
             <a:solidFill>
-              <a:srgbClr val="C8003C"/>
+              <a:srgbClr val="8C52E8"/>
             </a:solidFill>
             <a:prstDash val="solid"/>
           </a:ln>
@@ -28525,7 +28447,7 @@
             <a:r>
               <a:rPr lang="en-US" sz="1100" b="1" dirty="0">
                 <a:solidFill>
-                  <a:srgbClr val="C8003C"/>
+                  <a:srgbClr val="8C52E8"/>
                 </a:solidFill>
                 <a:latin typeface="Calibri" pitchFamily="34" charset="0"/>
                 <a:ea typeface="Calibri" pitchFamily="34" charset="-122"/>
@@ -28556,7 +28478,7 @@
           </a:solidFill>
           <a:ln w="12700">
             <a:solidFill>
-              <a:srgbClr val="C8003C"/>
+              <a:srgbClr val="8C52E8"/>
             </a:solidFill>
             <a:prstDash val="solid"/>
           </a:ln>
@@ -28589,7 +28511,7 @@
             <a:r>
               <a:rPr lang="en-US" sz="1100" b="1" dirty="0">
                 <a:solidFill>
-                  <a:srgbClr val="C8003C"/>
+                  <a:srgbClr val="8C52E8"/>
                 </a:solidFill>
                 <a:latin typeface="Calibri" pitchFamily="34" charset="0"/>
                 <a:ea typeface="Calibri" pitchFamily="34" charset="-122"/>
@@ -28659,7 +28581,7 @@
                 <a:ea typeface="Calibri" pitchFamily="34" charset="-122"/>
                 <a:cs typeface="Calibri" pitchFamily="34" charset="-120"/>
               </a:rPr>
-              <a:t>🏗 Balkon/Terrasse</a:t>
+              <a:t>🏗 Balkon ✓</a:t>
             </a:r>
             <a:endParaRPr lang="en-US" sz="1100" dirty="0"/>
           </a:p>
@@ -28684,7 +28606,7 @@
           </a:solidFill>
           <a:ln w="12700">
             <a:solidFill>
-              <a:srgbClr val="C8003C"/>
+              <a:srgbClr val="8C52E8"/>
             </a:solidFill>
             <a:prstDash val="solid"/>
           </a:ln>
@@ -28717,7 +28639,7 @@
             <a:r>
               <a:rPr lang="en-US" sz="1100" b="1" dirty="0">
                 <a:solidFill>
-                  <a:srgbClr val="C8003C"/>
+                  <a:srgbClr val="8C52E8"/>
                 </a:solidFill>
                 <a:latin typeface="Calibri" pitchFamily="34" charset="0"/>
                 <a:ea typeface="Calibri" pitchFamily="34" charset="-122"/>
@@ -28748,7 +28670,7 @@
           </a:solidFill>
           <a:ln w="12700">
             <a:solidFill>
-              <a:srgbClr val="C8003C"/>
+              <a:srgbClr val="8C52E8"/>
             </a:solidFill>
             <a:prstDash val="solid"/>
           </a:ln>
@@ -28781,7 +28703,7 @@
             <a:r>
               <a:rPr lang="en-US" sz="1100" b="1" dirty="0">
                 <a:solidFill>
-                  <a:srgbClr val="C8003C"/>
+                  <a:srgbClr val="8C52E8"/>
                 </a:solidFill>
                 <a:latin typeface="Calibri" pitchFamily="34" charset="0"/>
                 <a:ea typeface="Calibri" pitchFamily="34" charset="-122"/>
@@ -28812,7 +28734,7 @@
           </a:solidFill>
           <a:ln w="12700">
             <a:solidFill>
-              <a:srgbClr val="C8003C"/>
+              <a:srgbClr val="8C52E8"/>
             </a:solidFill>
             <a:prstDash val="solid"/>
           </a:ln>
@@ -28845,13 +28767,13 @@
             <a:r>
               <a:rPr lang="en-US" sz="1100" b="1" dirty="0">
                 <a:solidFill>
-                  <a:srgbClr val="C8003C"/>
+                  <a:srgbClr val="8C52E8"/>
                 </a:solidFill>
                 <a:latin typeface="Calibri" pitchFamily="34" charset="0"/>
                 <a:ea typeface="Calibri" pitchFamily="34" charset="-122"/>
                 <a:cs typeface="Calibri" pitchFamily="34" charset="-120"/>
               </a:rPr>
-              <a:t>🍹 Navigli Bars 1 Min</a:t>
+              <a:t>🏔 Vitosha-Blick</a:t>
             </a:r>
             <a:endParaRPr lang="en-US" sz="1100" dirty="0"/>
           </a:p>
@@ -28915,7 +28837,7 @@
                 <a:ea typeface="Calibri" pitchFamily="34" charset="-122"/>
                 <a:cs typeface="Calibri" pitchFamily="34" charset="-120"/>
               </a:rPr>
-              <a:t>📌 Navigli — direkt an der Aperitivo-Meile, 15 Min. per Metro/Tram zum Duomo &amp; Corso Como</a:t>
+              <a:t>📌 Vitosha Blvd / Stadtzentrum — direkt an der besten Bar-Meile, 10 Min. zu Fuß zur Kathedrale</a:t>
             </a:r>
             <a:endParaRPr lang="en-US" sz="1050" dirty="0"/>
           </a:p>
@@ -28940,7 +28862,7 @@
           </a:solidFill>
           <a:ln w="12700">
             <a:solidFill>
-              <a:srgbClr val="C8003C"/>
+              <a:srgbClr val="8C52E8"/>
             </a:solidFill>
             <a:prstDash val="solid"/>
           </a:ln>
@@ -28973,7 +28895,7 @@
             <a:r>
               <a:rPr lang="en-US" sz="1100" b="1" dirty="0">
                 <a:solidFill>
-                  <a:srgbClr val="C8003C"/>
+                  <a:srgbClr val="8C52E8"/>
                 </a:solidFill>
                 <a:latin typeface="Trebuchet MS" pitchFamily="34" charset="0"/>
                 <a:ea typeface="Trebuchet MS" pitchFamily="34" charset="-122"/>
@@ -29057,7 +28979,7 @@
                 <a:ea typeface="Trebuchet MS" pitchFamily="34" charset="-122"/>
                 <a:cs typeface="Trebuchet MS" pitchFamily="34" charset="-120"/>
               </a:rPr>
-              <a:t>~€130</a:t>
+              <a:t>~€60–80</a:t>
             </a:r>
             <a:endParaRPr lang="en-US" sz="1000" dirty="0"/>
           </a:p>
@@ -29135,7 +29057,7 @@
                 <a:ea typeface="Trebuchet MS" pitchFamily="34" charset="-122"/>
                 <a:cs typeface="Trebuchet MS" pitchFamily="34" charset="-120"/>
               </a:rPr>
-              <a:t>~€390</a:t>
+              <a:t>~€180–240</a:t>
             </a:r>
             <a:endParaRPr lang="en-US" sz="1000" dirty="0"/>
           </a:p>
@@ -29213,7 +29135,7 @@
                 <a:ea typeface="Trebuchet MS" pitchFamily="34" charset="-122"/>
                 <a:cs typeface="Trebuchet MS" pitchFamily="34" charset="-120"/>
               </a:rPr>
-              <a:t>~€60–80</a:t>
+              <a:t>~€30–50</a:t>
             </a:r>
             <a:endParaRPr lang="en-US" sz="1000" dirty="0"/>
           </a:p>
@@ -29285,13 +29207,13 @@
             <a:r>
               <a:rPr lang="en-US" sz="1000" b="1" dirty="0">
                 <a:solidFill>
-                  <a:srgbClr val="C8003C"/>
+                  <a:srgbClr val="8C52E8"/>
                 </a:solidFill>
                 <a:latin typeface="Trebuchet MS" pitchFamily="34" charset="0"/>
                 <a:ea typeface="Trebuchet MS" pitchFamily="34" charset="-122"/>
                 <a:cs typeface="Trebuchet MS" pitchFamily="34" charset="-120"/>
               </a:rPr>
-              <a:t>~€450–470</a:t>
+              <a:t>~€210–290</a:t>
             </a:r>
             <a:endParaRPr lang="en-US" sz="1000" dirty="0"/>
           </a:p>
@@ -29369,7 +29291,7 @@
                 <a:ea typeface="Trebuchet MS" pitchFamily="34" charset="-122"/>
                 <a:cs typeface="Trebuchet MS" pitchFamily="34" charset="-120"/>
               </a:rPr>
-              <a:t>~€113–118</a:t>
+              <a:t>~€53–73</a:t>
             </a:r>
             <a:endParaRPr lang="en-US" sz="1000" dirty="0"/>
           </a:p>
@@ -29390,11 +29312,11 @@
             <a:avLst/>
           </a:prstGeom>
           <a:solidFill>
-            <a:srgbClr val="C8003C"/>
+            <a:srgbClr val="8C52E8"/>
           </a:solidFill>
           <a:ln w="12700">
             <a:solidFill>
-              <a:srgbClr val="C8003C"/>
+              <a:srgbClr val="8C52E8"/>
             </a:solidFill>
             <a:prstDash val="solid"/>
           </a:ln>
@@ -29442,7 +29364,7 @@
                   </a:extLst>
                 </a:hlinkClick>
               </a:rPr>
-              <a:t>🔍  Airbnb: Mailand durchsuchen  →</a:t>
+              <a:t>🔍  Airbnb: Sofia durchsuchen  →</a:t>
             </a:r>
             <a:endParaRPr lang="en-US" sz="1500" dirty="0"/>
           </a:p>
@@ -29490,7 +29412,7 @@
                   </a:extLst>
                 </a:hlinkClick>
               </a:rPr>
-              <a:t>📍 Alternativ in Brera/Isola suchen: airbnb.com/s/Brera--Milan (Designviertel, gleiche Daten)</a:t>
+              <a:t>📍 Alternativ im Studentenviertel suchen: airbnb.com/s/Studentski-Grad--Sofia (lebhafter, günstiger)</a:t>
             </a:r>
             <a:endParaRPr lang="en-US" sz="900" dirty="0"/>
           </a:p>
